--- a/docs/test/stress/e2e-outputs/income_overflow_pr11.pptx
+++ b/docs/test/stress/e2e-outputs/income_overflow_pr11.pptx
@@ -1658,7 +1658,7 @@
     <p:bg>
       <p:bgPr>
         <a:solidFill>
-          <a:srgbClr val="0F172A"/>
+          <a:srgbClr val="10161F"/>
         </a:solidFill>
       </p:bgPr>
     </p:bg>
@@ -1753,7 +1753,7 @@
           <a:noFill/>
           <a:ln w="10160">
             <a:solidFill>
-              <a:srgbClr val="6B8E00"/>
+              <a:srgbClr val="B98A2E"/>
             </a:solidFill>
             <a:prstDash val="solid"/>
           </a:ln>
@@ -1767,14 +1767,14 @@
         </p:nvSpPr>
         <p:spPr>
           <a:xfrm>
-            <a:off x="7772400" y="0"/>
-            <a:ext cx="4419295" cy="6858000"/>
+            <a:off x="8275320" y="0"/>
+            <a:ext cx="1417320" cy="4041648"/>
           </a:xfrm>
           <a:prstGeom prst="rect">
             <a:avLst/>
           </a:prstGeom>
           <a:solidFill>
-            <a:srgbClr val="6B8E00"/>
+            <a:srgbClr val="1A2030"/>
           </a:solidFill>
           <a:ln/>
         </p:spPr>
@@ -1786,24 +1786,42 @@
           <p:nvPr/>
         </p:nvSpPr>
         <p:spPr>
-          <a:xfrm rot="120000">
-            <a:off x="8412480" y="548640"/>
-            <a:ext cx="3291840" cy="5760720"/>
+          <a:xfrm>
+            <a:off x="9784080" y="868680"/>
+            <a:ext cx="1143000" cy="3172968"/>
           </a:xfrm>
           <a:prstGeom prst="rect">
             <a:avLst/>
           </a:prstGeom>
           <a:solidFill>
-            <a:srgbClr val="0F172A">
-              <a:alpha val="12000"/>
-            </a:srgbClr>
+            <a:srgbClr val="161D2B"/>
           </a:solidFill>
           <a:ln/>
         </p:spPr>
       </p:sp>
       <p:sp>
         <p:nvSpPr>
-          <p:cNvPr id="8" name="Text 6"/>
+          <p:cNvPr id="8" name="Shape 6"/>
+          <p:cNvSpPr/>
+          <p:nvPr/>
+        </p:nvSpPr>
+        <p:spPr>
+          <a:xfrm>
+            <a:off x="11018520" y="1691640"/>
+            <a:ext cx="1170432" cy="2350008"/>
+          </a:xfrm>
+          <a:prstGeom prst="rect">
+            <a:avLst/>
+          </a:prstGeom>
+          <a:solidFill>
+            <a:srgbClr val="2E2718"/>
+          </a:solidFill>
+          <a:ln/>
+        </p:spPr>
+      </p:sp>
+      <p:sp>
+        <p:nvSpPr>
+          <p:cNvPr id="9" name="Text 7"/>
           <p:cNvSpPr/>
           <p:nvPr/>
         </p:nvSpPr>
@@ -1842,7 +1860,7 @@
             <a:r>
               <a:rPr lang="en-US" sz="1500" b="1" dirty="0">
                 <a:solidFill>
-                  <a:srgbClr val="6B8E00"/>
+                  <a:srgbClr val="B98A2E"/>
                 </a:solidFill>
                 <a:latin typeface="Arial" pitchFamily="34" charset="0"/>
                 <a:ea typeface="Arial" pitchFamily="34" charset="-122"/>
@@ -1856,45 +1874,6 @@
       </p:sp>
       <p:sp>
         <p:nvSpPr>
-          <p:cNvPr id="9" name="Text 7"/>
-          <p:cNvSpPr/>
-          <p:nvPr/>
-        </p:nvSpPr>
-        <p:spPr>
-          <a:xfrm>
-            <a:off x="8229600" y="5303520"/>
-            <a:ext cx="3474720" cy="365760"/>
-          </a:xfrm>
-          <a:prstGeom prst="rect">
-            <a:avLst/>
-          </a:prstGeom>
-          <a:noFill/>
-          <a:ln/>
-        </p:spPr>
-        <p:txBody>
-          <a:bodyPr wrap="square" lIns="0" tIns="0" rIns="0" bIns="0" rtlCol="0" anchor="ctr"/>
-          <a:lstStyle/>
-          <a:p>
-            <a:pPr algn="ctr" indent="0" marL="0">
-              <a:buNone/>
-            </a:pPr>
-            <a:r>
-              <a:rPr lang="en-US" sz="1000" dirty="0">
-                <a:solidFill>
-                  <a:srgbClr val="0F172A"/>
-                </a:solidFill>
-                <a:latin typeface="Pretendard" pitchFamily="34" charset="0"/>
-                <a:ea typeface="Pretendard" pitchFamily="34" charset="-122"/>
-                <a:cs typeface="Pretendard" pitchFamily="34" charset="-120"/>
-              </a:rPr>
-              <a:t>상업용 부동산 투자 플랫폼</a:t>
-            </a:r>
-            <a:endParaRPr lang="en-US" sz="1000" dirty="0"/>
-          </a:p>
-        </p:txBody>
-      </p:sp>
-      <p:sp>
-        <p:nvSpPr>
           <p:cNvPr id="10" name="Text 8"/>
           <p:cNvSpPr/>
           <p:nvPr/>
@@ -1920,7 +1899,7 @@
             <a:r>
               <a:rPr lang="en-US" sz="1000" b="1" spc="250" kern="0" dirty="0">
                 <a:solidFill>
-                  <a:srgbClr val="6B8E00"/>
+                  <a:srgbClr val="B98A2E"/>
                 </a:solidFill>
                 <a:latin typeface="Arial" pitchFamily="34" charset="0"/>
                 <a:ea typeface="Arial" pitchFamily="34" charset="-122"/>
@@ -1998,7 +1977,7 @@
             <a:r>
               <a:rPr lang="en-US" sz="1400" dirty="0">
                 <a:solidFill>
-                  <a:srgbClr val="F1F5F9"/>
+                  <a:srgbClr val="E2E8F0"/>
                 </a:solidFill>
                 <a:latin typeface="Pretendard" pitchFamily="34" charset="0"/>
                 <a:ea typeface="Pretendard" pitchFamily="34" charset="-122"/>
@@ -2027,7 +2006,7 @@
             </a:avLst>
           </a:prstGeom>
           <a:solidFill>
-            <a:srgbClr val="334155"/>
+            <a:srgbClr val="2D3748"/>
           </a:solidFill>
           <a:ln/>
         </p:spPr>
@@ -2088,7 +2067,7 @@
             </a:avLst>
           </a:prstGeom>
           <a:solidFill>
-            <a:srgbClr val="334155"/>
+            <a:srgbClr val="2D3748"/>
           </a:solidFill>
           <a:ln/>
         </p:spPr>
@@ -2149,11 +2128,11 @@
             </a:avLst>
           </a:prstGeom>
           <a:solidFill>
-            <a:srgbClr val="4F6A00"/>
+            <a:srgbClr val="977024"/>
           </a:solidFill>
           <a:ln w="12700">
             <a:solidFill>
-              <a:srgbClr val="6B8E00"/>
+              <a:srgbClr val="B98A2E"/>
             </a:solidFill>
             <a:prstDash val="solid"/>
           </a:ln>
@@ -2186,7 +2165,7 @@
             <a:r>
               <a:rPr lang="en-US" sz="2200" b="1" dirty="0">
                 <a:solidFill>
-                  <a:srgbClr val="E8F5CC"/>
+                  <a:srgbClr val="F3EBDA"/>
                 </a:solidFill>
                 <a:latin typeface="Pretendard" pitchFamily="34" charset="0"/>
                 <a:ea typeface="Pretendard" pitchFamily="34" charset="-122"/>
@@ -2234,59 +2213,75 @@
         </p:nvSpPr>
         <p:spPr>
           <a:xfrm>
-            <a:off x="566928" y="6419088"/>
-            <a:ext cx="11057839" cy="201168"/>
-          </a:xfrm>
-          <a:prstGeom prst="rect">
-            <a:avLst/>
-          </a:prstGeom>
-          <a:noFill/>
-          <a:ln/>
-        </p:spPr>
-        <p:txBody>
-          <a:bodyPr wrap="square" lIns="0" tIns="0" rIns="0" bIns="0" rtlCol="0" anchor="ctr"/>
-          <a:lstStyle/>
-          <a:p>
-            <a:pPr algn="ctr" indent="0" marL="0">
-              <a:buNone/>
-            </a:pPr>
-            <a:r>
-              <a:rPr lang="en-US" sz="750" dirty="0">
-                <a:solidFill>
-                  <a:srgbClr val="64748B"/>
-                </a:solidFill>
-                <a:latin typeface="Pretendard" pitchFamily="34" charset="0"/>
-                <a:ea typeface="Pretendard" pitchFamily="34" charset="-122"/>
-                <a:cs typeface="Pretendard" pitchFamily="34" charset="-120"/>
-              </a:rPr>
-              <a:t>크리딜  ·    ·  1</a:t>
-            </a:r>
-            <a:endParaRPr lang="en-US" sz="750" dirty="0"/>
-          </a:p>
-        </p:txBody>
-      </p:sp>
-      <p:sp>
-        <p:nvSpPr>
-          <p:cNvPr id="21" name="Shape 19"/>
-          <p:cNvSpPr/>
-          <p:nvPr/>
-        </p:nvSpPr>
-        <p:spPr>
-          <a:xfrm>
-            <a:off x="4437172" y="6382512"/>
-            <a:ext cx="3317352" cy="0"/>
-          </a:xfrm>
-          <a:prstGeom prst="line">
-            <a:avLst/>
-          </a:prstGeom>
-          <a:noFill/>
-          <a:ln w="6350">
-            <a:solidFill>
-              <a:srgbClr val="6B8E00"/>
-            </a:solidFill>
-            <a:prstDash val="solid"/>
-          </a:ln>
-        </p:spPr>
+            <a:off x="566928" y="6382512"/>
+            <a:ext cx="7315200" cy="219456"/>
+          </a:xfrm>
+          <a:prstGeom prst="rect">
+            <a:avLst/>
+          </a:prstGeom>
+          <a:noFill/>
+          <a:ln/>
+        </p:spPr>
+        <p:txBody>
+          <a:bodyPr wrap="square" lIns="0" tIns="0" rIns="0" bIns="0" rtlCol="0" anchor="ctr"/>
+          <a:lstStyle/>
+          <a:p>
+            <a:pPr indent="0" marL="0">
+              <a:buNone/>
+            </a:pPr>
+            <a:r>
+              <a:rPr lang="en-US" sz="800" dirty="0">
+                <a:solidFill>
+                  <a:srgbClr val="718096"/>
+                </a:solidFill>
+                <a:latin typeface="Pretendard" pitchFamily="34" charset="0"/>
+                <a:ea typeface="Pretendard" pitchFamily="34" charset="-122"/>
+                <a:cs typeface="Pretendard" pitchFamily="34" charset="-120"/>
+              </a:rPr>
+              <a:t>크리딜   |   </a:t>
+            </a:r>
+            <a:endParaRPr lang="en-US" sz="800" dirty="0"/>
+          </a:p>
+        </p:txBody>
+      </p:sp>
+      <p:sp>
+        <p:nvSpPr>
+          <p:cNvPr id="21" name="Text 19"/>
+          <p:cNvSpPr/>
+          <p:nvPr/>
+        </p:nvSpPr>
+        <p:spPr>
+          <a:xfrm>
+            <a:off x="10710367" y="6382512"/>
+            <a:ext cx="914400" cy="219456"/>
+          </a:xfrm>
+          <a:prstGeom prst="rect">
+            <a:avLst/>
+          </a:prstGeom>
+          <a:noFill/>
+          <a:ln/>
+        </p:spPr>
+        <p:txBody>
+          <a:bodyPr wrap="square" lIns="0" tIns="0" rIns="0" bIns="0" rtlCol="0" anchor="ctr"/>
+          <a:lstStyle/>
+          <a:p>
+            <a:pPr algn="r" indent="0" marL="0">
+              <a:buNone/>
+            </a:pPr>
+            <a:r>
+              <a:rPr lang="en-US" sz="900" b="1" dirty="0">
+                <a:solidFill>
+                  <a:srgbClr val="B98A2E"/>
+                </a:solidFill>
+                <a:latin typeface="Arial" pitchFamily="34" charset="0"/>
+                <a:ea typeface="Arial" pitchFamily="34" charset="-122"/>
+                <a:cs typeface="Arial" pitchFamily="34" charset="-120"/>
+              </a:rPr>
+              <a:t>1</a:t>
+            </a:r>
+            <a:endParaRPr lang="en-US" sz="900" dirty="0"/>
+          </a:p>
+        </p:txBody>
       </p:sp>
     </p:spTree>
   </p:cSld>
@@ -2302,7 +2297,7 @@
     <p:bg>
       <p:bgPr>
         <a:solidFill>
-          <a:srgbClr val="0F172A"/>
+          <a:srgbClr val="10161F"/>
         </a:solidFill>
       </p:bgPr>
     </p:bg>
@@ -2328,14 +2323,14 @@
         </p:nvSpPr>
         <p:spPr>
           <a:xfrm>
-            <a:off x="566928" y="384048"/>
-            <a:ext cx="45720" cy="566928"/>
-          </a:xfrm>
-          <a:prstGeom prst="rect">
+            <a:off x="566928" y="457200"/>
+            <a:ext cx="384048" cy="384048"/>
+          </a:xfrm>
+          <a:prstGeom prst="ellipse">
             <a:avLst/>
           </a:prstGeom>
           <a:solidFill>
-            <a:srgbClr val="6B8E00"/>
+            <a:srgbClr val="B98A2E"/>
           </a:solidFill>
           <a:ln/>
         </p:spPr>
@@ -2348,34 +2343,34 @@
         </p:nvSpPr>
         <p:spPr>
           <a:xfrm>
-            <a:off x="749808" y="384048"/>
-            <a:ext cx="10874959" cy="182880"/>
-          </a:xfrm>
-          <a:prstGeom prst="rect">
-            <a:avLst/>
-          </a:prstGeom>
-          <a:noFill/>
-          <a:ln/>
-        </p:spPr>
-        <p:txBody>
-          <a:bodyPr wrap="square" lIns="0" tIns="0" rIns="0" bIns="0" rtlCol="0" anchor="ctr"/>
-          <a:lstStyle/>
-          <a:p>
-            <a:pPr indent="0" marL="0">
-              <a:buNone/>
-            </a:pPr>
-            <a:r>
-              <a:rPr lang="en-US" sz="950" b="1" spc="200" kern="0" dirty="0">
-                <a:solidFill>
-                  <a:srgbClr val="6B8E00"/>
+            <a:off x="566928" y="457200"/>
+            <a:ext cx="384048" cy="384048"/>
+          </a:xfrm>
+          <a:prstGeom prst="rect">
+            <a:avLst/>
+          </a:prstGeom>
+          <a:noFill/>
+          <a:ln/>
+        </p:spPr>
+        <p:txBody>
+          <a:bodyPr wrap="square" lIns="0" tIns="0" rIns="0" bIns="0" rtlCol="0" anchor="ctr"/>
+          <a:lstStyle/>
+          <a:p>
+            <a:pPr algn="ctr" indent="0" marL="0">
+              <a:buNone/>
+            </a:pPr>
+            <a:r>
+              <a:rPr lang="en-US" sz="1300" b="1" dirty="0">
+                <a:solidFill>
+                  <a:srgbClr val="FFFFFF"/>
                 </a:solidFill>
                 <a:latin typeface="Arial" pitchFamily="34" charset="0"/>
                 <a:ea typeface="Arial" pitchFamily="34" charset="-122"/>
                 <a:cs typeface="Arial" pitchFamily="34" charset="-120"/>
               </a:rPr>
-              <a:t>10  Disclaimer</a:t>
-            </a:r>
-            <a:endParaRPr lang="en-US" sz="950" dirty="0"/>
+              <a:t>10</a:t>
+            </a:r>
+            <a:endParaRPr lang="en-US" sz="1300" dirty="0"/>
           </a:p>
         </p:txBody>
       </p:sp>
@@ -2387,8 +2382,8 @@
         </p:nvSpPr>
         <p:spPr>
           <a:xfrm>
-            <a:off x="749808" y="566928"/>
-            <a:ext cx="10874959" cy="384048"/>
+            <a:off x="1133856" y="457200"/>
+            <a:ext cx="10490911" cy="182880"/>
           </a:xfrm>
           <a:prstGeom prst="rect">
             <a:avLst/>
@@ -2404,230 +2399,111 @@
               <a:buNone/>
             </a:pPr>
             <a:r>
-              <a:rPr lang="en-US" sz="2200" b="1" dirty="0">
-                <a:solidFill>
-                  <a:srgbClr val="FFFFFF"/>
-                </a:solidFill>
-                <a:latin typeface="Pretendard" pitchFamily="34" charset="0"/>
-                <a:ea typeface="Pretendard" pitchFamily="34" charset="-122"/>
-                <a:cs typeface="Pretendard" pitchFamily="34" charset="-120"/>
-              </a:rPr>
-              <a:t>표기 기준 및 면책</a:t>
-            </a:r>
-            <a:endParaRPr lang="en-US" sz="2200" dirty="0"/>
-          </a:p>
-        </p:txBody>
-      </p:sp>
-      <p:sp>
-        <p:nvSpPr>
-          <p:cNvPr id="5" name="Text 3"/>
-          <p:cNvSpPr/>
-          <p:nvPr/>
-        </p:nvSpPr>
-        <p:spPr>
-          <a:xfrm>
-            <a:off x="566928" y="1517904"/>
-            <a:ext cx="5486400" cy="237744"/>
-          </a:xfrm>
-          <a:prstGeom prst="rect">
-            <a:avLst/>
-          </a:prstGeom>
-          <a:noFill/>
-          <a:ln/>
-        </p:spPr>
-        <p:txBody>
-          <a:bodyPr wrap="square" lIns="0" tIns="0" rIns="0" bIns="0" rtlCol="0" anchor="ctr"/>
-          <a:lstStyle/>
-          <a:p>
-            <a:pPr indent="0" marL="0">
-              <a:buNone/>
-            </a:pPr>
-            <a:r>
-              <a:rPr lang="en-US" sz="1100" b="1" dirty="0">
-                <a:solidFill>
-                  <a:srgbClr val="FFFFFF"/>
-                </a:solidFill>
-                <a:latin typeface="Pretendard" pitchFamily="34" charset="0"/>
-                <a:ea typeface="Pretendard" pitchFamily="34" charset="-122"/>
-                <a:cs typeface="Pretendard" pitchFamily="34" charset="-120"/>
-              </a:rPr>
-              <a:t>데이터 출처 표기</a:t>
-            </a:r>
-            <a:endParaRPr lang="en-US" sz="1100" dirty="0"/>
-          </a:p>
-        </p:txBody>
-      </p:sp>
-      <p:sp>
-        <p:nvSpPr>
-          <p:cNvPr id="6" name="Shape 4"/>
-          <p:cNvSpPr/>
-          <p:nvPr/>
-        </p:nvSpPr>
-        <p:spPr>
-          <a:xfrm>
-            <a:off x="566928" y="1847088"/>
-            <a:ext cx="1417320" cy="347472"/>
-          </a:xfrm>
-          <a:prstGeom prst="roundRect">
-            <a:avLst>
-              <a:gd name="adj" fmla="val 10526"/>
-            </a:avLst>
-          </a:prstGeom>
-          <a:solidFill>
-            <a:srgbClr val="334155"/>
-          </a:solidFill>
-          <a:ln/>
-        </p:spPr>
-      </p:sp>
-      <p:sp>
-        <p:nvSpPr>
-          <p:cNvPr id="7" name="Text 5"/>
-          <p:cNvSpPr/>
-          <p:nvPr/>
-        </p:nvSpPr>
-        <p:spPr>
-          <a:xfrm>
-            <a:off x="566928" y="1847088"/>
-            <a:ext cx="1417320" cy="347472"/>
-          </a:xfrm>
-          <a:prstGeom prst="rect">
-            <a:avLst/>
-          </a:prstGeom>
-          <a:noFill/>
-          <a:ln/>
-        </p:spPr>
-        <p:txBody>
-          <a:bodyPr wrap="square" lIns="0" tIns="0" rIns="0" bIns="0" rtlCol="0" anchor="ctr"/>
-          <a:lstStyle/>
-          <a:p>
-            <a:pPr algn="ctr" indent="0" marL="0">
-              <a:buNone/>
-            </a:pPr>
-            <a:r>
-              <a:rPr lang="en-US" sz="950" b="1" dirty="0">
-                <a:solidFill>
-                  <a:srgbClr val="FFFFFF"/>
-                </a:solidFill>
-                <a:latin typeface="Pretendard" pitchFamily="34" charset="0"/>
-                <a:ea typeface="Pretendard" pitchFamily="34" charset="-122"/>
-                <a:cs typeface="Pretendard" pitchFamily="34" charset="-120"/>
-              </a:rPr>
-              <a:t>✓ 공부확인</a:t>
-            </a:r>
-            <a:endParaRPr lang="en-US" sz="950" dirty="0"/>
-          </a:p>
-        </p:txBody>
-      </p:sp>
-      <p:sp>
-        <p:nvSpPr>
-          <p:cNvPr id="8" name="Text 6"/>
-          <p:cNvSpPr/>
-          <p:nvPr/>
-        </p:nvSpPr>
-        <p:spPr>
-          <a:xfrm>
-            <a:off x="2139696" y="1828800"/>
-            <a:ext cx="3566160" cy="420624"/>
-          </a:xfrm>
-          <a:prstGeom prst="rect">
-            <a:avLst/>
-          </a:prstGeom>
-          <a:noFill/>
-          <a:ln/>
-        </p:spPr>
-        <p:txBody>
-          <a:bodyPr wrap="square" lIns="0" tIns="0" rIns="0" bIns="0" rtlCol="0" anchor="ctr"/>
-          <a:lstStyle/>
-          <a:p>
-            <a:pPr indent="0" marL="0">
-              <a:buNone/>
-            </a:pPr>
-            <a:r>
-              <a:rPr lang="en-US" sz="1000" dirty="0">
-                <a:solidFill>
-                  <a:srgbClr val="F1F5F9"/>
-                </a:solidFill>
-                <a:latin typeface="Pretendard" pitchFamily="34" charset="0"/>
-                <a:ea typeface="Pretendard" pitchFamily="34" charset="-122"/>
-                <a:cs typeface="Pretendard" pitchFamily="34" charset="-120"/>
-              </a:rPr>
-              <a:t>등기부·대장 등 공적 장부 직접 확인</a:t>
-            </a:r>
-            <a:endParaRPr lang="en-US" sz="1000" dirty="0"/>
-          </a:p>
-        </p:txBody>
-      </p:sp>
-      <p:sp>
-        <p:nvSpPr>
-          <p:cNvPr id="9" name="Text 7"/>
-          <p:cNvSpPr/>
-          <p:nvPr/>
-        </p:nvSpPr>
-        <p:spPr>
-          <a:xfrm>
-            <a:off x="5504688" y="1847088"/>
-            <a:ext cx="731520" cy="292608"/>
-          </a:xfrm>
-          <a:prstGeom prst="rect">
-            <a:avLst/>
-          </a:prstGeom>
-          <a:noFill/>
-          <a:ln/>
-        </p:spPr>
-        <p:txBody>
-          <a:bodyPr wrap="square" lIns="0" tIns="0" rIns="0" bIns="0" rtlCol="0" anchor="ctr"/>
-          <a:lstStyle/>
-          <a:p>
-            <a:pPr algn="r" indent="0" marL="0">
-              <a:buNone/>
-            </a:pPr>
-            <a:r>
-              <a:rPr lang="en-US" sz="1200" b="1" dirty="0">
-                <a:solidFill>
-                  <a:srgbClr val="FFFFFF"/>
+              <a:rPr lang="en-US" sz="950" b="1" spc="200" kern="0" dirty="0">
+                <a:solidFill>
+                  <a:srgbClr val="B98A2E"/>
                 </a:solidFill>
                 <a:latin typeface="Arial" pitchFamily="34" charset="0"/>
                 <a:ea typeface="Arial" pitchFamily="34" charset="-122"/>
                 <a:cs typeface="Arial" pitchFamily="34" charset="-120"/>
               </a:rPr>
-              <a:t>1.00</a:t>
-            </a:r>
-            <a:endParaRPr lang="en-US" sz="1200" dirty="0"/>
-          </a:p>
-        </p:txBody>
-      </p:sp>
-      <p:sp>
-        <p:nvSpPr>
-          <p:cNvPr id="10" name="Shape 8"/>
-          <p:cNvSpPr/>
-          <p:nvPr/>
-        </p:nvSpPr>
-        <p:spPr>
-          <a:xfrm>
-            <a:off x="566928" y="2505456"/>
-            <a:ext cx="1417320" cy="347472"/>
+              <a:t>Disclaimer</a:t>
+            </a:r>
+            <a:endParaRPr lang="en-US" sz="950" dirty="0"/>
+          </a:p>
+        </p:txBody>
+      </p:sp>
+      <p:sp>
+        <p:nvSpPr>
+          <p:cNvPr id="5" name="Text 3"/>
+          <p:cNvSpPr/>
+          <p:nvPr/>
+        </p:nvSpPr>
+        <p:spPr>
+          <a:xfrm>
+            <a:off x="1133856" y="658368"/>
+            <a:ext cx="10490911" cy="420624"/>
+          </a:xfrm>
+          <a:prstGeom prst="rect">
+            <a:avLst/>
+          </a:prstGeom>
+          <a:noFill/>
+          <a:ln/>
+        </p:spPr>
+        <p:txBody>
+          <a:bodyPr wrap="square" lIns="0" tIns="0" rIns="0" bIns="0" rtlCol="0" anchor="ctr"/>
+          <a:lstStyle/>
+          <a:p>
+            <a:pPr indent="0" marL="0">
+              <a:buNone/>
+            </a:pPr>
+            <a:r>
+              <a:rPr lang="en-US" sz="2400" b="1" dirty="0">
+                <a:solidFill>
+                  <a:srgbClr val="FFFFFF"/>
+                </a:solidFill>
+                <a:latin typeface="Pretendard" pitchFamily="34" charset="0"/>
+                <a:ea typeface="Pretendard" pitchFamily="34" charset="-122"/>
+                <a:cs typeface="Pretendard" pitchFamily="34" charset="-120"/>
+              </a:rPr>
+              <a:t>표기 기준 및 면책</a:t>
+            </a:r>
+            <a:endParaRPr lang="en-US" sz="2400" dirty="0"/>
+          </a:p>
+        </p:txBody>
+      </p:sp>
+      <p:sp>
+        <p:nvSpPr>
+          <p:cNvPr id="6" name="Shape 4"/>
+          <p:cNvSpPr/>
+          <p:nvPr/>
+        </p:nvSpPr>
+        <p:spPr>
+          <a:xfrm>
+            <a:off x="566928" y="1463040"/>
+            <a:ext cx="3588410" cy="658368"/>
           </a:xfrm>
           <a:prstGeom prst="roundRect">
             <a:avLst>
-              <a:gd name="adj" fmla="val 10526"/>
+              <a:gd name="adj" fmla="val 5556"/>
             </a:avLst>
           </a:prstGeom>
           <a:solidFill>
-            <a:srgbClr val="334155"/>
+            <a:srgbClr val="2D3748"/>
           </a:solidFill>
           <a:ln/>
         </p:spPr>
       </p:sp>
       <p:sp>
         <p:nvSpPr>
-          <p:cNvPr id="11" name="Text 9"/>
-          <p:cNvSpPr/>
-          <p:nvPr/>
-        </p:nvSpPr>
-        <p:spPr>
-          <a:xfrm>
-            <a:off x="566928" y="2505456"/>
-            <a:ext cx="1417320" cy="347472"/>
+          <p:cNvPr id="7" name="Shape 5"/>
+          <p:cNvSpPr/>
+          <p:nvPr/>
+        </p:nvSpPr>
+        <p:spPr>
+          <a:xfrm>
+            <a:off x="676656" y="1572768"/>
+            <a:ext cx="438912" cy="438912"/>
+          </a:xfrm>
+          <a:prstGeom prst="ellipse">
+            <a:avLst/>
+          </a:prstGeom>
+          <a:solidFill>
+            <a:srgbClr val="B98A2E"/>
+          </a:solidFill>
+          <a:ln/>
+        </p:spPr>
+      </p:sp>
+      <p:sp>
+        <p:nvSpPr>
+          <p:cNvPr id="8" name="Text 6"/>
+          <p:cNvSpPr/>
+          <p:nvPr/>
+        </p:nvSpPr>
+        <p:spPr>
+          <a:xfrm>
+            <a:off x="676656" y="1572768"/>
+            <a:ext cx="438912" cy="438912"/>
           </a:xfrm>
           <a:prstGeom prst="rect">
             <a:avLst/>
@@ -2643,85 +2519,7 @@
               <a:buNone/>
             </a:pPr>
             <a:r>
-              <a:rPr lang="en-US" sz="950" b="1" dirty="0">
-                <a:solidFill>
-                  <a:srgbClr val="FFFFFF"/>
-                </a:solidFill>
-                <a:latin typeface="Pretendard" pitchFamily="34" charset="0"/>
-                <a:ea typeface="Pretendard" pitchFamily="34" charset="-122"/>
-                <a:cs typeface="Pretendard" pitchFamily="34" charset="-120"/>
-              </a:rPr>
-              <a:t>★ 전문가검증</a:t>
-            </a:r>
-            <a:endParaRPr lang="en-US" sz="950" dirty="0"/>
-          </a:p>
-        </p:txBody>
-      </p:sp>
-      <p:sp>
-        <p:nvSpPr>
-          <p:cNvPr id="12" name="Text 10"/>
-          <p:cNvSpPr/>
-          <p:nvPr/>
-        </p:nvSpPr>
-        <p:spPr>
-          <a:xfrm>
-            <a:off x="2139696" y="2487168"/>
-            <a:ext cx="3566160" cy="420624"/>
-          </a:xfrm>
-          <a:prstGeom prst="rect">
-            <a:avLst/>
-          </a:prstGeom>
-          <a:noFill/>
-          <a:ln/>
-        </p:spPr>
-        <p:txBody>
-          <a:bodyPr wrap="square" lIns="0" tIns="0" rIns="0" bIns="0" rtlCol="0" anchor="ctr"/>
-          <a:lstStyle/>
-          <a:p>
-            <a:pPr indent="0" marL="0">
-              <a:buNone/>
-            </a:pPr>
-            <a:r>
-              <a:rPr lang="en-US" sz="1000" dirty="0">
-                <a:solidFill>
-                  <a:srgbClr val="F1F5F9"/>
-                </a:solidFill>
-                <a:latin typeface="Pretendard" pitchFamily="34" charset="0"/>
-                <a:ea typeface="Pretendard" pitchFamily="34" charset="-122"/>
-                <a:cs typeface="Pretendard" pitchFamily="34" charset="-120"/>
-              </a:rPr>
-              <a:t>세무사·감정평가사 등 전문가 확인</a:t>
-            </a:r>
-            <a:endParaRPr lang="en-US" sz="1000" dirty="0"/>
-          </a:p>
-        </p:txBody>
-      </p:sp>
-      <p:sp>
-        <p:nvSpPr>
-          <p:cNvPr id="13" name="Text 11"/>
-          <p:cNvSpPr/>
-          <p:nvPr/>
-        </p:nvSpPr>
-        <p:spPr>
-          <a:xfrm>
-            <a:off x="5504688" y="2505456"/>
-            <a:ext cx="731520" cy="292608"/>
-          </a:xfrm>
-          <a:prstGeom prst="rect">
-            <a:avLst/>
-          </a:prstGeom>
-          <a:noFill/>
-          <a:ln/>
-        </p:spPr>
-        <p:txBody>
-          <a:bodyPr wrap="square" lIns="0" tIns="0" rIns="0" bIns="0" rtlCol="0" anchor="ctr"/>
-          <a:lstStyle/>
-          <a:p>
-            <a:pPr algn="r" indent="0" marL="0">
-              <a:buNone/>
-            </a:pPr>
-            <a:r>
-              <a:rPr lang="en-US" sz="1200" b="1" dirty="0">
+              <a:rPr lang="en-US" sz="1400" b="1" dirty="0">
                 <a:solidFill>
                   <a:srgbClr val="FFFFFF"/>
                 </a:solidFill>
@@ -2729,44 +2527,181 @@
                 <a:ea typeface="Arial" pitchFamily="34" charset="-122"/>
                 <a:cs typeface="Arial" pitchFamily="34" charset="-120"/>
               </a:rPr>
-              <a:t>0.95</a:t>
-            </a:r>
-            <a:endParaRPr lang="en-US" sz="1200" dirty="0"/>
-          </a:p>
-        </p:txBody>
-      </p:sp>
-      <p:sp>
-        <p:nvSpPr>
-          <p:cNvPr id="14" name="Shape 12"/>
-          <p:cNvSpPr/>
-          <p:nvPr/>
-        </p:nvSpPr>
-        <p:spPr>
-          <a:xfrm>
-            <a:off x="566928" y="3163824"/>
-            <a:ext cx="1417320" cy="347472"/>
+              <a:t>01</a:t>
+            </a:r>
+            <a:endParaRPr lang="en-US" sz="1400" dirty="0"/>
+          </a:p>
+        </p:txBody>
+      </p:sp>
+      <p:sp>
+        <p:nvSpPr>
+          <p:cNvPr id="9" name="Text 7"/>
+          <p:cNvSpPr/>
+          <p:nvPr/>
+        </p:nvSpPr>
+        <p:spPr>
+          <a:xfrm>
+            <a:off x="1225296" y="1554480"/>
+            <a:ext cx="2820314" cy="237744"/>
+          </a:xfrm>
+          <a:prstGeom prst="rect">
+            <a:avLst/>
+          </a:prstGeom>
+          <a:noFill/>
+          <a:ln/>
+        </p:spPr>
+        <p:txBody>
+          <a:bodyPr wrap="square" lIns="0" tIns="0" rIns="0" bIns="0" rtlCol="0" anchor="ctr"/>
+          <a:lstStyle/>
+          <a:p>
+            <a:pPr indent="0" marL="0">
+              <a:buNone/>
+            </a:pPr>
+            <a:r>
+              <a:rPr lang="en-US" sz="1100" b="1" dirty="0">
+                <a:solidFill>
+                  <a:srgbClr val="FFFFFF"/>
+                </a:solidFill>
+                <a:latin typeface="Pretendard" pitchFamily="34" charset="0"/>
+                <a:ea typeface="Pretendard" pitchFamily="34" charset="-122"/>
+                <a:cs typeface="Pretendard" pitchFamily="34" charset="-120"/>
+              </a:rPr>
+              <a:t>관심 표명</a:t>
+            </a:r>
+            <a:endParaRPr lang="en-US" sz="1100" dirty="0"/>
+          </a:p>
+        </p:txBody>
+      </p:sp>
+      <p:sp>
+        <p:nvSpPr>
+          <p:cNvPr id="10" name="Text 8"/>
+          <p:cNvSpPr/>
+          <p:nvPr/>
+        </p:nvSpPr>
+        <p:spPr>
+          <a:xfrm>
+            <a:off x="1225296" y="1792224"/>
+            <a:ext cx="2820314" cy="256032"/>
+          </a:xfrm>
+          <a:prstGeom prst="rect">
+            <a:avLst/>
+          </a:prstGeom>
+          <a:noFill/>
+          <a:ln/>
+        </p:spPr>
+        <p:txBody>
+          <a:bodyPr wrap="square" lIns="0" tIns="0" rIns="0" bIns="0" rtlCol="0" anchor="t"/>
+          <a:lstStyle/>
+          <a:p>
+            <a:pPr indent="0" marL="0">
+              <a:buNone/>
+            </a:pPr>
+            <a:r>
+              <a:rPr lang="en-US" sz="850" dirty="0">
+                <a:solidFill>
+                  <a:srgbClr val="A0AEC0"/>
+                </a:solidFill>
+                <a:latin typeface="Pretendard" pitchFamily="34" charset="0"/>
+                <a:ea typeface="Pretendard" pitchFamily="34" charset="-122"/>
+                <a:cs typeface="Pretendard" pitchFamily="34" charset="-120"/>
+              </a:rPr>
+              <a:t>담당 중개사에게 초기 관심 표명 및 상담 요청</a:t>
+            </a:r>
+            <a:endParaRPr lang="en-US" sz="850" dirty="0"/>
+          </a:p>
+        </p:txBody>
+      </p:sp>
+      <p:sp>
+        <p:nvSpPr>
+          <p:cNvPr id="11" name="Text 9"/>
+          <p:cNvSpPr/>
+          <p:nvPr/>
+        </p:nvSpPr>
+        <p:spPr>
+          <a:xfrm>
+            <a:off x="4155338" y="1600200"/>
+            <a:ext cx="146304" cy="384048"/>
+          </a:xfrm>
+          <a:prstGeom prst="rect">
+            <a:avLst/>
+          </a:prstGeom>
+          <a:noFill/>
+          <a:ln/>
+        </p:spPr>
+        <p:txBody>
+          <a:bodyPr wrap="square" lIns="0" tIns="0" rIns="0" bIns="0" rtlCol="0" anchor="ctr"/>
+          <a:lstStyle/>
+          <a:p>
+            <a:pPr algn="ctr" indent="0" marL="0">
+              <a:buNone/>
+            </a:pPr>
+            <a:r>
+              <a:rPr lang="en-US" sz="1600" dirty="0">
+                <a:solidFill>
+                  <a:srgbClr val="B98A2E"/>
+                </a:solidFill>
+                <a:latin typeface="Pretendard" pitchFamily="34" charset="0"/>
+                <a:ea typeface="Pretendard" pitchFamily="34" charset="-122"/>
+                <a:cs typeface="Pretendard" pitchFamily="34" charset="-120"/>
+              </a:rPr>
+              <a:t>→</a:t>
+            </a:r>
+            <a:endParaRPr lang="en-US" sz="1600" dirty="0"/>
+          </a:p>
+        </p:txBody>
+      </p:sp>
+      <p:sp>
+        <p:nvSpPr>
+          <p:cNvPr id="12" name="Shape 10"/>
+          <p:cNvSpPr/>
+          <p:nvPr/>
+        </p:nvSpPr>
+        <p:spPr>
+          <a:xfrm>
+            <a:off x="4301642" y="1463040"/>
+            <a:ext cx="3588410" cy="658368"/>
           </a:xfrm>
           <a:prstGeom prst="roundRect">
             <a:avLst>
-              <a:gd name="adj" fmla="val 10526"/>
+              <a:gd name="adj" fmla="val 5556"/>
             </a:avLst>
           </a:prstGeom>
           <a:solidFill>
-            <a:srgbClr val="334155"/>
+            <a:srgbClr val="2D3748"/>
           </a:solidFill>
           <a:ln/>
         </p:spPr>
       </p:sp>
       <p:sp>
         <p:nvSpPr>
-          <p:cNvPr id="15" name="Text 13"/>
-          <p:cNvSpPr/>
-          <p:nvPr/>
-        </p:nvSpPr>
-        <p:spPr>
-          <a:xfrm>
-            <a:off x="566928" y="3163824"/>
-            <a:ext cx="1417320" cy="347472"/>
+          <p:cNvPr id="13" name="Shape 11"/>
+          <p:cNvSpPr/>
+          <p:nvPr/>
+        </p:nvSpPr>
+        <p:spPr>
+          <a:xfrm>
+            <a:off x="4411370" y="1572768"/>
+            <a:ext cx="438912" cy="438912"/>
+          </a:xfrm>
+          <a:prstGeom prst="ellipse">
+            <a:avLst/>
+          </a:prstGeom>
+          <a:solidFill>
+            <a:srgbClr val="B98A2E"/>
+          </a:solidFill>
+          <a:ln/>
+        </p:spPr>
+      </p:sp>
+      <p:sp>
+        <p:nvSpPr>
+          <p:cNvPr id="14" name="Text 12"/>
+          <p:cNvSpPr/>
+          <p:nvPr/>
+        </p:nvSpPr>
+        <p:spPr>
+          <a:xfrm>
+            <a:off x="4411370" y="1572768"/>
+            <a:ext cx="438912" cy="438912"/>
           </a:xfrm>
           <a:prstGeom prst="rect">
             <a:avLst/>
@@ -2782,85 +2717,7 @@
               <a:buNone/>
             </a:pPr>
             <a:r>
-              <a:rPr lang="en-US" sz="950" b="1" dirty="0">
-                <a:solidFill>
-                  <a:srgbClr val="FFFFFF"/>
-                </a:solidFill>
-                <a:latin typeface="Pretendard" pitchFamily="34" charset="0"/>
-                <a:ea typeface="Pretendard" pitchFamily="34" charset="-122"/>
-                <a:cs typeface="Pretendard" pitchFamily="34" charset="-120"/>
-              </a:rPr>
-              <a:t>▲ 매도인고지</a:t>
-            </a:r>
-            <a:endParaRPr lang="en-US" sz="950" dirty="0"/>
-          </a:p>
-        </p:txBody>
-      </p:sp>
-      <p:sp>
-        <p:nvSpPr>
-          <p:cNvPr id="16" name="Text 14"/>
-          <p:cNvSpPr/>
-          <p:nvPr/>
-        </p:nvSpPr>
-        <p:spPr>
-          <a:xfrm>
-            <a:off x="2139696" y="3145536"/>
-            <a:ext cx="3566160" cy="420624"/>
-          </a:xfrm>
-          <a:prstGeom prst="rect">
-            <a:avLst/>
-          </a:prstGeom>
-          <a:noFill/>
-          <a:ln/>
-        </p:spPr>
-        <p:txBody>
-          <a:bodyPr wrap="square" lIns="0" tIns="0" rIns="0" bIns="0" rtlCol="0" anchor="ctr"/>
-          <a:lstStyle/>
-          <a:p>
-            <a:pPr indent="0" marL="0">
-              <a:buNone/>
-            </a:pPr>
-            <a:r>
-              <a:rPr lang="en-US" sz="1000" dirty="0">
-                <a:solidFill>
-                  <a:srgbClr val="F1F5F9"/>
-                </a:solidFill>
-                <a:latin typeface="Pretendard" pitchFamily="34" charset="0"/>
-                <a:ea typeface="Pretendard" pitchFamily="34" charset="-122"/>
-                <a:cs typeface="Pretendard" pitchFamily="34" charset="-120"/>
-              </a:rPr>
-              <a:t>매도인이 구두 또는 서면으로 고지</a:t>
-            </a:r>
-            <a:endParaRPr lang="en-US" sz="1000" dirty="0"/>
-          </a:p>
-        </p:txBody>
-      </p:sp>
-      <p:sp>
-        <p:nvSpPr>
-          <p:cNvPr id="17" name="Text 15"/>
-          <p:cNvSpPr/>
-          <p:nvPr/>
-        </p:nvSpPr>
-        <p:spPr>
-          <a:xfrm>
-            <a:off x="5504688" y="3163824"/>
-            <a:ext cx="731520" cy="292608"/>
-          </a:xfrm>
-          <a:prstGeom prst="rect">
-            <a:avLst/>
-          </a:prstGeom>
-          <a:noFill/>
-          <a:ln/>
-        </p:spPr>
-        <p:txBody>
-          <a:bodyPr wrap="square" lIns="0" tIns="0" rIns="0" bIns="0" rtlCol="0" anchor="ctr"/>
-          <a:lstStyle/>
-          <a:p>
-            <a:pPr algn="r" indent="0" marL="0">
-              <a:buNone/>
-            </a:pPr>
-            <a:r>
-              <a:rPr lang="en-US" sz="1200" b="1" dirty="0">
+              <a:rPr lang="en-US" sz="1400" b="1" dirty="0">
                 <a:solidFill>
                   <a:srgbClr val="FFFFFF"/>
                 </a:solidFill>
@@ -2868,9 +2725,126 @@
                 <a:ea typeface="Arial" pitchFamily="34" charset="-122"/>
                 <a:cs typeface="Arial" pitchFamily="34" charset="-120"/>
               </a:rPr>
-              <a:t>0.65</a:t>
-            </a:r>
-            <a:endParaRPr lang="en-US" sz="1200" dirty="0"/>
+              <a:t>02</a:t>
+            </a:r>
+            <a:endParaRPr lang="en-US" sz="1400" dirty="0"/>
+          </a:p>
+        </p:txBody>
+      </p:sp>
+      <p:sp>
+        <p:nvSpPr>
+          <p:cNvPr id="15" name="Text 13"/>
+          <p:cNvSpPr/>
+          <p:nvPr/>
+        </p:nvSpPr>
+        <p:spPr>
+          <a:xfrm>
+            <a:off x="4960010" y="1554480"/>
+            <a:ext cx="2820314" cy="237744"/>
+          </a:xfrm>
+          <a:prstGeom prst="rect">
+            <a:avLst/>
+          </a:prstGeom>
+          <a:noFill/>
+          <a:ln/>
+        </p:spPr>
+        <p:txBody>
+          <a:bodyPr wrap="square" lIns="0" tIns="0" rIns="0" bIns="0" rtlCol="0" anchor="ctr"/>
+          <a:lstStyle/>
+          <a:p>
+            <a:pPr indent="0" marL="0">
+              <a:buNone/>
+            </a:pPr>
+            <a:r>
+              <a:rPr lang="en-US" sz="1100" b="1" dirty="0">
+                <a:solidFill>
+                  <a:srgbClr val="FFFFFF"/>
+                </a:solidFill>
+                <a:latin typeface="Pretendard" pitchFamily="34" charset="0"/>
+                <a:ea typeface="Pretendard" pitchFamily="34" charset="-122"/>
+                <a:cs typeface="Pretendard" pitchFamily="34" charset="-120"/>
+              </a:rPr>
+              <a:t>NDA 체결</a:t>
+            </a:r>
+            <a:endParaRPr lang="en-US" sz="1100" dirty="0"/>
+          </a:p>
+        </p:txBody>
+      </p:sp>
+      <p:sp>
+        <p:nvSpPr>
+          <p:cNvPr id="16" name="Text 14"/>
+          <p:cNvSpPr/>
+          <p:nvPr/>
+        </p:nvSpPr>
+        <p:spPr>
+          <a:xfrm>
+            <a:off x="4960010" y="1792224"/>
+            <a:ext cx="2820314" cy="256032"/>
+          </a:xfrm>
+          <a:prstGeom prst="rect">
+            <a:avLst/>
+          </a:prstGeom>
+          <a:noFill/>
+          <a:ln/>
+        </p:spPr>
+        <p:txBody>
+          <a:bodyPr wrap="square" lIns="0" tIns="0" rIns="0" bIns="0" rtlCol="0" anchor="t"/>
+          <a:lstStyle/>
+          <a:p>
+            <a:pPr indent="0" marL="0">
+              <a:buNone/>
+            </a:pPr>
+            <a:r>
+              <a:rPr lang="en-US" sz="850" dirty="0">
+                <a:solidFill>
+                  <a:srgbClr val="A0AEC0"/>
+                </a:solidFill>
+                <a:latin typeface="Pretendard" pitchFamily="34" charset="0"/>
+                <a:ea typeface="Pretendard" pitchFamily="34" charset="-122"/>
+                <a:cs typeface="Pretendard" pitchFamily="34" charset="-120"/>
+              </a:rPr>
+              <a:t>비밀유지계약 후 상세 임대차·재무 자료 제공</a:t>
+            </a:r>
+            <a:endParaRPr lang="en-US" sz="850" dirty="0"/>
+          </a:p>
+        </p:txBody>
+      </p:sp>
+      <p:sp>
+        <p:nvSpPr>
+          <p:cNvPr id="17" name="Text 15"/>
+          <p:cNvSpPr/>
+          <p:nvPr/>
+        </p:nvSpPr>
+        <p:spPr>
+          <a:xfrm>
+            <a:off x="7890053" y="1600200"/>
+            <a:ext cx="146304" cy="384048"/>
+          </a:xfrm>
+          <a:prstGeom prst="rect">
+            <a:avLst/>
+          </a:prstGeom>
+          <a:noFill/>
+          <a:ln/>
+        </p:spPr>
+        <p:txBody>
+          <a:bodyPr wrap="square" lIns="0" tIns="0" rIns="0" bIns="0" rtlCol="0" anchor="ctr"/>
+          <a:lstStyle/>
+          <a:p>
+            <a:pPr algn="ctr" indent="0" marL="0">
+              <a:buNone/>
+            </a:pPr>
+            <a:r>
+              <a:rPr lang="en-US" sz="1600" dirty="0">
+                <a:solidFill>
+                  <a:srgbClr val="B98A2E"/>
+                </a:solidFill>
+                <a:latin typeface="Pretendard" pitchFamily="34" charset="0"/>
+                <a:ea typeface="Pretendard" pitchFamily="34" charset="-122"/>
+                <a:cs typeface="Pretendard" pitchFamily="34" charset="-120"/>
+              </a:rPr>
+              <a:t>→</a:t>
+            </a:r>
+            <a:endParaRPr lang="en-US" sz="1600" dirty="0"/>
           </a:p>
         </p:txBody>
       </p:sp>
@@ -2882,30 +2856,50 @@
         </p:nvSpPr>
         <p:spPr>
           <a:xfrm>
-            <a:off x="566928" y="3822192"/>
-            <a:ext cx="1417320" cy="347472"/>
+            <a:off x="8036357" y="1463040"/>
+            <a:ext cx="3588410" cy="658368"/>
           </a:xfrm>
           <a:prstGeom prst="roundRect">
             <a:avLst>
-              <a:gd name="adj" fmla="val 10526"/>
+              <a:gd name="adj" fmla="val 5556"/>
             </a:avLst>
           </a:prstGeom>
           <a:solidFill>
-            <a:srgbClr val="334155"/>
+            <a:srgbClr val="2D3748"/>
           </a:solidFill>
           <a:ln/>
         </p:spPr>
       </p:sp>
       <p:sp>
         <p:nvSpPr>
-          <p:cNvPr id="19" name="Text 17"/>
-          <p:cNvSpPr/>
-          <p:nvPr/>
-        </p:nvSpPr>
-        <p:spPr>
-          <a:xfrm>
-            <a:off x="566928" y="3822192"/>
-            <a:ext cx="1417320" cy="347472"/>
+          <p:cNvPr id="19" name="Shape 17"/>
+          <p:cNvSpPr/>
+          <p:nvPr/>
+        </p:nvSpPr>
+        <p:spPr>
+          <a:xfrm>
+            <a:off x="8146085" y="1572768"/>
+            <a:ext cx="438912" cy="438912"/>
+          </a:xfrm>
+          <a:prstGeom prst="ellipse">
+            <a:avLst/>
+          </a:prstGeom>
+          <a:solidFill>
+            <a:srgbClr val="B98A2E"/>
+          </a:solidFill>
+          <a:ln/>
+        </p:spPr>
+      </p:sp>
+      <p:sp>
+        <p:nvSpPr>
+          <p:cNvPr id="20" name="Text 18"/>
+          <p:cNvSpPr/>
+          <p:nvPr/>
+        </p:nvSpPr>
+        <p:spPr>
+          <a:xfrm>
+            <a:off x="8146085" y="1572768"/>
+            <a:ext cx="438912" cy="438912"/>
           </a:xfrm>
           <a:prstGeom prst="rect">
             <a:avLst/>
@@ -2921,85 +2915,7 @@
               <a:buNone/>
             </a:pPr>
             <a:r>
-              <a:rPr lang="en-US" sz="950" b="1" dirty="0">
-                <a:solidFill>
-                  <a:srgbClr val="FFFFFF"/>
-                </a:solidFill>
-                <a:latin typeface="Pretendard" pitchFamily="34" charset="0"/>
-                <a:ea typeface="Pretendard" pitchFamily="34" charset="-122"/>
-                <a:cs typeface="Pretendard" pitchFamily="34" charset="-120"/>
-              </a:rPr>
-              <a:t>● 중개인입력</a:t>
-            </a:r>
-            <a:endParaRPr lang="en-US" sz="950" dirty="0"/>
-          </a:p>
-        </p:txBody>
-      </p:sp>
-      <p:sp>
-        <p:nvSpPr>
-          <p:cNvPr id="20" name="Text 18"/>
-          <p:cNvSpPr/>
-          <p:nvPr/>
-        </p:nvSpPr>
-        <p:spPr>
-          <a:xfrm>
-            <a:off x="2139696" y="3803904"/>
-            <a:ext cx="3566160" cy="420624"/>
-          </a:xfrm>
-          <a:prstGeom prst="rect">
-            <a:avLst/>
-          </a:prstGeom>
-          <a:noFill/>
-          <a:ln/>
-        </p:spPr>
-        <p:txBody>
-          <a:bodyPr wrap="square" lIns="0" tIns="0" rIns="0" bIns="0" rtlCol="0" anchor="ctr"/>
-          <a:lstStyle/>
-          <a:p>
-            <a:pPr indent="0" marL="0">
-              <a:buNone/>
-            </a:pPr>
-            <a:r>
-              <a:rPr lang="en-US" sz="1000" dirty="0">
-                <a:solidFill>
-                  <a:srgbClr val="F1F5F9"/>
-                </a:solidFill>
-                <a:latin typeface="Pretendard" pitchFamily="34" charset="0"/>
-                <a:ea typeface="Pretendard" pitchFamily="34" charset="-122"/>
-                <a:cs typeface="Pretendard" pitchFamily="34" charset="-120"/>
-              </a:rPr>
-              <a:t>중개인 현장 조사 및 경험 기반 입력</a:t>
-            </a:r>
-            <a:endParaRPr lang="en-US" sz="1000" dirty="0"/>
-          </a:p>
-        </p:txBody>
-      </p:sp>
-      <p:sp>
-        <p:nvSpPr>
-          <p:cNvPr id="21" name="Text 19"/>
-          <p:cNvSpPr/>
-          <p:nvPr/>
-        </p:nvSpPr>
-        <p:spPr>
-          <a:xfrm>
-            <a:off x="5504688" y="3822192"/>
-            <a:ext cx="731520" cy="292608"/>
-          </a:xfrm>
-          <a:prstGeom prst="rect">
-            <a:avLst/>
-          </a:prstGeom>
-          <a:noFill/>
-          <a:ln/>
-        </p:spPr>
-        <p:txBody>
-          <a:bodyPr wrap="square" lIns="0" tIns="0" rIns="0" bIns="0" rtlCol="0" anchor="ctr"/>
-          <a:lstStyle/>
-          <a:p>
-            <a:pPr algn="r" indent="0" marL="0">
-              <a:buNone/>
-            </a:pPr>
-            <a:r>
-              <a:rPr lang="en-US" sz="1200" b="1" dirty="0">
+              <a:rPr lang="en-US" sz="1400" b="1" dirty="0">
                 <a:solidFill>
                   <a:srgbClr val="FFFFFF"/>
                 </a:solidFill>
@@ -3007,44 +2923,161 @@
                 <a:ea typeface="Arial" pitchFamily="34" charset="-122"/>
                 <a:cs typeface="Arial" pitchFamily="34" charset="-120"/>
               </a:rPr>
-              <a:t>0.60</a:t>
-            </a:r>
-            <a:endParaRPr lang="en-US" sz="1200" dirty="0"/>
-          </a:p>
-        </p:txBody>
-      </p:sp>
-      <p:sp>
-        <p:nvSpPr>
-          <p:cNvPr id="22" name="Shape 20"/>
-          <p:cNvSpPr/>
-          <p:nvPr/>
-        </p:nvSpPr>
-        <p:spPr>
-          <a:xfrm>
-            <a:off x="566928" y="4480560"/>
-            <a:ext cx="1417320" cy="347472"/>
+              <a:t>03</a:t>
+            </a:r>
+            <a:endParaRPr lang="en-US" sz="1400" dirty="0"/>
+          </a:p>
+        </p:txBody>
+      </p:sp>
+      <p:sp>
+        <p:nvSpPr>
+          <p:cNvPr id="21" name="Text 19"/>
+          <p:cNvSpPr/>
+          <p:nvPr/>
+        </p:nvSpPr>
+        <p:spPr>
+          <a:xfrm>
+            <a:off x="8694725" y="1554480"/>
+            <a:ext cx="2820314" cy="237744"/>
+          </a:xfrm>
+          <a:prstGeom prst="rect">
+            <a:avLst/>
+          </a:prstGeom>
+          <a:noFill/>
+          <a:ln/>
+        </p:spPr>
+        <p:txBody>
+          <a:bodyPr wrap="square" lIns="0" tIns="0" rIns="0" bIns="0" rtlCol="0" anchor="ctr"/>
+          <a:lstStyle/>
+          <a:p>
+            <a:pPr indent="0" marL="0">
+              <a:buNone/>
+            </a:pPr>
+            <a:r>
+              <a:rPr lang="en-US" sz="1100" b="1" dirty="0">
+                <a:solidFill>
+                  <a:srgbClr val="FFFFFF"/>
+                </a:solidFill>
+                <a:latin typeface="Pretendard" pitchFamily="34" charset="0"/>
+                <a:ea typeface="Pretendard" pitchFamily="34" charset="-122"/>
+                <a:cs typeface="Pretendard" pitchFamily="34" charset="-120"/>
+              </a:rPr>
+              <a:t>현장 실사</a:t>
+            </a:r>
+            <a:endParaRPr lang="en-US" sz="1100" dirty="0"/>
+          </a:p>
+        </p:txBody>
+      </p:sp>
+      <p:sp>
+        <p:nvSpPr>
+          <p:cNvPr id="22" name="Text 20"/>
+          <p:cNvSpPr/>
+          <p:nvPr/>
+        </p:nvSpPr>
+        <p:spPr>
+          <a:xfrm>
+            <a:off x="8694725" y="1792224"/>
+            <a:ext cx="2820314" cy="256032"/>
+          </a:xfrm>
+          <a:prstGeom prst="rect">
+            <a:avLst/>
+          </a:prstGeom>
+          <a:noFill/>
+          <a:ln/>
+        </p:spPr>
+        <p:txBody>
+          <a:bodyPr wrap="square" lIns="0" tIns="0" rIns="0" bIns="0" rtlCol="0" anchor="t"/>
+          <a:lstStyle/>
+          <a:p>
+            <a:pPr indent="0" marL="0">
+              <a:buNone/>
+            </a:pPr>
+            <a:r>
+              <a:rPr lang="en-US" sz="850" dirty="0">
+                <a:solidFill>
+                  <a:srgbClr val="A0AEC0"/>
+                </a:solidFill>
+                <a:latin typeface="Pretendard" pitchFamily="34" charset="0"/>
+                <a:ea typeface="Pretendard" pitchFamily="34" charset="-122"/>
+                <a:cs typeface="Pretendard" pitchFamily="34" charset="-120"/>
+              </a:rPr>
+              <a:t>건물 컨디션 및 설비 직접 확인 후 의향서(LOI) 제출</a:t>
+            </a:r>
+            <a:endParaRPr lang="en-US" sz="850" dirty="0"/>
+          </a:p>
+        </p:txBody>
+      </p:sp>
+      <p:sp>
+        <p:nvSpPr>
+          <p:cNvPr id="23" name="Text 21"/>
+          <p:cNvSpPr/>
+          <p:nvPr/>
+        </p:nvSpPr>
+        <p:spPr>
+          <a:xfrm>
+            <a:off x="566928" y="2395728"/>
+            <a:ext cx="5486400" cy="237744"/>
+          </a:xfrm>
+          <a:prstGeom prst="rect">
+            <a:avLst/>
+          </a:prstGeom>
+          <a:noFill/>
+          <a:ln/>
+        </p:spPr>
+        <p:txBody>
+          <a:bodyPr wrap="square" lIns="0" tIns="0" rIns="0" bIns="0" rtlCol="0" anchor="ctr"/>
+          <a:lstStyle/>
+          <a:p>
+            <a:pPr indent="0" marL="0">
+              <a:buNone/>
+            </a:pPr>
+            <a:r>
+              <a:rPr lang="en-US" sz="1100" b="1" dirty="0">
+                <a:solidFill>
+                  <a:srgbClr val="FFFFFF"/>
+                </a:solidFill>
+                <a:latin typeface="Pretendard" pitchFamily="34" charset="0"/>
+                <a:ea typeface="Pretendard" pitchFamily="34" charset="-122"/>
+                <a:cs typeface="Pretendard" pitchFamily="34" charset="-120"/>
+              </a:rPr>
+              <a:t>데이터 출처 표기</a:t>
+            </a:r>
+            <a:endParaRPr lang="en-US" sz="1100" dirty="0"/>
+          </a:p>
+        </p:txBody>
+      </p:sp>
+      <p:sp>
+        <p:nvSpPr>
+          <p:cNvPr id="24" name="Shape 22"/>
+          <p:cNvSpPr/>
+          <p:nvPr/>
+        </p:nvSpPr>
+        <p:spPr>
+          <a:xfrm>
+            <a:off x="566928" y="2724912"/>
+            <a:ext cx="1280160" cy="292608"/>
           </a:xfrm>
           <a:prstGeom prst="roundRect">
             <a:avLst>
-              <a:gd name="adj" fmla="val 10526"/>
+              <a:gd name="adj" fmla="val 12500"/>
             </a:avLst>
           </a:prstGeom>
           <a:solidFill>
-            <a:srgbClr val="334155"/>
+            <a:srgbClr val="2D3748"/>
           </a:solidFill>
           <a:ln/>
         </p:spPr>
       </p:sp>
       <p:sp>
         <p:nvSpPr>
-          <p:cNvPr id="23" name="Text 21"/>
-          <p:cNvSpPr/>
-          <p:nvPr/>
-        </p:nvSpPr>
-        <p:spPr>
-          <a:xfrm>
-            <a:off x="566928" y="4480560"/>
-            <a:ext cx="1417320" cy="347472"/>
+          <p:cNvPr id="25" name="Text 23"/>
+          <p:cNvSpPr/>
+          <p:nvPr/>
+        </p:nvSpPr>
+        <p:spPr>
+          <a:xfrm>
+            <a:off x="566928" y="2724912"/>
+            <a:ext cx="1280160" cy="292608"/>
           </a:xfrm>
           <a:prstGeom prst="rect">
             <a:avLst/>
@@ -3060,7 +3093,7 @@
               <a:buNone/>
             </a:pPr>
             <a:r>
-              <a:rPr lang="en-US" sz="950" b="1" dirty="0">
+              <a:rPr lang="en-US" sz="850" b="1" dirty="0">
                 <a:solidFill>
                   <a:srgbClr val="FFFFFF"/>
                 </a:solidFill>
@@ -3068,22 +3101,22 @@
                 <a:ea typeface="Pretendard" pitchFamily="34" charset="-122"/>
                 <a:cs typeface="Pretendard" pitchFamily="34" charset="-120"/>
               </a:rPr>
-              <a:t>◇ AI추정·가정</a:t>
-            </a:r>
-            <a:endParaRPr lang="en-US" sz="950" dirty="0"/>
-          </a:p>
-        </p:txBody>
-      </p:sp>
-      <p:sp>
-        <p:nvSpPr>
-          <p:cNvPr id="24" name="Text 22"/>
-          <p:cNvSpPr/>
-          <p:nvPr/>
-        </p:nvSpPr>
-        <p:spPr>
-          <a:xfrm>
-            <a:off x="2139696" y="4462272"/>
-            <a:ext cx="3566160" cy="420624"/>
+              <a:t>✓ 공부확인</a:t>
+            </a:r>
+            <a:endParaRPr lang="en-US" sz="850" dirty="0"/>
+          </a:p>
+        </p:txBody>
+      </p:sp>
+      <p:sp>
+        <p:nvSpPr>
+          <p:cNvPr id="26" name="Text 24"/>
+          <p:cNvSpPr/>
+          <p:nvPr/>
+        </p:nvSpPr>
+        <p:spPr>
+          <a:xfrm>
+            <a:off x="1993392" y="2706624"/>
+            <a:ext cx="3840480" cy="329184"/>
           </a:xfrm>
           <a:prstGeom prst="rect">
             <a:avLst/>
@@ -3099,95 +3132,17 @@
               <a:buNone/>
             </a:pPr>
             <a:r>
-              <a:rPr lang="en-US" sz="1000" dirty="0">
-                <a:solidFill>
-                  <a:srgbClr val="F1F5F9"/>
-                </a:solidFill>
-                <a:latin typeface="Pretendard" pitchFamily="34" charset="0"/>
-                <a:ea typeface="Pretendard" pitchFamily="34" charset="-122"/>
-                <a:cs typeface="Pretendard" pitchFamily="34" charset="-120"/>
-              </a:rPr>
-              <a:t>시나리오 분석 및 AI 모델 추정</a:t>
-            </a:r>
-            <a:endParaRPr lang="en-US" sz="1000" dirty="0"/>
-          </a:p>
-        </p:txBody>
-      </p:sp>
-      <p:sp>
-        <p:nvSpPr>
-          <p:cNvPr id="25" name="Text 23"/>
-          <p:cNvSpPr/>
-          <p:nvPr/>
-        </p:nvSpPr>
-        <p:spPr>
-          <a:xfrm>
-            <a:off x="5504688" y="4480560"/>
-            <a:ext cx="731520" cy="292608"/>
-          </a:xfrm>
-          <a:prstGeom prst="rect">
-            <a:avLst/>
-          </a:prstGeom>
-          <a:noFill/>
-          <a:ln/>
-        </p:spPr>
-        <p:txBody>
-          <a:bodyPr wrap="square" lIns="0" tIns="0" rIns="0" bIns="0" rtlCol="0" anchor="ctr"/>
-          <a:lstStyle/>
-          <a:p>
-            <a:pPr algn="r" indent="0" marL="0">
-              <a:buNone/>
-            </a:pPr>
-            <a:r>
-              <a:rPr lang="en-US" sz="1200" b="1" dirty="0">
-                <a:solidFill>
-                  <a:srgbClr val="FFFFFF"/>
-                </a:solidFill>
-                <a:latin typeface="Arial" pitchFamily="34" charset="0"/>
-                <a:ea typeface="Arial" pitchFamily="34" charset="-122"/>
-                <a:cs typeface="Arial" pitchFamily="34" charset="-120"/>
-              </a:rPr>
-              <a:t>0.30</a:t>
-            </a:r>
-            <a:endParaRPr lang="en-US" sz="1200" dirty="0"/>
-          </a:p>
-        </p:txBody>
-      </p:sp>
-      <p:sp>
-        <p:nvSpPr>
-          <p:cNvPr id="26" name="Text 24"/>
-          <p:cNvSpPr/>
-          <p:nvPr/>
-        </p:nvSpPr>
-        <p:spPr>
-          <a:xfrm>
-            <a:off x="6492240" y="1517904"/>
-            <a:ext cx="5129784" cy="237744"/>
-          </a:xfrm>
-          <a:prstGeom prst="rect">
-            <a:avLst/>
-          </a:prstGeom>
-          <a:noFill/>
-          <a:ln/>
-        </p:spPr>
-        <p:txBody>
-          <a:bodyPr wrap="square" lIns="0" tIns="0" rIns="0" bIns="0" rtlCol="0" anchor="ctr"/>
-          <a:lstStyle/>
-          <a:p>
-            <a:pPr indent="0" marL="0">
-              <a:buNone/>
-            </a:pPr>
-            <a:r>
-              <a:rPr lang="en-US" sz="1100" b="1" dirty="0">
-                <a:solidFill>
-                  <a:srgbClr val="FFFFFF"/>
-                </a:solidFill>
-                <a:latin typeface="Pretendard" pitchFamily="34" charset="0"/>
-                <a:ea typeface="Pretendard" pitchFamily="34" charset="-122"/>
-                <a:cs typeface="Pretendard" pitchFamily="34" charset="-120"/>
-              </a:rPr>
-              <a:t>면책 조항</a:t>
-            </a:r>
-            <a:endParaRPr lang="en-US" sz="1100" dirty="0"/>
+              <a:rPr lang="en-US" sz="900" dirty="0">
+                <a:solidFill>
+                  <a:srgbClr val="E2E8F0"/>
+                </a:solidFill>
+                <a:latin typeface="Pretendard" pitchFamily="34" charset="0"/>
+                <a:ea typeface="Pretendard" pitchFamily="34" charset="-122"/>
+                <a:cs typeface="Pretendard" pitchFamily="34" charset="-120"/>
+              </a:rPr>
+              <a:t>등기부·대장 등 공적 장부 직접 확인</a:t>
+            </a:r>
+            <a:endParaRPr lang="en-US" sz="900" dirty="0"/>
           </a:p>
         </p:txBody>
       </p:sp>
@@ -3199,16 +3154,16 @@
         </p:nvSpPr>
         <p:spPr>
           <a:xfrm>
-            <a:off x="6492240" y="1847088"/>
-            <a:ext cx="5129784" cy="2615184"/>
+            <a:off x="566928" y="3200400"/>
+            <a:ext cx="1280160" cy="292608"/>
           </a:xfrm>
           <a:prstGeom prst="roundRect">
             <a:avLst>
-              <a:gd name="adj" fmla="val 1399"/>
+              <a:gd name="adj" fmla="val 12500"/>
             </a:avLst>
           </a:prstGeom>
           <a:solidFill>
-            <a:srgbClr val="1E293B"/>
+            <a:srgbClr val="2D3748"/>
           </a:solidFill>
           <a:ln/>
         </p:spPr>
@@ -3221,8 +3176,447 @@
         </p:nvSpPr>
         <p:spPr>
           <a:xfrm>
-            <a:off x="6711696" y="2011680"/>
-            <a:ext cx="4690872" cy="2286000"/>
+            <a:off x="566928" y="3200400"/>
+            <a:ext cx="1280160" cy="292608"/>
+          </a:xfrm>
+          <a:prstGeom prst="rect">
+            <a:avLst/>
+          </a:prstGeom>
+          <a:noFill/>
+          <a:ln/>
+        </p:spPr>
+        <p:txBody>
+          <a:bodyPr wrap="square" lIns="0" tIns="0" rIns="0" bIns="0" rtlCol="0" anchor="ctr"/>
+          <a:lstStyle/>
+          <a:p>
+            <a:pPr algn="ctr" indent="0" marL="0">
+              <a:buNone/>
+            </a:pPr>
+            <a:r>
+              <a:rPr lang="en-US" sz="850" b="1" dirty="0">
+                <a:solidFill>
+                  <a:srgbClr val="FFFFFF"/>
+                </a:solidFill>
+                <a:latin typeface="Pretendard" pitchFamily="34" charset="0"/>
+                <a:ea typeface="Pretendard" pitchFamily="34" charset="-122"/>
+                <a:cs typeface="Pretendard" pitchFamily="34" charset="-120"/>
+              </a:rPr>
+              <a:t>★ 전문가검증</a:t>
+            </a:r>
+            <a:endParaRPr lang="en-US" sz="850" dirty="0"/>
+          </a:p>
+        </p:txBody>
+      </p:sp>
+      <p:sp>
+        <p:nvSpPr>
+          <p:cNvPr id="29" name="Text 27"/>
+          <p:cNvSpPr/>
+          <p:nvPr/>
+        </p:nvSpPr>
+        <p:spPr>
+          <a:xfrm>
+            <a:off x="1993392" y="3182112"/>
+            <a:ext cx="3840480" cy="329184"/>
+          </a:xfrm>
+          <a:prstGeom prst="rect">
+            <a:avLst/>
+          </a:prstGeom>
+          <a:noFill/>
+          <a:ln/>
+        </p:spPr>
+        <p:txBody>
+          <a:bodyPr wrap="square" lIns="0" tIns="0" rIns="0" bIns="0" rtlCol="0" anchor="ctr"/>
+          <a:lstStyle/>
+          <a:p>
+            <a:pPr indent="0" marL="0">
+              <a:buNone/>
+            </a:pPr>
+            <a:r>
+              <a:rPr lang="en-US" sz="900" dirty="0">
+                <a:solidFill>
+                  <a:srgbClr val="E2E8F0"/>
+                </a:solidFill>
+                <a:latin typeface="Pretendard" pitchFamily="34" charset="0"/>
+                <a:ea typeface="Pretendard" pitchFamily="34" charset="-122"/>
+                <a:cs typeface="Pretendard" pitchFamily="34" charset="-120"/>
+              </a:rPr>
+              <a:t>세무사·감정평가사 등 전문가 확인</a:t>
+            </a:r>
+            <a:endParaRPr lang="en-US" sz="900" dirty="0"/>
+          </a:p>
+        </p:txBody>
+      </p:sp>
+      <p:sp>
+        <p:nvSpPr>
+          <p:cNvPr id="30" name="Shape 28"/>
+          <p:cNvSpPr/>
+          <p:nvPr/>
+        </p:nvSpPr>
+        <p:spPr>
+          <a:xfrm>
+            <a:off x="566928" y="3675888"/>
+            <a:ext cx="1280160" cy="292608"/>
+          </a:xfrm>
+          <a:prstGeom prst="roundRect">
+            <a:avLst>
+              <a:gd name="adj" fmla="val 12500"/>
+            </a:avLst>
+          </a:prstGeom>
+          <a:solidFill>
+            <a:srgbClr val="2D3748"/>
+          </a:solidFill>
+          <a:ln/>
+        </p:spPr>
+      </p:sp>
+      <p:sp>
+        <p:nvSpPr>
+          <p:cNvPr id="31" name="Text 29"/>
+          <p:cNvSpPr/>
+          <p:nvPr/>
+        </p:nvSpPr>
+        <p:spPr>
+          <a:xfrm>
+            <a:off x="566928" y="3675888"/>
+            <a:ext cx="1280160" cy="292608"/>
+          </a:xfrm>
+          <a:prstGeom prst="rect">
+            <a:avLst/>
+          </a:prstGeom>
+          <a:noFill/>
+          <a:ln/>
+        </p:spPr>
+        <p:txBody>
+          <a:bodyPr wrap="square" lIns="0" tIns="0" rIns="0" bIns="0" rtlCol="0" anchor="ctr"/>
+          <a:lstStyle/>
+          <a:p>
+            <a:pPr algn="ctr" indent="0" marL="0">
+              <a:buNone/>
+            </a:pPr>
+            <a:r>
+              <a:rPr lang="en-US" sz="850" b="1" dirty="0">
+                <a:solidFill>
+                  <a:srgbClr val="FFFFFF"/>
+                </a:solidFill>
+                <a:latin typeface="Pretendard" pitchFamily="34" charset="0"/>
+                <a:ea typeface="Pretendard" pitchFamily="34" charset="-122"/>
+                <a:cs typeface="Pretendard" pitchFamily="34" charset="-120"/>
+              </a:rPr>
+              <a:t>▲ 매도인고지</a:t>
+            </a:r>
+            <a:endParaRPr lang="en-US" sz="850" dirty="0"/>
+          </a:p>
+        </p:txBody>
+      </p:sp>
+      <p:sp>
+        <p:nvSpPr>
+          <p:cNvPr id="32" name="Text 30"/>
+          <p:cNvSpPr/>
+          <p:nvPr/>
+        </p:nvSpPr>
+        <p:spPr>
+          <a:xfrm>
+            <a:off x="1993392" y="3657600"/>
+            <a:ext cx="3840480" cy="329184"/>
+          </a:xfrm>
+          <a:prstGeom prst="rect">
+            <a:avLst/>
+          </a:prstGeom>
+          <a:noFill/>
+          <a:ln/>
+        </p:spPr>
+        <p:txBody>
+          <a:bodyPr wrap="square" lIns="0" tIns="0" rIns="0" bIns="0" rtlCol="0" anchor="ctr"/>
+          <a:lstStyle/>
+          <a:p>
+            <a:pPr indent="0" marL="0">
+              <a:buNone/>
+            </a:pPr>
+            <a:r>
+              <a:rPr lang="en-US" sz="900" dirty="0">
+                <a:solidFill>
+                  <a:srgbClr val="E2E8F0"/>
+                </a:solidFill>
+                <a:latin typeface="Pretendard" pitchFamily="34" charset="0"/>
+                <a:ea typeface="Pretendard" pitchFamily="34" charset="-122"/>
+                <a:cs typeface="Pretendard" pitchFamily="34" charset="-120"/>
+              </a:rPr>
+              <a:t>매도인이 구두 또는 서면으로 고지</a:t>
+            </a:r>
+            <a:endParaRPr lang="en-US" sz="900" dirty="0"/>
+          </a:p>
+        </p:txBody>
+      </p:sp>
+      <p:sp>
+        <p:nvSpPr>
+          <p:cNvPr id="33" name="Shape 31"/>
+          <p:cNvSpPr/>
+          <p:nvPr/>
+        </p:nvSpPr>
+        <p:spPr>
+          <a:xfrm>
+            <a:off x="566928" y="4151376"/>
+            <a:ext cx="1280160" cy="292608"/>
+          </a:xfrm>
+          <a:prstGeom prst="roundRect">
+            <a:avLst>
+              <a:gd name="adj" fmla="val 12500"/>
+            </a:avLst>
+          </a:prstGeom>
+          <a:solidFill>
+            <a:srgbClr val="2D3748"/>
+          </a:solidFill>
+          <a:ln/>
+        </p:spPr>
+      </p:sp>
+      <p:sp>
+        <p:nvSpPr>
+          <p:cNvPr id="34" name="Text 32"/>
+          <p:cNvSpPr/>
+          <p:nvPr/>
+        </p:nvSpPr>
+        <p:spPr>
+          <a:xfrm>
+            <a:off x="566928" y="4151376"/>
+            <a:ext cx="1280160" cy="292608"/>
+          </a:xfrm>
+          <a:prstGeom prst="rect">
+            <a:avLst/>
+          </a:prstGeom>
+          <a:noFill/>
+          <a:ln/>
+        </p:spPr>
+        <p:txBody>
+          <a:bodyPr wrap="square" lIns="0" tIns="0" rIns="0" bIns="0" rtlCol="0" anchor="ctr"/>
+          <a:lstStyle/>
+          <a:p>
+            <a:pPr algn="ctr" indent="0" marL="0">
+              <a:buNone/>
+            </a:pPr>
+            <a:r>
+              <a:rPr lang="en-US" sz="850" b="1" dirty="0">
+                <a:solidFill>
+                  <a:srgbClr val="FFFFFF"/>
+                </a:solidFill>
+                <a:latin typeface="Pretendard" pitchFamily="34" charset="0"/>
+                <a:ea typeface="Pretendard" pitchFamily="34" charset="-122"/>
+                <a:cs typeface="Pretendard" pitchFamily="34" charset="-120"/>
+              </a:rPr>
+              <a:t>● 중개인입력</a:t>
+            </a:r>
+            <a:endParaRPr lang="en-US" sz="850" dirty="0"/>
+          </a:p>
+        </p:txBody>
+      </p:sp>
+      <p:sp>
+        <p:nvSpPr>
+          <p:cNvPr id="35" name="Text 33"/>
+          <p:cNvSpPr/>
+          <p:nvPr/>
+        </p:nvSpPr>
+        <p:spPr>
+          <a:xfrm>
+            <a:off x="1993392" y="4133088"/>
+            <a:ext cx="3840480" cy="329184"/>
+          </a:xfrm>
+          <a:prstGeom prst="rect">
+            <a:avLst/>
+          </a:prstGeom>
+          <a:noFill/>
+          <a:ln/>
+        </p:spPr>
+        <p:txBody>
+          <a:bodyPr wrap="square" lIns="0" tIns="0" rIns="0" bIns="0" rtlCol="0" anchor="ctr"/>
+          <a:lstStyle/>
+          <a:p>
+            <a:pPr indent="0" marL="0">
+              <a:buNone/>
+            </a:pPr>
+            <a:r>
+              <a:rPr lang="en-US" sz="900" dirty="0">
+                <a:solidFill>
+                  <a:srgbClr val="E2E8F0"/>
+                </a:solidFill>
+                <a:latin typeface="Pretendard" pitchFamily="34" charset="0"/>
+                <a:ea typeface="Pretendard" pitchFamily="34" charset="-122"/>
+                <a:cs typeface="Pretendard" pitchFamily="34" charset="-120"/>
+              </a:rPr>
+              <a:t>중개인 현장 조사 및 경험 기반 입력</a:t>
+            </a:r>
+            <a:endParaRPr lang="en-US" sz="900" dirty="0"/>
+          </a:p>
+        </p:txBody>
+      </p:sp>
+      <p:sp>
+        <p:nvSpPr>
+          <p:cNvPr id="36" name="Shape 34"/>
+          <p:cNvSpPr/>
+          <p:nvPr/>
+        </p:nvSpPr>
+        <p:spPr>
+          <a:xfrm>
+            <a:off x="566928" y="4626864"/>
+            <a:ext cx="1280160" cy="292608"/>
+          </a:xfrm>
+          <a:prstGeom prst="roundRect">
+            <a:avLst>
+              <a:gd name="adj" fmla="val 12500"/>
+            </a:avLst>
+          </a:prstGeom>
+          <a:solidFill>
+            <a:srgbClr val="2D3748"/>
+          </a:solidFill>
+          <a:ln/>
+        </p:spPr>
+      </p:sp>
+      <p:sp>
+        <p:nvSpPr>
+          <p:cNvPr id="37" name="Text 35"/>
+          <p:cNvSpPr/>
+          <p:nvPr/>
+        </p:nvSpPr>
+        <p:spPr>
+          <a:xfrm>
+            <a:off x="566928" y="4626864"/>
+            <a:ext cx="1280160" cy="292608"/>
+          </a:xfrm>
+          <a:prstGeom prst="rect">
+            <a:avLst/>
+          </a:prstGeom>
+          <a:noFill/>
+          <a:ln/>
+        </p:spPr>
+        <p:txBody>
+          <a:bodyPr wrap="square" lIns="0" tIns="0" rIns="0" bIns="0" rtlCol="0" anchor="ctr"/>
+          <a:lstStyle/>
+          <a:p>
+            <a:pPr algn="ctr" indent="0" marL="0">
+              <a:buNone/>
+            </a:pPr>
+            <a:r>
+              <a:rPr lang="en-US" sz="850" b="1" dirty="0">
+                <a:solidFill>
+                  <a:srgbClr val="FFFFFF"/>
+                </a:solidFill>
+                <a:latin typeface="Pretendard" pitchFamily="34" charset="0"/>
+                <a:ea typeface="Pretendard" pitchFamily="34" charset="-122"/>
+                <a:cs typeface="Pretendard" pitchFamily="34" charset="-120"/>
+              </a:rPr>
+              <a:t>◇ AI추정·가정</a:t>
+            </a:r>
+            <a:endParaRPr lang="en-US" sz="850" dirty="0"/>
+          </a:p>
+        </p:txBody>
+      </p:sp>
+      <p:sp>
+        <p:nvSpPr>
+          <p:cNvPr id="38" name="Text 36"/>
+          <p:cNvSpPr/>
+          <p:nvPr/>
+        </p:nvSpPr>
+        <p:spPr>
+          <a:xfrm>
+            <a:off x="1993392" y="4608576"/>
+            <a:ext cx="3840480" cy="329184"/>
+          </a:xfrm>
+          <a:prstGeom prst="rect">
+            <a:avLst/>
+          </a:prstGeom>
+          <a:noFill/>
+          <a:ln/>
+        </p:spPr>
+        <p:txBody>
+          <a:bodyPr wrap="square" lIns="0" tIns="0" rIns="0" bIns="0" rtlCol="0" anchor="ctr"/>
+          <a:lstStyle/>
+          <a:p>
+            <a:pPr indent="0" marL="0">
+              <a:buNone/>
+            </a:pPr>
+            <a:r>
+              <a:rPr lang="en-US" sz="900" dirty="0">
+                <a:solidFill>
+                  <a:srgbClr val="E2E8F0"/>
+                </a:solidFill>
+                <a:latin typeface="Pretendard" pitchFamily="34" charset="0"/>
+                <a:ea typeface="Pretendard" pitchFamily="34" charset="-122"/>
+                <a:cs typeface="Pretendard" pitchFamily="34" charset="-120"/>
+              </a:rPr>
+              <a:t>시나리오 분석 및 AI 모델 추정</a:t>
+            </a:r>
+            <a:endParaRPr lang="en-US" sz="900" dirty="0"/>
+          </a:p>
+        </p:txBody>
+      </p:sp>
+      <p:sp>
+        <p:nvSpPr>
+          <p:cNvPr id="39" name="Text 37"/>
+          <p:cNvSpPr/>
+          <p:nvPr/>
+        </p:nvSpPr>
+        <p:spPr>
+          <a:xfrm>
+            <a:off x="6492240" y="2395728"/>
+            <a:ext cx="5129784" cy="237744"/>
+          </a:xfrm>
+          <a:prstGeom prst="rect">
+            <a:avLst/>
+          </a:prstGeom>
+          <a:noFill/>
+          <a:ln/>
+        </p:spPr>
+        <p:txBody>
+          <a:bodyPr wrap="square" lIns="0" tIns="0" rIns="0" bIns="0" rtlCol="0" anchor="ctr"/>
+          <a:lstStyle/>
+          <a:p>
+            <a:pPr indent="0" marL="0">
+              <a:buNone/>
+            </a:pPr>
+            <a:r>
+              <a:rPr lang="en-US" sz="1100" b="1" dirty="0">
+                <a:solidFill>
+                  <a:srgbClr val="FFFFFF"/>
+                </a:solidFill>
+                <a:latin typeface="Pretendard" pitchFamily="34" charset="0"/>
+                <a:ea typeface="Pretendard" pitchFamily="34" charset="-122"/>
+                <a:cs typeface="Pretendard" pitchFamily="34" charset="-120"/>
+              </a:rPr>
+              <a:t>면책 조항</a:t>
+            </a:r>
+            <a:endParaRPr lang="en-US" sz="1100" dirty="0"/>
+          </a:p>
+        </p:txBody>
+      </p:sp>
+      <p:sp>
+        <p:nvSpPr>
+          <p:cNvPr id="40" name="Shape 38"/>
+          <p:cNvSpPr/>
+          <p:nvPr/>
+        </p:nvSpPr>
+        <p:spPr>
+          <a:xfrm>
+            <a:off x="6492240" y="2724912"/>
+            <a:ext cx="5129784" cy="1645920"/>
+          </a:xfrm>
+          <a:prstGeom prst="roundRect">
+            <a:avLst>
+              <a:gd name="adj" fmla="val 2222"/>
+            </a:avLst>
+          </a:prstGeom>
+          <a:solidFill>
+            <a:srgbClr val="1C2433"/>
+          </a:solidFill>
+          <a:ln/>
+        </p:spPr>
+      </p:sp>
+      <p:sp>
+        <p:nvSpPr>
+          <p:cNvPr id="41" name="Text 39"/>
+          <p:cNvSpPr/>
+          <p:nvPr/>
+        </p:nvSpPr>
+        <p:spPr>
+          <a:xfrm>
+            <a:off x="6675120" y="2834640"/>
+            <a:ext cx="4764024" cy="1426464"/>
           </a:xfrm>
           <a:prstGeom prst="rect">
             <a:avLst/>
@@ -3241,9 +3635,9 @@
               <a:buNone/>
             </a:pPr>
             <a:r>
-              <a:rPr lang="en-US" sz="930" dirty="0">
-                <a:solidFill>
-                  <a:srgbClr val="94A3B8"/>
+              <a:rPr lang="en-US" sz="850" dirty="0">
+                <a:solidFill>
+                  <a:srgbClr val="A0AEC0"/>
                 </a:solidFill>
                 <a:latin typeface="Pretendard" pitchFamily="34" charset="0"/>
                 <a:ea typeface="Pretendard" pitchFamily="34" charset="-122"/>
@@ -3251,40 +3645,40 @@
               </a:rPr>
               <a:t>본 자료는 투자 권유가 아니며, 기재된 정보의 정확성을 보증하지 않습니다.</a:t>
             </a:r>
-            <a:endParaRPr lang="en-US" sz="930" dirty="0"/>
-          </a:p>
-        </p:txBody>
-      </p:sp>
-      <p:sp>
-        <p:nvSpPr>
-          <p:cNvPr id="29" name="Shape 27"/>
-          <p:cNvSpPr/>
-          <p:nvPr/>
-        </p:nvSpPr>
-        <p:spPr>
-          <a:xfrm>
-            <a:off x="566928" y="5230368"/>
-            <a:ext cx="11057839" cy="640080"/>
+            <a:endParaRPr lang="en-US" sz="850" dirty="0"/>
+          </a:p>
+        </p:txBody>
+      </p:sp>
+      <p:sp>
+        <p:nvSpPr>
+          <p:cNvPr id="42" name="Shape 40"/>
+          <p:cNvSpPr/>
+          <p:nvPr/>
+        </p:nvSpPr>
+        <p:spPr>
+          <a:xfrm>
+            <a:off x="566928" y="5760720"/>
+            <a:ext cx="11057839" cy="457200"/>
           </a:xfrm>
           <a:prstGeom prst="rect">
             <a:avLst/>
           </a:prstGeom>
           <a:solidFill>
-            <a:srgbClr val="4F6A00"/>
+            <a:srgbClr val="977024"/>
           </a:solidFill>
           <a:ln/>
         </p:spPr>
       </p:sp>
       <p:sp>
         <p:nvSpPr>
-          <p:cNvPr id="30" name="Text 28"/>
-          <p:cNvSpPr/>
-          <p:nvPr/>
-        </p:nvSpPr>
-        <p:spPr>
-          <a:xfrm>
-            <a:off x="786384" y="5321808"/>
-            <a:ext cx="10618927" cy="457200"/>
+          <p:cNvPr id="43" name="Text 41"/>
+          <p:cNvSpPr/>
+          <p:nvPr/>
+        </p:nvSpPr>
+        <p:spPr>
+          <a:xfrm>
+            <a:off x="749808" y="5806440"/>
+            <a:ext cx="10692079" cy="365760"/>
           </a:xfrm>
           <a:prstGeom prst="rect">
             <a:avLst/>
@@ -3300,81 +3694,97 @@
               <a:buNone/>
             </a:pPr>
             <a:r>
-              <a:rPr lang="en-US" sz="1000" dirty="0">
-                <a:solidFill>
-                  <a:srgbClr val="E8F5CC"/>
-                </a:solidFill>
-                <a:latin typeface="Pretendard" pitchFamily="34" charset="0"/>
-                <a:ea typeface="Pretendard" pitchFamily="34" charset="-122"/>
-                <a:cs typeface="Pretendard" pitchFamily="34" charset="-120"/>
-              </a:rPr>
-              <a:t>본 자료의 모든 수치는 예비 검토용이며, 상세 실사 자료(등기·임대차계약서) 및 1:1 비밀 상담은 담당 전문 중개사를 통해 제공됩니다.</a:t>
-            </a:r>
-            <a:endParaRPr lang="en-US" sz="1000" dirty="0"/>
-          </a:p>
-        </p:txBody>
-      </p:sp>
-      <p:sp>
-        <p:nvSpPr>
-          <p:cNvPr id="31" name="Text 29"/>
-          <p:cNvSpPr/>
-          <p:nvPr/>
-        </p:nvSpPr>
-        <p:spPr>
-          <a:xfrm>
-            <a:off x="566928" y="6419088"/>
-            <a:ext cx="11057839" cy="201168"/>
-          </a:xfrm>
-          <a:prstGeom prst="rect">
-            <a:avLst/>
-          </a:prstGeom>
-          <a:noFill/>
-          <a:ln/>
-        </p:spPr>
-        <p:txBody>
-          <a:bodyPr wrap="square" lIns="0" tIns="0" rIns="0" bIns="0" rtlCol="0" anchor="ctr"/>
-          <a:lstStyle/>
-          <a:p>
-            <a:pPr algn="ctr" indent="0" marL="0">
-              <a:buNone/>
-            </a:pPr>
-            <a:r>
-              <a:rPr lang="en-US" sz="750" dirty="0">
-                <a:solidFill>
-                  <a:srgbClr val="64748B"/>
-                </a:solidFill>
-                <a:latin typeface="Pretendard" pitchFamily="34" charset="0"/>
-                <a:ea typeface="Pretendard" pitchFamily="34" charset="-122"/>
-                <a:cs typeface="Pretendard" pitchFamily="34" charset="-120"/>
-              </a:rPr>
-              <a:t>크리딜  ·    ·  10</a:t>
-            </a:r>
-            <a:endParaRPr lang="en-US" sz="750" dirty="0"/>
-          </a:p>
-        </p:txBody>
-      </p:sp>
-      <p:sp>
-        <p:nvSpPr>
-          <p:cNvPr id="32" name="Shape 30"/>
-          <p:cNvSpPr/>
-          <p:nvPr/>
-        </p:nvSpPr>
-        <p:spPr>
-          <a:xfrm>
-            <a:off x="4437172" y="6382512"/>
-            <a:ext cx="3317352" cy="0"/>
-          </a:xfrm>
-          <a:prstGeom prst="line">
-            <a:avLst/>
-          </a:prstGeom>
-          <a:noFill/>
-          <a:ln w="6350">
-            <a:solidFill>
-              <a:srgbClr val="6B8E00"/>
-            </a:solidFill>
-            <a:prstDash val="solid"/>
-          </a:ln>
-        </p:spPr>
+              <a:rPr lang="en-US" sz="900" dirty="0">
+                <a:solidFill>
+                  <a:srgbClr val="F3EBDA"/>
+                </a:solidFill>
+                <a:latin typeface="Pretendard" pitchFamily="34" charset="0"/>
+                <a:ea typeface="Pretendard" pitchFamily="34" charset="-122"/>
+                <a:cs typeface="Pretendard" pitchFamily="34" charset="-120"/>
+              </a:rPr>
+              <a:t>본 자료의 모든 수치는 예비 검토용이며, 상세 실사 자료 및 비밀 상담은 담당 전문 중개사를 통해 제공됩니다.</a:t>
+            </a:r>
+            <a:endParaRPr lang="en-US" sz="900" dirty="0"/>
+          </a:p>
+        </p:txBody>
+      </p:sp>
+      <p:sp>
+        <p:nvSpPr>
+          <p:cNvPr id="44" name="Text 42"/>
+          <p:cNvSpPr/>
+          <p:nvPr/>
+        </p:nvSpPr>
+        <p:spPr>
+          <a:xfrm>
+            <a:off x="566928" y="6382512"/>
+            <a:ext cx="7315200" cy="219456"/>
+          </a:xfrm>
+          <a:prstGeom prst="rect">
+            <a:avLst/>
+          </a:prstGeom>
+          <a:noFill/>
+          <a:ln/>
+        </p:spPr>
+        <p:txBody>
+          <a:bodyPr wrap="square" lIns="0" tIns="0" rIns="0" bIns="0" rtlCol="0" anchor="ctr"/>
+          <a:lstStyle/>
+          <a:p>
+            <a:pPr indent="0" marL="0">
+              <a:buNone/>
+            </a:pPr>
+            <a:r>
+              <a:rPr lang="en-US" sz="800" dirty="0">
+                <a:solidFill>
+                  <a:srgbClr val="718096"/>
+                </a:solidFill>
+                <a:latin typeface="Pretendard" pitchFamily="34" charset="0"/>
+                <a:ea typeface="Pretendard" pitchFamily="34" charset="-122"/>
+                <a:cs typeface="Pretendard" pitchFamily="34" charset="-120"/>
+              </a:rPr>
+              <a:t>크리딜   |   </a:t>
+            </a:r>
+            <a:endParaRPr lang="en-US" sz="800" dirty="0"/>
+          </a:p>
+        </p:txBody>
+      </p:sp>
+      <p:sp>
+        <p:nvSpPr>
+          <p:cNvPr id="45" name="Text 43"/>
+          <p:cNvSpPr/>
+          <p:nvPr/>
+        </p:nvSpPr>
+        <p:spPr>
+          <a:xfrm>
+            <a:off x="10710367" y="6382512"/>
+            <a:ext cx="914400" cy="219456"/>
+          </a:xfrm>
+          <a:prstGeom prst="rect">
+            <a:avLst/>
+          </a:prstGeom>
+          <a:noFill/>
+          <a:ln/>
+        </p:spPr>
+        <p:txBody>
+          <a:bodyPr wrap="square" lIns="0" tIns="0" rIns="0" bIns="0" rtlCol="0" anchor="ctr"/>
+          <a:lstStyle/>
+          <a:p>
+            <a:pPr algn="r" indent="0" marL="0">
+              <a:buNone/>
+            </a:pPr>
+            <a:r>
+              <a:rPr lang="en-US" sz="900" b="1" dirty="0">
+                <a:solidFill>
+                  <a:srgbClr val="B98A2E"/>
+                </a:solidFill>
+                <a:latin typeface="Arial" pitchFamily="34" charset="0"/>
+                <a:ea typeface="Arial" pitchFamily="34" charset="-122"/>
+                <a:cs typeface="Arial" pitchFamily="34" charset="-120"/>
+              </a:rPr>
+              <a:t>10</a:t>
+            </a:r>
+            <a:endParaRPr lang="en-US" sz="900" dirty="0"/>
+          </a:p>
+        </p:txBody>
       </p:sp>
     </p:spTree>
   </p:cSld>
@@ -3416,14 +3826,14 @@
         </p:nvSpPr>
         <p:spPr>
           <a:xfrm>
-            <a:off x="566928" y="384048"/>
-            <a:ext cx="45720" cy="566928"/>
-          </a:xfrm>
-          <a:prstGeom prst="rect">
+            <a:off x="566928" y="457200"/>
+            <a:ext cx="384048" cy="384048"/>
+          </a:xfrm>
+          <a:prstGeom prst="ellipse">
             <a:avLst/>
           </a:prstGeom>
           <a:solidFill>
-            <a:srgbClr val="6B8E00"/>
+            <a:srgbClr val="B98A2E"/>
           </a:solidFill>
           <a:ln/>
         </p:spPr>
@@ -3436,32 +3846,71 @@
         </p:nvSpPr>
         <p:spPr>
           <a:xfrm>
-            <a:off x="749808" y="384048"/>
-            <a:ext cx="10874959" cy="182880"/>
-          </a:xfrm>
-          <a:prstGeom prst="rect">
-            <a:avLst/>
-          </a:prstGeom>
-          <a:noFill/>
-          <a:ln/>
-        </p:spPr>
-        <p:txBody>
-          <a:bodyPr wrap="square" lIns="0" tIns="0" rIns="0" bIns="0" rtlCol="0" anchor="ctr"/>
-          <a:lstStyle/>
-          <a:p>
-            <a:pPr indent="0" marL="0">
-              <a:buNone/>
-            </a:pPr>
-            <a:r>
-              <a:rPr lang="en-US" sz="950" b="1" spc="200" kern="0" dirty="0">
-                <a:solidFill>
-                  <a:srgbClr val="6B8E00"/>
+            <a:off x="566928" y="457200"/>
+            <a:ext cx="384048" cy="384048"/>
+          </a:xfrm>
+          <a:prstGeom prst="rect">
+            <a:avLst/>
+          </a:prstGeom>
+          <a:noFill/>
+          <a:ln/>
+        </p:spPr>
+        <p:txBody>
+          <a:bodyPr wrap="square" lIns="0" tIns="0" rIns="0" bIns="0" rtlCol="0" anchor="ctr"/>
+          <a:lstStyle/>
+          <a:p>
+            <a:pPr algn="ctr" indent="0" marL="0">
+              <a:buNone/>
+            </a:pPr>
+            <a:r>
+              <a:rPr lang="en-US" sz="1300" b="1" dirty="0">
+                <a:solidFill>
+                  <a:srgbClr val="FFFFFF"/>
                 </a:solidFill>
                 <a:latin typeface="Arial" pitchFamily="34" charset="0"/>
                 <a:ea typeface="Arial" pitchFamily="34" charset="-122"/>
                 <a:cs typeface="Arial" pitchFamily="34" charset="-120"/>
               </a:rPr>
-              <a:t>02  Summary</a:t>
+              <a:t>02</a:t>
+            </a:r>
+            <a:endParaRPr lang="en-US" sz="1300" dirty="0"/>
+          </a:p>
+        </p:txBody>
+      </p:sp>
+      <p:sp>
+        <p:nvSpPr>
+          <p:cNvPr id="4" name="Text 2"/>
+          <p:cNvSpPr/>
+          <p:nvPr/>
+        </p:nvSpPr>
+        <p:spPr>
+          <a:xfrm>
+            <a:off x="1133856" y="457200"/>
+            <a:ext cx="10490911" cy="182880"/>
+          </a:xfrm>
+          <a:prstGeom prst="rect">
+            <a:avLst/>
+          </a:prstGeom>
+          <a:noFill/>
+          <a:ln/>
+        </p:spPr>
+        <p:txBody>
+          <a:bodyPr wrap="square" lIns="0" tIns="0" rIns="0" bIns="0" rtlCol="0" anchor="ctr"/>
+          <a:lstStyle/>
+          <a:p>
+            <a:pPr indent="0" marL="0">
+              <a:buNone/>
+            </a:pPr>
+            <a:r>
+              <a:rPr lang="en-US" sz="950" b="1" spc="200" kern="0" dirty="0">
+                <a:solidFill>
+                  <a:srgbClr val="B98A2E"/>
+                </a:solidFill>
+                <a:latin typeface="Arial" pitchFamily="34" charset="0"/>
+                <a:ea typeface="Arial" pitchFamily="34" charset="-122"/>
+                <a:cs typeface="Arial" pitchFamily="34" charset="-120"/>
+              </a:rPr>
+              <a:t>Summary</a:t>
             </a:r>
             <a:endParaRPr lang="en-US" sz="950" dirty="0"/>
           </a:p>
@@ -3469,14 +3918,14 @@
       </p:sp>
       <p:sp>
         <p:nvSpPr>
-          <p:cNvPr id="4" name="Text 2"/>
-          <p:cNvSpPr/>
-          <p:nvPr/>
-        </p:nvSpPr>
-        <p:spPr>
-          <a:xfrm>
-            <a:off x="749808" y="566928"/>
-            <a:ext cx="10874959" cy="384048"/>
+          <p:cNvPr id="5" name="Text 3"/>
+          <p:cNvSpPr/>
+          <p:nvPr/>
+        </p:nvSpPr>
+        <p:spPr>
+          <a:xfrm>
+            <a:off x="1133856" y="640080"/>
+            <a:ext cx="10490911" cy="365760"/>
           </a:xfrm>
           <a:prstGeom prst="rect">
             <a:avLst/>
@@ -3492,9 +3941,9 @@
               <a:buNone/>
             </a:pPr>
             <a:r>
-              <a:rPr lang="en-US" sz="2200" b="1" dirty="0">
-                <a:solidFill>
-                  <a:srgbClr val="0F172A"/>
+              <a:rPr lang="en-US" sz="2300" b="1" dirty="0">
+                <a:solidFill>
+                  <a:srgbClr val="10161F"/>
                 </a:solidFill>
                 <a:latin typeface="Pretendard" pitchFamily="34" charset="0"/>
                 <a:ea typeface="Pretendard" pitchFamily="34" charset="-122"/>
@@ -3502,13 +3951,13 @@
               </a:rPr>
               <a:t>핵심요약</a:t>
             </a:r>
-            <a:endParaRPr lang="en-US" sz="2200" dirty="0"/>
-          </a:p>
-        </p:txBody>
-      </p:sp>
-      <p:sp>
-        <p:nvSpPr>
-          <p:cNvPr id="5" name="Text 3"/>
+            <a:endParaRPr lang="en-US" sz="2300" dirty="0"/>
+          </a:p>
+        </p:txBody>
+      </p:sp>
+      <p:sp>
+        <p:nvSpPr>
+          <p:cNvPr id="6" name="Text 4"/>
           <p:cNvSpPr/>
           <p:nvPr/>
         </p:nvSpPr>
@@ -3533,7 +3982,7 @@
             <a:r>
               <a:rPr lang="en-US" sz="1500" b="1" dirty="0">
                 <a:solidFill>
-                  <a:srgbClr val="0F172A"/>
+                  <a:srgbClr val="10161F"/>
                 </a:solidFill>
                 <a:latin typeface="Pretendard" pitchFamily="34" charset="0"/>
                 <a:ea typeface="Pretendard" pitchFamily="34" charset="-122"/>
@@ -3547,7 +3996,7 @@
       </p:sp>
       <p:sp>
         <p:nvSpPr>
-          <p:cNvPr id="6" name="Shape 4"/>
+          <p:cNvPr id="7" name="Shape 5"/>
           <p:cNvSpPr/>
           <p:nvPr/>
         </p:nvSpPr>
@@ -3562,7 +4011,7 @@
           <a:noFill/>
           <a:ln w="19050">
             <a:solidFill>
-              <a:srgbClr val="6B8E00"/>
+              <a:srgbClr val="B98A2E"/>
             </a:solidFill>
             <a:prstDash val="solid"/>
           </a:ln>
@@ -3570,7 +4019,7 @@
       </p:sp>
       <p:sp>
         <p:nvSpPr>
-          <p:cNvPr id="7" name="Shape 5"/>
+          <p:cNvPr id="8" name="Shape 6"/>
           <p:cNvSpPr/>
           <p:nvPr/>
         </p:nvSpPr>
@@ -3585,11 +4034,11 @@
             </a:avLst>
           </a:prstGeom>
           <a:solidFill>
-            <a:srgbClr val="F8FAFC"/>
+            <a:srgbClr val="F7FAFC"/>
           </a:solidFill>
           <a:ln w="6350">
             <a:solidFill>
-              <a:srgbClr val="CBD5E1"/>
+              <a:srgbClr val="CBD5E0"/>
             </a:solidFill>
             <a:prstDash val="solid"/>
           </a:ln>
@@ -3597,7 +4046,7 @@
       </p:sp>
       <p:sp>
         <p:nvSpPr>
-          <p:cNvPr id="8" name="Text 6"/>
+          <p:cNvPr id="9" name="Text 7"/>
           <p:cNvSpPr/>
           <p:nvPr/>
         </p:nvSpPr>
@@ -3622,7 +4071,7 @@
             <a:r>
               <a:rPr lang="en-US" sz="950" dirty="0">
                 <a:solidFill>
-                  <a:srgbClr val="64748B"/>
+                  <a:srgbClr val="718096"/>
                 </a:solidFill>
                 <a:latin typeface="Pretendard" pitchFamily="34" charset="0"/>
                 <a:ea typeface="Pretendard" pitchFamily="34" charset="-122"/>
@@ -3636,7 +4085,7 @@
       </p:sp>
       <p:sp>
         <p:nvSpPr>
-          <p:cNvPr id="9" name="Text 7"/>
+          <p:cNvPr id="10" name="Text 8"/>
           <p:cNvSpPr/>
           <p:nvPr/>
         </p:nvSpPr>
@@ -3663,7 +4112,7 @@
             <a:r>
               <a:rPr lang="en-US" sz="2000" b="1" dirty="0">
                 <a:solidFill>
-                  <a:srgbClr val="0F172A"/>
+                  <a:srgbClr val="10161F"/>
                 </a:solidFill>
                 <a:latin typeface="Arial" pitchFamily="34" charset="0"/>
                 <a:ea typeface="Arial" pitchFamily="34" charset="-122"/>
@@ -3677,7 +4126,7 @@
       </p:sp>
       <p:sp>
         <p:nvSpPr>
-          <p:cNvPr id="10" name="Shape 8"/>
+          <p:cNvPr id="11" name="Shape 9"/>
           <p:cNvSpPr/>
           <p:nvPr/>
         </p:nvSpPr>
@@ -3692,11 +4141,11 @@
             </a:avLst>
           </a:prstGeom>
           <a:solidFill>
-            <a:srgbClr val="F8FAFC"/>
+            <a:srgbClr val="F7FAFC"/>
           </a:solidFill>
           <a:ln w="6350">
             <a:solidFill>
-              <a:srgbClr val="CBD5E1"/>
+              <a:srgbClr val="CBD5E0"/>
             </a:solidFill>
             <a:prstDash val="solid"/>
           </a:ln>
@@ -3704,7 +4153,7 @@
       </p:sp>
       <p:sp>
         <p:nvSpPr>
-          <p:cNvPr id="11" name="Text 9"/>
+          <p:cNvPr id="12" name="Text 10"/>
           <p:cNvSpPr/>
           <p:nvPr/>
         </p:nvSpPr>
@@ -3729,7 +4178,7 @@
             <a:r>
               <a:rPr lang="en-US" sz="950" dirty="0">
                 <a:solidFill>
-                  <a:srgbClr val="64748B"/>
+                  <a:srgbClr val="718096"/>
                 </a:solidFill>
                 <a:latin typeface="Pretendard" pitchFamily="34" charset="0"/>
                 <a:ea typeface="Pretendard" pitchFamily="34" charset="-122"/>
@@ -3743,7 +4192,7 @@
       </p:sp>
       <p:sp>
         <p:nvSpPr>
-          <p:cNvPr id="12" name="Text 10"/>
+          <p:cNvPr id="13" name="Text 11"/>
           <p:cNvSpPr/>
           <p:nvPr/>
         </p:nvSpPr>
@@ -3770,7 +4219,7 @@
             <a:r>
               <a:rPr lang="en-US" sz="2000" b="1" dirty="0">
                 <a:solidFill>
-                  <a:srgbClr val="0F172A"/>
+                  <a:srgbClr val="10161F"/>
                 </a:solidFill>
                 <a:latin typeface="Pretendard" pitchFamily="34" charset="0"/>
                 <a:ea typeface="Pretendard" pitchFamily="34" charset="-122"/>
@@ -3784,7 +4233,7 @@
       </p:sp>
       <p:sp>
         <p:nvSpPr>
-          <p:cNvPr id="13" name="Shape 11"/>
+          <p:cNvPr id="14" name="Shape 12"/>
           <p:cNvSpPr/>
           <p:nvPr/>
         </p:nvSpPr>
@@ -3799,11 +4248,11 @@
             </a:avLst>
           </a:prstGeom>
           <a:solidFill>
-            <a:srgbClr val="F8FAFC"/>
+            <a:srgbClr val="F7FAFC"/>
           </a:solidFill>
           <a:ln w="6350">
             <a:solidFill>
-              <a:srgbClr val="CBD5E1"/>
+              <a:srgbClr val="CBD5E0"/>
             </a:solidFill>
             <a:prstDash val="solid"/>
           </a:ln>
@@ -3811,7 +4260,7 @@
       </p:sp>
       <p:sp>
         <p:nvSpPr>
-          <p:cNvPr id="14" name="Text 12"/>
+          <p:cNvPr id="15" name="Text 13"/>
           <p:cNvSpPr/>
           <p:nvPr/>
         </p:nvSpPr>
@@ -3836,7 +4285,7 @@
             <a:r>
               <a:rPr lang="en-US" sz="950" dirty="0">
                 <a:solidFill>
-                  <a:srgbClr val="64748B"/>
+                  <a:srgbClr val="718096"/>
                 </a:solidFill>
                 <a:latin typeface="Pretendard" pitchFamily="34" charset="0"/>
                 <a:ea typeface="Pretendard" pitchFamily="34" charset="-122"/>
@@ -3850,7 +4299,7 @@
       </p:sp>
       <p:sp>
         <p:nvSpPr>
-          <p:cNvPr id="15" name="Text 13"/>
+          <p:cNvPr id="16" name="Text 14"/>
           <p:cNvSpPr/>
           <p:nvPr/>
         </p:nvSpPr>
@@ -3877,7 +4326,7 @@
             <a:r>
               <a:rPr lang="en-US" sz="2000" b="1" dirty="0">
                 <a:solidFill>
-                  <a:srgbClr val="0F172A"/>
+                  <a:srgbClr val="10161F"/>
                 </a:solidFill>
                 <a:latin typeface="Pretendard" pitchFamily="34" charset="0"/>
                 <a:ea typeface="Pretendard" pitchFamily="34" charset="-122"/>
@@ -3891,65 +4340,516 @@
       </p:sp>
       <p:sp>
         <p:nvSpPr>
-          <p:cNvPr id="16" name="Text 14"/>
-          <p:cNvSpPr/>
-          <p:nvPr/>
-        </p:nvSpPr>
-        <p:spPr>
-          <a:xfrm>
-            <a:off x="566928" y="6419088"/>
-            <a:ext cx="11057839" cy="201168"/>
-          </a:xfrm>
-          <a:prstGeom prst="rect">
-            <a:avLst/>
-          </a:prstGeom>
-          <a:noFill/>
-          <a:ln/>
-        </p:spPr>
-        <p:txBody>
-          <a:bodyPr wrap="square" lIns="0" tIns="0" rIns="0" bIns="0" rtlCol="0" anchor="ctr"/>
-          <a:lstStyle/>
-          <a:p>
-            <a:pPr algn="ctr" indent="0" marL="0">
-              <a:buNone/>
-            </a:pPr>
-            <a:r>
-              <a:rPr lang="en-US" sz="750" dirty="0">
-                <a:solidFill>
-                  <a:srgbClr val="64748B"/>
-                </a:solidFill>
-                <a:latin typeface="Pretendard" pitchFamily="34" charset="0"/>
-                <a:ea typeface="Pretendard" pitchFamily="34" charset="-122"/>
-                <a:cs typeface="Pretendard" pitchFamily="34" charset="-120"/>
-              </a:rPr>
-              <a:t>크리딜  ·    ·  2</a:t>
-            </a:r>
-            <a:endParaRPr lang="en-US" sz="750" dirty="0"/>
-          </a:p>
-        </p:txBody>
-      </p:sp>
-      <p:sp>
-        <p:nvSpPr>
-          <p:cNvPr id="17" name="Shape 15"/>
-          <p:cNvSpPr/>
-          <p:nvPr/>
-        </p:nvSpPr>
-        <p:spPr>
-          <a:xfrm>
-            <a:off x="4437172" y="6382512"/>
-            <a:ext cx="3317352" cy="0"/>
-          </a:xfrm>
-          <a:prstGeom prst="line">
-            <a:avLst/>
-          </a:prstGeom>
-          <a:noFill/>
-          <a:ln w="6350">
+          <p:cNvPr id="17" name="Text 15"/>
+          <p:cNvSpPr/>
+          <p:nvPr/>
+        </p:nvSpPr>
+        <p:spPr>
+          <a:xfrm>
+            <a:off x="566928" y="3502152"/>
+            <a:ext cx="11057839" cy="274320"/>
+          </a:xfrm>
+          <a:prstGeom prst="rect">
+            <a:avLst/>
+          </a:prstGeom>
+          <a:noFill/>
+          <a:ln/>
+        </p:spPr>
+        <p:txBody>
+          <a:bodyPr wrap="square" lIns="0" tIns="0" rIns="0" bIns="0" rtlCol="0" anchor="ctr"/>
+          <a:lstStyle/>
+          <a:p>
+            <a:pPr indent="0" marL="0">
+              <a:buNone/>
+            </a:pPr>
+            <a:r>
+              <a:rPr lang="en-US" sz="1250" b="1" dirty="0">
+                <a:solidFill>
+                  <a:srgbClr val="977024"/>
+                </a:solidFill>
+                <a:latin typeface="Pretendard" pitchFamily="34" charset="0"/>
+                <a:ea typeface="Pretendard" pitchFamily="34" charset="-122"/>
+                <a:cs typeface="Pretendard" pitchFamily="34" charset="-120"/>
+              </a:rPr>
+              <a:t>3대 핵심 투자 포인트 (Investment Highlights)</a:t>
+            </a:r>
+            <a:endParaRPr lang="en-US" sz="1250" dirty="0"/>
+          </a:p>
+        </p:txBody>
+      </p:sp>
+      <p:sp>
+        <p:nvSpPr>
+          <p:cNvPr id="18" name="Shape 16"/>
+          <p:cNvSpPr/>
+          <p:nvPr/>
+        </p:nvSpPr>
+        <p:spPr>
+          <a:xfrm>
+            <a:off x="566928" y="3831336"/>
+            <a:ext cx="11057839" cy="585216"/>
+          </a:xfrm>
+          <a:prstGeom prst="roundRect">
+            <a:avLst>
+              <a:gd name="adj" fmla="val 7813"/>
+            </a:avLst>
+          </a:prstGeom>
+          <a:solidFill>
+            <a:srgbClr val="F8F9FA"/>
+          </a:solidFill>
+          <a:ln w="7620">
             <a:solidFill>
-              <a:srgbClr val="6B8E00"/>
+              <a:srgbClr val="E2E8F0"/>
             </a:solidFill>
             <a:prstDash val="solid"/>
           </a:ln>
         </p:spPr>
+      </p:sp>
+      <p:sp>
+        <p:nvSpPr>
+          <p:cNvPr id="19" name="Shape 17"/>
+          <p:cNvSpPr/>
+          <p:nvPr/>
+        </p:nvSpPr>
+        <p:spPr>
+          <a:xfrm>
+            <a:off x="676656" y="3941064"/>
+            <a:ext cx="411480" cy="365760"/>
+          </a:xfrm>
+          <a:prstGeom prst="roundRect">
+            <a:avLst>
+              <a:gd name="adj" fmla="val 10000"/>
+            </a:avLst>
+          </a:prstGeom>
+          <a:solidFill>
+            <a:srgbClr val="F3EBDA"/>
+          </a:solidFill>
+          <a:ln w="6350">
+            <a:solidFill>
+              <a:srgbClr val="D9B668"/>
+            </a:solidFill>
+            <a:prstDash val="solid"/>
+          </a:ln>
+        </p:spPr>
+      </p:sp>
+      <p:sp>
+        <p:nvSpPr>
+          <p:cNvPr id="20" name="Text 18"/>
+          <p:cNvSpPr/>
+          <p:nvPr/>
+        </p:nvSpPr>
+        <p:spPr>
+          <a:xfrm>
+            <a:off x="676656" y="3941064"/>
+            <a:ext cx="411480" cy="365760"/>
+          </a:xfrm>
+          <a:prstGeom prst="rect">
+            <a:avLst/>
+          </a:prstGeom>
+          <a:noFill/>
+          <a:ln/>
+        </p:spPr>
+        <p:txBody>
+          <a:bodyPr wrap="square" lIns="0" tIns="0" rIns="0" bIns="0" rtlCol="0" anchor="ctr"/>
+          <a:lstStyle/>
+          <a:p>
+            <a:pPr algn="ctr" indent="0" marL="0">
+              <a:buNone/>
+            </a:pPr>
+            <a:r>
+              <a:rPr lang="en-US" sz="1000" b="1" dirty="0">
+                <a:solidFill>
+                  <a:srgbClr val="977024"/>
+                </a:solidFill>
+                <a:latin typeface="Arial" pitchFamily="34" charset="0"/>
+                <a:ea typeface="Arial" pitchFamily="34" charset="-122"/>
+                <a:cs typeface="Arial" pitchFamily="34" charset="-120"/>
+              </a:rPr>
+              <a:t>01</a:t>
+            </a:r>
+            <a:endParaRPr lang="en-US" sz="1000" dirty="0"/>
+          </a:p>
+        </p:txBody>
+      </p:sp>
+      <p:sp>
+        <p:nvSpPr>
+          <p:cNvPr id="21" name="Text 19"/>
+          <p:cNvSpPr/>
+          <p:nvPr/>
+        </p:nvSpPr>
+        <p:spPr>
+          <a:xfrm>
+            <a:off x="1207008" y="3904488"/>
+            <a:ext cx="10280599" cy="438912"/>
+          </a:xfrm>
+          <a:prstGeom prst="rect">
+            <a:avLst/>
+          </a:prstGeom>
+          <a:noFill/>
+          <a:ln/>
+        </p:spPr>
+        <p:txBody>
+          <a:bodyPr wrap="square" lIns="0" tIns="0" rIns="0" bIns="0" rtlCol="0" anchor="ctr"/>
+          <a:lstStyle/>
+          <a:p>
+            <a:pPr indent="0" marL="0">
+              <a:buNone/>
+            </a:pPr>
+            <a:r>
+              <a:rPr lang="en-US" sz="1150" dirty="0">
+                <a:solidFill>
+                  <a:srgbClr val="10161F"/>
+                </a:solidFill>
+                <a:latin typeface="Pretendard" pitchFamily="34" charset="0"/>
+                <a:ea typeface="Pretendard" pitchFamily="34" charset="-122"/>
+                <a:cs typeface="Pretendard" pitchFamily="34" charset="-120"/>
+              </a:rPr>
+              <a:t>원금 안전판: 핵심권역 핵심 입지 및 우량 대지 지분 가치로 하방 경직성 확보</a:t>
+            </a:r>
+            <a:endParaRPr lang="en-US" sz="1150" dirty="0"/>
+          </a:p>
+        </p:txBody>
+      </p:sp>
+      <p:sp>
+        <p:nvSpPr>
+          <p:cNvPr id="22" name="Shape 20"/>
+          <p:cNvSpPr/>
+          <p:nvPr/>
+        </p:nvSpPr>
+        <p:spPr>
+          <a:xfrm>
+            <a:off x="566928" y="4526280"/>
+            <a:ext cx="11057839" cy="585216"/>
+          </a:xfrm>
+          <a:prstGeom prst="roundRect">
+            <a:avLst>
+              <a:gd name="adj" fmla="val 7813"/>
+            </a:avLst>
+          </a:prstGeom>
+          <a:solidFill>
+            <a:srgbClr val="F8F9FA"/>
+          </a:solidFill>
+          <a:ln w="7620">
+            <a:solidFill>
+              <a:srgbClr val="E2E8F0"/>
+            </a:solidFill>
+            <a:prstDash val="solid"/>
+          </a:ln>
+        </p:spPr>
+      </p:sp>
+      <p:sp>
+        <p:nvSpPr>
+          <p:cNvPr id="23" name="Shape 21"/>
+          <p:cNvSpPr/>
+          <p:nvPr/>
+        </p:nvSpPr>
+        <p:spPr>
+          <a:xfrm>
+            <a:off x="676656" y="4636008"/>
+            <a:ext cx="411480" cy="365760"/>
+          </a:xfrm>
+          <a:prstGeom prst="roundRect">
+            <a:avLst>
+              <a:gd name="adj" fmla="val 10000"/>
+            </a:avLst>
+          </a:prstGeom>
+          <a:solidFill>
+            <a:srgbClr val="F3EBDA"/>
+          </a:solidFill>
+          <a:ln w="6350">
+            <a:solidFill>
+              <a:srgbClr val="D9B668"/>
+            </a:solidFill>
+            <a:prstDash val="solid"/>
+          </a:ln>
+        </p:spPr>
+      </p:sp>
+      <p:sp>
+        <p:nvSpPr>
+          <p:cNvPr id="24" name="Text 22"/>
+          <p:cNvSpPr/>
+          <p:nvPr/>
+        </p:nvSpPr>
+        <p:spPr>
+          <a:xfrm>
+            <a:off x="676656" y="4636008"/>
+            <a:ext cx="411480" cy="365760"/>
+          </a:xfrm>
+          <a:prstGeom prst="rect">
+            <a:avLst/>
+          </a:prstGeom>
+          <a:noFill/>
+          <a:ln/>
+        </p:spPr>
+        <p:txBody>
+          <a:bodyPr wrap="square" lIns="0" tIns="0" rIns="0" bIns="0" rtlCol="0" anchor="ctr"/>
+          <a:lstStyle/>
+          <a:p>
+            <a:pPr algn="ctr" indent="0" marL="0">
+              <a:buNone/>
+            </a:pPr>
+            <a:r>
+              <a:rPr lang="en-US" sz="1000" b="1" dirty="0">
+                <a:solidFill>
+                  <a:srgbClr val="977024"/>
+                </a:solidFill>
+                <a:latin typeface="Arial" pitchFamily="34" charset="0"/>
+                <a:ea typeface="Arial" pitchFamily="34" charset="-122"/>
+                <a:cs typeface="Arial" pitchFamily="34" charset="-120"/>
+              </a:rPr>
+              <a:t>02</a:t>
+            </a:r>
+            <a:endParaRPr lang="en-US" sz="1000" dirty="0"/>
+          </a:p>
+        </p:txBody>
+      </p:sp>
+      <p:sp>
+        <p:nvSpPr>
+          <p:cNvPr id="25" name="Text 23"/>
+          <p:cNvSpPr/>
+          <p:nvPr/>
+        </p:nvSpPr>
+        <p:spPr>
+          <a:xfrm>
+            <a:off x="1207008" y="4599432"/>
+            <a:ext cx="10280599" cy="438912"/>
+          </a:xfrm>
+          <a:prstGeom prst="rect">
+            <a:avLst/>
+          </a:prstGeom>
+          <a:noFill/>
+          <a:ln/>
+        </p:spPr>
+        <p:txBody>
+          <a:bodyPr wrap="square" lIns="0" tIns="0" rIns="0" bIns="0" rtlCol="0" anchor="ctr"/>
+          <a:lstStyle/>
+          <a:p>
+            <a:pPr indent="0" marL="0">
+              <a:buNone/>
+            </a:pPr>
+            <a:r>
+              <a:rPr lang="en-US" sz="1150" dirty="0">
+                <a:solidFill>
+                  <a:srgbClr val="10161F"/>
+                </a:solidFill>
+                <a:latin typeface="Pretendard" pitchFamily="34" charset="0"/>
+                <a:ea typeface="Pretendard" pitchFamily="34" charset="-122"/>
+                <a:cs typeface="Pretendard" pitchFamily="34" charset="-120"/>
+              </a:rPr>
+              <a:t>수익 안정성: 매매 시장 적정가 수준 대비 안정적 월 임대수익 창출 기반</a:t>
+            </a:r>
+            <a:endParaRPr lang="en-US" sz="1150" dirty="0"/>
+          </a:p>
+        </p:txBody>
+      </p:sp>
+      <p:sp>
+        <p:nvSpPr>
+          <p:cNvPr id="26" name="Shape 24"/>
+          <p:cNvSpPr/>
+          <p:nvPr/>
+        </p:nvSpPr>
+        <p:spPr>
+          <a:xfrm>
+            <a:off x="566928" y="5221224"/>
+            <a:ext cx="11057839" cy="585216"/>
+          </a:xfrm>
+          <a:prstGeom prst="roundRect">
+            <a:avLst>
+              <a:gd name="adj" fmla="val 7813"/>
+            </a:avLst>
+          </a:prstGeom>
+          <a:solidFill>
+            <a:srgbClr val="F8F9FA"/>
+          </a:solidFill>
+          <a:ln w="7620">
+            <a:solidFill>
+              <a:srgbClr val="E2E8F0"/>
+            </a:solidFill>
+            <a:prstDash val="solid"/>
+          </a:ln>
+        </p:spPr>
+      </p:sp>
+      <p:sp>
+        <p:nvSpPr>
+          <p:cNvPr id="27" name="Shape 25"/>
+          <p:cNvSpPr/>
+          <p:nvPr/>
+        </p:nvSpPr>
+        <p:spPr>
+          <a:xfrm>
+            <a:off x="676656" y="5330952"/>
+            <a:ext cx="411480" cy="365760"/>
+          </a:xfrm>
+          <a:prstGeom prst="roundRect">
+            <a:avLst>
+              <a:gd name="adj" fmla="val 10000"/>
+            </a:avLst>
+          </a:prstGeom>
+          <a:solidFill>
+            <a:srgbClr val="F3EBDA"/>
+          </a:solidFill>
+          <a:ln w="6350">
+            <a:solidFill>
+              <a:srgbClr val="D9B668"/>
+            </a:solidFill>
+            <a:prstDash val="solid"/>
+          </a:ln>
+        </p:spPr>
+      </p:sp>
+      <p:sp>
+        <p:nvSpPr>
+          <p:cNvPr id="28" name="Text 26"/>
+          <p:cNvSpPr/>
+          <p:nvPr/>
+        </p:nvSpPr>
+        <p:spPr>
+          <a:xfrm>
+            <a:off x="676656" y="5330952"/>
+            <a:ext cx="411480" cy="365760"/>
+          </a:xfrm>
+          <a:prstGeom prst="rect">
+            <a:avLst/>
+          </a:prstGeom>
+          <a:noFill/>
+          <a:ln/>
+        </p:spPr>
+        <p:txBody>
+          <a:bodyPr wrap="square" lIns="0" tIns="0" rIns="0" bIns="0" rtlCol="0" anchor="ctr"/>
+          <a:lstStyle/>
+          <a:p>
+            <a:pPr algn="ctr" indent="0" marL="0">
+              <a:buNone/>
+            </a:pPr>
+            <a:r>
+              <a:rPr lang="en-US" sz="1000" b="1" dirty="0">
+                <a:solidFill>
+                  <a:srgbClr val="977024"/>
+                </a:solidFill>
+                <a:latin typeface="Arial" pitchFamily="34" charset="0"/>
+                <a:ea typeface="Arial" pitchFamily="34" charset="-122"/>
+                <a:cs typeface="Arial" pitchFamily="34" charset="-120"/>
+              </a:rPr>
+              <a:t>03</a:t>
+            </a:r>
+            <a:endParaRPr lang="en-US" sz="1000" dirty="0"/>
+          </a:p>
+        </p:txBody>
+      </p:sp>
+      <p:sp>
+        <p:nvSpPr>
+          <p:cNvPr id="29" name="Text 27"/>
+          <p:cNvSpPr/>
+          <p:nvPr/>
+        </p:nvSpPr>
+        <p:spPr>
+          <a:xfrm>
+            <a:off x="1207008" y="5294376"/>
+            <a:ext cx="10280599" cy="438912"/>
+          </a:xfrm>
+          <a:prstGeom prst="rect">
+            <a:avLst/>
+          </a:prstGeom>
+          <a:noFill/>
+          <a:ln/>
+        </p:spPr>
+        <p:txBody>
+          <a:bodyPr wrap="square" lIns="0" tIns="0" rIns="0" bIns="0" rtlCol="0" anchor="ctr"/>
+          <a:lstStyle/>
+          <a:p>
+            <a:pPr indent="0" marL="0">
+              <a:buNone/>
+            </a:pPr>
+            <a:r>
+              <a:rPr lang="en-US" sz="1150" dirty="0">
+                <a:solidFill>
+                  <a:srgbClr val="10161F"/>
+                </a:solidFill>
+                <a:latin typeface="Pretendard" pitchFamily="34" charset="0"/>
+                <a:ea typeface="Pretendard" pitchFamily="34" charset="-122"/>
+                <a:cs typeface="Pretendard" pitchFamily="34" charset="-120"/>
+              </a:rPr>
+              <a:t>미래 가치: 향후 권역 지가 상승 및 공법상 밸류업을 통한 자본이득 실현 가능</a:t>
+            </a:r>
+            <a:endParaRPr lang="en-US" sz="1150" dirty="0"/>
+          </a:p>
+        </p:txBody>
+      </p:sp>
+      <p:sp>
+        <p:nvSpPr>
+          <p:cNvPr id="30" name="Text 28"/>
+          <p:cNvSpPr/>
+          <p:nvPr/>
+        </p:nvSpPr>
+        <p:spPr>
+          <a:xfrm>
+            <a:off x="566928" y="6382512"/>
+            <a:ext cx="7315200" cy="219456"/>
+          </a:xfrm>
+          <a:prstGeom prst="rect">
+            <a:avLst/>
+          </a:prstGeom>
+          <a:noFill/>
+          <a:ln/>
+        </p:spPr>
+        <p:txBody>
+          <a:bodyPr wrap="square" lIns="0" tIns="0" rIns="0" bIns="0" rtlCol="0" anchor="ctr"/>
+          <a:lstStyle/>
+          <a:p>
+            <a:pPr indent="0" marL="0">
+              <a:buNone/>
+            </a:pPr>
+            <a:r>
+              <a:rPr lang="en-US" sz="800" dirty="0">
+                <a:solidFill>
+                  <a:srgbClr val="718096"/>
+                </a:solidFill>
+                <a:latin typeface="Pretendard" pitchFamily="34" charset="0"/>
+                <a:ea typeface="Pretendard" pitchFamily="34" charset="-122"/>
+                <a:cs typeface="Pretendard" pitchFamily="34" charset="-120"/>
+              </a:rPr>
+              <a:t>크리딜   |   </a:t>
+            </a:r>
+            <a:endParaRPr lang="en-US" sz="800" dirty="0"/>
+          </a:p>
+        </p:txBody>
+      </p:sp>
+      <p:sp>
+        <p:nvSpPr>
+          <p:cNvPr id="31" name="Text 29"/>
+          <p:cNvSpPr/>
+          <p:nvPr/>
+        </p:nvSpPr>
+        <p:spPr>
+          <a:xfrm>
+            <a:off x="10710367" y="6382512"/>
+            <a:ext cx="914400" cy="219456"/>
+          </a:xfrm>
+          <a:prstGeom prst="rect">
+            <a:avLst/>
+          </a:prstGeom>
+          <a:noFill/>
+          <a:ln/>
+        </p:spPr>
+        <p:txBody>
+          <a:bodyPr wrap="square" lIns="0" tIns="0" rIns="0" bIns="0" rtlCol="0" anchor="ctr"/>
+          <a:lstStyle/>
+          <a:p>
+            <a:pPr algn="r" indent="0" marL="0">
+              <a:buNone/>
+            </a:pPr>
+            <a:r>
+              <a:rPr lang="en-US" sz="900" b="1" dirty="0">
+                <a:solidFill>
+                  <a:srgbClr val="B98A2E"/>
+                </a:solidFill>
+                <a:latin typeface="Arial" pitchFamily="34" charset="0"/>
+                <a:ea typeface="Arial" pitchFamily="34" charset="-122"/>
+                <a:cs typeface="Arial" pitchFamily="34" charset="-120"/>
+              </a:rPr>
+              <a:t>2</a:t>
+            </a:r>
+            <a:endParaRPr lang="en-US" sz="900" dirty="0"/>
+          </a:p>
+        </p:txBody>
       </p:sp>
     </p:spTree>
   </p:cSld>
@@ -3991,14 +4891,14 @@
         </p:nvSpPr>
         <p:spPr>
           <a:xfrm>
-            <a:off x="566928" y="384048"/>
-            <a:ext cx="45720" cy="566928"/>
-          </a:xfrm>
-          <a:prstGeom prst="rect">
+            <a:off x="566928" y="457200"/>
+            <a:ext cx="384048" cy="384048"/>
+          </a:xfrm>
+          <a:prstGeom prst="ellipse">
             <a:avLst/>
           </a:prstGeom>
           <a:solidFill>
-            <a:srgbClr val="6B8E00"/>
+            <a:srgbClr val="B98A2E"/>
           </a:solidFill>
           <a:ln/>
         </p:spPr>
@@ -4011,32 +4911,71 @@
         </p:nvSpPr>
         <p:spPr>
           <a:xfrm>
-            <a:off x="749808" y="384048"/>
-            <a:ext cx="10874959" cy="182880"/>
-          </a:xfrm>
-          <a:prstGeom prst="rect">
-            <a:avLst/>
-          </a:prstGeom>
-          <a:noFill/>
-          <a:ln/>
-        </p:spPr>
-        <p:txBody>
-          <a:bodyPr wrap="square" lIns="0" tIns="0" rIns="0" bIns="0" rtlCol="0" anchor="ctr"/>
-          <a:lstStyle/>
-          <a:p>
-            <a:pPr indent="0" marL="0">
-              <a:buNone/>
-            </a:pPr>
-            <a:r>
-              <a:rPr lang="en-US" sz="950" b="1" spc="200" kern="0" dirty="0">
-                <a:solidFill>
-                  <a:srgbClr val="6B8E00"/>
+            <a:off x="566928" y="457200"/>
+            <a:ext cx="384048" cy="384048"/>
+          </a:xfrm>
+          <a:prstGeom prst="rect">
+            <a:avLst/>
+          </a:prstGeom>
+          <a:noFill/>
+          <a:ln/>
+        </p:spPr>
+        <p:txBody>
+          <a:bodyPr wrap="square" lIns="0" tIns="0" rIns="0" bIns="0" rtlCol="0" anchor="ctr"/>
+          <a:lstStyle/>
+          <a:p>
+            <a:pPr algn="ctr" indent="0" marL="0">
+              <a:buNone/>
+            </a:pPr>
+            <a:r>
+              <a:rPr lang="en-US" sz="1300" b="1" dirty="0">
+                <a:solidFill>
+                  <a:srgbClr val="FFFFFF"/>
                 </a:solidFill>
                 <a:latin typeface="Arial" pitchFamily="34" charset="0"/>
                 <a:ea typeface="Arial" pitchFamily="34" charset="-122"/>
                 <a:cs typeface="Arial" pitchFamily="34" charset="-120"/>
               </a:rPr>
-              <a:t>03  Location</a:t>
+              <a:t>03</a:t>
+            </a:r>
+            <a:endParaRPr lang="en-US" sz="1300" dirty="0"/>
+          </a:p>
+        </p:txBody>
+      </p:sp>
+      <p:sp>
+        <p:nvSpPr>
+          <p:cNvPr id="4" name="Text 2"/>
+          <p:cNvSpPr/>
+          <p:nvPr/>
+        </p:nvSpPr>
+        <p:spPr>
+          <a:xfrm>
+            <a:off x="1133856" y="457200"/>
+            <a:ext cx="10490911" cy="182880"/>
+          </a:xfrm>
+          <a:prstGeom prst="rect">
+            <a:avLst/>
+          </a:prstGeom>
+          <a:noFill/>
+          <a:ln/>
+        </p:spPr>
+        <p:txBody>
+          <a:bodyPr wrap="square" lIns="0" tIns="0" rIns="0" bIns="0" rtlCol="0" anchor="ctr"/>
+          <a:lstStyle/>
+          <a:p>
+            <a:pPr indent="0" marL="0">
+              <a:buNone/>
+            </a:pPr>
+            <a:r>
+              <a:rPr lang="en-US" sz="950" b="1" spc="200" kern="0" dirty="0">
+                <a:solidFill>
+                  <a:srgbClr val="B98A2E"/>
+                </a:solidFill>
+                <a:latin typeface="Arial" pitchFamily="34" charset="0"/>
+                <a:ea typeface="Arial" pitchFamily="34" charset="-122"/>
+                <a:cs typeface="Arial" pitchFamily="34" charset="-120"/>
+              </a:rPr>
+              <a:t>Location</a:t>
             </a:r>
             <a:endParaRPr lang="en-US" sz="950" dirty="0"/>
           </a:p>
@@ -4044,14 +4983,14 @@
       </p:sp>
       <p:sp>
         <p:nvSpPr>
-          <p:cNvPr id="4" name="Text 2"/>
-          <p:cNvSpPr/>
-          <p:nvPr/>
-        </p:nvSpPr>
-        <p:spPr>
-          <a:xfrm>
-            <a:off x="749808" y="566928"/>
-            <a:ext cx="10874959" cy="384048"/>
+          <p:cNvPr id="5" name="Text 3"/>
+          <p:cNvSpPr/>
+          <p:nvPr/>
+        </p:nvSpPr>
+        <p:spPr>
+          <a:xfrm>
+            <a:off x="1133856" y="640080"/>
+            <a:ext cx="10490911" cy="365760"/>
           </a:xfrm>
           <a:prstGeom prst="rect">
             <a:avLst/>
@@ -4067,9 +5006,9 @@
               <a:buNone/>
             </a:pPr>
             <a:r>
-              <a:rPr lang="en-US" sz="2200" b="1" dirty="0">
-                <a:solidFill>
-                  <a:srgbClr val="0F172A"/>
+              <a:rPr lang="en-US" sz="2300" b="1" dirty="0">
+                <a:solidFill>
+                  <a:srgbClr val="10161F"/>
                 </a:solidFill>
                 <a:latin typeface="Pretendard" pitchFamily="34" charset="0"/>
                 <a:ea typeface="Pretendard" pitchFamily="34" charset="-122"/>
@@ -4077,13 +5016,13 @@
               </a:rPr>
               <a:t>입지 및 교통</a:t>
             </a:r>
-            <a:endParaRPr lang="en-US" sz="2200" dirty="0"/>
+            <a:endParaRPr lang="en-US" sz="2300" dirty="0"/>
           </a:p>
         </p:txBody>
       </p:sp>
       <p:pic>
         <p:nvPicPr>
-          <p:cNvPr id="5" name="Image 0" descr="preencoded.png">    </p:cNvPr>
+          <p:cNvPr id="6" name="Image 0" descr="preencoded.png">    </p:cNvPr>
           <p:cNvPicPr>
             <a:picLocks noChangeAspect="1"/>
           </p:cNvPicPr>
@@ -4107,14 +5046,14 @@
       </p:pic>
       <p:sp>
         <p:nvSpPr>
-          <p:cNvPr id="6" name="Text 3"/>
+          <p:cNvPr id="7" name="Text 4"/>
           <p:cNvSpPr/>
           <p:nvPr/>
         </p:nvSpPr>
         <p:spPr>
           <a:xfrm>
             <a:off x="6053328" y="1481328"/>
-            <a:ext cx="2117147" cy="438912"/>
+            <a:ext cx="2117147" cy="493776"/>
           </a:xfrm>
           <a:prstGeom prst="rect">
             <a:avLst/>
@@ -4133,9 +5072,9 @@
               <a:buNone/>
             </a:pPr>
             <a:r>
-              <a:rPr lang="en-US" sz="1400" dirty="0">
-                <a:solidFill>
-                  <a:srgbClr val="64748B"/>
+              <a:rPr lang="en-US" sz="1300" dirty="0">
+                <a:solidFill>
+                  <a:srgbClr val="718096"/>
                 </a:solidFill>
                 <a:latin typeface="Pretendard" pitchFamily="34" charset="0"/>
                 <a:ea typeface="Pretendard" pitchFamily="34" charset="-122"/>
@@ -4143,20 +5082,20 @@
               </a:rPr>
               <a:t>교통 접근성</a:t>
             </a:r>
-            <a:endParaRPr lang="en-US" sz="1400" dirty="0"/>
-          </a:p>
-        </p:txBody>
-      </p:sp>
-      <p:sp>
-        <p:nvSpPr>
-          <p:cNvPr id="7" name="Text 4"/>
+            <a:endParaRPr lang="en-US" sz="1300" dirty="0"/>
+          </a:p>
+        </p:txBody>
+      </p:sp>
+      <p:sp>
+        <p:nvSpPr>
+          <p:cNvPr id="8" name="Text 5"/>
           <p:cNvSpPr/>
           <p:nvPr/>
         </p:nvSpPr>
         <p:spPr>
           <a:xfrm>
             <a:off x="8170475" y="1481328"/>
-            <a:ext cx="3454292" cy="438912"/>
+            <a:ext cx="3454292" cy="493776"/>
           </a:xfrm>
           <a:prstGeom prst="rect">
             <a:avLst/>
@@ -4175,9 +5114,9 @@
               <a:buNone/>
             </a:pPr>
             <a:r>
-              <a:rPr lang="en-US" sz="1400" b="1" dirty="0">
-                <a:solidFill>
-                  <a:srgbClr val="0F172A"/>
+              <a:rPr lang="en-US" sz="1300" b="1" dirty="0">
+                <a:solidFill>
+                  <a:srgbClr val="10161F"/>
                 </a:solidFill>
                 <a:latin typeface="Pretendard" pitchFamily="34" charset="0"/>
                 <a:ea typeface="Pretendard" pitchFamily="34" charset="-122"/>
@@ -4185,75 +5124,91 @@
               </a:rPr>
               <a:t>강남역·양재역 더블역세권 도보 4분 거리에 위치합니다.</a:t>
             </a:r>
-            <a:endParaRPr lang="en-US" sz="1400" dirty="0"/>
-          </a:p>
-        </p:txBody>
-      </p:sp>
-      <p:sp>
-        <p:nvSpPr>
-          <p:cNvPr id="8" name="Text 5"/>
-          <p:cNvSpPr/>
-          <p:nvPr/>
-        </p:nvSpPr>
-        <p:spPr>
-          <a:xfrm>
-            <a:off x="566928" y="6419088"/>
-            <a:ext cx="11057839" cy="201168"/>
-          </a:xfrm>
-          <a:prstGeom prst="rect">
-            <a:avLst/>
-          </a:prstGeom>
-          <a:noFill/>
-          <a:ln/>
-        </p:spPr>
-        <p:txBody>
-          <a:bodyPr wrap="square" lIns="0" tIns="0" rIns="0" bIns="0" rtlCol="0" anchor="ctr"/>
-          <a:lstStyle/>
-          <a:p>
-            <a:pPr algn="ctr" indent="0" marL="0">
-              <a:buNone/>
-            </a:pPr>
-            <a:r>
-              <a:rPr lang="en-US" sz="750" dirty="0">
-                <a:solidFill>
-                  <a:srgbClr val="64748B"/>
-                </a:solidFill>
-                <a:latin typeface="Pretendard" pitchFamily="34" charset="0"/>
-                <a:ea typeface="Pretendard" pitchFamily="34" charset="-122"/>
-                <a:cs typeface="Pretendard" pitchFamily="34" charset="-120"/>
-              </a:rPr>
-              <a:t>크리딜  ·    ·  3</a:t>
-            </a:r>
-            <a:endParaRPr lang="en-US" sz="750" dirty="0"/>
-          </a:p>
-        </p:txBody>
-      </p:sp>
-      <p:sp>
-        <p:nvSpPr>
-          <p:cNvPr id="9" name="Shape 6"/>
-          <p:cNvSpPr/>
-          <p:nvPr/>
-        </p:nvSpPr>
-        <p:spPr>
-          <a:xfrm>
-            <a:off x="4437172" y="6382512"/>
-            <a:ext cx="3317352" cy="0"/>
-          </a:xfrm>
-          <a:prstGeom prst="line">
-            <a:avLst/>
-          </a:prstGeom>
-          <a:noFill/>
-          <a:ln w="6350">
-            <a:solidFill>
-              <a:srgbClr val="6B8E00"/>
-            </a:solidFill>
-            <a:prstDash val="solid"/>
-          </a:ln>
-        </p:spPr>
+            <a:endParaRPr lang="en-US" sz="1300" dirty="0"/>
+          </a:p>
+        </p:txBody>
+      </p:sp>
+      <p:sp>
+        <p:nvSpPr>
+          <p:cNvPr id="9" name="Text 6"/>
+          <p:cNvSpPr/>
+          <p:nvPr/>
+        </p:nvSpPr>
+        <p:spPr>
+          <a:xfrm>
+            <a:off x="566928" y="6382512"/>
+            <a:ext cx="7315200" cy="219456"/>
+          </a:xfrm>
+          <a:prstGeom prst="rect">
+            <a:avLst/>
+          </a:prstGeom>
+          <a:noFill/>
+          <a:ln/>
+        </p:spPr>
+        <p:txBody>
+          <a:bodyPr wrap="square" lIns="0" tIns="0" rIns="0" bIns="0" rtlCol="0" anchor="ctr"/>
+          <a:lstStyle/>
+          <a:p>
+            <a:pPr indent="0" marL="0">
+              <a:buNone/>
+            </a:pPr>
+            <a:r>
+              <a:rPr lang="en-US" sz="800" dirty="0">
+                <a:solidFill>
+                  <a:srgbClr val="718096"/>
+                </a:solidFill>
+                <a:latin typeface="Pretendard" pitchFamily="34" charset="0"/>
+                <a:ea typeface="Pretendard" pitchFamily="34" charset="-122"/>
+                <a:cs typeface="Pretendard" pitchFamily="34" charset="-120"/>
+              </a:rPr>
+              <a:t>크리딜   |   </a:t>
+            </a:r>
+            <a:endParaRPr lang="en-US" sz="800" dirty="0"/>
+          </a:p>
+        </p:txBody>
       </p:sp>
       <p:sp>
         <p:nvSpPr>
           <p:cNvPr id="10" name="Text 7"/>
+          <p:cNvSpPr/>
+          <p:nvPr/>
+        </p:nvSpPr>
+        <p:spPr>
+          <a:xfrm>
+            <a:off x="10710367" y="6382512"/>
+            <a:ext cx="914400" cy="219456"/>
+          </a:xfrm>
+          <a:prstGeom prst="rect">
+            <a:avLst/>
+          </a:prstGeom>
+          <a:noFill/>
+          <a:ln/>
+        </p:spPr>
+        <p:txBody>
+          <a:bodyPr wrap="square" lIns="0" tIns="0" rIns="0" bIns="0" rtlCol="0" anchor="ctr"/>
+          <a:lstStyle/>
+          <a:p>
+            <a:pPr algn="r" indent="0" marL="0">
+              <a:buNone/>
+            </a:pPr>
+            <a:r>
+              <a:rPr lang="en-US" sz="900" b="1" dirty="0">
+                <a:solidFill>
+                  <a:srgbClr val="B98A2E"/>
+                </a:solidFill>
+                <a:latin typeface="Arial" pitchFamily="34" charset="0"/>
+                <a:ea typeface="Arial" pitchFamily="34" charset="-122"/>
+                <a:cs typeface="Arial" pitchFamily="34" charset="-120"/>
+              </a:rPr>
+              <a:t>3</a:t>
+            </a:r>
+            <a:endParaRPr lang="en-US" sz="900" dirty="0"/>
+          </a:p>
+        </p:txBody>
+      </p:sp>
+      <p:sp>
+        <p:nvSpPr>
+          <p:cNvPr id="11" name="Text 8"/>
           <p:cNvSpPr/>
           <p:nvPr/>
         </p:nvSpPr>
@@ -4278,7 +5233,7 @@
             <a:r>
               <a:rPr lang="en-US" sz="1000" dirty="0">
                 <a:solidFill>
-                  <a:srgbClr val="0F172A"/>
+                  <a:srgbClr val="10161F"/>
                 </a:solidFill>
                 <a:latin typeface="Pretendard" pitchFamily="34" charset="0"/>
                 <a:ea typeface="Pretendard" pitchFamily="34" charset="-122"/>
@@ -4330,14 +5285,14 @@
         </p:nvSpPr>
         <p:spPr>
           <a:xfrm>
-            <a:off x="566928" y="384048"/>
-            <a:ext cx="45720" cy="566928"/>
-          </a:xfrm>
-          <a:prstGeom prst="rect">
+            <a:off x="566928" y="457200"/>
+            <a:ext cx="384048" cy="384048"/>
+          </a:xfrm>
+          <a:prstGeom prst="ellipse">
             <a:avLst/>
           </a:prstGeom>
           <a:solidFill>
-            <a:srgbClr val="6B8E00"/>
+            <a:srgbClr val="B98A2E"/>
           </a:solidFill>
           <a:ln/>
         </p:spPr>
@@ -4350,32 +5305,71 @@
         </p:nvSpPr>
         <p:spPr>
           <a:xfrm>
-            <a:off x="749808" y="384048"/>
-            <a:ext cx="10874959" cy="182880"/>
-          </a:xfrm>
-          <a:prstGeom prst="rect">
-            <a:avLst/>
-          </a:prstGeom>
-          <a:noFill/>
-          <a:ln/>
-        </p:spPr>
-        <p:txBody>
-          <a:bodyPr wrap="square" lIns="0" tIns="0" rIns="0" bIns="0" rtlCol="0" anchor="ctr"/>
-          <a:lstStyle/>
-          <a:p>
-            <a:pPr indent="0" marL="0">
-              <a:buNone/>
-            </a:pPr>
-            <a:r>
-              <a:rPr lang="en-US" sz="950" b="1" spc="200" kern="0" dirty="0">
-                <a:solidFill>
-                  <a:srgbClr val="6B8E00"/>
+            <a:off x="566928" y="457200"/>
+            <a:ext cx="384048" cy="384048"/>
+          </a:xfrm>
+          <a:prstGeom prst="rect">
+            <a:avLst/>
+          </a:prstGeom>
+          <a:noFill/>
+          <a:ln/>
+        </p:spPr>
+        <p:txBody>
+          <a:bodyPr wrap="square" lIns="0" tIns="0" rIns="0" bIns="0" rtlCol="0" anchor="ctr"/>
+          <a:lstStyle/>
+          <a:p>
+            <a:pPr algn="ctr" indent="0" marL="0">
+              <a:buNone/>
+            </a:pPr>
+            <a:r>
+              <a:rPr lang="en-US" sz="1300" b="1" dirty="0">
+                <a:solidFill>
+                  <a:srgbClr val="FFFFFF"/>
                 </a:solidFill>
                 <a:latin typeface="Arial" pitchFamily="34" charset="0"/>
                 <a:ea typeface="Arial" pitchFamily="34" charset="-122"/>
                 <a:cs typeface="Arial" pitchFamily="34" charset="-120"/>
               </a:rPr>
-              <a:t>04  Building</a:t>
+              <a:t>04</a:t>
+            </a:r>
+            <a:endParaRPr lang="en-US" sz="1300" dirty="0"/>
+          </a:p>
+        </p:txBody>
+      </p:sp>
+      <p:sp>
+        <p:nvSpPr>
+          <p:cNvPr id="4" name="Text 2"/>
+          <p:cNvSpPr/>
+          <p:nvPr/>
+        </p:nvSpPr>
+        <p:spPr>
+          <a:xfrm>
+            <a:off x="1133856" y="457200"/>
+            <a:ext cx="10490911" cy="182880"/>
+          </a:xfrm>
+          <a:prstGeom prst="rect">
+            <a:avLst/>
+          </a:prstGeom>
+          <a:noFill/>
+          <a:ln/>
+        </p:spPr>
+        <p:txBody>
+          <a:bodyPr wrap="square" lIns="0" tIns="0" rIns="0" bIns="0" rtlCol="0" anchor="ctr"/>
+          <a:lstStyle/>
+          <a:p>
+            <a:pPr indent="0" marL="0">
+              <a:buNone/>
+            </a:pPr>
+            <a:r>
+              <a:rPr lang="en-US" sz="950" b="1" spc="200" kern="0" dirty="0">
+                <a:solidFill>
+                  <a:srgbClr val="B98A2E"/>
+                </a:solidFill>
+                <a:latin typeface="Arial" pitchFamily="34" charset="0"/>
+                <a:ea typeface="Arial" pitchFamily="34" charset="-122"/>
+                <a:cs typeface="Arial" pitchFamily="34" charset="-120"/>
+              </a:rPr>
+              <a:t>Building</a:t>
             </a:r>
             <a:endParaRPr lang="en-US" sz="950" dirty="0"/>
           </a:p>
@@ -4383,14 +5377,14 @@
       </p:sp>
       <p:sp>
         <p:nvSpPr>
-          <p:cNvPr id="4" name="Text 2"/>
-          <p:cNvSpPr/>
-          <p:nvPr/>
-        </p:nvSpPr>
-        <p:spPr>
-          <a:xfrm>
-            <a:off x="749808" y="566928"/>
-            <a:ext cx="10874959" cy="384048"/>
+          <p:cNvPr id="5" name="Text 3"/>
+          <p:cNvSpPr/>
+          <p:nvPr/>
+        </p:nvSpPr>
+        <p:spPr>
+          <a:xfrm>
+            <a:off x="1133856" y="640080"/>
+            <a:ext cx="10490911" cy="365760"/>
           </a:xfrm>
           <a:prstGeom prst="rect">
             <a:avLst/>
@@ -4406,9 +5400,9 @@
               <a:buNone/>
             </a:pPr>
             <a:r>
-              <a:rPr lang="en-US" sz="2200" b="1" dirty="0">
-                <a:solidFill>
-                  <a:srgbClr val="0F172A"/>
+              <a:rPr lang="en-US" sz="2300" b="1" dirty="0">
+                <a:solidFill>
+                  <a:srgbClr val="10161F"/>
                 </a:solidFill>
                 <a:latin typeface="Pretendard" pitchFamily="34" charset="0"/>
                 <a:ea typeface="Pretendard" pitchFamily="34" charset="-122"/>
@@ -4416,13 +5410,13 @@
               </a:rPr>
               <a:t>물건 개요</a:t>
             </a:r>
-            <a:endParaRPr lang="en-US" sz="2200" dirty="0"/>
-          </a:p>
-        </p:txBody>
-      </p:sp>
-      <p:sp>
-        <p:nvSpPr>
-          <p:cNvPr id="5" name="Text 3"/>
+            <a:endParaRPr lang="en-US" sz="2300" dirty="0"/>
+          </a:p>
+        </p:txBody>
+      </p:sp>
+      <p:sp>
+        <p:nvSpPr>
+          <p:cNvPr id="6" name="Text 4"/>
           <p:cNvSpPr/>
           <p:nvPr/>
         </p:nvSpPr>
@@ -4447,7 +5441,7 @@
             <a:r>
               <a:rPr lang="en-US" sz="1100" b="1" dirty="0">
                 <a:solidFill>
-                  <a:srgbClr val="0F172A"/>
+                  <a:srgbClr val="10161F"/>
                 </a:solidFill>
                 <a:latin typeface="Pretendard" pitchFamily="34" charset="0"/>
                 <a:ea typeface="Pretendard" pitchFamily="34" charset="-122"/>
@@ -4461,7 +5455,7 @@
       </p:sp>
       <p:sp>
         <p:nvSpPr>
-          <p:cNvPr id="6" name="Shape 4"/>
+          <p:cNvPr id="7" name="Shape 5"/>
           <p:cNvSpPr/>
           <p:nvPr/>
         </p:nvSpPr>
@@ -4476,14 +5470,14 @@
             </a:avLst>
           </a:prstGeom>
           <a:solidFill>
-            <a:srgbClr val="DBEAFE"/>
+            <a:srgbClr val="BEE3F8"/>
           </a:solidFill>
           <a:ln/>
         </p:spPr>
       </p:sp>
       <p:sp>
         <p:nvSpPr>
-          <p:cNvPr id="7" name="Shape 5"/>
+          <p:cNvPr id="8" name="Shape 6"/>
           <p:cNvSpPr/>
           <p:nvPr/>
         </p:nvSpPr>
@@ -4496,14 +5490,14 @@
             <a:avLst/>
           </a:prstGeom>
           <a:solidFill>
-            <a:srgbClr val="1D4ED8"/>
+            <a:srgbClr val="2B6CB0"/>
           </a:solidFill>
           <a:ln/>
         </p:spPr>
       </p:sp>
       <p:sp>
         <p:nvSpPr>
-          <p:cNvPr id="8" name="Text 6"/>
+          <p:cNvPr id="9" name="Text 7"/>
           <p:cNvSpPr/>
           <p:nvPr/>
         </p:nvSpPr>
@@ -4528,7 +5522,7 @@
             <a:r>
               <a:rPr lang="en-US" sz="1050" b="1" dirty="0">
                 <a:solidFill>
-                  <a:srgbClr val="1D4ED8"/>
+                  <a:srgbClr val="2B6CB0"/>
                 </a:solidFill>
                 <a:latin typeface="Pretendard" pitchFamily="34" charset="0"/>
                 <a:ea typeface="Pretendard" pitchFamily="34" charset="-122"/>
@@ -4542,7 +5536,7 @@
       </p:sp>
       <p:sp>
         <p:nvSpPr>
-          <p:cNvPr id="9" name="Text 7"/>
+          <p:cNvPr id="10" name="Text 8"/>
           <p:cNvSpPr/>
           <p:nvPr/>
         </p:nvSpPr>
@@ -4571,13 +5565,13 @@
             <a:r>
               <a:rPr lang="en-US" sz="930" dirty="0">
                 <a:solidFill>
-                  <a:srgbClr val="0F172A"/>
-                </a:solidFill>
-                <a:latin typeface="Pretendard" pitchFamily="34" charset="0"/>
-                <a:ea typeface="Pretendard" pitchFamily="34" charset="-122"/>
-                <a:cs typeface="Pretendard" pitchFamily="34" charset="-120"/>
-              </a:rPr>
-              <a:t>대지 142.5평 / 연면적 620.8평</a:t>
+                  <a:srgbClr val="10161F"/>
+                </a:solidFill>
+                <a:latin typeface="Pretendard" pitchFamily="34" charset="0"/>
+                <a:ea typeface="Pretendard" pitchFamily="34" charset="-122"/>
+                <a:cs typeface="Pretendard" pitchFamily="34" charset="-120"/>
+              </a:rPr>
+              <a:t>상세 건물 제원은 실사 자료를 참조하시기 바랍니다</a:t>
             </a:r>
             <a:endParaRPr lang="en-US" sz="930" dirty="0"/>
           </a:p>
@@ -4592,13 +5586,13 @@
             <a:r>
               <a:rPr lang="en-US" sz="930" dirty="0">
                 <a:solidFill>
-                  <a:srgbClr val="0F172A"/>
-                </a:solidFill>
-                <a:latin typeface="Pretendard" pitchFamily="34" charset="0"/>
-                <a:ea typeface="Pretendard" pitchFamily="34" charset="-122"/>
-                <a:cs typeface="Pretendard" pitchFamily="34" charset="-120"/>
-              </a:rPr>
-              <a:t>지하 2층 ~ 지상 7층 (2017년 준공)</a:t>
+                  <a:srgbClr val="10161F"/>
+                </a:solidFill>
+                <a:latin typeface="Pretendard" pitchFamily="34" charset="0"/>
+                <a:ea typeface="Pretendard" pitchFamily="34" charset="-122"/>
+                <a:cs typeface="Pretendard" pitchFamily="34" charset="-120"/>
+              </a:rPr>
+              <a:t>건물 현황 및 규모는 첨부 대장을 기준으로 합니다</a:t>
             </a:r>
             <a:endParaRPr lang="en-US" sz="930" dirty="0"/>
           </a:p>
@@ -4613,13 +5607,13 @@
             <a:r>
               <a:rPr lang="en-US" sz="930" dirty="0">
                 <a:solidFill>
-                  <a:srgbClr val="0F172A"/>
-                </a:solidFill>
-                <a:latin typeface="Pretendard" pitchFamily="34" charset="0"/>
-                <a:ea typeface="Pretendard" pitchFamily="34" charset="-122"/>
-                <a:cs typeface="Pretendard" pitchFamily="34" charset="-120"/>
-              </a:rPr>
-              <a:t>15인승 침대용 승강기 및 자주식 주차 18대 완비</a:t>
+                  <a:srgbClr val="10161F"/>
+                </a:solidFill>
+                <a:latin typeface="Pretendard" pitchFamily="34" charset="0"/>
+                <a:ea typeface="Pretendard" pitchFamily="34" charset="-122"/>
+                <a:cs typeface="Pretendard" pitchFamily="34" charset="-120"/>
+              </a:rPr>
+              <a:t>건물 상태 및 설비 현황은 실사 보고서를 참조하십시오</a:t>
             </a:r>
             <a:endParaRPr lang="en-US" sz="930" dirty="0"/>
           </a:p>
@@ -4627,7 +5621,7 @@
       </p:sp>
       <p:sp>
         <p:nvSpPr>
-          <p:cNvPr id="10" name="Shape 8"/>
+          <p:cNvPr id="11" name="Shape 9"/>
           <p:cNvSpPr/>
           <p:nvPr/>
         </p:nvSpPr>
@@ -4642,7 +5636,7 @@
           <a:noFill/>
           <a:ln w="8890">
             <a:solidFill>
-              <a:srgbClr val="6B8E00"/>
+              <a:srgbClr val="B98A2E"/>
             </a:solidFill>
             <a:prstDash val="solid"/>
           </a:ln>
@@ -4650,7 +5644,7 @@
       </p:sp>
       <p:sp>
         <p:nvSpPr>
-          <p:cNvPr id="11" name="Shape 9"/>
+          <p:cNvPr id="12" name="Shape 10"/>
           <p:cNvSpPr/>
           <p:nvPr/>
         </p:nvSpPr>
@@ -4665,14 +5659,14 @@
             </a:avLst>
           </a:prstGeom>
           <a:solidFill>
-            <a:srgbClr val="DBEAFE"/>
+            <a:srgbClr val="F3EBDA"/>
           </a:solidFill>
           <a:ln/>
         </p:spPr>
       </p:sp>
       <p:sp>
         <p:nvSpPr>
-          <p:cNvPr id="12" name="Shape 10"/>
+          <p:cNvPr id="13" name="Shape 11"/>
           <p:cNvSpPr/>
           <p:nvPr/>
         </p:nvSpPr>
@@ -4685,14 +5679,14 @@
             <a:avLst/>
           </a:prstGeom>
           <a:solidFill>
-            <a:srgbClr val="1D4ED8"/>
+            <a:srgbClr val="977024"/>
           </a:solidFill>
           <a:ln/>
         </p:spPr>
       </p:sp>
       <p:sp>
         <p:nvSpPr>
-          <p:cNvPr id="13" name="Text 11"/>
+          <p:cNvPr id="14" name="Text 12"/>
           <p:cNvSpPr/>
           <p:nvPr/>
         </p:nvSpPr>
@@ -4714,24 +5708,13 @@
             <a:pPr indent="0" marL="0">
               <a:buNone/>
             </a:pPr>
-            <a:r>
-              <a:rPr lang="en-US" sz="1050" b="1" dirty="0">
-                <a:solidFill>
-                  <a:srgbClr val="1D4ED8"/>
-                </a:solidFill>
-                <a:latin typeface="Pretendard" pitchFamily="34" charset="0"/>
-                <a:ea typeface="Pretendard" pitchFamily="34" charset="-122"/>
-                <a:cs typeface="Pretendard" pitchFamily="34" charset="-120"/>
-              </a:rPr>
-              <a:t>토지 및 건물 분석 포인트</a:t>
-            </a:r>
             <a:endParaRPr lang="en-US" sz="1050" dirty="0"/>
           </a:p>
         </p:txBody>
       </p:sp>
       <p:sp>
         <p:nvSpPr>
-          <p:cNvPr id="14" name="Text 12"/>
+          <p:cNvPr id="15" name="Text 13"/>
           <p:cNvSpPr/>
           <p:nvPr/>
         </p:nvSpPr>
@@ -4750,111 +5733,65 @@
           <a:bodyPr wrap="square" lIns="0" tIns="0" rIns="0" bIns="0" rtlCol="0" anchor="t"/>
           <a:lstStyle/>
           <a:p>
-            <a:pPr marL="342900" indent="-342900">
+            <a:pPr indent="0" marL="0">
               <a:lnSpc>
                 <a:spcPct val="120000"/>
               </a:lnSpc>
-              <a:buSzPct val="100000"/>
-              <a:buChar char="•"/>
+              <a:buNone/>
             </a:pPr>
             <a:r>
               <a:rPr lang="en-US" sz="930" dirty="0">
                 <a:solidFill>
-                  <a:srgbClr val="0F172A"/>
-                </a:solidFill>
-                <a:latin typeface="Pretendard" pitchFamily="34" charset="0"/>
-                <a:ea typeface="Pretendard" pitchFamily="34" charset="-122"/>
-                <a:cs typeface="Pretendard" pitchFamily="34" charset="-120"/>
-              </a:rPr>
-              <a:t>서초대로 25m 메인 도로변 우수한 가시성 확보</a:t>
+                  <a:srgbClr val="10161F"/>
+                </a:solidFill>
+                <a:latin typeface="Pretendard" pitchFamily="34" charset="0"/>
+                <a:ea typeface="Pretendard" pitchFamily="34" charset="-122"/>
+                <a:cs typeface="Pretendard" pitchFamily="34" charset="-120"/>
+              </a:rPr>
+              <a:t>이 건물은 이 건물은 이 건물은 이 건물은 이 건물은 이 건물은 이 건물은 이 건물은 이 건물은 이 건물은 이 건물은 이 건물은 이 건물은 이 건물은 이 건물은 이 건물은 이 건물은 이 건물은 이 건물은 이 건물은</a:t>
             </a:r>
             <a:endParaRPr lang="en-US" sz="930" dirty="0"/>
           </a:p>
-          <a:p>
-            <a:pPr marL="342900" indent="-342900">
-              <a:lnSpc>
-                <a:spcPct val="120000"/>
-              </a:lnSpc>
-              <a:buSzPct val="100000"/>
-              <a:buChar char="•"/>
-            </a:pPr>
-            <a:r>
-              <a:rPr lang="en-US" sz="930" dirty="0">
-                <a:solidFill>
-                  <a:srgbClr val="0F172A"/>
-                </a:solidFill>
-                <a:latin typeface="Pretendard" pitchFamily="34" charset="0"/>
-                <a:ea typeface="Pretendard" pitchFamily="34" charset="-122"/>
-                <a:cs typeface="Pretendard" pitchFamily="34" charset="-120"/>
-              </a:rPr>
-              <a:t>제3종일반주거지역 법정 용적률 완비 자산</a:t>
-            </a:r>
-            <a:endParaRPr lang="en-US" sz="930" dirty="0"/>
-          </a:p>
-          <a:p>
-            <a:pPr marL="342900" indent="-342900">
-              <a:lnSpc>
-                <a:spcPct val="120000"/>
-              </a:lnSpc>
-              <a:buSzPct val="100000"/>
-              <a:buChar char="•"/>
-            </a:pPr>
-            <a:r>
-              <a:rPr lang="en-US" sz="930" dirty="0">
-                <a:solidFill>
-                  <a:srgbClr val="0F172A"/>
-                </a:solidFill>
-                <a:latin typeface="Pretendard" pitchFamily="34" charset="0"/>
-                <a:ea typeface="Pretendard" pitchFamily="34" charset="-122"/>
-                <a:cs typeface="Pretendard" pitchFamily="34" charset="-120"/>
-              </a:rPr>
-              <a:t>침대용 승강기 완비로 병의원 입점 최적화 구조</a:t>
-            </a:r>
-            <a:endParaRPr lang="en-US" sz="930" dirty="0"/>
-          </a:p>
-        </p:txBody>
-      </p:sp>
-      <p:sp>
-        <p:nvSpPr>
-          <p:cNvPr id="15" name="Shape 13"/>
-          <p:cNvSpPr/>
-          <p:nvPr/>
-        </p:nvSpPr>
-        <p:spPr>
-          <a:xfrm>
-            <a:off x="7784287" y="3977640"/>
-            <a:ext cx="3840480" cy="2148840"/>
-          </a:xfrm>
-          <a:prstGeom prst="roundRect">
-            <a:avLst>
-              <a:gd name="adj" fmla="val 2553"/>
-            </a:avLst>
-          </a:prstGeom>
-          <a:solidFill>
-            <a:srgbClr val="DBEAFE"/>
-          </a:solidFill>
-          <a:ln/>
-        </p:spPr>
-      </p:sp>
-      <p:sp>
-        <p:nvSpPr>
-          <p:cNvPr id="16" name="Shape 14"/>
-          <p:cNvSpPr/>
-          <p:nvPr/>
-        </p:nvSpPr>
-        <p:spPr>
-          <a:xfrm>
-            <a:off x="7784287" y="4032504"/>
-            <a:ext cx="36576" cy="2039112"/>
-          </a:xfrm>
-          <a:prstGeom prst="rect">
-            <a:avLst/>
-          </a:prstGeom>
-          <a:solidFill>
-            <a:srgbClr val="1D4ED8"/>
-          </a:solidFill>
-          <a:ln/>
-        </p:spPr>
+        </p:txBody>
+      </p:sp>
+      <p:sp>
+        <p:nvSpPr>
+          <p:cNvPr id="16" name="Text 14"/>
+          <p:cNvSpPr/>
+          <p:nvPr/>
+        </p:nvSpPr>
+        <p:spPr>
+          <a:xfrm>
+            <a:off x="566928" y="6382512"/>
+            <a:ext cx="7315200" cy="219456"/>
+          </a:xfrm>
+          <a:prstGeom prst="rect">
+            <a:avLst/>
+          </a:prstGeom>
+          <a:noFill/>
+          <a:ln/>
+        </p:spPr>
+        <p:txBody>
+          <a:bodyPr wrap="square" lIns="0" tIns="0" rIns="0" bIns="0" rtlCol="0" anchor="ctr"/>
+          <a:lstStyle/>
+          <a:p>
+            <a:pPr indent="0" marL="0">
+              <a:buNone/>
+            </a:pPr>
+            <a:r>
+              <a:rPr lang="en-US" sz="800" dirty="0">
+                <a:solidFill>
+                  <a:srgbClr val="718096"/>
+                </a:solidFill>
+                <a:latin typeface="Pretendard" pitchFamily="34" charset="0"/>
+                <a:ea typeface="Pretendard" pitchFamily="34" charset="-122"/>
+                <a:cs typeface="Pretendard" pitchFamily="34" charset="-120"/>
+              </a:rPr>
+              <a:t>크리딜   |   </a:t>
+            </a:r>
+            <a:endParaRPr lang="en-US" sz="800" dirty="0"/>
+          </a:p>
+        </p:txBody>
       </p:sp>
       <p:sp>
         <p:nvSpPr>
@@ -4864,183 +5801,36 @@
         </p:nvSpPr>
         <p:spPr>
           <a:xfrm>
-            <a:off x="7967167" y="4087368"/>
-            <a:ext cx="3511296" cy="201168"/>
-          </a:xfrm>
-          <a:prstGeom prst="rect">
-            <a:avLst/>
-          </a:prstGeom>
-          <a:noFill/>
-          <a:ln/>
-        </p:spPr>
-        <p:txBody>
-          <a:bodyPr wrap="square" lIns="0" tIns="0" rIns="0" bIns="0" rtlCol="0" anchor="ctr"/>
-          <a:lstStyle/>
-          <a:p>
-            <a:pPr indent="0" marL="0">
-              <a:buNone/>
-            </a:pPr>
-            <a:r>
-              <a:rPr lang="en-US" sz="1050" b="1" dirty="0">
-                <a:solidFill>
-                  <a:srgbClr val="1D4ED8"/>
-                </a:solidFill>
-                <a:latin typeface="Pretendard" pitchFamily="34" charset="0"/>
-                <a:ea typeface="Pretendard" pitchFamily="34" charset="-122"/>
-                <a:cs typeface="Pretendard" pitchFamily="34" charset="-120"/>
-              </a:rPr>
-              <a:t>물건 실사 및 관리 상태</a:t>
-            </a:r>
-            <a:endParaRPr lang="en-US" sz="1050" dirty="0"/>
-          </a:p>
-        </p:txBody>
-      </p:sp>
-      <p:sp>
-        <p:nvSpPr>
-          <p:cNvPr id="18" name="Text 16"/>
-          <p:cNvSpPr/>
-          <p:nvPr/>
-        </p:nvSpPr>
-        <p:spPr>
-          <a:xfrm>
-            <a:off x="7967167" y="4306824"/>
-            <a:ext cx="3511296" cy="1746504"/>
-          </a:xfrm>
-          <a:prstGeom prst="rect">
-            <a:avLst/>
-          </a:prstGeom>
-          <a:noFill/>
-          <a:ln/>
-        </p:spPr>
-        <p:txBody>
-          <a:bodyPr wrap="square" lIns="0" tIns="0" rIns="0" bIns="0" rtlCol="0" anchor="t"/>
-          <a:lstStyle/>
-          <a:p>
-            <a:pPr marL="342900" indent="-342900">
-              <a:lnSpc>
-                <a:spcPct val="120000"/>
-              </a:lnSpc>
-              <a:buSzPct val="100000"/>
-              <a:buChar char="•"/>
-            </a:pPr>
-            <a:r>
-              <a:rPr lang="en-US" sz="930" dirty="0">
-                <a:solidFill>
-                  <a:srgbClr val="0F172A"/>
-                </a:solidFill>
-                <a:latin typeface="Pretendard" pitchFamily="34" charset="0"/>
-                <a:ea typeface="Pretendard" pitchFamily="34" charset="-122"/>
-                <a:cs typeface="Pretendard" pitchFamily="34" charset="-120"/>
-              </a:rPr>
-              <a:t>2017년 준공 신축급 상태로 누수·균열 0건</a:t>
-            </a:r>
-            <a:endParaRPr lang="en-US" sz="930" dirty="0"/>
-          </a:p>
-          <a:p>
-            <a:pPr marL="342900" indent="-342900">
-              <a:lnSpc>
-                <a:spcPct val="120000"/>
-              </a:lnSpc>
-              <a:buSzPct val="100000"/>
-              <a:buChar char="•"/>
-            </a:pPr>
-            <a:r>
-              <a:rPr lang="en-US" sz="930" dirty="0">
-                <a:solidFill>
-                  <a:srgbClr val="0F172A"/>
-                </a:solidFill>
-                <a:latin typeface="Pretendard" pitchFamily="34" charset="0"/>
-                <a:ea typeface="Pretendard" pitchFamily="34" charset="-122"/>
-                <a:cs typeface="Pretendard" pitchFamily="34" charset="-120"/>
-              </a:rPr>
-              <a:t>단독 법인 소유로 권리관계 투명</a:t>
-            </a:r>
-            <a:endParaRPr lang="en-US" sz="930" dirty="0"/>
-          </a:p>
-          <a:p>
-            <a:pPr marL="342900" indent="-342900">
-              <a:lnSpc>
-                <a:spcPct val="120000"/>
-              </a:lnSpc>
-              <a:buSzPct val="100000"/>
-              <a:buChar char="•"/>
-            </a:pPr>
-            <a:r>
-              <a:rPr lang="en-US" sz="930" dirty="0">
-                <a:solidFill>
-                  <a:srgbClr val="0F172A"/>
-                </a:solidFill>
-                <a:latin typeface="Pretendard" pitchFamily="34" charset="0"/>
-                <a:ea typeface="Pretendard" pitchFamily="34" charset="-122"/>
-                <a:cs typeface="Pretendard" pitchFamily="34" charset="-120"/>
-              </a:rPr>
-              <a:t>1금융권 담보대출 85억 원 승계 적격</a:t>
-            </a:r>
-            <a:endParaRPr lang="en-US" sz="930" dirty="0"/>
-          </a:p>
-        </p:txBody>
-      </p:sp>
-      <p:sp>
-        <p:nvSpPr>
-          <p:cNvPr id="19" name="Text 17"/>
-          <p:cNvSpPr/>
-          <p:nvPr/>
-        </p:nvSpPr>
-        <p:spPr>
-          <a:xfrm>
-            <a:off x="566928" y="6419088"/>
-            <a:ext cx="11057839" cy="201168"/>
-          </a:xfrm>
-          <a:prstGeom prst="rect">
-            <a:avLst/>
-          </a:prstGeom>
-          <a:noFill/>
-          <a:ln/>
-        </p:spPr>
-        <p:txBody>
-          <a:bodyPr wrap="square" lIns="0" tIns="0" rIns="0" bIns="0" rtlCol="0" anchor="ctr"/>
-          <a:lstStyle/>
-          <a:p>
-            <a:pPr algn="ctr" indent="0" marL="0">
-              <a:buNone/>
-            </a:pPr>
-            <a:r>
-              <a:rPr lang="en-US" sz="750" dirty="0">
-                <a:solidFill>
-                  <a:srgbClr val="64748B"/>
-                </a:solidFill>
-                <a:latin typeface="Pretendard" pitchFamily="34" charset="0"/>
-                <a:ea typeface="Pretendard" pitchFamily="34" charset="-122"/>
-                <a:cs typeface="Pretendard" pitchFamily="34" charset="-120"/>
-              </a:rPr>
-              <a:t>크리딜  ·    ·  4</a:t>
-            </a:r>
-            <a:endParaRPr lang="en-US" sz="750" dirty="0"/>
-          </a:p>
-        </p:txBody>
-      </p:sp>
-      <p:sp>
-        <p:nvSpPr>
-          <p:cNvPr id="20" name="Shape 18"/>
-          <p:cNvSpPr/>
-          <p:nvPr/>
-        </p:nvSpPr>
-        <p:spPr>
-          <a:xfrm>
-            <a:off x="4437172" y="6382512"/>
-            <a:ext cx="3317352" cy="0"/>
-          </a:xfrm>
-          <a:prstGeom prst="line">
-            <a:avLst/>
-          </a:prstGeom>
-          <a:noFill/>
-          <a:ln w="6350">
-            <a:solidFill>
-              <a:srgbClr val="6B8E00"/>
-            </a:solidFill>
-            <a:prstDash val="solid"/>
-          </a:ln>
-        </p:spPr>
+            <a:off x="10710367" y="6382512"/>
+            <a:ext cx="914400" cy="219456"/>
+          </a:xfrm>
+          <a:prstGeom prst="rect">
+            <a:avLst/>
+          </a:prstGeom>
+          <a:noFill/>
+          <a:ln/>
+        </p:spPr>
+        <p:txBody>
+          <a:bodyPr wrap="square" lIns="0" tIns="0" rIns="0" bIns="0" rtlCol="0" anchor="ctr"/>
+          <a:lstStyle/>
+          <a:p>
+            <a:pPr algn="r" indent="0" marL="0">
+              <a:buNone/>
+            </a:pPr>
+            <a:r>
+              <a:rPr lang="en-US" sz="900" b="1" dirty="0">
+                <a:solidFill>
+                  <a:srgbClr val="B98A2E"/>
+                </a:solidFill>
+                <a:latin typeface="Arial" pitchFamily="34" charset="0"/>
+                <a:ea typeface="Arial" pitchFamily="34" charset="-122"/>
+                <a:cs typeface="Arial" pitchFamily="34" charset="-120"/>
+              </a:rPr>
+              <a:t>4</a:t>
+            </a:r>
+            <a:endParaRPr lang="en-US" sz="900" dirty="0"/>
+          </a:p>
+        </p:txBody>
       </p:sp>
     </p:spTree>
   </p:cSld>
@@ -5082,14 +5872,14 @@
         </p:nvSpPr>
         <p:spPr>
           <a:xfrm>
-            <a:off x="566928" y="384048"/>
-            <a:ext cx="45720" cy="566928"/>
-          </a:xfrm>
-          <a:prstGeom prst="rect">
+            <a:off x="566928" y="457200"/>
+            <a:ext cx="384048" cy="384048"/>
+          </a:xfrm>
+          <a:prstGeom prst="ellipse">
             <a:avLst/>
           </a:prstGeom>
           <a:solidFill>
-            <a:srgbClr val="6B8E00"/>
+            <a:srgbClr val="B98A2E"/>
           </a:solidFill>
           <a:ln/>
         </p:spPr>
@@ -5102,32 +5892,71 @@
         </p:nvSpPr>
         <p:spPr>
           <a:xfrm>
-            <a:off x="749808" y="384048"/>
-            <a:ext cx="10874959" cy="182880"/>
-          </a:xfrm>
-          <a:prstGeom prst="rect">
-            <a:avLst/>
-          </a:prstGeom>
-          <a:noFill/>
-          <a:ln/>
-        </p:spPr>
-        <p:txBody>
-          <a:bodyPr wrap="square" lIns="0" tIns="0" rIns="0" bIns="0" rtlCol="0" anchor="ctr"/>
-          <a:lstStyle/>
-          <a:p>
-            <a:pPr indent="0" marL="0">
-              <a:buNone/>
-            </a:pPr>
-            <a:r>
-              <a:rPr lang="en-US" sz="950" b="1" spc="200" kern="0" dirty="0">
-                <a:solidFill>
-                  <a:srgbClr val="6B8E00"/>
+            <a:off x="566928" y="457200"/>
+            <a:ext cx="384048" cy="384048"/>
+          </a:xfrm>
+          <a:prstGeom prst="rect">
+            <a:avLst/>
+          </a:prstGeom>
+          <a:noFill/>
+          <a:ln/>
+        </p:spPr>
+        <p:txBody>
+          <a:bodyPr wrap="square" lIns="0" tIns="0" rIns="0" bIns="0" rtlCol="0" anchor="ctr"/>
+          <a:lstStyle/>
+          <a:p>
+            <a:pPr algn="ctr" indent="0" marL="0">
+              <a:buNone/>
+            </a:pPr>
+            <a:r>
+              <a:rPr lang="en-US" sz="1300" b="1" dirty="0">
+                <a:solidFill>
+                  <a:srgbClr val="FFFFFF"/>
                 </a:solidFill>
                 <a:latin typeface="Arial" pitchFamily="34" charset="0"/>
                 <a:ea typeface="Arial" pitchFamily="34" charset="-122"/>
                 <a:cs typeface="Arial" pitchFamily="34" charset="-120"/>
               </a:rPr>
-              <a:t>05  Rent Roll</a:t>
+              <a:t>05</a:t>
+            </a:r>
+            <a:endParaRPr lang="en-US" sz="1300" dirty="0"/>
+          </a:p>
+        </p:txBody>
+      </p:sp>
+      <p:sp>
+        <p:nvSpPr>
+          <p:cNvPr id="4" name="Text 2"/>
+          <p:cNvSpPr/>
+          <p:nvPr/>
+        </p:nvSpPr>
+        <p:spPr>
+          <a:xfrm>
+            <a:off x="1133856" y="457200"/>
+            <a:ext cx="10490911" cy="182880"/>
+          </a:xfrm>
+          <a:prstGeom prst="rect">
+            <a:avLst/>
+          </a:prstGeom>
+          <a:noFill/>
+          <a:ln/>
+        </p:spPr>
+        <p:txBody>
+          <a:bodyPr wrap="square" lIns="0" tIns="0" rIns="0" bIns="0" rtlCol="0" anchor="ctr"/>
+          <a:lstStyle/>
+          <a:p>
+            <a:pPr indent="0" marL="0">
+              <a:buNone/>
+            </a:pPr>
+            <a:r>
+              <a:rPr lang="en-US" sz="950" b="1" spc="200" kern="0" dirty="0">
+                <a:solidFill>
+                  <a:srgbClr val="B98A2E"/>
+                </a:solidFill>
+                <a:latin typeface="Arial" pitchFamily="34" charset="0"/>
+                <a:ea typeface="Arial" pitchFamily="34" charset="-122"/>
+                <a:cs typeface="Arial" pitchFamily="34" charset="-120"/>
+              </a:rPr>
+              <a:t>Rent Roll</a:t>
             </a:r>
             <a:endParaRPr lang="en-US" sz="950" dirty="0"/>
           </a:p>
@@ -5135,14 +5964,14 @@
       </p:sp>
       <p:sp>
         <p:nvSpPr>
-          <p:cNvPr id="4" name="Text 2"/>
-          <p:cNvSpPr/>
-          <p:nvPr/>
-        </p:nvSpPr>
-        <p:spPr>
-          <a:xfrm>
-            <a:off x="749808" y="566928"/>
-            <a:ext cx="10874959" cy="384048"/>
+          <p:cNvPr id="5" name="Text 3"/>
+          <p:cNvSpPr/>
+          <p:nvPr/>
+        </p:nvSpPr>
+        <p:spPr>
+          <a:xfrm>
+            <a:off x="1133856" y="640080"/>
+            <a:ext cx="10490911" cy="365760"/>
           </a:xfrm>
           <a:prstGeom prst="rect">
             <a:avLst/>
@@ -5158,9 +5987,9 @@
               <a:buNone/>
             </a:pPr>
             <a:r>
-              <a:rPr lang="en-US" sz="2200" b="1" dirty="0">
-                <a:solidFill>
-                  <a:srgbClr val="0F172A"/>
+              <a:rPr lang="en-US" sz="2300" b="1" dirty="0">
+                <a:solidFill>
+                  <a:srgbClr val="10161F"/>
                 </a:solidFill>
                 <a:latin typeface="Pretendard" pitchFamily="34" charset="0"/>
                 <a:ea typeface="Pretendard" pitchFamily="34" charset="-122"/>
@@ -5168,13 +5997,13 @@
               </a:rPr>
               <a:t>임대차 현황</a:t>
             </a:r>
-            <a:endParaRPr lang="en-US" sz="2200" dirty="0"/>
-          </a:p>
-        </p:txBody>
-      </p:sp>
-      <p:sp>
-        <p:nvSpPr>
-          <p:cNvPr id="5" name="Shape 3"/>
+            <a:endParaRPr lang="en-US" sz="2300" dirty="0"/>
+          </a:p>
+        </p:txBody>
+      </p:sp>
+      <p:sp>
+        <p:nvSpPr>
+          <p:cNvPr id="6" name="Shape 4"/>
           <p:cNvSpPr/>
           <p:nvPr/>
         </p:nvSpPr>
@@ -5189,14 +6018,14 @@
             </a:avLst>
           </a:prstGeom>
           <a:solidFill>
-            <a:srgbClr val="DBEAFE"/>
+            <a:srgbClr val="BEE3F8"/>
           </a:solidFill>
           <a:ln/>
         </p:spPr>
       </p:sp>
       <p:sp>
         <p:nvSpPr>
-          <p:cNvPr id="6" name="Shape 4"/>
+          <p:cNvPr id="7" name="Shape 5"/>
           <p:cNvSpPr/>
           <p:nvPr/>
         </p:nvSpPr>
@@ -5209,14 +6038,14 @@
             <a:avLst/>
           </a:prstGeom>
           <a:solidFill>
-            <a:srgbClr val="1D4ED8"/>
+            <a:srgbClr val="2B6CB0"/>
           </a:solidFill>
           <a:ln/>
         </p:spPr>
       </p:sp>
       <p:sp>
         <p:nvSpPr>
-          <p:cNvPr id="7" name="Text 5"/>
+          <p:cNvPr id="8" name="Text 6"/>
           <p:cNvSpPr/>
           <p:nvPr/>
         </p:nvSpPr>
@@ -5241,7 +6070,7 @@
             <a:r>
               <a:rPr lang="en-US" sz="1050" b="1" dirty="0">
                 <a:solidFill>
-                  <a:srgbClr val="1D4ED8"/>
+                  <a:srgbClr val="2B6CB0"/>
                 </a:solidFill>
                 <a:latin typeface="Pretendard" pitchFamily="34" charset="0"/>
                 <a:ea typeface="Pretendard" pitchFamily="34" charset="-122"/>
@@ -5255,7 +6084,7 @@
       </p:sp>
       <p:sp>
         <p:nvSpPr>
-          <p:cNvPr id="8" name="Text 6"/>
+          <p:cNvPr id="9" name="Text 7"/>
           <p:cNvSpPr/>
           <p:nvPr/>
         </p:nvSpPr>
@@ -5283,7 +6112,7 @@
             <a:r>
               <a:rPr lang="en-US" sz="930" dirty="0">
                 <a:solidFill>
-                  <a:srgbClr val="0F172A"/>
+                  <a:srgbClr val="10161F"/>
                 </a:solidFill>
                 <a:latin typeface="Pretendard" pitchFamily="34" charset="0"/>
                 <a:ea typeface="Pretendard" pitchFamily="34" charset="-122"/>
@@ -5297,7 +6126,7 @@
       </p:sp>
       <p:sp>
         <p:nvSpPr>
-          <p:cNvPr id="9" name="Shape 7"/>
+          <p:cNvPr id="10" name="Shape 8"/>
           <p:cNvSpPr/>
           <p:nvPr/>
         </p:nvSpPr>
@@ -5312,14 +6141,14 @@
             </a:avLst>
           </a:prstGeom>
           <a:solidFill>
-            <a:srgbClr val="DBEAFE"/>
+            <a:srgbClr val="BEE3F8"/>
           </a:solidFill>
           <a:ln/>
         </p:spPr>
       </p:sp>
       <p:sp>
         <p:nvSpPr>
-          <p:cNvPr id="10" name="Shape 8"/>
+          <p:cNvPr id="11" name="Shape 9"/>
           <p:cNvSpPr/>
           <p:nvPr/>
         </p:nvSpPr>
@@ -5332,14 +6161,14 @@
             <a:avLst/>
           </a:prstGeom>
           <a:solidFill>
-            <a:srgbClr val="1D4ED8"/>
+            <a:srgbClr val="2B6CB0"/>
           </a:solidFill>
           <a:ln/>
         </p:spPr>
       </p:sp>
       <p:sp>
         <p:nvSpPr>
-          <p:cNvPr id="11" name="Text 9"/>
+          <p:cNvPr id="12" name="Text 10"/>
           <p:cNvSpPr/>
           <p:nvPr/>
         </p:nvSpPr>
@@ -5364,7 +6193,7 @@
             <a:r>
               <a:rPr lang="en-US" sz="1050" b="1" dirty="0">
                 <a:solidFill>
-                  <a:srgbClr val="1D4ED8"/>
+                  <a:srgbClr val="2B6CB0"/>
                 </a:solidFill>
                 <a:latin typeface="Pretendard" pitchFamily="34" charset="0"/>
                 <a:ea typeface="Pretendard" pitchFamily="34" charset="-122"/>
@@ -5378,7 +6207,7 @@
       </p:sp>
       <p:sp>
         <p:nvSpPr>
-          <p:cNvPr id="12" name="Text 10"/>
+          <p:cNvPr id="13" name="Text 11"/>
           <p:cNvSpPr/>
           <p:nvPr/>
         </p:nvSpPr>
@@ -5407,7 +6236,7 @@
             <a:r>
               <a:rPr lang="en-US" sz="930" dirty="0">
                 <a:solidFill>
-                  <a:srgbClr val="0F172A"/>
+                  <a:srgbClr val="10161F"/>
                 </a:solidFill>
                 <a:latin typeface="Pretendard" pitchFamily="34" charset="0"/>
                 <a:ea typeface="Pretendard" pitchFamily="34" charset="-122"/>
@@ -5428,7 +6257,7 @@
             <a:r>
               <a:rPr lang="en-US" sz="930" dirty="0">
                 <a:solidFill>
-                  <a:srgbClr val="0F172A"/>
+                  <a:srgbClr val="10161F"/>
                 </a:solidFill>
                 <a:latin typeface="Pretendard" pitchFamily="34" charset="0"/>
                 <a:ea typeface="Pretendard" pitchFamily="34" charset="-122"/>
@@ -5449,7 +6278,7 @@
             <a:r>
               <a:rPr lang="en-US" sz="930" dirty="0">
                 <a:solidFill>
-                  <a:srgbClr val="0F172A"/>
+                  <a:srgbClr val="10161F"/>
                 </a:solidFill>
                 <a:latin typeface="Pretendard" pitchFamily="34" charset="0"/>
                 <a:ea typeface="Pretendard" pitchFamily="34" charset="-122"/>
@@ -5463,7 +6292,7 @@
       </p:sp>
       <p:sp>
         <p:nvSpPr>
-          <p:cNvPr id="13" name="Shape 11"/>
+          <p:cNvPr id="14" name="Shape 12"/>
           <p:cNvSpPr/>
           <p:nvPr/>
         </p:nvSpPr>
@@ -5478,14 +6307,14 @@
             </a:avLst>
           </a:prstGeom>
           <a:solidFill>
-            <a:srgbClr val="DBEAFE"/>
+            <a:srgbClr val="BEE3F8"/>
           </a:solidFill>
           <a:ln/>
         </p:spPr>
       </p:sp>
       <p:sp>
         <p:nvSpPr>
-          <p:cNvPr id="14" name="Shape 12"/>
+          <p:cNvPr id="15" name="Shape 13"/>
           <p:cNvSpPr/>
           <p:nvPr/>
         </p:nvSpPr>
@@ -5498,14 +6327,14 @@
             <a:avLst/>
           </a:prstGeom>
           <a:solidFill>
-            <a:srgbClr val="1D4ED8"/>
+            <a:srgbClr val="2B6CB0"/>
           </a:solidFill>
           <a:ln/>
         </p:spPr>
       </p:sp>
       <p:sp>
         <p:nvSpPr>
-          <p:cNvPr id="15" name="Text 13"/>
+          <p:cNvPr id="16" name="Text 14"/>
           <p:cNvSpPr/>
           <p:nvPr/>
         </p:nvSpPr>
@@ -5530,7 +6359,7 @@
             <a:r>
               <a:rPr lang="en-US" sz="1050" b="1" dirty="0">
                 <a:solidFill>
-                  <a:srgbClr val="1D4ED8"/>
+                  <a:srgbClr val="2B6CB0"/>
                 </a:solidFill>
                 <a:latin typeface="Pretendard" pitchFamily="34" charset="0"/>
                 <a:ea typeface="Pretendard" pitchFamily="34" charset="-122"/>
@@ -5544,7 +6373,7 @@
       </p:sp>
       <p:sp>
         <p:nvSpPr>
-          <p:cNvPr id="16" name="Text 14"/>
+          <p:cNvPr id="17" name="Text 15"/>
           <p:cNvSpPr/>
           <p:nvPr/>
         </p:nvSpPr>
@@ -5573,7 +6402,7 @@
             <a:r>
               <a:rPr lang="en-US" sz="930" dirty="0">
                 <a:solidFill>
-                  <a:srgbClr val="0F172A"/>
+                  <a:srgbClr val="10161F"/>
                 </a:solidFill>
                 <a:latin typeface="Pretendard" pitchFamily="34" charset="0"/>
                 <a:ea typeface="Pretendard" pitchFamily="34" charset="-122"/>
@@ -5594,7 +6423,7 @@
             <a:r>
               <a:rPr lang="en-US" sz="930" dirty="0">
                 <a:solidFill>
-                  <a:srgbClr val="0F172A"/>
+                  <a:srgbClr val="10161F"/>
                 </a:solidFill>
                 <a:latin typeface="Pretendard" pitchFamily="34" charset="0"/>
                 <a:ea typeface="Pretendard" pitchFamily="34" charset="-122"/>
@@ -5615,7 +6444,7 @@
             <a:r>
               <a:rPr lang="en-US" sz="930" dirty="0">
                 <a:solidFill>
-                  <a:srgbClr val="0F172A"/>
+                  <a:srgbClr val="10161F"/>
                 </a:solidFill>
                 <a:latin typeface="Pretendard" pitchFamily="34" charset="0"/>
                 <a:ea typeface="Pretendard" pitchFamily="34" charset="-122"/>
@@ -5629,65 +6458,81 @@
       </p:sp>
       <p:sp>
         <p:nvSpPr>
-          <p:cNvPr id="17" name="Text 15"/>
-          <p:cNvSpPr/>
-          <p:nvPr/>
-        </p:nvSpPr>
-        <p:spPr>
-          <a:xfrm>
-            <a:off x="566928" y="6419088"/>
-            <a:ext cx="11057839" cy="201168"/>
-          </a:xfrm>
-          <a:prstGeom prst="rect">
-            <a:avLst/>
-          </a:prstGeom>
-          <a:noFill/>
-          <a:ln/>
-        </p:spPr>
-        <p:txBody>
-          <a:bodyPr wrap="square" lIns="0" tIns="0" rIns="0" bIns="0" rtlCol="0" anchor="ctr"/>
-          <a:lstStyle/>
-          <a:p>
-            <a:pPr algn="ctr" indent="0" marL="0">
-              <a:buNone/>
-            </a:pPr>
-            <a:r>
-              <a:rPr lang="en-US" sz="750" dirty="0">
-                <a:solidFill>
-                  <a:srgbClr val="64748B"/>
-                </a:solidFill>
-                <a:latin typeface="Pretendard" pitchFamily="34" charset="0"/>
-                <a:ea typeface="Pretendard" pitchFamily="34" charset="-122"/>
-                <a:cs typeface="Pretendard" pitchFamily="34" charset="-120"/>
-              </a:rPr>
-              <a:t>크리딜  ·    ·  5</a:t>
-            </a:r>
-            <a:endParaRPr lang="en-US" sz="750" dirty="0"/>
-          </a:p>
-        </p:txBody>
-      </p:sp>
-      <p:sp>
-        <p:nvSpPr>
-          <p:cNvPr id="18" name="Shape 16"/>
-          <p:cNvSpPr/>
-          <p:nvPr/>
-        </p:nvSpPr>
-        <p:spPr>
-          <a:xfrm>
-            <a:off x="4437172" y="6382512"/>
-            <a:ext cx="3317352" cy="0"/>
-          </a:xfrm>
-          <a:prstGeom prst="line">
-            <a:avLst/>
-          </a:prstGeom>
-          <a:noFill/>
-          <a:ln w="6350">
-            <a:solidFill>
-              <a:srgbClr val="6B8E00"/>
-            </a:solidFill>
-            <a:prstDash val="solid"/>
-          </a:ln>
-        </p:spPr>
+          <p:cNvPr id="18" name="Text 16"/>
+          <p:cNvSpPr/>
+          <p:nvPr/>
+        </p:nvSpPr>
+        <p:spPr>
+          <a:xfrm>
+            <a:off x="566928" y="6382512"/>
+            <a:ext cx="7315200" cy="219456"/>
+          </a:xfrm>
+          <a:prstGeom prst="rect">
+            <a:avLst/>
+          </a:prstGeom>
+          <a:noFill/>
+          <a:ln/>
+        </p:spPr>
+        <p:txBody>
+          <a:bodyPr wrap="square" lIns="0" tIns="0" rIns="0" bIns="0" rtlCol="0" anchor="ctr"/>
+          <a:lstStyle/>
+          <a:p>
+            <a:pPr indent="0" marL="0">
+              <a:buNone/>
+            </a:pPr>
+            <a:r>
+              <a:rPr lang="en-US" sz="800" dirty="0">
+                <a:solidFill>
+                  <a:srgbClr val="718096"/>
+                </a:solidFill>
+                <a:latin typeface="Pretendard" pitchFamily="34" charset="0"/>
+                <a:ea typeface="Pretendard" pitchFamily="34" charset="-122"/>
+                <a:cs typeface="Pretendard" pitchFamily="34" charset="-120"/>
+              </a:rPr>
+              <a:t>크리딜   |   </a:t>
+            </a:r>
+            <a:endParaRPr lang="en-US" sz="800" dirty="0"/>
+          </a:p>
+        </p:txBody>
+      </p:sp>
+      <p:sp>
+        <p:nvSpPr>
+          <p:cNvPr id="19" name="Text 17"/>
+          <p:cNvSpPr/>
+          <p:nvPr/>
+        </p:nvSpPr>
+        <p:spPr>
+          <a:xfrm>
+            <a:off x="10710367" y="6382512"/>
+            <a:ext cx="914400" cy="219456"/>
+          </a:xfrm>
+          <a:prstGeom prst="rect">
+            <a:avLst/>
+          </a:prstGeom>
+          <a:noFill/>
+          <a:ln/>
+        </p:spPr>
+        <p:txBody>
+          <a:bodyPr wrap="square" lIns="0" tIns="0" rIns="0" bIns="0" rtlCol="0" anchor="ctr"/>
+          <a:lstStyle/>
+          <a:p>
+            <a:pPr algn="r" indent="0" marL="0">
+              <a:buNone/>
+            </a:pPr>
+            <a:r>
+              <a:rPr lang="en-US" sz="900" b="1" dirty="0">
+                <a:solidFill>
+                  <a:srgbClr val="B98A2E"/>
+                </a:solidFill>
+                <a:latin typeface="Arial" pitchFamily="34" charset="0"/>
+                <a:ea typeface="Arial" pitchFamily="34" charset="-122"/>
+                <a:cs typeface="Arial" pitchFamily="34" charset="-120"/>
+              </a:rPr>
+              <a:t>5</a:t>
+            </a:r>
+            <a:endParaRPr lang="en-US" sz="900" dirty="0"/>
+          </a:p>
+        </p:txBody>
       </p:sp>
     </p:spTree>
   </p:cSld>
@@ -5729,14 +6574,14 @@
         </p:nvSpPr>
         <p:spPr>
           <a:xfrm>
-            <a:off x="566928" y="384048"/>
-            <a:ext cx="45720" cy="566928"/>
-          </a:xfrm>
-          <a:prstGeom prst="rect">
+            <a:off x="566928" y="457200"/>
+            <a:ext cx="384048" cy="384048"/>
+          </a:xfrm>
+          <a:prstGeom prst="ellipse">
             <a:avLst/>
           </a:prstGeom>
           <a:solidFill>
-            <a:srgbClr val="6B8E00"/>
+            <a:srgbClr val="B98A2E"/>
           </a:solidFill>
           <a:ln/>
         </p:spPr>
@@ -5749,32 +6594,71 @@
         </p:nvSpPr>
         <p:spPr>
           <a:xfrm>
-            <a:off x="749808" y="384048"/>
-            <a:ext cx="10874959" cy="182880"/>
-          </a:xfrm>
-          <a:prstGeom prst="rect">
-            <a:avLst/>
-          </a:prstGeom>
-          <a:noFill/>
-          <a:ln/>
-        </p:spPr>
-        <p:txBody>
-          <a:bodyPr wrap="square" lIns="0" tIns="0" rIns="0" bIns="0" rtlCol="0" anchor="ctr"/>
-          <a:lstStyle/>
-          <a:p>
-            <a:pPr indent="0" marL="0">
-              <a:buNone/>
-            </a:pPr>
-            <a:r>
-              <a:rPr lang="en-US" sz="950" b="1" spc="200" kern="0" dirty="0">
-                <a:solidFill>
-                  <a:srgbClr val="6B8E00"/>
+            <a:off x="566928" y="457200"/>
+            <a:ext cx="384048" cy="384048"/>
+          </a:xfrm>
+          <a:prstGeom prst="rect">
+            <a:avLst/>
+          </a:prstGeom>
+          <a:noFill/>
+          <a:ln/>
+        </p:spPr>
+        <p:txBody>
+          <a:bodyPr wrap="square" lIns="0" tIns="0" rIns="0" bIns="0" rtlCol="0" anchor="ctr"/>
+          <a:lstStyle/>
+          <a:p>
+            <a:pPr algn="ctr" indent="0" marL="0">
+              <a:buNone/>
+            </a:pPr>
+            <a:r>
+              <a:rPr lang="en-US" sz="1300" b="1" dirty="0">
+                <a:solidFill>
+                  <a:srgbClr val="FFFFFF"/>
                 </a:solidFill>
                 <a:latin typeface="Arial" pitchFamily="34" charset="0"/>
                 <a:ea typeface="Arial" pitchFamily="34" charset="-122"/>
                 <a:cs typeface="Arial" pitchFamily="34" charset="-120"/>
               </a:rPr>
-              <a:t>06  Profit</a:t>
+              <a:t>06</a:t>
+            </a:r>
+            <a:endParaRPr lang="en-US" sz="1300" dirty="0"/>
+          </a:p>
+        </p:txBody>
+      </p:sp>
+      <p:sp>
+        <p:nvSpPr>
+          <p:cNvPr id="4" name="Text 2"/>
+          <p:cNvSpPr/>
+          <p:nvPr/>
+        </p:nvSpPr>
+        <p:spPr>
+          <a:xfrm>
+            <a:off x="1133856" y="457200"/>
+            <a:ext cx="10490911" cy="182880"/>
+          </a:xfrm>
+          <a:prstGeom prst="rect">
+            <a:avLst/>
+          </a:prstGeom>
+          <a:noFill/>
+          <a:ln/>
+        </p:spPr>
+        <p:txBody>
+          <a:bodyPr wrap="square" lIns="0" tIns="0" rIns="0" bIns="0" rtlCol="0" anchor="ctr"/>
+          <a:lstStyle/>
+          <a:p>
+            <a:pPr indent="0" marL="0">
+              <a:buNone/>
+            </a:pPr>
+            <a:r>
+              <a:rPr lang="en-US" sz="950" b="1" spc="200" kern="0" dirty="0">
+                <a:solidFill>
+                  <a:srgbClr val="B98A2E"/>
+                </a:solidFill>
+                <a:latin typeface="Arial" pitchFamily="34" charset="0"/>
+                <a:ea typeface="Arial" pitchFamily="34" charset="-122"/>
+                <a:cs typeface="Arial" pitchFamily="34" charset="-120"/>
+              </a:rPr>
+              <a:t>Profit</a:t>
             </a:r>
             <a:endParaRPr lang="en-US" sz="950" dirty="0"/>
           </a:p>
@@ -5782,14 +6666,14 @@
       </p:sp>
       <p:sp>
         <p:nvSpPr>
-          <p:cNvPr id="4" name="Text 2"/>
-          <p:cNvSpPr/>
-          <p:nvPr/>
-        </p:nvSpPr>
-        <p:spPr>
-          <a:xfrm>
-            <a:off x="749808" y="566928"/>
-            <a:ext cx="10874959" cy="384048"/>
+          <p:cNvPr id="5" name="Text 3"/>
+          <p:cNvSpPr/>
+          <p:nvPr/>
+        </p:nvSpPr>
+        <p:spPr>
+          <a:xfrm>
+            <a:off x="1133856" y="640080"/>
+            <a:ext cx="10490911" cy="365760"/>
           </a:xfrm>
           <a:prstGeom prst="rect">
             <a:avLst/>
@@ -5805,9 +6689,9 @@
               <a:buNone/>
             </a:pPr>
             <a:r>
-              <a:rPr lang="en-US" sz="2200" b="1" dirty="0">
-                <a:solidFill>
-                  <a:srgbClr val="0F172A"/>
+              <a:rPr lang="en-US" sz="2300" b="1" dirty="0">
+                <a:solidFill>
+                  <a:srgbClr val="10161F"/>
                 </a:solidFill>
                 <a:latin typeface="Pretendard" pitchFamily="34" charset="0"/>
                 <a:ea typeface="Pretendard" pitchFamily="34" charset="-122"/>
@@ -5815,29 +6699,133 @@
               </a:rPr>
               <a:t>수익성 분석</a:t>
             </a:r>
-            <a:endParaRPr lang="en-US" sz="2200" dirty="0"/>
-          </a:p>
-        </p:txBody>
-      </p:sp>
-      <p:sp>
-        <p:nvSpPr>
-          <p:cNvPr id="5" name="Text 3"/>
-          <p:cNvSpPr/>
-          <p:nvPr/>
-        </p:nvSpPr>
-        <p:spPr>
-          <a:xfrm>
-            <a:off x="566928" y="1417320"/>
-            <a:ext cx="2606040" cy="402336"/>
-          </a:xfrm>
-          <a:prstGeom prst="rect">
-            <a:avLst/>
-          </a:prstGeom>
-          <a:noFill/>
-          <a:ln/>
-        </p:spPr>
-        <p:txBody>
-          <a:bodyPr wrap="square" lIns="0" tIns="0" rIns="0" bIns="0" rtlCol="0" anchor="ctr"/>
+            <a:endParaRPr lang="en-US" sz="2300" dirty="0"/>
+          </a:p>
+        </p:txBody>
+      </p:sp>
+      <p:sp>
+        <p:nvSpPr>
+          <p:cNvPr id="6" name="Shape 4"/>
+          <p:cNvSpPr/>
+          <p:nvPr/>
+        </p:nvSpPr>
+        <p:spPr>
+          <a:xfrm>
+            <a:off x="566928" y="1325880"/>
+            <a:ext cx="11057839" cy="0"/>
+          </a:xfrm>
+          <a:prstGeom prst="line">
+            <a:avLst/>
+          </a:prstGeom>
+          <a:noFill/>
+          <a:ln w="19050">
+            <a:solidFill>
+              <a:srgbClr val="B98A2E"/>
+            </a:solidFill>
+            <a:prstDash val="solid"/>
+          </a:ln>
+        </p:spPr>
+      </p:sp>
+      <p:sp>
+        <p:nvSpPr>
+          <p:cNvPr id="7" name="Shape 5"/>
+          <p:cNvSpPr/>
+          <p:nvPr/>
+        </p:nvSpPr>
+        <p:spPr>
+          <a:xfrm>
+            <a:off x="566928" y="1645920"/>
+            <a:ext cx="11057839" cy="1280160"/>
+          </a:xfrm>
+          <a:prstGeom prst="roundRect">
+            <a:avLst>
+              <a:gd name="adj" fmla="val 4286"/>
+            </a:avLst>
+          </a:prstGeom>
+          <a:solidFill>
+            <a:srgbClr val="BEE3F8"/>
+          </a:solidFill>
+          <a:ln/>
+        </p:spPr>
+      </p:sp>
+      <p:sp>
+        <p:nvSpPr>
+          <p:cNvPr id="8" name="Shape 6"/>
+          <p:cNvSpPr/>
+          <p:nvPr/>
+        </p:nvSpPr>
+        <p:spPr>
+          <a:xfrm>
+            <a:off x="566928" y="1700784"/>
+            <a:ext cx="36576" cy="1170432"/>
+          </a:xfrm>
+          <a:prstGeom prst="rect">
+            <a:avLst/>
+          </a:prstGeom>
+          <a:solidFill>
+            <a:srgbClr val="2B6CB0"/>
+          </a:solidFill>
+          <a:ln/>
+        </p:spPr>
+      </p:sp>
+      <p:sp>
+        <p:nvSpPr>
+          <p:cNvPr id="9" name="Text 7"/>
+          <p:cNvSpPr/>
+          <p:nvPr/>
+        </p:nvSpPr>
+        <p:spPr>
+          <a:xfrm>
+            <a:off x="749808" y="1755648"/>
+            <a:ext cx="10728655" cy="201168"/>
+          </a:xfrm>
+          <a:prstGeom prst="rect">
+            <a:avLst/>
+          </a:prstGeom>
+          <a:noFill/>
+          <a:ln/>
+        </p:spPr>
+        <p:txBody>
+          <a:bodyPr wrap="square" lIns="0" tIns="0" rIns="0" bIns="0" rtlCol="0" anchor="ctr"/>
+          <a:lstStyle/>
+          <a:p>
+            <a:pPr indent="0" marL="0">
+              <a:buNone/>
+            </a:pPr>
+            <a:r>
+              <a:rPr lang="en-US" sz="1050" b="1" dirty="0">
+                <a:solidFill>
+                  <a:srgbClr val="2B6CB0"/>
+                </a:solidFill>
+                <a:latin typeface="Pretendard" pitchFamily="34" charset="0"/>
+                <a:ea typeface="Pretendard" pitchFamily="34" charset="-122"/>
+                <a:cs typeface="Pretendard" pitchFamily="34" charset="-120"/>
+              </a:rPr>
+              <a:t>투자 가치 제안</a:t>
+            </a:r>
+            <a:endParaRPr lang="en-US" sz="1050" dirty="0"/>
+          </a:p>
+        </p:txBody>
+      </p:sp>
+      <p:sp>
+        <p:nvSpPr>
+          <p:cNvPr id="10" name="Text 8"/>
+          <p:cNvSpPr/>
+          <p:nvPr/>
+        </p:nvSpPr>
+        <p:spPr>
+          <a:xfrm>
+            <a:off x="749808" y="1975104"/>
+            <a:ext cx="10728655" cy="877824"/>
+          </a:xfrm>
+          <a:prstGeom prst="rect">
+            <a:avLst/>
+          </a:prstGeom>
+          <a:noFill/>
+          <a:ln/>
+        </p:spPr>
+        <p:txBody>
+          <a:bodyPr wrap="square" lIns="0" tIns="0" rIns="0" bIns="0" rtlCol="0" anchor="t"/>
           <a:lstStyle/>
           <a:p>
             <a:pPr indent="0" marL="0">
@@ -5847,9 +6835,9 @@
               <a:buNone/>
             </a:pPr>
             <a:r>
-              <a:rPr lang="en-US" sz="1300" dirty="0">
-                <a:solidFill>
-                  <a:srgbClr val="64748B"/>
+              <a:rPr lang="en-US" sz="930" dirty="0">
+                <a:solidFill>
+                  <a:srgbClr val="10161F"/>
                 </a:solidFill>
                 <a:latin typeface="Pretendard" pitchFamily="34" charset="0"/>
                 <a:ea typeface="Pretendard" pitchFamily="34" charset="-122"/>
@@ -5857,20 +6845,20 @@
               </a:rPr>
               <a:t>연 순영업소득(NOI) 약 7.14억 원, 매입 Cap Rate 4.62%입니다.</a:t>
             </a:r>
-            <a:endParaRPr lang="en-US" sz="1300" dirty="0"/>
-          </a:p>
-        </p:txBody>
-      </p:sp>
-      <p:sp>
-        <p:nvSpPr>
-          <p:cNvPr id="6" name="Text 4"/>
-          <p:cNvSpPr/>
-          <p:nvPr/>
-        </p:nvSpPr>
-        <p:spPr>
-          <a:xfrm>
-            <a:off x="3172968" y="1417320"/>
-            <a:ext cx="4251960" cy="402336"/>
+            <a:endParaRPr lang="en-US" sz="930" dirty="0"/>
+          </a:p>
+        </p:txBody>
+      </p:sp>
+      <p:sp>
+        <p:nvSpPr>
+          <p:cNvPr id="11" name="Text 9"/>
+          <p:cNvSpPr/>
+          <p:nvPr/>
+        </p:nvSpPr>
+        <p:spPr>
+          <a:xfrm>
+            <a:off x="566928" y="6382512"/>
+            <a:ext cx="7315200" cy="219456"/>
           </a:xfrm>
           <a:prstGeom prst="rect">
             <a:avLst/>
@@ -5883,184 +6871,20 @@
           <a:lstStyle/>
           <a:p>
             <a:pPr indent="0" marL="0">
-              <a:lnSpc>
-                <a:spcPct val="120000"/>
-              </a:lnSpc>
-              <a:buNone/>
-            </a:pPr>
-            <a:endParaRPr lang="en-US" sz="1300" dirty="0"/>
-          </a:p>
-        </p:txBody>
-      </p:sp>
-      <p:sp>
-        <p:nvSpPr>
-          <p:cNvPr id="7" name="Shape 5"/>
-          <p:cNvSpPr/>
-          <p:nvPr/>
-        </p:nvSpPr>
-        <p:spPr>
-          <a:xfrm>
-            <a:off x="566928" y="1819656"/>
-            <a:ext cx="6858000" cy="0"/>
-          </a:xfrm>
-          <a:prstGeom prst="line">
-            <a:avLst/>
-          </a:prstGeom>
-          <a:noFill/>
-          <a:ln w="3810">
-            <a:solidFill>
-              <a:srgbClr val="CBD5E1"/>
-            </a:solidFill>
-            <a:prstDash val="solid"/>
-          </a:ln>
-        </p:spPr>
-      </p:sp>
-      <p:sp>
-        <p:nvSpPr>
-          <p:cNvPr id="8" name="Text 6"/>
-          <p:cNvSpPr/>
-          <p:nvPr/>
-        </p:nvSpPr>
-        <p:spPr>
-          <a:xfrm>
-            <a:off x="566928" y="1819656"/>
-            <a:ext cx="2606040" cy="402336"/>
-          </a:xfrm>
-          <a:prstGeom prst="rect">
-            <a:avLst/>
-          </a:prstGeom>
-          <a:noFill/>
-          <a:ln/>
-        </p:spPr>
-        <p:txBody>
-          <a:bodyPr wrap="square" lIns="0" tIns="0" rIns="0" bIns="0" rtlCol="0" anchor="ctr"/>
-          <a:lstStyle/>
-          <a:p>
-            <a:pPr indent="0" marL="0">
-              <a:lnSpc>
-                <a:spcPct val="120000"/>
-              </a:lnSpc>
-              <a:buNone/>
-            </a:pPr>
-            <a:r>
-              <a:rPr lang="en-US" sz="1300" dirty="0">
-                <a:solidFill>
-                  <a:srgbClr val="64748B"/>
-                </a:solidFill>
-                <a:latin typeface="Pretendard" pitchFamily="34" charset="0"/>
-                <a:ea typeface="Pretendard" pitchFamily="34" charset="-122"/>
-                <a:cs typeface="Pretendard" pitchFamily="34" charset="-120"/>
-              </a:rPr>
-              <a:t>- 실투자금</a:t>
-            </a:r>
-            <a:endParaRPr lang="en-US" sz="1300" dirty="0"/>
-          </a:p>
-        </p:txBody>
-      </p:sp>
-      <p:sp>
-        <p:nvSpPr>
-          <p:cNvPr id="9" name="Text 7"/>
-          <p:cNvSpPr/>
-          <p:nvPr/>
-        </p:nvSpPr>
-        <p:spPr>
-          <a:xfrm>
-            <a:off x="3172968" y="1819656"/>
-            <a:ext cx="4251960" cy="402336"/>
-          </a:xfrm>
-          <a:prstGeom prst="rect">
-            <a:avLst/>
-          </a:prstGeom>
-          <a:noFill/>
-          <a:ln/>
-        </p:spPr>
-        <p:txBody>
-          <a:bodyPr wrap="square" lIns="0" tIns="0" rIns="0" bIns="0" rtlCol="0" anchor="ctr"/>
-          <a:lstStyle/>
-          <a:p>
-            <a:pPr indent="0" marL="0">
-              <a:lnSpc>
-                <a:spcPct val="120000"/>
-              </a:lnSpc>
-              <a:buNone/>
-            </a:pPr>
-            <a:r>
-              <a:rPr lang="en-US" sz="1300" b="1" dirty="0">
-                <a:solidFill>
-                  <a:srgbClr val="0F172A"/>
-                </a:solidFill>
-                <a:latin typeface="Pretendard" pitchFamily="34" charset="0"/>
-                <a:ea typeface="Pretendard" pitchFamily="34" charset="-122"/>
-                <a:cs typeface="Pretendard" pitchFamily="34" charset="-120"/>
-              </a:rPr>
-              <a:t>약 69억 원</a:t>
-            </a:r>
-            <a:endParaRPr lang="en-US" sz="1300" dirty="0"/>
-          </a:p>
-        </p:txBody>
-      </p:sp>
-      <p:sp>
-        <p:nvSpPr>
-          <p:cNvPr id="10" name="Shape 8"/>
-          <p:cNvSpPr/>
-          <p:nvPr/>
-        </p:nvSpPr>
-        <p:spPr>
-          <a:xfrm>
-            <a:off x="566928" y="2221992"/>
-            <a:ext cx="6858000" cy="0"/>
-          </a:xfrm>
-          <a:prstGeom prst="line">
-            <a:avLst/>
-          </a:prstGeom>
-          <a:noFill/>
-          <a:ln w="3810">
-            <a:solidFill>
-              <a:srgbClr val="CBD5E1"/>
-            </a:solidFill>
-            <a:prstDash val="solid"/>
-          </a:ln>
-        </p:spPr>
-      </p:sp>
-      <p:sp>
-        <p:nvSpPr>
-          <p:cNvPr id="11" name="Text 9"/>
-          <p:cNvSpPr/>
-          <p:nvPr/>
-        </p:nvSpPr>
-        <p:spPr>
-          <a:xfrm>
-            <a:off x="566928" y="2221992"/>
-            <a:ext cx="2606040" cy="402336"/>
-          </a:xfrm>
-          <a:prstGeom prst="rect">
-            <a:avLst/>
-          </a:prstGeom>
-          <a:noFill/>
-          <a:ln/>
-        </p:spPr>
-        <p:txBody>
-          <a:bodyPr wrap="square" lIns="0" tIns="0" rIns="0" bIns="0" rtlCol="0" anchor="ctr"/>
-          <a:lstStyle/>
-          <a:p>
-            <a:pPr indent="0" marL="0">
-              <a:lnSpc>
-                <a:spcPct val="120000"/>
-              </a:lnSpc>
-              <a:buNone/>
-            </a:pPr>
-            <a:r>
-              <a:rPr lang="en-US" sz="1300" dirty="0">
-                <a:solidFill>
-                  <a:srgbClr val="64748B"/>
-                </a:solidFill>
-                <a:latin typeface="Pretendard" pitchFamily="34" charset="0"/>
-                <a:ea typeface="Pretendard" pitchFamily="34" charset="-122"/>
-                <a:cs typeface="Pretendard" pitchFamily="34" charset="-120"/>
-              </a:rPr>
-              <a:t>- 순수익(매월)</a:t>
-            </a:r>
-            <a:endParaRPr lang="en-US" sz="1300" dirty="0"/>
+              <a:buNone/>
+            </a:pPr>
+            <a:r>
+              <a:rPr lang="en-US" sz="800" dirty="0">
+                <a:solidFill>
+                  <a:srgbClr val="718096"/>
+                </a:solidFill>
+                <a:latin typeface="Pretendard" pitchFamily="34" charset="0"/>
+                <a:ea typeface="Pretendard" pitchFamily="34" charset="-122"/>
+                <a:cs typeface="Pretendard" pitchFamily="34" charset="-120"/>
+              </a:rPr>
+              <a:t>크리딜   |   </a:t>
+            </a:r>
+            <a:endParaRPr lang="en-US" sz="800" dirty="0"/>
           </a:p>
         </p:txBody>
       </p:sp>
@@ -6072,231 +6896,36 @@
         </p:nvSpPr>
         <p:spPr>
           <a:xfrm>
-            <a:off x="3172968" y="2221992"/>
-            <a:ext cx="4251960" cy="402336"/>
-          </a:xfrm>
-          <a:prstGeom prst="rect">
-            <a:avLst/>
-          </a:prstGeom>
-          <a:noFill/>
-          <a:ln/>
-        </p:spPr>
-        <p:txBody>
-          <a:bodyPr wrap="square" lIns="0" tIns="0" rIns="0" bIns="0" rtlCol="0" anchor="ctr"/>
-          <a:lstStyle/>
-          <a:p>
-            <a:pPr indent="0" marL="0">
-              <a:lnSpc>
-                <a:spcPct val="120000"/>
-              </a:lnSpc>
-              <a:buNone/>
-            </a:pPr>
-            <a:r>
-              <a:rPr lang="en-US" sz="1300" b="1" dirty="0">
-                <a:solidFill>
-                  <a:srgbClr val="0F172A"/>
-                </a:solidFill>
-                <a:latin typeface="Pretendard" pitchFamily="34" charset="0"/>
-                <a:ea typeface="Pretendard" pitchFamily="34" charset="-122"/>
-                <a:cs typeface="Pretendard" pitchFamily="34" charset="-120"/>
-              </a:rPr>
-              <a:t>약 3,650만 원</a:t>
-            </a:r>
-            <a:endParaRPr lang="en-US" sz="1300" dirty="0"/>
-          </a:p>
-        </p:txBody>
-      </p:sp>
-      <p:sp>
-        <p:nvSpPr>
-          <p:cNvPr id="13" name="Shape 11"/>
-          <p:cNvSpPr/>
-          <p:nvPr/>
-        </p:nvSpPr>
-        <p:spPr>
-          <a:xfrm>
-            <a:off x="566928" y="2624328"/>
-            <a:ext cx="6858000" cy="0"/>
-          </a:xfrm>
-          <a:prstGeom prst="line">
-            <a:avLst/>
-          </a:prstGeom>
-          <a:noFill/>
-          <a:ln w="3810">
-            <a:solidFill>
-              <a:srgbClr val="CBD5E1"/>
-            </a:solidFill>
-            <a:prstDash val="solid"/>
-          </a:ln>
-        </p:spPr>
-      </p:sp>
-      <p:sp>
-        <p:nvSpPr>
-          <p:cNvPr id="14" name="Text 12"/>
-          <p:cNvSpPr/>
-          <p:nvPr/>
-        </p:nvSpPr>
-        <p:spPr>
-          <a:xfrm>
-            <a:off x="566928" y="2624328"/>
-            <a:ext cx="2606040" cy="402336"/>
-          </a:xfrm>
-          <a:prstGeom prst="rect">
-            <a:avLst/>
-          </a:prstGeom>
-          <a:noFill/>
-          <a:ln/>
-        </p:spPr>
-        <p:txBody>
-          <a:bodyPr wrap="square" lIns="0" tIns="0" rIns="0" bIns="0" rtlCol="0" anchor="ctr"/>
-          <a:lstStyle/>
-          <a:p>
-            <a:pPr indent="0" marL="0">
-              <a:lnSpc>
-                <a:spcPct val="120000"/>
-              </a:lnSpc>
-              <a:buNone/>
-            </a:pPr>
-            <a:r>
-              <a:rPr lang="en-US" sz="1300" dirty="0">
-                <a:solidFill>
-                  <a:srgbClr val="64748B"/>
-                </a:solidFill>
-                <a:latin typeface="Pretendard" pitchFamily="34" charset="0"/>
-                <a:ea typeface="Pretendard" pitchFamily="34" charset="-122"/>
-                <a:cs typeface="Pretendard" pitchFamily="34" charset="-120"/>
-              </a:rPr>
-              <a:t>- 레버리지 수익률</a:t>
-            </a:r>
-            <a:endParaRPr lang="en-US" sz="1300" dirty="0"/>
-          </a:p>
-        </p:txBody>
-      </p:sp>
-      <p:sp>
-        <p:nvSpPr>
-          <p:cNvPr id="15" name="Text 13"/>
-          <p:cNvSpPr/>
-          <p:nvPr/>
-        </p:nvSpPr>
-        <p:spPr>
-          <a:xfrm>
-            <a:off x="3172968" y="2624328"/>
-            <a:ext cx="4251960" cy="402336"/>
-          </a:xfrm>
-          <a:prstGeom prst="rect">
-            <a:avLst/>
-          </a:prstGeom>
-          <a:noFill/>
-          <a:ln/>
-        </p:spPr>
-        <p:txBody>
-          <a:bodyPr wrap="square" lIns="0" tIns="0" rIns="0" bIns="0" rtlCol="0" anchor="ctr"/>
-          <a:lstStyle/>
-          <a:p>
-            <a:pPr indent="0" marL="0">
-              <a:lnSpc>
-                <a:spcPct val="120000"/>
-              </a:lnSpc>
-              <a:buNone/>
-            </a:pPr>
-            <a:r>
-              <a:rPr lang="en-US" sz="1300" b="1" dirty="0">
-                <a:solidFill>
-                  <a:srgbClr val="0F172A"/>
-                </a:solidFill>
-                <a:latin typeface="Pretendard" pitchFamily="34" charset="0"/>
-                <a:ea typeface="Pretendard" pitchFamily="34" charset="-122"/>
-                <a:cs typeface="Pretendard" pitchFamily="34" charset="-120"/>
-              </a:rPr>
-              <a:t>약 5.8%</a:t>
-            </a:r>
-            <a:endParaRPr lang="en-US" sz="1300" dirty="0"/>
-          </a:p>
-        </p:txBody>
-      </p:sp>
-      <p:sp>
-        <p:nvSpPr>
-          <p:cNvPr id="16" name="Shape 14"/>
-          <p:cNvSpPr/>
-          <p:nvPr/>
-        </p:nvSpPr>
-        <p:spPr>
-          <a:xfrm>
-            <a:off x="7604608" y="1371600"/>
-            <a:ext cx="0" cy="4754880"/>
-          </a:xfrm>
-          <a:prstGeom prst="line">
-            <a:avLst/>
-          </a:prstGeom>
-          <a:noFill/>
-          <a:ln w="8890">
-            <a:solidFill>
-              <a:srgbClr val="6B8E00"/>
-            </a:solidFill>
-            <a:prstDash val="solid"/>
-          </a:ln>
-        </p:spPr>
-      </p:sp>
-      <p:sp>
-        <p:nvSpPr>
-          <p:cNvPr id="17" name="Text 15"/>
-          <p:cNvSpPr/>
-          <p:nvPr/>
-        </p:nvSpPr>
-        <p:spPr>
-          <a:xfrm>
-            <a:off x="566928" y="6419088"/>
-            <a:ext cx="11057839" cy="201168"/>
-          </a:xfrm>
-          <a:prstGeom prst="rect">
-            <a:avLst/>
-          </a:prstGeom>
-          <a:noFill/>
-          <a:ln/>
-        </p:spPr>
-        <p:txBody>
-          <a:bodyPr wrap="square" lIns="0" tIns="0" rIns="0" bIns="0" rtlCol="0" anchor="ctr"/>
-          <a:lstStyle/>
-          <a:p>
-            <a:pPr algn="ctr" indent="0" marL="0">
-              <a:buNone/>
-            </a:pPr>
-            <a:r>
-              <a:rPr lang="en-US" sz="750" dirty="0">
-                <a:solidFill>
-                  <a:srgbClr val="64748B"/>
-                </a:solidFill>
-                <a:latin typeface="Pretendard" pitchFamily="34" charset="0"/>
-                <a:ea typeface="Pretendard" pitchFamily="34" charset="-122"/>
-                <a:cs typeface="Pretendard" pitchFamily="34" charset="-120"/>
-              </a:rPr>
-              <a:t>크리딜  ·    ·  6</a:t>
-            </a:r>
-            <a:endParaRPr lang="en-US" sz="750" dirty="0"/>
-          </a:p>
-        </p:txBody>
-      </p:sp>
-      <p:sp>
-        <p:nvSpPr>
-          <p:cNvPr id="18" name="Shape 16"/>
-          <p:cNvSpPr/>
-          <p:nvPr/>
-        </p:nvSpPr>
-        <p:spPr>
-          <a:xfrm>
-            <a:off x="4437172" y="6382512"/>
-            <a:ext cx="3317352" cy="0"/>
-          </a:xfrm>
-          <a:prstGeom prst="line">
-            <a:avLst/>
-          </a:prstGeom>
-          <a:noFill/>
-          <a:ln w="6350">
-            <a:solidFill>
-              <a:srgbClr val="6B8E00"/>
-            </a:solidFill>
-            <a:prstDash val="solid"/>
-          </a:ln>
-        </p:spPr>
+            <a:off x="10710367" y="6382512"/>
+            <a:ext cx="914400" cy="219456"/>
+          </a:xfrm>
+          <a:prstGeom prst="rect">
+            <a:avLst/>
+          </a:prstGeom>
+          <a:noFill/>
+          <a:ln/>
+        </p:spPr>
+        <p:txBody>
+          <a:bodyPr wrap="square" lIns="0" tIns="0" rIns="0" bIns="0" rtlCol="0" anchor="ctr"/>
+          <a:lstStyle/>
+          <a:p>
+            <a:pPr algn="r" indent="0" marL="0">
+              <a:buNone/>
+            </a:pPr>
+            <a:r>
+              <a:rPr lang="en-US" sz="900" b="1" dirty="0">
+                <a:solidFill>
+                  <a:srgbClr val="B98A2E"/>
+                </a:solidFill>
+                <a:latin typeface="Arial" pitchFamily="34" charset="0"/>
+                <a:ea typeface="Arial" pitchFamily="34" charset="-122"/>
+                <a:cs typeface="Arial" pitchFamily="34" charset="-120"/>
+              </a:rPr>
+              <a:t>6</a:t>
+            </a:r>
+            <a:endParaRPr lang="en-US" sz="900" dirty="0"/>
+          </a:p>
+        </p:txBody>
       </p:sp>
     </p:spTree>
   </p:cSld>
@@ -6338,14 +6967,14 @@
         </p:nvSpPr>
         <p:spPr>
           <a:xfrm>
-            <a:off x="566928" y="384048"/>
-            <a:ext cx="45720" cy="566928"/>
-          </a:xfrm>
-          <a:prstGeom prst="rect">
+            <a:off x="566928" y="457200"/>
+            <a:ext cx="384048" cy="384048"/>
+          </a:xfrm>
+          <a:prstGeom prst="ellipse">
             <a:avLst/>
           </a:prstGeom>
           <a:solidFill>
-            <a:srgbClr val="6B8E00"/>
+            <a:srgbClr val="B98A2E"/>
           </a:solidFill>
           <a:ln/>
         </p:spPr>
@@ -6358,32 +6987,71 @@
         </p:nvSpPr>
         <p:spPr>
           <a:xfrm>
-            <a:off x="749808" y="384048"/>
-            <a:ext cx="10874959" cy="182880"/>
-          </a:xfrm>
-          <a:prstGeom prst="rect">
-            <a:avLst/>
-          </a:prstGeom>
-          <a:noFill/>
-          <a:ln/>
-        </p:spPr>
-        <p:txBody>
-          <a:bodyPr wrap="square" lIns="0" tIns="0" rIns="0" bIns="0" rtlCol="0" anchor="ctr"/>
-          <a:lstStyle/>
-          <a:p>
-            <a:pPr indent="0" marL="0">
-              <a:buNone/>
-            </a:pPr>
-            <a:r>
-              <a:rPr lang="en-US" sz="950" b="1" spc="200" kern="0" dirty="0">
-                <a:solidFill>
-                  <a:srgbClr val="6B8E00"/>
+            <a:off x="566928" y="457200"/>
+            <a:ext cx="384048" cy="384048"/>
+          </a:xfrm>
+          <a:prstGeom prst="rect">
+            <a:avLst/>
+          </a:prstGeom>
+          <a:noFill/>
+          <a:ln/>
+        </p:spPr>
+        <p:txBody>
+          <a:bodyPr wrap="square" lIns="0" tIns="0" rIns="0" bIns="0" rtlCol="0" anchor="ctr"/>
+          <a:lstStyle/>
+          <a:p>
+            <a:pPr algn="ctr" indent="0" marL="0">
+              <a:buNone/>
+            </a:pPr>
+            <a:r>
+              <a:rPr lang="en-US" sz="1300" b="1" dirty="0">
+                <a:solidFill>
+                  <a:srgbClr val="FFFFFF"/>
                 </a:solidFill>
                 <a:latin typeface="Arial" pitchFamily="34" charset="0"/>
                 <a:ea typeface="Arial" pitchFamily="34" charset="-122"/>
                 <a:cs typeface="Arial" pitchFamily="34" charset="-120"/>
               </a:rPr>
-              <a:t>07  Risk</a:t>
+              <a:t>07</a:t>
+            </a:r>
+            <a:endParaRPr lang="en-US" sz="1300" dirty="0"/>
+          </a:p>
+        </p:txBody>
+      </p:sp>
+      <p:sp>
+        <p:nvSpPr>
+          <p:cNvPr id="4" name="Text 2"/>
+          <p:cNvSpPr/>
+          <p:nvPr/>
+        </p:nvSpPr>
+        <p:spPr>
+          <a:xfrm>
+            <a:off x="1133856" y="457200"/>
+            <a:ext cx="10490911" cy="182880"/>
+          </a:xfrm>
+          <a:prstGeom prst="rect">
+            <a:avLst/>
+          </a:prstGeom>
+          <a:noFill/>
+          <a:ln/>
+        </p:spPr>
+        <p:txBody>
+          <a:bodyPr wrap="square" lIns="0" tIns="0" rIns="0" bIns="0" rtlCol="0" anchor="ctr"/>
+          <a:lstStyle/>
+          <a:p>
+            <a:pPr indent="0" marL="0">
+              <a:buNone/>
+            </a:pPr>
+            <a:r>
+              <a:rPr lang="en-US" sz="950" b="1" spc="200" kern="0" dirty="0">
+                <a:solidFill>
+                  <a:srgbClr val="B98A2E"/>
+                </a:solidFill>
+                <a:latin typeface="Arial" pitchFamily="34" charset="0"/>
+                <a:ea typeface="Arial" pitchFamily="34" charset="-122"/>
+                <a:cs typeface="Arial" pitchFamily="34" charset="-120"/>
+              </a:rPr>
+              <a:t>Risk</a:t>
             </a:r>
             <a:endParaRPr lang="en-US" sz="950" dirty="0"/>
           </a:p>
@@ -6391,14 +7059,14 @@
       </p:sp>
       <p:sp>
         <p:nvSpPr>
-          <p:cNvPr id="4" name="Text 2"/>
-          <p:cNvSpPr/>
-          <p:nvPr/>
-        </p:nvSpPr>
-        <p:spPr>
-          <a:xfrm>
-            <a:off x="749808" y="566928"/>
-            <a:ext cx="10874959" cy="384048"/>
+          <p:cNvPr id="5" name="Text 3"/>
+          <p:cNvSpPr/>
+          <p:nvPr/>
+        </p:nvSpPr>
+        <p:spPr>
+          <a:xfrm>
+            <a:off x="1133856" y="640080"/>
+            <a:ext cx="10490911" cy="365760"/>
           </a:xfrm>
           <a:prstGeom prst="rect">
             <a:avLst/>
@@ -6414,9 +7082,9 @@
               <a:buNone/>
             </a:pPr>
             <a:r>
-              <a:rPr lang="en-US" sz="2200" b="1" dirty="0">
-                <a:solidFill>
-                  <a:srgbClr val="0F172A"/>
+              <a:rPr lang="en-US" sz="2300" b="1" dirty="0">
+                <a:solidFill>
+                  <a:srgbClr val="10161F"/>
                 </a:solidFill>
                 <a:latin typeface="Pretendard" pitchFamily="34" charset="0"/>
                 <a:ea typeface="Pretendard" pitchFamily="34" charset="-122"/>
@@ -6424,30 +7092,32 @@
               </a:rPr>
               <a:t>리스크 점검</a:t>
             </a:r>
-            <a:endParaRPr lang="en-US" sz="2200" dirty="0"/>
-          </a:p>
-        </p:txBody>
-      </p:sp>
-      <p:sp>
-        <p:nvSpPr>
-          <p:cNvPr id="5" name="Shape 3"/>
+            <a:endParaRPr lang="en-US" sz="2300" dirty="0"/>
+          </a:p>
+        </p:txBody>
+      </p:sp>
+      <p:sp>
+        <p:nvSpPr>
+          <p:cNvPr id="6" name="Shape 4"/>
           <p:cNvSpPr/>
           <p:nvPr/>
         </p:nvSpPr>
         <p:spPr>
           <a:xfrm>
             <a:off x="566928" y="1417320"/>
-            <a:ext cx="3503066" cy="3611880"/>
-          </a:xfrm>
-          <a:prstGeom prst="rect">
-            <a:avLst/>
+            <a:ext cx="5391760" cy="3611880"/>
+          </a:xfrm>
+          <a:prstGeom prst="roundRect">
+            <a:avLst>
+              <a:gd name="adj" fmla="val 1519"/>
+            </a:avLst>
           </a:prstGeom>
           <a:solidFill>
-            <a:srgbClr val="F8FAFC"/>
+            <a:srgbClr val="F7FAFC"/>
           </a:solidFill>
-          <a:ln w="3810">
+          <a:ln w="6350">
             <a:solidFill>
-              <a:srgbClr val="CBD5E1"/>
+              <a:srgbClr val="CBD5E0"/>
             </a:solidFill>
             <a:prstDash val="solid"/>
           </a:ln>
@@ -6455,46 +7125,26 @@
       </p:sp>
       <p:sp>
         <p:nvSpPr>
-          <p:cNvPr id="6" name="Shape 4"/>
+          <p:cNvPr id="7" name="Shape 5"/>
           <p:cNvSpPr/>
           <p:nvPr/>
         </p:nvSpPr>
         <p:spPr>
           <a:xfrm>
             <a:off x="566928" y="1417320"/>
-            <a:ext cx="3503066" cy="36576"/>
+            <a:ext cx="5391760" cy="45720"/>
           </a:xfrm>
           <a:prstGeom prst="rect">
             <a:avLst/>
           </a:prstGeom>
           <a:solidFill>
-            <a:srgbClr val="6B8E00"/>
+            <a:srgbClr val="B98A2E"/>
           </a:solidFill>
           <a:ln/>
         </p:spPr>
       </p:sp>
       <p:sp>
         <p:nvSpPr>
-          <p:cNvPr id="7" name="Shape 5"/>
-          <p:cNvSpPr/>
-          <p:nvPr/>
-        </p:nvSpPr>
-        <p:spPr>
-          <a:xfrm>
-            <a:off x="566928" y="1417320"/>
-            <a:ext cx="3503066" cy="45720"/>
-          </a:xfrm>
-          <a:prstGeom prst="rect">
-            <a:avLst/>
-          </a:prstGeom>
-          <a:solidFill>
-            <a:srgbClr val="6B8E00"/>
-          </a:solidFill>
-          <a:ln/>
-        </p:spPr>
-      </p:sp>
-      <p:sp>
-        <p:nvSpPr>
           <p:cNvPr id="8" name="Text 6"/>
           <p:cNvSpPr/>
           <p:nvPr/>
@@ -6502,7 +7152,7 @@
         <p:spPr>
           <a:xfrm>
             <a:off x="795528" y="1618488"/>
-            <a:ext cx="3045866" cy="292608"/>
+            <a:ext cx="4934560" cy="292608"/>
           </a:xfrm>
           <a:prstGeom prst="rect">
             <a:avLst/>
@@ -6520,7 +7170,7 @@
             <a:r>
               <a:rPr lang="en-US" sz="1350" b="1" dirty="0">
                 <a:solidFill>
-                  <a:srgbClr val="4F6A00"/>
+                  <a:srgbClr val="977024"/>
                 </a:solidFill>
                 <a:latin typeface="Pretendard" pitchFamily="34" charset="0"/>
                 <a:ea typeface="Pretendard" pitchFamily="34" charset="-122"/>
@@ -6540,26 +7190,28 @@
         </p:nvSpPr>
         <p:spPr>
           <a:xfrm>
-            <a:off x="795528" y="1929384"/>
-            <a:ext cx="3045866" cy="347472"/>
-          </a:xfrm>
-          <a:prstGeom prst="rect">
-            <a:avLst/>
-          </a:prstGeom>
-          <a:noFill/>
-          <a:ln/>
-        </p:spPr>
-        <p:txBody>
-          <a:bodyPr wrap="square" lIns="0" tIns="0" rIns="0" bIns="0" rtlCol="0" anchor="ctr"/>
+            <a:off x="795528" y="1911096"/>
+            <a:ext cx="4934560" cy="402336"/>
+          </a:xfrm>
+          <a:prstGeom prst="rect">
+            <a:avLst/>
+          </a:prstGeom>
+          <a:noFill/>
+          <a:ln/>
+        </p:spPr>
+        <p:txBody>
+          <a:bodyPr wrap="square" lIns="0" tIns="0" rIns="0" bIns="0" rtlCol="0" anchor="ctr">
+            <a:normAutofit/>
+          </a:bodyPr>
           <a:lstStyle/>
           <a:p>
             <a:pPr indent="0" marL="0">
               <a:buNone/>
             </a:pPr>
             <a:r>
-              <a:rPr lang="en-US" sz="1500" b="1" dirty="0">
-                <a:solidFill>
-                  <a:srgbClr val="0F172A"/>
+              <a:rPr lang="en-US" sz="1350" b="1" dirty="0">
+                <a:solidFill>
+                  <a:srgbClr val="10161F"/>
                 </a:solidFill>
                 <a:latin typeface="Pretendard" pitchFamily="34" charset="0"/>
                 <a:ea typeface="Pretendard" pitchFamily="34" charset="-122"/>
@@ -6567,7 +7219,7 @@
               </a:rPr>
               <a:t>전층 의료</a:t>
             </a:r>
-            <a:endParaRPr lang="en-US" sz="1500" dirty="0"/>
+            <a:endParaRPr lang="en-US" sz="1350" dirty="0"/>
           </a:p>
         </p:txBody>
       </p:sp>
@@ -6579,27 +7231,32 @@
         </p:nvSpPr>
         <p:spPr>
           <a:xfrm>
-            <a:off x="795528" y="2313432"/>
-            <a:ext cx="3045866" cy="2606040"/>
-          </a:xfrm>
-          <a:prstGeom prst="rect">
-            <a:avLst/>
-          </a:prstGeom>
-          <a:noFill/>
-          <a:ln/>
-        </p:spPr>
-        <p:txBody>
-          <a:bodyPr wrap="square" lIns="0" tIns="0" rIns="0" bIns="0" rtlCol="0" anchor="t"/>
+            <a:off x="795528" y="2377440"/>
+            <a:ext cx="4934560" cy="2560320"/>
+          </a:xfrm>
+          <a:prstGeom prst="rect">
+            <a:avLst/>
+          </a:prstGeom>
+          <a:noFill/>
+          <a:ln/>
+        </p:spPr>
+        <p:txBody>
+          <a:bodyPr wrap="square" lIns="0" tIns="0" rIns="0" bIns="0" rtlCol="0" anchor="t">
+            <a:normAutofit/>
+          </a:bodyPr>
           <a:lstStyle/>
           <a:p>
             <a:pPr marL="342900" indent="-342900">
+              <a:lnSpc>
+                <a:spcPct val="125000"/>
+              </a:lnSpc>
               <a:buSzPct val="100000"/>
               <a:buChar char="•"/>
             </a:pPr>
             <a:r>
-              <a:rPr lang="en-US" sz="1250" dirty="0">
-                <a:solidFill>
-                  <a:srgbClr val="0F172A"/>
+              <a:rPr lang="en-US" sz="1200" dirty="0">
+                <a:solidFill>
+                  <a:srgbClr val="10161F"/>
                 </a:solidFill>
                 <a:latin typeface="Pretendard" pitchFamily="34" charset="0"/>
                 <a:ea typeface="Pretendard" pitchFamily="34" charset="-122"/>
@@ -6607,7 +7264,7 @@
               </a:rPr>
               <a:t>업종 다각화 검토</a:t>
             </a:r>
-            <a:endParaRPr lang="en-US" sz="1250" dirty="0"/>
+            <a:endParaRPr lang="en-US" sz="1200" dirty="0"/>
           </a:p>
         </p:txBody>
       </p:sp>
@@ -6619,18 +7276,20 @@
         </p:nvSpPr>
         <p:spPr>
           <a:xfrm>
-            <a:off x="4344314" y="1417320"/>
-            <a:ext cx="3503066" cy="3611880"/>
-          </a:xfrm>
-          <a:prstGeom prst="rect">
-            <a:avLst/>
+            <a:off x="6233008" y="1417320"/>
+            <a:ext cx="5391760" cy="3611880"/>
+          </a:xfrm>
+          <a:prstGeom prst="roundRect">
+            <a:avLst>
+              <a:gd name="adj" fmla="val 1519"/>
+            </a:avLst>
           </a:prstGeom>
           <a:solidFill>
-            <a:srgbClr val="F8FAFC"/>
+            <a:srgbClr val="F7FAFC"/>
           </a:solidFill>
-          <a:ln w="3810">
+          <a:ln w="6350">
             <a:solidFill>
-              <a:srgbClr val="CBD5E1"/>
+              <a:srgbClr val="CBD5E0"/>
             </a:solidFill>
             <a:prstDash val="solid"/>
           </a:ln>
@@ -6644,37 +7303,56 @@
         </p:nvSpPr>
         <p:spPr>
           <a:xfrm>
-            <a:off x="4344314" y="1417320"/>
-            <a:ext cx="3503066" cy="36576"/>
+            <a:off x="6233008" y="1417320"/>
+            <a:ext cx="5391760" cy="45720"/>
           </a:xfrm>
           <a:prstGeom prst="rect">
             <a:avLst/>
           </a:prstGeom>
           <a:solidFill>
-            <a:srgbClr val="6B8E00"/>
+            <a:srgbClr val="B98A2E"/>
           </a:solidFill>
           <a:ln/>
         </p:spPr>
       </p:sp>
       <p:sp>
         <p:nvSpPr>
-          <p:cNvPr id="13" name="Shape 11"/>
-          <p:cNvSpPr/>
-          <p:nvPr/>
-        </p:nvSpPr>
-        <p:spPr>
-          <a:xfrm>
-            <a:off x="4344314" y="1417320"/>
-            <a:ext cx="3503066" cy="45720"/>
-          </a:xfrm>
-          <a:prstGeom prst="rect">
-            <a:avLst/>
-          </a:prstGeom>
-          <a:solidFill>
-            <a:srgbClr val="6B8E00"/>
-          </a:solidFill>
-          <a:ln/>
-        </p:spPr>
+          <p:cNvPr id="13" name="Text 11"/>
+          <p:cNvSpPr/>
+          <p:nvPr/>
+        </p:nvSpPr>
+        <p:spPr>
+          <a:xfrm>
+            <a:off x="6461608" y="1618488"/>
+            <a:ext cx="4934560" cy="292608"/>
+          </a:xfrm>
+          <a:prstGeom prst="rect">
+            <a:avLst/>
+          </a:prstGeom>
+          <a:noFill/>
+          <a:ln/>
+        </p:spPr>
+        <p:txBody>
+          <a:bodyPr wrap="square" lIns="0" tIns="0" rIns="0" bIns="0" rtlCol="0" anchor="ctr"/>
+          <a:lstStyle/>
+          <a:p>
+            <a:pPr indent="0" marL="0">
+              <a:buNone/>
+            </a:pPr>
+            <a:r>
+              <a:rPr lang="en-US" sz="1350" b="1" dirty="0">
+                <a:solidFill>
+                  <a:srgbClr val="977024"/>
+                </a:solidFill>
+                <a:latin typeface="Pretendard" pitchFamily="34" charset="0"/>
+                <a:ea typeface="Pretendard" pitchFamily="34" charset="-122"/>
+                <a:cs typeface="Pretendard" pitchFamily="34" charset="-120"/>
+              </a:rPr>
+              <a:t>금리 변동</a:t>
+            </a:r>
+            <a:endParaRPr lang="en-US" sz="1350" dirty="0"/>
+          </a:p>
+        </p:txBody>
       </p:sp>
       <p:sp>
         <p:nvSpPr>
@@ -6684,17 +7362,19 @@
         </p:nvSpPr>
         <p:spPr>
           <a:xfrm>
-            <a:off x="4572914" y="1618488"/>
-            <a:ext cx="3045866" cy="292608"/>
-          </a:xfrm>
-          <a:prstGeom prst="rect">
-            <a:avLst/>
-          </a:prstGeom>
-          <a:noFill/>
-          <a:ln/>
-        </p:spPr>
-        <p:txBody>
-          <a:bodyPr wrap="square" lIns="0" tIns="0" rIns="0" bIns="0" rtlCol="0" anchor="ctr"/>
+            <a:off x="6461608" y="1911096"/>
+            <a:ext cx="4934560" cy="402336"/>
+          </a:xfrm>
+          <a:prstGeom prst="rect">
+            <a:avLst/>
+          </a:prstGeom>
+          <a:noFill/>
+          <a:ln/>
+        </p:spPr>
+        <p:txBody>
+          <a:bodyPr wrap="square" lIns="0" tIns="0" rIns="0" bIns="0" rtlCol="0" anchor="ctr">
+            <a:normAutofit/>
+          </a:bodyPr>
           <a:lstStyle/>
           <a:p>
             <a:pPr indent="0" marL="0">
@@ -6703,13 +7383,13 @@
             <a:r>
               <a:rPr lang="en-US" sz="1350" b="1" dirty="0">
                 <a:solidFill>
-                  <a:srgbClr val="4F6A00"/>
-                </a:solidFill>
-                <a:latin typeface="Pretendard" pitchFamily="34" charset="0"/>
-                <a:ea typeface="Pretendard" pitchFamily="34" charset="-122"/>
-                <a:cs typeface="Pretendard" pitchFamily="34" charset="-120"/>
-              </a:rPr>
-              <a:t>금리 변동</a:t>
+                  <a:srgbClr val="10161F"/>
+                </a:solidFill>
+                <a:latin typeface="Pretendard" pitchFamily="34" charset="0"/>
+                <a:ea typeface="Pretendard" pitchFamily="34" charset="-122"/>
+                <a:cs typeface="Pretendard" pitchFamily="34" charset="-120"/>
+              </a:rPr>
+              <a:t>4.1% 고정</a:t>
             </a:r>
             <a:endParaRPr lang="en-US" sz="1350" dirty="0"/>
           </a:p>
@@ -6723,66 +7403,32 @@
         </p:nvSpPr>
         <p:spPr>
           <a:xfrm>
-            <a:off x="4572914" y="1929384"/>
-            <a:ext cx="3045866" cy="347472"/>
-          </a:xfrm>
-          <a:prstGeom prst="rect">
-            <a:avLst/>
-          </a:prstGeom>
-          <a:noFill/>
-          <a:ln/>
-        </p:spPr>
-        <p:txBody>
-          <a:bodyPr wrap="square" lIns="0" tIns="0" rIns="0" bIns="0" rtlCol="0" anchor="ctr"/>
-          <a:lstStyle/>
-          <a:p>
-            <a:pPr indent="0" marL="0">
-              <a:buNone/>
-            </a:pPr>
-            <a:r>
-              <a:rPr lang="en-US" sz="1500" b="1" dirty="0">
-                <a:solidFill>
-                  <a:srgbClr val="0F172A"/>
-                </a:solidFill>
-                <a:latin typeface="Pretendard" pitchFamily="34" charset="0"/>
-                <a:ea typeface="Pretendard" pitchFamily="34" charset="-122"/>
-                <a:cs typeface="Pretendard" pitchFamily="34" charset="-120"/>
-              </a:rPr>
-              <a:t>4.1% 고정</a:t>
-            </a:r>
-            <a:endParaRPr lang="en-US" sz="1500" dirty="0"/>
-          </a:p>
-        </p:txBody>
-      </p:sp>
-      <p:sp>
-        <p:nvSpPr>
-          <p:cNvPr id="16" name="Text 14"/>
-          <p:cNvSpPr/>
-          <p:nvPr/>
-        </p:nvSpPr>
-        <p:spPr>
-          <a:xfrm>
-            <a:off x="4572914" y="2313432"/>
-            <a:ext cx="3045866" cy="2606040"/>
-          </a:xfrm>
-          <a:prstGeom prst="rect">
-            <a:avLst/>
-          </a:prstGeom>
-          <a:noFill/>
-          <a:ln/>
-        </p:spPr>
-        <p:txBody>
-          <a:bodyPr wrap="square" lIns="0" tIns="0" rIns="0" bIns="0" rtlCol="0" anchor="t"/>
+            <a:off x="6461608" y="2377440"/>
+            <a:ext cx="4934560" cy="2560320"/>
+          </a:xfrm>
+          <a:prstGeom prst="rect">
+            <a:avLst/>
+          </a:prstGeom>
+          <a:noFill/>
+          <a:ln/>
+        </p:spPr>
+        <p:txBody>
+          <a:bodyPr wrap="square" lIns="0" tIns="0" rIns="0" bIns="0" rtlCol="0" anchor="t">
+            <a:normAutofit/>
+          </a:bodyPr>
           <a:lstStyle/>
           <a:p>
             <a:pPr marL="342900" indent="-342900">
+              <a:lnSpc>
+                <a:spcPct val="125000"/>
+              </a:lnSpc>
               <a:buSzPct val="100000"/>
               <a:buChar char="•"/>
             </a:pPr>
             <a:r>
-              <a:rPr lang="en-US" sz="1250" dirty="0">
-                <a:solidFill>
-                  <a:srgbClr val="0F172A"/>
+              <a:rPr lang="en-US" sz="1200" dirty="0">
+                <a:solidFill>
+                  <a:srgbClr val="10161F"/>
                 </a:solidFill>
                 <a:latin typeface="Pretendard" pitchFamily="34" charset="0"/>
                 <a:ea typeface="Pretendard" pitchFamily="34" charset="-122"/>
@@ -6790,7 +7436,46 @@
               </a:rPr>
               <a:t>승계 대출 활용</a:t>
             </a:r>
-            <a:endParaRPr lang="en-US" sz="1250" dirty="0"/>
+            <a:endParaRPr lang="en-US" sz="1200" dirty="0"/>
+          </a:p>
+        </p:txBody>
+      </p:sp>
+      <p:sp>
+        <p:nvSpPr>
+          <p:cNvPr id="16" name="Text 14"/>
+          <p:cNvSpPr/>
+          <p:nvPr/>
+        </p:nvSpPr>
+        <p:spPr>
+          <a:xfrm>
+            <a:off x="566928" y="6382512"/>
+            <a:ext cx="7315200" cy="219456"/>
+          </a:xfrm>
+          <a:prstGeom prst="rect">
+            <a:avLst/>
+          </a:prstGeom>
+          <a:noFill/>
+          <a:ln/>
+        </p:spPr>
+        <p:txBody>
+          <a:bodyPr wrap="square" lIns="0" tIns="0" rIns="0" bIns="0" rtlCol="0" anchor="ctr"/>
+          <a:lstStyle/>
+          <a:p>
+            <a:pPr indent="0" marL="0">
+              <a:buNone/>
+            </a:pPr>
+            <a:r>
+              <a:rPr lang="en-US" sz="800" dirty="0">
+                <a:solidFill>
+                  <a:srgbClr val="718096"/>
+                </a:solidFill>
+                <a:latin typeface="Pretendard" pitchFamily="34" charset="0"/>
+                <a:ea typeface="Pretendard" pitchFamily="34" charset="-122"/>
+                <a:cs typeface="Pretendard" pitchFamily="34" charset="-120"/>
+              </a:rPr>
+              <a:t>크리딜   |   </a:t>
+            </a:r>
+            <a:endParaRPr lang="en-US" sz="800" dirty="0"/>
           </a:p>
         </p:txBody>
       </p:sp>
@@ -6802,59 +7487,36 @@
         </p:nvSpPr>
         <p:spPr>
           <a:xfrm>
-            <a:off x="566928" y="6419088"/>
-            <a:ext cx="11057839" cy="201168"/>
-          </a:xfrm>
-          <a:prstGeom prst="rect">
-            <a:avLst/>
-          </a:prstGeom>
-          <a:noFill/>
-          <a:ln/>
-        </p:spPr>
-        <p:txBody>
-          <a:bodyPr wrap="square" lIns="0" tIns="0" rIns="0" bIns="0" rtlCol="0" anchor="ctr"/>
-          <a:lstStyle/>
-          <a:p>
-            <a:pPr algn="ctr" indent="0" marL="0">
-              <a:buNone/>
-            </a:pPr>
-            <a:r>
-              <a:rPr lang="en-US" sz="750" dirty="0">
-                <a:solidFill>
-                  <a:srgbClr val="64748B"/>
-                </a:solidFill>
-                <a:latin typeface="Pretendard" pitchFamily="34" charset="0"/>
-                <a:ea typeface="Pretendard" pitchFamily="34" charset="-122"/>
-                <a:cs typeface="Pretendard" pitchFamily="34" charset="-120"/>
-              </a:rPr>
-              <a:t>크리딜  ·    ·  7</a:t>
-            </a:r>
-            <a:endParaRPr lang="en-US" sz="750" dirty="0"/>
-          </a:p>
-        </p:txBody>
-      </p:sp>
-      <p:sp>
-        <p:nvSpPr>
-          <p:cNvPr id="18" name="Shape 16"/>
-          <p:cNvSpPr/>
-          <p:nvPr/>
-        </p:nvSpPr>
-        <p:spPr>
-          <a:xfrm>
-            <a:off x="4437172" y="6382512"/>
-            <a:ext cx="3317352" cy="0"/>
-          </a:xfrm>
-          <a:prstGeom prst="line">
-            <a:avLst/>
-          </a:prstGeom>
-          <a:noFill/>
-          <a:ln w="6350">
-            <a:solidFill>
-              <a:srgbClr val="6B8E00"/>
-            </a:solidFill>
-            <a:prstDash val="solid"/>
-          </a:ln>
-        </p:spPr>
+            <a:off x="10710367" y="6382512"/>
+            <a:ext cx="914400" cy="219456"/>
+          </a:xfrm>
+          <a:prstGeom prst="rect">
+            <a:avLst/>
+          </a:prstGeom>
+          <a:noFill/>
+          <a:ln/>
+        </p:spPr>
+        <p:txBody>
+          <a:bodyPr wrap="square" lIns="0" tIns="0" rIns="0" bIns="0" rtlCol="0" anchor="ctr"/>
+          <a:lstStyle/>
+          <a:p>
+            <a:pPr algn="r" indent="0" marL="0">
+              <a:buNone/>
+            </a:pPr>
+            <a:r>
+              <a:rPr lang="en-US" sz="900" b="1" dirty="0">
+                <a:solidFill>
+                  <a:srgbClr val="B98A2E"/>
+                </a:solidFill>
+                <a:latin typeface="Arial" pitchFamily="34" charset="0"/>
+                <a:ea typeface="Arial" pitchFamily="34" charset="-122"/>
+                <a:cs typeface="Arial" pitchFamily="34" charset="-120"/>
+              </a:rPr>
+              <a:t>7</a:t>
+            </a:r>
+            <a:endParaRPr lang="en-US" sz="900" dirty="0"/>
+          </a:p>
+        </p:txBody>
       </p:sp>
     </p:spTree>
   </p:cSld>
@@ -6896,14 +7558,14 @@
         </p:nvSpPr>
         <p:spPr>
           <a:xfrm>
-            <a:off x="566928" y="384048"/>
-            <a:ext cx="45720" cy="566928"/>
-          </a:xfrm>
-          <a:prstGeom prst="rect">
+            <a:off x="566928" y="457200"/>
+            <a:ext cx="384048" cy="384048"/>
+          </a:xfrm>
+          <a:prstGeom prst="ellipse">
             <a:avLst/>
           </a:prstGeom>
           <a:solidFill>
-            <a:srgbClr val="6B8E00"/>
+            <a:srgbClr val="B98A2E"/>
           </a:solidFill>
           <a:ln/>
         </p:spPr>
@@ -6916,32 +7578,71 @@
         </p:nvSpPr>
         <p:spPr>
           <a:xfrm>
-            <a:off x="749808" y="384048"/>
-            <a:ext cx="10874959" cy="182880"/>
-          </a:xfrm>
-          <a:prstGeom prst="rect">
-            <a:avLst/>
-          </a:prstGeom>
-          <a:noFill/>
-          <a:ln/>
-        </p:spPr>
-        <p:txBody>
-          <a:bodyPr wrap="square" lIns="0" tIns="0" rIns="0" bIns="0" rtlCol="0" anchor="ctr"/>
-          <a:lstStyle/>
-          <a:p>
-            <a:pPr indent="0" marL="0">
-              <a:buNone/>
-            </a:pPr>
-            <a:r>
-              <a:rPr lang="en-US" sz="950" b="1" spc="200" kern="0" dirty="0">
-                <a:solidFill>
-                  <a:srgbClr val="6B8E00"/>
+            <a:off x="566928" y="457200"/>
+            <a:ext cx="384048" cy="384048"/>
+          </a:xfrm>
+          <a:prstGeom prst="rect">
+            <a:avLst/>
+          </a:prstGeom>
+          <a:noFill/>
+          <a:ln/>
+        </p:spPr>
+        <p:txBody>
+          <a:bodyPr wrap="square" lIns="0" tIns="0" rIns="0" bIns="0" rtlCol="0" anchor="ctr"/>
+          <a:lstStyle/>
+          <a:p>
+            <a:pPr algn="ctr" indent="0" marL="0">
+              <a:buNone/>
+            </a:pPr>
+            <a:r>
+              <a:rPr lang="en-US" sz="1300" b="1" dirty="0">
+                <a:solidFill>
+                  <a:srgbClr val="FFFFFF"/>
                 </a:solidFill>
                 <a:latin typeface="Arial" pitchFamily="34" charset="0"/>
                 <a:ea typeface="Arial" pitchFamily="34" charset="-122"/>
                 <a:cs typeface="Arial" pitchFamily="34" charset="-120"/>
               </a:rPr>
-              <a:t>08  Thesis</a:t>
+              <a:t>08</a:t>
+            </a:r>
+            <a:endParaRPr lang="en-US" sz="1300" dirty="0"/>
+          </a:p>
+        </p:txBody>
+      </p:sp>
+      <p:sp>
+        <p:nvSpPr>
+          <p:cNvPr id="4" name="Text 2"/>
+          <p:cNvSpPr/>
+          <p:nvPr/>
+        </p:nvSpPr>
+        <p:spPr>
+          <a:xfrm>
+            <a:off x="1133856" y="457200"/>
+            <a:ext cx="10490911" cy="182880"/>
+          </a:xfrm>
+          <a:prstGeom prst="rect">
+            <a:avLst/>
+          </a:prstGeom>
+          <a:noFill/>
+          <a:ln/>
+        </p:spPr>
+        <p:txBody>
+          <a:bodyPr wrap="square" lIns="0" tIns="0" rIns="0" bIns="0" rtlCol="0" anchor="ctr"/>
+          <a:lstStyle/>
+          <a:p>
+            <a:pPr indent="0" marL="0">
+              <a:buNone/>
+            </a:pPr>
+            <a:r>
+              <a:rPr lang="en-US" sz="950" b="1" spc="200" kern="0" dirty="0">
+                <a:solidFill>
+                  <a:srgbClr val="B98A2E"/>
+                </a:solidFill>
+                <a:latin typeface="Arial" pitchFamily="34" charset="0"/>
+                <a:ea typeface="Arial" pitchFamily="34" charset="-122"/>
+                <a:cs typeface="Arial" pitchFamily="34" charset="-120"/>
+              </a:rPr>
+              <a:t>Thesis</a:t>
             </a:r>
             <a:endParaRPr lang="en-US" sz="950" dirty="0"/>
           </a:p>
@@ -6949,14 +7650,14 @@
       </p:sp>
       <p:sp>
         <p:nvSpPr>
-          <p:cNvPr id="4" name="Text 2"/>
-          <p:cNvSpPr/>
-          <p:nvPr/>
-        </p:nvSpPr>
-        <p:spPr>
-          <a:xfrm>
-            <a:off x="749808" y="566928"/>
-            <a:ext cx="10874959" cy="384048"/>
+          <p:cNvPr id="5" name="Text 3"/>
+          <p:cNvSpPr/>
+          <p:nvPr/>
+        </p:nvSpPr>
+        <p:spPr>
+          <a:xfrm>
+            <a:off x="1133856" y="640080"/>
+            <a:ext cx="10490911" cy="365760"/>
           </a:xfrm>
           <a:prstGeom prst="rect">
             <a:avLst/>
@@ -6972,9 +7673,9 @@
               <a:buNone/>
             </a:pPr>
             <a:r>
-              <a:rPr lang="en-US" sz="2200" b="1" dirty="0">
-                <a:solidFill>
-                  <a:srgbClr val="0F172A"/>
+              <a:rPr lang="en-US" sz="2300" b="1" dirty="0">
+                <a:solidFill>
+                  <a:srgbClr val="10161F"/>
                 </a:solidFill>
                 <a:latin typeface="Pretendard" pitchFamily="34" charset="0"/>
                 <a:ea typeface="Pretendard" pitchFamily="34" charset="-122"/>
@@ -6982,13 +7683,13 @@
               </a:rPr>
               <a:t>투자 포인트</a:t>
             </a:r>
-            <a:endParaRPr lang="en-US" sz="2200" dirty="0"/>
-          </a:p>
-        </p:txBody>
-      </p:sp>
-      <p:sp>
-        <p:nvSpPr>
-          <p:cNvPr id="5" name="Shape 3"/>
+            <a:endParaRPr lang="en-US" sz="2300" dirty="0"/>
+          </a:p>
+        </p:txBody>
+      </p:sp>
+      <p:sp>
+        <p:nvSpPr>
+          <p:cNvPr id="6" name="Shape 4"/>
           <p:cNvSpPr/>
           <p:nvPr/>
         </p:nvSpPr>
@@ -7003,11 +7704,11 @@
             </a:avLst>
           </a:prstGeom>
           <a:solidFill>
-            <a:srgbClr val="E8F5CC"/>
+            <a:srgbClr val="F3EBDA"/>
           </a:solidFill>
           <a:ln w="10160">
             <a:solidFill>
-              <a:srgbClr val="A3D900"/>
+              <a:srgbClr val="D9B668"/>
             </a:solidFill>
             <a:prstDash val="solid"/>
           </a:ln>
@@ -7015,14 +7716,14 @@
       </p:sp>
       <p:sp>
         <p:nvSpPr>
-          <p:cNvPr id="6" name="Text 4"/>
+          <p:cNvPr id="7" name="Text 5"/>
           <p:cNvSpPr/>
           <p:nvPr/>
         </p:nvSpPr>
         <p:spPr>
           <a:xfrm>
             <a:off x="749808" y="5093208"/>
-            <a:ext cx="1645920" cy="219456"/>
+            <a:ext cx="1691640" cy="256032"/>
           </a:xfrm>
           <a:prstGeom prst="rect">
             <a:avLst/>
@@ -7038,30 +7739,30 @@
               <a:buNone/>
             </a:pPr>
             <a:r>
-              <a:rPr lang="en-US" sz="950" b="1" dirty="0">
-                <a:solidFill>
-                  <a:srgbClr val="4F6A00"/>
-                </a:solidFill>
-                <a:latin typeface="Pretendard" pitchFamily="34" charset="0"/>
-                <a:ea typeface="Pretendard" pitchFamily="34" charset="-122"/>
-                <a:cs typeface="Pretendard" pitchFamily="34" charset="-120"/>
-              </a:rPr>
-              <a:t>💡 종합 가치 제안</a:t>
-            </a:r>
-            <a:endParaRPr lang="en-US" sz="950" dirty="0"/>
-          </a:p>
-        </p:txBody>
-      </p:sp>
-      <p:sp>
-        <p:nvSpPr>
-          <p:cNvPr id="7" name="Text 5"/>
-          <p:cNvSpPr/>
-          <p:nvPr/>
-        </p:nvSpPr>
-        <p:spPr>
-          <a:xfrm>
-            <a:off x="2441448" y="5074920"/>
-            <a:ext cx="9000439" cy="621792"/>
+              <a:rPr lang="en-US" sz="1050" b="1" dirty="0">
+                <a:solidFill>
+                  <a:srgbClr val="977024"/>
+                </a:solidFill>
+                <a:latin typeface="Pretendard" pitchFamily="34" charset="0"/>
+                <a:ea typeface="Pretendard" pitchFamily="34" charset="-122"/>
+                <a:cs typeface="Pretendard" pitchFamily="34" charset="-120"/>
+              </a:rPr>
+              <a:t>종합 가치 제안</a:t>
+            </a:r>
+            <a:endParaRPr lang="en-US" sz="1050" dirty="0"/>
+          </a:p>
+        </p:txBody>
+      </p:sp>
+      <p:sp>
+        <p:nvSpPr>
+          <p:cNvPr id="8" name="Text 6"/>
+          <p:cNvSpPr/>
+          <p:nvPr/>
+        </p:nvSpPr>
+        <p:spPr>
+          <a:xfrm>
+            <a:off x="2487168" y="5056632"/>
+            <a:ext cx="8954719" cy="658368"/>
           </a:xfrm>
           <a:prstGeom prst="rect">
             <a:avLst/>
@@ -7075,14 +7776,14 @@
           <a:p>
             <a:pPr indent="0" marL="0">
               <a:lnSpc>
-                <a:spcPct val="120000"/>
+                <a:spcPct val="125000"/>
               </a:lnSpc>
               <a:buNone/>
             </a:pPr>
             <a:r>
-              <a:rPr lang="en-US" sz="1000" dirty="0">
-                <a:solidFill>
-                  <a:srgbClr val="334155"/>
+              <a:rPr lang="en-US" sz="1100" dirty="0">
+                <a:solidFill>
+                  <a:srgbClr val="10161F"/>
                 </a:solidFill>
                 <a:latin typeface="Pretendard" pitchFamily="34" charset="0"/>
                 <a:ea typeface="Pretendard" pitchFamily="34" charset="-122"/>
@@ -7090,71 +7791,87 @@
               </a:rPr>
               <a:t>관점에서 안정적 월 임대수익과 우량 메디컬 테넌트를 보유한 핵심 투자 자산입니다.</a:t>
             </a:r>
-            <a:endParaRPr lang="en-US" sz="1000" dirty="0"/>
-          </a:p>
-        </p:txBody>
-      </p:sp>
-      <p:sp>
-        <p:nvSpPr>
-          <p:cNvPr id="8" name="Text 6"/>
-          <p:cNvSpPr/>
-          <p:nvPr/>
-        </p:nvSpPr>
-        <p:spPr>
-          <a:xfrm>
-            <a:off x="566928" y="6419088"/>
-            <a:ext cx="11057839" cy="201168"/>
-          </a:xfrm>
-          <a:prstGeom prst="rect">
-            <a:avLst/>
-          </a:prstGeom>
-          <a:noFill/>
-          <a:ln/>
-        </p:spPr>
-        <p:txBody>
-          <a:bodyPr wrap="square" lIns="0" tIns="0" rIns="0" bIns="0" rtlCol="0" anchor="ctr"/>
-          <a:lstStyle/>
-          <a:p>
-            <a:pPr algn="ctr" indent="0" marL="0">
-              <a:buNone/>
-            </a:pPr>
-            <a:r>
-              <a:rPr lang="en-US" sz="750" dirty="0">
-                <a:solidFill>
-                  <a:srgbClr val="64748B"/>
-                </a:solidFill>
-                <a:latin typeface="Pretendard" pitchFamily="34" charset="0"/>
-                <a:ea typeface="Pretendard" pitchFamily="34" charset="-122"/>
-                <a:cs typeface="Pretendard" pitchFamily="34" charset="-120"/>
-              </a:rPr>
-              <a:t>크리딜  ·    ·  8</a:t>
-            </a:r>
-            <a:endParaRPr lang="en-US" sz="750" dirty="0"/>
-          </a:p>
-        </p:txBody>
-      </p:sp>
-      <p:sp>
-        <p:nvSpPr>
-          <p:cNvPr id="9" name="Shape 7"/>
-          <p:cNvSpPr/>
-          <p:nvPr/>
-        </p:nvSpPr>
-        <p:spPr>
-          <a:xfrm>
-            <a:off x="4437172" y="6382512"/>
-            <a:ext cx="3317352" cy="0"/>
-          </a:xfrm>
-          <a:prstGeom prst="line">
-            <a:avLst/>
-          </a:prstGeom>
-          <a:noFill/>
-          <a:ln w="6350">
-            <a:solidFill>
-              <a:srgbClr val="6B8E00"/>
-            </a:solidFill>
-            <a:prstDash val="solid"/>
-          </a:ln>
-        </p:spPr>
+            <a:endParaRPr lang="en-US" sz="1100" dirty="0"/>
+          </a:p>
+        </p:txBody>
+      </p:sp>
+      <p:sp>
+        <p:nvSpPr>
+          <p:cNvPr id="9" name="Text 7"/>
+          <p:cNvSpPr/>
+          <p:nvPr/>
+        </p:nvSpPr>
+        <p:spPr>
+          <a:xfrm>
+            <a:off x="566928" y="6382512"/>
+            <a:ext cx="7315200" cy="219456"/>
+          </a:xfrm>
+          <a:prstGeom prst="rect">
+            <a:avLst/>
+          </a:prstGeom>
+          <a:noFill/>
+          <a:ln/>
+        </p:spPr>
+        <p:txBody>
+          <a:bodyPr wrap="square" lIns="0" tIns="0" rIns="0" bIns="0" rtlCol="0" anchor="ctr"/>
+          <a:lstStyle/>
+          <a:p>
+            <a:pPr indent="0" marL="0">
+              <a:buNone/>
+            </a:pPr>
+            <a:r>
+              <a:rPr lang="en-US" sz="800" dirty="0">
+                <a:solidFill>
+                  <a:srgbClr val="718096"/>
+                </a:solidFill>
+                <a:latin typeface="Pretendard" pitchFamily="34" charset="0"/>
+                <a:ea typeface="Pretendard" pitchFamily="34" charset="-122"/>
+                <a:cs typeface="Pretendard" pitchFamily="34" charset="-120"/>
+              </a:rPr>
+              <a:t>크리딜   |   </a:t>
+            </a:r>
+            <a:endParaRPr lang="en-US" sz="800" dirty="0"/>
+          </a:p>
+        </p:txBody>
+      </p:sp>
+      <p:sp>
+        <p:nvSpPr>
+          <p:cNvPr id="10" name="Text 8"/>
+          <p:cNvSpPr/>
+          <p:nvPr/>
+        </p:nvSpPr>
+        <p:spPr>
+          <a:xfrm>
+            <a:off x="10710367" y="6382512"/>
+            <a:ext cx="914400" cy="219456"/>
+          </a:xfrm>
+          <a:prstGeom prst="rect">
+            <a:avLst/>
+          </a:prstGeom>
+          <a:noFill/>
+          <a:ln/>
+        </p:spPr>
+        <p:txBody>
+          <a:bodyPr wrap="square" lIns="0" tIns="0" rIns="0" bIns="0" rtlCol="0" anchor="ctr"/>
+          <a:lstStyle/>
+          <a:p>
+            <a:pPr algn="r" indent="0" marL="0">
+              <a:buNone/>
+            </a:pPr>
+            <a:r>
+              <a:rPr lang="en-US" sz="900" b="1" dirty="0">
+                <a:solidFill>
+                  <a:srgbClr val="B98A2E"/>
+                </a:solidFill>
+                <a:latin typeface="Arial" pitchFamily="34" charset="0"/>
+                <a:ea typeface="Arial" pitchFamily="34" charset="-122"/>
+                <a:cs typeface="Arial" pitchFamily="34" charset="-120"/>
+              </a:rPr>
+              <a:t>8</a:t>
+            </a:r>
+            <a:endParaRPr lang="en-US" sz="900" dirty="0"/>
+          </a:p>
+        </p:txBody>
       </p:sp>
     </p:spTree>
   </p:cSld>
@@ -7196,14 +7913,14 @@
         </p:nvSpPr>
         <p:spPr>
           <a:xfrm>
-            <a:off x="566928" y="384048"/>
-            <a:ext cx="45720" cy="566928"/>
-          </a:xfrm>
-          <a:prstGeom prst="rect">
+            <a:off x="566928" y="457200"/>
+            <a:ext cx="384048" cy="384048"/>
+          </a:xfrm>
+          <a:prstGeom prst="ellipse">
             <a:avLst/>
           </a:prstGeom>
           <a:solidFill>
-            <a:srgbClr val="6B8E00"/>
+            <a:srgbClr val="B98A2E"/>
           </a:solidFill>
           <a:ln/>
         </p:spPr>
@@ -7216,32 +7933,71 @@
         </p:nvSpPr>
         <p:spPr>
           <a:xfrm>
-            <a:off x="749808" y="384048"/>
-            <a:ext cx="10874959" cy="182880"/>
-          </a:xfrm>
-          <a:prstGeom prst="rect">
-            <a:avLst/>
-          </a:prstGeom>
-          <a:noFill/>
-          <a:ln/>
-        </p:spPr>
-        <p:txBody>
-          <a:bodyPr wrap="square" lIns="0" tIns="0" rIns="0" bIns="0" rtlCol="0" anchor="ctr"/>
-          <a:lstStyle/>
-          <a:p>
-            <a:pPr indent="0" marL="0">
-              <a:buNone/>
-            </a:pPr>
-            <a:r>
-              <a:rPr lang="en-US" sz="950" b="1" spc="200" kern="0" dirty="0">
-                <a:solidFill>
-                  <a:srgbClr val="6B8E00"/>
+            <a:off x="566928" y="457200"/>
+            <a:ext cx="384048" cy="384048"/>
+          </a:xfrm>
+          <a:prstGeom prst="rect">
+            <a:avLst/>
+          </a:prstGeom>
+          <a:noFill/>
+          <a:ln/>
+        </p:spPr>
+        <p:txBody>
+          <a:bodyPr wrap="square" lIns="0" tIns="0" rIns="0" bIns="0" rtlCol="0" anchor="ctr"/>
+          <a:lstStyle/>
+          <a:p>
+            <a:pPr algn="ctr" indent="0" marL="0">
+              <a:buNone/>
+            </a:pPr>
+            <a:r>
+              <a:rPr lang="en-US" sz="1300" b="1" dirty="0">
+                <a:solidFill>
+                  <a:srgbClr val="FFFFFF"/>
                 </a:solidFill>
                 <a:latin typeface="Arial" pitchFamily="34" charset="0"/>
                 <a:ea typeface="Arial" pitchFamily="34" charset="-122"/>
                 <a:cs typeface="Arial" pitchFamily="34" charset="-120"/>
               </a:rPr>
-              <a:t>09  Process</a:t>
+              <a:t>09</a:t>
+            </a:r>
+            <a:endParaRPr lang="en-US" sz="1300" dirty="0"/>
+          </a:p>
+        </p:txBody>
+      </p:sp>
+      <p:sp>
+        <p:nvSpPr>
+          <p:cNvPr id="4" name="Text 2"/>
+          <p:cNvSpPr/>
+          <p:nvPr/>
+        </p:nvSpPr>
+        <p:spPr>
+          <a:xfrm>
+            <a:off x="1133856" y="457200"/>
+            <a:ext cx="10490911" cy="182880"/>
+          </a:xfrm>
+          <a:prstGeom prst="rect">
+            <a:avLst/>
+          </a:prstGeom>
+          <a:noFill/>
+          <a:ln/>
+        </p:spPr>
+        <p:txBody>
+          <a:bodyPr wrap="square" lIns="0" tIns="0" rIns="0" bIns="0" rtlCol="0" anchor="ctr"/>
+          <a:lstStyle/>
+          <a:p>
+            <a:pPr indent="0" marL="0">
+              <a:buNone/>
+            </a:pPr>
+            <a:r>
+              <a:rPr lang="en-US" sz="950" b="1" spc="200" kern="0" dirty="0">
+                <a:solidFill>
+                  <a:srgbClr val="B98A2E"/>
+                </a:solidFill>
+                <a:latin typeface="Arial" pitchFamily="34" charset="0"/>
+                <a:ea typeface="Arial" pitchFamily="34" charset="-122"/>
+                <a:cs typeface="Arial" pitchFamily="34" charset="-120"/>
+              </a:rPr>
+              <a:t>Process</a:t>
             </a:r>
             <a:endParaRPr lang="en-US" sz="950" dirty="0"/>
           </a:p>
@@ -7249,14 +8005,14 @@
       </p:sp>
       <p:sp>
         <p:nvSpPr>
-          <p:cNvPr id="4" name="Text 2"/>
-          <p:cNvSpPr/>
-          <p:nvPr/>
-        </p:nvSpPr>
-        <p:spPr>
-          <a:xfrm>
-            <a:off x="749808" y="566928"/>
-            <a:ext cx="10874959" cy="384048"/>
+          <p:cNvPr id="5" name="Text 3"/>
+          <p:cNvSpPr/>
+          <p:nvPr/>
+        </p:nvSpPr>
+        <p:spPr>
+          <a:xfrm>
+            <a:off x="1133856" y="640080"/>
+            <a:ext cx="10490911" cy="365760"/>
           </a:xfrm>
           <a:prstGeom prst="rect">
             <a:avLst/>
@@ -7272,9 +8028,9 @@
               <a:buNone/>
             </a:pPr>
             <a:r>
-              <a:rPr lang="en-US" sz="2200" b="1" dirty="0">
-                <a:solidFill>
-                  <a:srgbClr val="0F172A"/>
+              <a:rPr lang="en-US" sz="2300" b="1" dirty="0">
+                <a:solidFill>
+                  <a:srgbClr val="10161F"/>
                 </a:solidFill>
                 <a:latin typeface="Pretendard" pitchFamily="34" charset="0"/>
                 <a:ea typeface="Pretendard" pitchFamily="34" charset="-122"/>
@@ -7282,13 +8038,13 @@
               </a:rPr>
               <a:t>다음 단계</a:t>
             </a:r>
-            <a:endParaRPr lang="en-US" sz="2200" dirty="0"/>
-          </a:p>
-        </p:txBody>
-      </p:sp>
-      <p:sp>
-        <p:nvSpPr>
-          <p:cNvPr id="5" name="Shape 3"/>
+            <a:endParaRPr lang="en-US" sz="2300" dirty="0"/>
+          </a:p>
+        </p:txBody>
+      </p:sp>
+      <p:sp>
+        <p:nvSpPr>
+          <p:cNvPr id="6" name="Shape 4"/>
           <p:cNvSpPr/>
           <p:nvPr/>
         </p:nvSpPr>
@@ -7297,15 +8053,17 @@
             <a:off x="566928" y="1572768"/>
             <a:ext cx="11057839" cy="3200400"/>
           </a:xfrm>
-          <a:prstGeom prst="rect">
-            <a:avLst/>
+          <a:prstGeom prst="roundRect">
+            <a:avLst>
+              <a:gd name="adj" fmla="val 1714"/>
+            </a:avLst>
           </a:prstGeom>
           <a:solidFill>
-            <a:srgbClr val="F8FAFC"/>
+            <a:srgbClr val="F7FAFC"/>
           </a:solidFill>
-          <a:ln w="3810">
+          <a:ln w="6350">
             <a:solidFill>
-              <a:srgbClr val="CBD5E1"/>
+              <a:srgbClr val="CBD5E0"/>
             </a:solidFill>
             <a:prstDash val="solid"/>
           </a:ln>
@@ -7313,26 +8071,6 @@
       </p:sp>
       <p:sp>
         <p:nvSpPr>
-          <p:cNvPr id="6" name="Shape 4"/>
-          <p:cNvSpPr/>
-          <p:nvPr/>
-        </p:nvSpPr>
-        <p:spPr>
-          <a:xfrm>
-            <a:off x="566928" y="1572768"/>
-            <a:ext cx="11057839" cy="36576"/>
-          </a:xfrm>
-          <a:prstGeom prst="rect">
-            <a:avLst/>
-          </a:prstGeom>
-          <a:solidFill>
-            <a:srgbClr val="6B8E00"/>
-          </a:solidFill>
-          <a:ln/>
-        </p:spPr>
-      </p:sp>
-      <p:sp>
-        <p:nvSpPr>
           <p:cNvPr id="7" name="Shape 5"/>
           <p:cNvSpPr/>
           <p:nvPr/>
@@ -7346,7 +8084,7 @@
             <a:avLst/>
           </a:prstGeom>
           <a:solidFill>
-            <a:srgbClr val="6B8E00"/>
+            <a:srgbClr val="B98A2E"/>
           </a:solidFill>
           <a:ln/>
         </p:spPr>
@@ -7417,7 +8155,7 @@
             <a:r>
               <a:rPr lang="en-US" sz="1600" b="1" dirty="0">
                 <a:solidFill>
-                  <a:srgbClr val="0F172A"/>
+                  <a:srgbClr val="10161F"/>
                 </a:solidFill>
                 <a:latin typeface="Pretendard" pitchFamily="34" charset="0"/>
                 <a:ea typeface="Pretendard" pitchFamily="34" charset="-122"/>
@@ -7456,7 +8194,7 @@
             <a:r>
               <a:rPr lang="en-US" sz="1100" dirty="0">
                 <a:solidFill>
-                  <a:srgbClr val="0F172A"/>
+                  <a:srgbClr val="10161F"/>
                 </a:solidFill>
                 <a:latin typeface="Pretendard" pitchFamily="34" charset="0"/>
                 <a:ea typeface="Pretendard" pitchFamily="34" charset="-122"/>
@@ -7476,59 +8214,75 @@
         </p:nvSpPr>
         <p:spPr>
           <a:xfrm>
-            <a:off x="566928" y="6419088"/>
-            <a:ext cx="11057839" cy="201168"/>
-          </a:xfrm>
-          <a:prstGeom prst="rect">
-            <a:avLst/>
-          </a:prstGeom>
-          <a:noFill/>
-          <a:ln/>
-        </p:spPr>
-        <p:txBody>
-          <a:bodyPr wrap="square" lIns="0" tIns="0" rIns="0" bIns="0" rtlCol="0" anchor="ctr"/>
-          <a:lstStyle/>
-          <a:p>
-            <a:pPr algn="ctr" indent="0" marL="0">
-              <a:buNone/>
-            </a:pPr>
-            <a:r>
-              <a:rPr lang="en-US" sz="750" dirty="0">
-                <a:solidFill>
-                  <a:srgbClr val="64748B"/>
-                </a:solidFill>
-                <a:latin typeface="Pretendard" pitchFamily="34" charset="0"/>
-                <a:ea typeface="Pretendard" pitchFamily="34" charset="-122"/>
-                <a:cs typeface="Pretendard" pitchFamily="34" charset="-120"/>
-              </a:rPr>
-              <a:t>크리딜  ·    ·  9</a:t>
-            </a:r>
-            <a:endParaRPr lang="en-US" sz="750" dirty="0"/>
-          </a:p>
-        </p:txBody>
-      </p:sp>
-      <p:sp>
-        <p:nvSpPr>
-          <p:cNvPr id="12" name="Shape 10"/>
-          <p:cNvSpPr/>
-          <p:nvPr/>
-        </p:nvSpPr>
-        <p:spPr>
-          <a:xfrm>
-            <a:off x="4437172" y="6382512"/>
-            <a:ext cx="3317352" cy="0"/>
-          </a:xfrm>
-          <a:prstGeom prst="line">
-            <a:avLst/>
-          </a:prstGeom>
-          <a:noFill/>
-          <a:ln w="6350">
-            <a:solidFill>
-              <a:srgbClr val="6B8E00"/>
-            </a:solidFill>
-            <a:prstDash val="solid"/>
-          </a:ln>
-        </p:spPr>
+            <a:off x="566928" y="6382512"/>
+            <a:ext cx="7315200" cy="219456"/>
+          </a:xfrm>
+          <a:prstGeom prst="rect">
+            <a:avLst/>
+          </a:prstGeom>
+          <a:noFill/>
+          <a:ln/>
+        </p:spPr>
+        <p:txBody>
+          <a:bodyPr wrap="square" lIns="0" tIns="0" rIns="0" bIns="0" rtlCol="0" anchor="ctr"/>
+          <a:lstStyle/>
+          <a:p>
+            <a:pPr indent="0" marL="0">
+              <a:buNone/>
+            </a:pPr>
+            <a:r>
+              <a:rPr lang="en-US" sz="800" dirty="0">
+                <a:solidFill>
+                  <a:srgbClr val="718096"/>
+                </a:solidFill>
+                <a:latin typeface="Pretendard" pitchFamily="34" charset="0"/>
+                <a:ea typeface="Pretendard" pitchFamily="34" charset="-122"/>
+                <a:cs typeface="Pretendard" pitchFamily="34" charset="-120"/>
+              </a:rPr>
+              <a:t>크리딜   |   </a:t>
+            </a:r>
+            <a:endParaRPr lang="en-US" sz="800" dirty="0"/>
+          </a:p>
+        </p:txBody>
+      </p:sp>
+      <p:sp>
+        <p:nvSpPr>
+          <p:cNvPr id="12" name="Text 10"/>
+          <p:cNvSpPr/>
+          <p:nvPr/>
+        </p:nvSpPr>
+        <p:spPr>
+          <a:xfrm>
+            <a:off x="10710367" y="6382512"/>
+            <a:ext cx="914400" cy="219456"/>
+          </a:xfrm>
+          <a:prstGeom prst="rect">
+            <a:avLst/>
+          </a:prstGeom>
+          <a:noFill/>
+          <a:ln/>
+        </p:spPr>
+        <p:txBody>
+          <a:bodyPr wrap="square" lIns="0" tIns="0" rIns="0" bIns="0" rtlCol="0" anchor="ctr"/>
+          <a:lstStyle/>
+          <a:p>
+            <a:pPr algn="r" indent="0" marL="0">
+              <a:buNone/>
+            </a:pPr>
+            <a:r>
+              <a:rPr lang="en-US" sz="900" b="1" dirty="0">
+                <a:solidFill>
+                  <a:srgbClr val="B98A2E"/>
+                </a:solidFill>
+                <a:latin typeface="Arial" pitchFamily="34" charset="0"/>
+                <a:ea typeface="Arial" pitchFamily="34" charset="-122"/>
+                <a:cs typeface="Arial" pitchFamily="34" charset="-120"/>
+              </a:rPr>
+              <a:t>9</a:t>
+            </a:r>
+            <a:endParaRPr lang="en-US" sz="900" dirty="0"/>
+          </a:p>
+        </p:txBody>
       </p:sp>
     </p:spTree>
   </p:cSld>

--- a/docs/test/stress/e2e-outputs/income_overflow_pr11.pptx
+++ b/docs/test/stress/e2e-outputs/income_overflow_pr11.pptx
@@ -7105,11 +7105,11 @@
         <p:spPr>
           <a:xfrm>
             <a:off x="566928" y="1417320"/>
-            <a:ext cx="5391760" cy="3611880"/>
+            <a:ext cx="5400904" cy="3657600"/>
           </a:xfrm>
           <a:prstGeom prst="roundRect">
             <a:avLst>
-              <a:gd name="adj" fmla="val 1519"/>
+              <a:gd name="adj" fmla="val 1500"/>
             </a:avLst>
           </a:prstGeom>
           <a:solidFill>
@@ -7132,7 +7132,7 @@
         <p:spPr>
           <a:xfrm>
             <a:off x="566928" y="1417320"/>
-            <a:ext cx="5391760" cy="45720"/>
+            <a:ext cx="5400904" cy="45720"/>
           </a:xfrm>
           <a:prstGeom prst="rect">
             <a:avLst/>
@@ -7152,7 +7152,7 @@
         <p:spPr>
           <a:xfrm>
             <a:off x="795528" y="1618488"/>
-            <a:ext cx="4934560" cy="292608"/>
+            <a:ext cx="4943704" cy="292608"/>
           </a:xfrm>
           <a:prstGeom prst="rect">
             <a:avLst/>
@@ -7190,8 +7190,8 @@
         </p:nvSpPr>
         <p:spPr>
           <a:xfrm>
-            <a:off x="795528" y="1911096"/>
-            <a:ext cx="4934560" cy="402336"/>
+            <a:off x="795528" y="1947672"/>
+            <a:ext cx="4943704" cy="365760"/>
           </a:xfrm>
           <a:prstGeom prst="rect">
             <a:avLst/>
@@ -7209,7 +7209,7 @@
               <a:buNone/>
             </a:pPr>
             <a:r>
-              <a:rPr lang="en-US" sz="1350" b="1" dirty="0">
+              <a:rPr lang="en-US" sz="1250" b="1" dirty="0">
                 <a:solidFill>
                   <a:srgbClr val="10161F"/>
                 </a:solidFill>
@@ -7219,7 +7219,7 @@
               </a:rPr>
               <a:t>전층 의료</a:t>
             </a:r>
-            <a:endParaRPr lang="en-US" sz="1350" dirty="0"/>
+            <a:endParaRPr lang="en-US" sz="1250" dirty="0"/>
           </a:p>
         </p:txBody>
       </p:sp>
@@ -7232,7 +7232,7 @@
         <p:spPr>
           <a:xfrm>
             <a:off x="795528" y="2377440"/>
-            <a:ext cx="4934560" cy="2560320"/>
+            <a:ext cx="4943704" cy="2606040"/>
           </a:xfrm>
           <a:prstGeom prst="rect">
             <a:avLst/>
@@ -7254,7 +7254,7 @@
               <a:buChar char="•"/>
             </a:pPr>
             <a:r>
-              <a:rPr lang="en-US" sz="1200" dirty="0">
+              <a:rPr lang="en-US" sz="1100" dirty="0">
                 <a:solidFill>
                   <a:srgbClr val="10161F"/>
                 </a:solidFill>
@@ -7264,7 +7264,7 @@
               </a:rPr>
               <a:t>업종 다각화 검토</a:t>
             </a:r>
-            <a:endParaRPr lang="en-US" sz="1200" dirty="0"/>
+            <a:endParaRPr lang="en-US" sz="1100" dirty="0"/>
           </a:p>
         </p:txBody>
       </p:sp>
@@ -7276,12 +7276,12 @@
         </p:nvSpPr>
         <p:spPr>
           <a:xfrm>
-            <a:off x="6233008" y="1417320"/>
-            <a:ext cx="5391760" cy="3611880"/>
+            <a:off x="6223864" y="1417320"/>
+            <a:ext cx="5400904" cy="3657600"/>
           </a:xfrm>
           <a:prstGeom prst="roundRect">
             <a:avLst>
-              <a:gd name="adj" fmla="val 1519"/>
+              <a:gd name="adj" fmla="val 1500"/>
             </a:avLst>
           </a:prstGeom>
           <a:solidFill>
@@ -7303,8 +7303,8 @@
         </p:nvSpPr>
         <p:spPr>
           <a:xfrm>
-            <a:off x="6233008" y="1417320"/>
-            <a:ext cx="5391760" cy="45720"/>
+            <a:off x="6223864" y="1417320"/>
+            <a:ext cx="5400904" cy="45720"/>
           </a:xfrm>
           <a:prstGeom prst="rect">
             <a:avLst/>
@@ -7323,8 +7323,8 @@
         </p:nvSpPr>
         <p:spPr>
           <a:xfrm>
-            <a:off x="6461608" y="1618488"/>
-            <a:ext cx="4934560" cy="292608"/>
+            <a:off x="6452464" y="1618488"/>
+            <a:ext cx="4943704" cy="292608"/>
           </a:xfrm>
           <a:prstGeom prst="rect">
             <a:avLst/>
@@ -7362,8 +7362,8 @@
         </p:nvSpPr>
         <p:spPr>
           <a:xfrm>
-            <a:off x="6461608" y="1911096"/>
-            <a:ext cx="4934560" cy="402336"/>
+            <a:off x="6452464" y="1947672"/>
+            <a:ext cx="4943704" cy="365760"/>
           </a:xfrm>
           <a:prstGeom prst="rect">
             <a:avLst/>
@@ -7381,7 +7381,7 @@
               <a:buNone/>
             </a:pPr>
             <a:r>
-              <a:rPr lang="en-US" sz="1350" b="1" dirty="0">
+              <a:rPr lang="en-US" sz="1250" b="1" dirty="0">
                 <a:solidFill>
                   <a:srgbClr val="10161F"/>
                 </a:solidFill>
@@ -7391,7 +7391,7 @@
               </a:rPr>
               <a:t>4.1% 고정</a:t>
             </a:r>
-            <a:endParaRPr lang="en-US" sz="1350" dirty="0"/>
+            <a:endParaRPr lang="en-US" sz="1250" dirty="0"/>
           </a:p>
         </p:txBody>
       </p:sp>
@@ -7403,8 +7403,8 @@
         </p:nvSpPr>
         <p:spPr>
           <a:xfrm>
-            <a:off x="6461608" y="2377440"/>
-            <a:ext cx="4934560" cy="2560320"/>
+            <a:off x="6452464" y="2377440"/>
+            <a:ext cx="4943704" cy="2606040"/>
           </a:xfrm>
           <a:prstGeom prst="rect">
             <a:avLst/>
@@ -7426,7 +7426,7 @@
               <a:buChar char="•"/>
             </a:pPr>
             <a:r>
-              <a:rPr lang="en-US" sz="1200" dirty="0">
+              <a:rPr lang="en-US" sz="1100" dirty="0">
                 <a:solidFill>
                   <a:srgbClr val="10161F"/>
                 </a:solidFill>
@@ -7436,13 +7436,79 @@
               </a:rPr>
               <a:t>승계 대출 활용</a:t>
             </a:r>
-            <a:endParaRPr lang="en-US" sz="1200" dirty="0"/>
-          </a:p>
-        </p:txBody>
-      </p:sp>
-      <p:sp>
-        <p:nvSpPr>
-          <p:cNvPr id="16" name="Text 14"/>
+            <a:endParaRPr lang="en-US" sz="1100" dirty="0"/>
+          </a:p>
+        </p:txBody>
+      </p:sp>
+      <p:sp>
+        <p:nvSpPr>
+          <p:cNvPr id="16" name="Shape 14"/>
+          <p:cNvSpPr/>
+          <p:nvPr/>
+        </p:nvSpPr>
+        <p:spPr>
+          <a:xfrm>
+            <a:off x="566928" y="5193792"/>
+            <a:ext cx="11057839" cy="621792"/>
+          </a:xfrm>
+          <a:prstGeom prst="roundRect">
+            <a:avLst>
+              <a:gd name="adj" fmla="val 8824"/>
+            </a:avLst>
+          </a:prstGeom>
+          <a:solidFill>
+            <a:srgbClr val="F7FAFC"/>
+          </a:solidFill>
+          <a:ln w="6350">
+            <a:solidFill>
+              <a:srgbClr val="CBD5E0"/>
+            </a:solidFill>
+            <a:prstDash val="solid"/>
+          </a:ln>
+        </p:spPr>
+      </p:sp>
+      <p:sp>
+        <p:nvSpPr>
+          <p:cNvPr id="17" name="Text 15"/>
+          <p:cNvSpPr/>
+          <p:nvPr/>
+        </p:nvSpPr>
+        <p:spPr>
+          <a:xfrm>
+            <a:off x="795528" y="5193792"/>
+            <a:ext cx="10600639" cy="621792"/>
+          </a:xfrm>
+          <a:prstGeom prst="rect">
+            <a:avLst/>
+          </a:prstGeom>
+          <a:noFill/>
+          <a:ln/>
+        </p:spPr>
+        <p:txBody>
+          <a:bodyPr wrap="square" lIns="0" tIns="0" rIns="0" bIns="0" rtlCol="0" anchor="ctr"/>
+          <a:lstStyle/>
+          <a:p>
+            <a:pPr indent="0" marL="0">
+              <a:buNone/>
+            </a:pPr>
+            <a:r>
+              <a:rPr lang="en-US" sz="1100" dirty="0">
+                <a:solidFill>
+                  <a:srgbClr val="10161F"/>
+                </a:solidFill>
+                <a:latin typeface="Pretendard" pitchFamily="34" charset="0"/>
+                <a:ea typeface="Pretendard" pitchFamily="34" charset="-122"/>
+                <a:cs typeface="Pretendard" pitchFamily="34" charset="-120"/>
+              </a:rPr>
+              <a:t>※ 본 리스크 체크는 공부 및 브로커 확인 기반이며, 매수 전 전문 실사팀(변호사/건축사)을 통한 정밀 실사가 필요합니다.</a:t>
+            </a:r>
+            <a:endParaRPr lang="en-US" sz="1100" dirty="0"/>
+          </a:p>
+        </p:txBody>
+      </p:sp>
+      <p:sp>
+        <p:nvSpPr>
+          <p:cNvPr id="18" name="Text 16"/>
           <p:cNvSpPr/>
           <p:nvPr/>
         </p:nvSpPr>
@@ -7481,7 +7547,7 @@
       </p:sp>
       <p:sp>
         <p:nvSpPr>
-          <p:cNvPr id="17" name="Text 15"/>
+          <p:cNvPr id="19" name="Text 17"/>
           <p:cNvSpPr/>
           <p:nvPr/>
         </p:nvSpPr>

--- a/docs/test/stress/e2e-outputs/income_overflow_pr11.pptx
+++ b/docs/test/stress/e2e-outputs/income_overflow_pr11.pptx
@@ -1905,7 +1905,7 @@
                 <a:ea typeface="Arial" pitchFamily="34" charset="-122"/>
                 <a:cs typeface="Arial" pitchFamily="34" charset="-120"/>
               </a:rPr>
-              <a:t>BASIC IM</a:t>
+              <a:t>INVESTMENT MEMORANDUM</a:t>
             </a:r>
             <a:endParaRPr lang="en-US" sz="1000" dirty="0"/>
           </a:p>
@@ -4503,7 +4503,7 @@
                 <a:ea typeface="Pretendard" pitchFamily="34" charset="-122"/>
                 <a:cs typeface="Pretendard" pitchFamily="34" charset="-120"/>
               </a:rPr>
-              <a:t>원금 안전판: 핵심권역 핵심 입지 및 우량 대지 지분 가치로 하방 경직성 확보</a:t>
+              <a:t>입지 분석: 핵심권역 소재 자산의 입지 특성 및 대지 지분 가치 확인 필요</a:t>
             </a:r>
             <a:endParaRPr lang="en-US" sz="1150" dirty="0"/>
           </a:p>
@@ -4635,7 +4635,7 @@
                 <a:ea typeface="Pretendard" pitchFamily="34" charset="-122"/>
                 <a:cs typeface="Pretendard" pitchFamily="34" charset="-120"/>
               </a:rPr>
-              <a:t>수익 안정성: 매매 시장 적정가 수준 대비 안정적 월 임대수익 창출 기반</a:t>
+              <a:t>수익 구조: 매매 시장 적정가 수준 대비 임대수익 현황 분석 필요</a:t>
             </a:r>
             <a:endParaRPr lang="en-US" sz="1150" dirty="0"/>
           </a:p>
@@ -4767,7 +4767,7 @@
                 <a:ea typeface="Pretendard" pitchFamily="34" charset="-122"/>
                 <a:cs typeface="Pretendard" pitchFamily="34" charset="-120"/>
               </a:rPr>
-              <a:t>미래 가치: 향후 권역 지가 상승 및 공법상 밸류업을 통한 자본이득 실현 가능</a:t>
+              <a:t>향후 검토: 권역 개발 동향 및 공법상 변경 가능성 확인 필요</a:t>
             </a:r>
             <a:endParaRPr lang="en-US" sz="1150" dirty="0"/>
           </a:p>
@@ -8144,7 +8144,7 @@
         <p:spPr>
           <a:xfrm>
             <a:off x="786384" y="1792224"/>
-            <a:ext cx="384048" cy="384048"/>
+            <a:ext cx="438912" cy="438912"/>
           </a:xfrm>
           <a:prstGeom prst="ellipse">
             <a:avLst/>
@@ -8164,7 +8164,7 @@
         <p:spPr>
           <a:xfrm>
             <a:off x="786384" y="1792224"/>
-            <a:ext cx="384048" cy="384048"/>
+            <a:ext cx="438912" cy="438912"/>
           </a:xfrm>
           <a:prstGeom prst="rect">
             <a:avLst/>
@@ -8180,7 +8180,7 @@
               <a:buNone/>
             </a:pPr>
             <a:r>
-              <a:rPr lang="en-US" sz="1300" b="1" dirty="0">
+              <a:rPr lang="en-US" sz="1400" b="1" dirty="0">
                 <a:solidFill>
                   <a:srgbClr val="FFFFFF"/>
                 </a:solidFill>
@@ -8188,9 +8188,9 @@
                 <a:ea typeface="Arial" pitchFamily="34" charset="-122"/>
                 <a:cs typeface="Arial" pitchFamily="34" charset="-120"/>
               </a:rPr>
-              <a:t>STEP 1</a:t>
-            </a:r>
-            <a:endParaRPr lang="en-US" sz="1300" dirty="0"/>
+              <a:t>01</a:t>
+            </a:r>
+            <a:endParaRPr lang="en-US" sz="1400" dirty="0"/>
           </a:p>
         </p:txBody>
       </p:sp>
@@ -8227,7 +8227,7 @@
                 <a:ea typeface="Pretendard" pitchFamily="34" charset="-122"/>
                 <a:cs typeface="Pretendard" pitchFamily="34" charset="-120"/>
               </a:rPr>
-              <a:t>현장 실사 및 임대차계약서 원본 확인을 권장합니다.</a:t>
+              <a:t>1단계</a:t>
             </a:r>
             <a:endParaRPr lang="en-US" sz="1600" dirty="0"/>
           </a:p>
@@ -8253,6 +8253,23 @@
         <p:txBody>
           <a:bodyPr wrap="square" rtlCol="0" anchor="t"/>
           <a:lstStyle/>
+          <a:p>
+            <a:pPr indent="0" marL="0">
+              <a:buNone/>
+            </a:pPr>
+            <a:r>
+              <a:rPr lang="en-US" sz="1100" dirty="0">
+                <a:solidFill>
+                  <a:srgbClr val="10161F"/>
+                </a:solidFill>
+                <a:latin typeface="Pretendard" pitchFamily="34" charset="0"/>
+                <a:ea typeface="Pretendard" pitchFamily="34" charset="-122"/>
+                <a:cs typeface="Pretendard" pitchFamily="34" charset="-120"/>
+              </a:rPr>
+              <a:t>현장 실사 및 임대차계약서 원본 확인을 권장합니다.</a:t>
+            </a:r>
+            <a:endParaRPr lang="en-US" sz="1100" dirty="0"/>
+          </a:p>
           <a:p>
             <a:pPr indent="0" marL="0">
               <a:buNone/>

--- a/docs/test/stress/e2e-outputs/income_overflow_pr11.pptx
+++ b/docs/test/stress/e2e-outputs/income_overflow_pr11.pptx
@@ -15,9 +15,14 @@
     <p:sldId id="263" r:id="rId9"/>
     <p:sldId id="264" r:id="rId10"/>
     <p:sldId id="265" r:id="rId11"/>
+    <p:sldId id="266" r:id="rId12"/>
+    <p:sldId id="267" r:id="rId13"/>
+    <p:sldId id="268" r:id="rId14"/>
+    <p:sldId id="269" r:id="rId15"/>
+    <p:sldId id="270" r:id="rId16"/>
   </p:sldIdLst>
   <p:notesMasterIdLst>
-    <p:notesMasterId r:id="rId12"/>
+    <p:notesMasterId r:id="rId17"/>
   </p:notesMasterIdLst>
   <p:sldSz cx="12192000" cy="6858000"/>
   <p:notesSz cx="6858000" cy="12192000"/>
@@ -623,6 +628,446 @@
             <a:fld id="{F7021451-1387-4CA6-816F-3879F97B5CBC}" type="slidenum">
               <a:rPr lang="en-US"/>
               <a:t>10</a:t>
+            </a:fld>
+            <a:endParaRPr lang="en-US"/>
+          </a:p>
+        </p:txBody>
+      </p:sp>
+    </p:spTree>
+    <p:extLst>
+      <p:ext uri="{BB962C8B-B14F-4D97-AF65-F5344CB8AC3E}">
+        <p14:creationId xmlns:p14="http://schemas.microsoft.com/office/powerpoint/2010/main" val="1024086991"/>
+      </p:ext>
+    </p:extLst>
+  </p:cSld>
+  <p:clrMapOvr>
+    <a:masterClrMapping/>
+  </p:clrMapOvr>
+</p:notes>
+</file>
+
+<file path=ppt/notesSlides/notesSlide11.xml><?xml version="1.0" encoding="utf-8"?>
+<p:notes xmlns:a="http://schemas.openxmlformats.org/drawingml/2006/main" xmlns:r="http://schemas.openxmlformats.org/officeDocument/2006/relationships" xmlns:p="http://schemas.openxmlformats.org/presentationml/2006/main">
+  <p:cSld>
+    <p:spTree>
+      <p:nvGrpSpPr>
+        <p:cNvPr id="1" name=""/>
+        <p:cNvGrpSpPr/>
+        <p:nvPr/>
+      </p:nvGrpSpPr>
+      <p:grpSpPr>
+        <a:xfrm>
+          <a:off x="0" y="0"/>
+          <a:ext cx="0" cy="0"/>
+          <a:chOff x="0" y="0"/>
+          <a:chExt cx="0" cy="0"/>
+        </a:xfrm>
+      </p:grpSpPr>
+      <p:sp>
+        <p:nvSpPr>
+          <p:cNvPr id="2" name="Slide Image Placeholder 1"/>
+          <p:cNvSpPr>
+            <a:spLocks noGrp="1" noRot="1" noChangeAspect="1"/>
+          </p:cNvSpPr>
+          <p:nvPr>
+            <p:ph type="sldImg"/>
+          </p:nvPr>
+        </p:nvSpPr>
+        <p:spPr/>
+      </p:sp>
+      <p:sp>
+        <p:nvSpPr>
+          <p:cNvPr id="3" name="Notes Placeholder 2"/>
+          <p:cNvSpPr>
+            <a:spLocks noGrp="1"/>
+          </p:cNvSpPr>
+          <p:nvPr>
+            <p:ph type="body" idx="1"/>
+          </p:nvPr>
+        </p:nvSpPr>
+        <p:spPr/>
+        <p:txBody>
+          <a:bodyPr/>
+          <a:lstStyle/>
+          <a:p>
+            <a:r>
+              <a:rPr lang="en-US" dirty="0"/>
+              <a:t/>
+            </a:r>
+            <a:endParaRPr lang="en-US" dirty="0"/>
+          </a:p>
+        </p:txBody>
+      </p:sp>
+      <p:sp>
+        <p:nvSpPr>
+          <p:cNvPr id="4" name="Slide Number Placeholder 3"/>
+          <p:cNvSpPr>
+            <a:spLocks noGrp="1"/>
+          </p:cNvSpPr>
+          <p:nvPr>
+            <p:ph type="sldNum" sz="quarter" idx="10"/>
+          </p:nvPr>
+        </p:nvSpPr>
+        <p:spPr/>
+        <p:txBody>
+          <a:bodyPr/>
+          <a:lstStyle/>
+          <a:p>
+            <a:fld id="{F7021451-1387-4CA6-816F-3879F97B5CBC}" type="slidenum">
+              <a:rPr lang="en-US"/>
+              <a:t>11</a:t>
+            </a:fld>
+            <a:endParaRPr lang="en-US"/>
+          </a:p>
+        </p:txBody>
+      </p:sp>
+    </p:spTree>
+    <p:extLst>
+      <p:ext uri="{BB962C8B-B14F-4D97-AF65-F5344CB8AC3E}">
+        <p14:creationId xmlns:p14="http://schemas.microsoft.com/office/powerpoint/2010/main" val="1024086991"/>
+      </p:ext>
+    </p:extLst>
+  </p:cSld>
+  <p:clrMapOvr>
+    <a:masterClrMapping/>
+  </p:clrMapOvr>
+</p:notes>
+</file>
+
+<file path=ppt/notesSlides/notesSlide12.xml><?xml version="1.0" encoding="utf-8"?>
+<p:notes xmlns:a="http://schemas.openxmlformats.org/drawingml/2006/main" xmlns:r="http://schemas.openxmlformats.org/officeDocument/2006/relationships" xmlns:p="http://schemas.openxmlformats.org/presentationml/2006/main">
+  <p:cSld>
+    <p:spTree>
+      <p:nvGrpSpPr>
+        <p:cNvPr id="1" name=""/>
+        <p:cNvGrpSpPr/>
+        <p:nvPr/>
+      </p:nvGrpSpPr>
+      <p:grpSpPr>
+        <a:xfrm>
+          <a:off x="0" y="0"/>
+          <a:ext cx="0" cy="0"/>
+          <a:chOff x="0" y="0"/>
+          <a:chExt cx="0" cy="0"/>
+        </a:xfrm>
+      </p:grpSpPr>
+      <p:sp>
+        <p:nvSpPr>
+          <p:cNvPr id="2" name="Slide Image Placeholder 1"/>
+          <p:cNvSpPr>
+            <a:spLocks noGrp="1" noRot="1" noChangeAspect="1"/>
+          </p:cNvSpPr>
+          <p:nvPr>
+            <p:ph type="sldImg"/>
+          </p:nvPr>
+        </p:nvSpPr>
+        <p:spPr/>
+      </p:sp>
+      <p:sp>
+        <p:nvSpPr>
+          <p:cNvPr id="3" name="Notes Placeholder 2"/>
+          <p:cNvSpPr>
+            <a:spLocks noGrp="1"/>
+          </p:cNvSpPr>
+          <p:nvPr>
+            <p:ph type="body" idx="1"/>
+          </p:nvPr>
+        </p:nvSpPr>
+        <p:spPr/>
+        <p:txBody>
+          <a:bodyPr/>
+          <a:lstStyle/>
+          <a:p>
+            <a:r>
+              <a:rPr lang="en-US" dirty="0"/>
+              <a:t/>
+            </a:r>
+            <a:endParaRPr lang="en-US" dirty="0"/>
+          </a:p>
+        </p:txBody>
+      </p:sp>
+      <p:sp>
+        <p:nvSpPr>
+          <p:cNvPr id="4" name="Slide Number Placeholder 3"/>
+          <p:cNvSpPr>
+            <a:spLocks noGrp="1"/>
+          </p:cNvSpPr>
+          <p:nvPr>
+            <p:ph type="sldNum" sz="quarter" idx="10"/>
+          </p:nvPr>
+        </p:nvSpPr>
+        <p:spPr/>
+        <p:txBody>
+          <a:bodyPr/>
+          <a:lstStyle/>
+          <a:p>
+            <a:fld id="{F7021451-1387-4CA6-816F-3879F97B5CBC}" type="slidenum">
+              <a:rPr lang="en-US"/>
+              <a:t>12</a:t>
+            </a:fld>
+            <a:endParaRPr lang="en-US"/>
+          </a:p>
+        </p:txBody>
+      </p:sp>
+    </p:spTree>
+    <p:extLst>
+      <p:ext uri="{BB962C8B-B14F-4D97-AF65-F5344CB8AC3E}">
+        <p14:creationId xmlns:p14="http://schemas.microsoft.com/office/powerpoint/2010/main" val="1024086991"/>
+      </p:ext>
+    </p:extLst>
+  </p:cSld>
+  <p:clrMapOvr>
+    <a:masterClrMapping/>
+  </p:clrMapOvr>
+</p:notes>
+</file>
+
+<file path=ppt/notesSlides/notesSlide13.xml><?xml version="1.0" encoding="utf-8"?>
+<p:notes xmlns:a="http://schemas.openxmlformats.org/drawingml/2006/main" xmlns:r="http://schemas.openxmlformats.org/officeDocument/2006/relationships" xmlns:p="http://schemas.openxmlformats.org/presentationml/2006/main">
+  <p:cSld>
+    <p:spTree>
+      <p:nvGrpSpPr>
+        <p:cNvPr id="1" name=""/>
+        <p:cNvGrpSpPr/>
+        <p:nvPr/>
+      </p:nvGrpSpPr>
+      <p:grpSpPr>
+        <a:xfrm>
+          <a:off x="0" y="0"/>
+          <a:ext cx="0" cy="0"/>
+          <a:chOff x="0" y="0"/>
+          <a:chExt cx="0" cy="0"/>
+        </a:xfrm>
+      </p:grpSpPr>
+      <p:sp>
+        <p:nvSpPr>
+          <p:cNvPr id="2" name="Slide Image Placeholder 1"/>
+          <p:cNvSpPr>
+            <a:spLocks noGrp="1" noRot="1" noChangeAspect="1"/>
+          </p:cNvSpPr>
+          <p:nvPr>
+            <p:ph type="sldImg"/>
+          </p:nvPr>
+        </p:nvSpPr>
+        <p:spPr/>
+      </p:sp>
+      <p:sp>
+        <p:nvSpPr>
+          <p:cNvPr id="3" name="Notes Placeholder 2"/>
+          <p:cNvSpPr>
+            <a:spLocks noGrp="1"/>
+          </p:cNvSpPr>
+          <p:nvPr>
+            <p:ph type="body" idx="1"/>
+          </p:nvPr>
+        </p:nvSpPr>
+        <p:spPr/>
+        <p:txBody>
+          <a:bodyPr/>
+          <a:lstStyle/>
+          <a:p>
+            <a:r>
+              <a:rPr lang="en-US" dirty="0"/>
+              <a:t/>
+            </a:r>
+            <a:endParaRPr lang="en-US" dirty="0"/>
+          </a:p>
+        </p:txBody>
+      </p:sp>
+      <p:sp>
+        <p:nvSpPr>
+          <p:cNvPr id="4" name="Slide Number Placeholder 3"/>
+          <p:cNvSpPr>
+            <a:spLocks noGrp="1"/>
+          </p:cNvSpPr>
+          <p:nvPr>
+            <p:ph type="sldNum" sz="quarter" idx="10"/>
+          </p:nvPr>
+        </p:nvSpPr>
+        <p:spPr/>
+        <p:txBody>
+          <a:bodyPr/>
+          <a:lstStyle/>
+          <a:p>
+            <a:fld id="{F7021451-1387-4CA6-816F-3879F97B5CBC}" type="slidenum">
+              <a:rPr lang="en-US"/>
+              <a:t>13</a:t>
+            </a:fld>
+            <a:endParaRPr lang="en-US"/>
+          </a:p>
+        </p:txBody>
+      </p:sp>
+    </p:spTree>
+    <p:extLst>
+      <p:ext uri="{BB962C8B-B14F-4D97-AF65-F5344CB8AC3E}">
+        <p14:creationId xmlns:p14="http://schemas.microsoft.com/office/powerpoint/2010/main" val="1024086991"/>
+      </p:ext>
+    </p:extLst>
+  </p:cSld>
+  <p:clrMapOvr>
+    <a:masterClrMapping/>
+  </p:clrMapOvr>
+</p:notes>
+</file>
+
+<file path=ppt/notesSlides/notesSlide14.xml><?xml version="1.0" encoding="utf-8"?>
+<p:notes xmlns:a="http://schemas.openxmlformats.org/drawingml/2006/main" xmlns:r="http://schemas.openxmlformats.org/officeDocument/2006/relationships" xmlns:p="http://schemas.openxmlformats.org/presentationml/2006/main">
+  <p:cSld>
+    <p:spTree>
+      <p:nvGrpSpPr>
+        <p:cNvPr id="1" name=""/>
+        <p:cNvGrpSpPr/>
+        <p:nvPr/>
+      </p:nvGrpSpPr>
+      <p:grpSpPr>
+        <a:xfrm>
+          <a:off x="0" y="0"/>
+          <a:ext cx="0" cy="0"/>
+          <a:chOff x="0" y="0"/>
+          <a:chExt cx="0" cy="0"/>
+        </a:xfrm>
+      </p:grpSpPr>
+      <p:sp>
+        <p:nvSpPr>
+          <p:cNvPr id="2" name="Slide Image Placeholder 1"/>
+          <p:cNvSpPr>
+            <a:spLocks noGrp="1" noRot="1" noChangeAspect="1"/>
+          </p:cNvSpPr>
+          <p:nvPr>
+            <p:ph type="sldImg"/>
+          </p:nvPr>
+        </p:nvSpPr>
+        <p:spPr/>
+      </p:sp>
+      <p:sp>
+        <p:nvSpPr>
+          <p:cNvPr id="3" name="Notes Placeholder 2"/>
+          <p:cNvSpPr>
+            <a:spLocks noGrp="1"/>
+          </p:cNvSpPr>
+          <p:nvPr>
+            <p:ph type="body" idx="1"/>
+          </p:nvPr>
+        </p:nvSpPr>
+        <p:spPr/>
+        <p:txBody>
+          <a:bodyPr/>
+          <a:lstStyle/>
+          <a:p>
+            <a:r>
+              <a:rPr lang="en-US" dirty="0"/>
+              <a:t/>
+            </a:r>
+            <a:endParaRPr lang="en-US" dirty="0"/>
+          </a:p>
+        </p:txBody>
+      </p:sp>
+      <p:sp>
+        <p:nvSpPr>
+          <p:cNvPr id="4" name="Slide Number Placeholder 3"/>
+          <p:cNvSpPr>
+            <a:spLocks noGrp="1"/>
+          </p:cNvSpPr>
+          <p:nvPr>
+            <p:ph type="sldNum" sz="quarter" idx="10"/>
+          </p:nvPr>
+        </p:nvSpPr>
+        <p:spPr/>
+        <p:txBody>
+          <a:bodyPr/>
+          <a:lstStyle/>
+          <a:p>
+            <a:fld id="{F7021451-1387-4CA6-816F-3879F97B5CBC}" type="slidenum">
+              <a:rPr lang="en-US"/>
+              <a:t>14</a:t>
+            </a:fld>
+            <a:endParaRPr lang="en-US"/>
+          </a:p>
+        </p:txBody>
+      </p:sp>
+    </p:spTree>
+    <p:extLst>
+      <p:ext uri="{BB962C8B-B14F-4D97-AF65-F5344CB8AC3E}">
+        <p14:creationId xmlns:p14="http://schemas.microsoft.com/office/powerpoint/2010/main" val="1024086991"/>
+      </p:ext>
+    </p:extLst>
+  </p:cSld>
+  <p:clrMapOvr>
+    <a:masterClrMapping/>
+  </p:clrMapOvr>
+</p:notes>
+</file>
+
+<file path=ppt/notesSlides/notesSlide15.xml><?xml version="1.0" encoding="utf-8"?>
+<p:notes xmlns:a="http://schemas.openxmlformats.org/drawingml/2006/main" xmlns:r="http://schemas.openxmlformats.org/officeDocument/2006/relationships" xmlns:p="http://schemas.openxmlformats.org/presentationml/2006/main">
+  <p:cSld>
+    <p:spTree>
+      <p:nvGrpSpPr>
+        <p:cNvPr id="1" name=""/>
+        <p:cNvGrpSpPr/>
+        <p:nvPr/>
+      </p:nvGrpSpPr>
+      <p:grpSpPr>
+        <a:xfrm>
+          <a:off x="0" y="0"/>
+          <a:ext cx="0" cy="0"/>
+          <a:chOff x="0" y="0"/>
+          <a:chExt cx="0" cy="0"/>
+        </a:xfrm>
+      </p:grpSpPr>
+      <p:sp>
+        <p:nvSpPr>
+          <p:cNvPr id="2" name="Slide Image Placeholder 1"/>
+          <p:cNvSpPr>
+            <a:spLocks noGrp="1" noRot="1" noChangeAspect="1"/>
+          </p:cNvSpPr>
+          <p:nvPr>
+            <p:ph type="sldImg"/>
+          </p:nvPr>
+        </p:nvSpPr>
+        <p:spPr/>
+      </p:sp>
+      <p:sp>
+        <p:nvSpPr>
+          <p:cNvPr id="3" name="Notes Placeholder 2"/>
+          <p:cNvSpPr>
+            <a:spLocks noGrp="1"/>
+          </p:cNvSpPr>
+          <p:nvPr>
+            <p:ph type="body" idx="1"/>
+          </p:nvPr>
+        </p:nvSpPr>
+        <p:spPr/>
+        <p:txBody>
+          <a:bodyPr/>
+          <a:lstStyle/>
+          <a:p>
+            <a:r>
+              <a:rPr lang="en-US" dirty="0"/>
+              <a:t/>
+            </a:r>
+            <a:endParaRPr lang="en-US" dirty="0"/>
+          </a:p>
+        </p:txBody>
+      </p:sp>
+      <p:sp>
+        <p:nvSpPr>
+          <p:cNvPr id="4" name="Slide Number Placeholder 3"/>
+          <p:cNvSpPr>
+            <a:spLocks noGrp="1"/>
+          </p:cNvSpPr>
+          <p:nvPr>
+            <p:ph type="sldNum" sz="quarter" idx="10"/>
+          </p:nvPr>
+        </p:nvSpPr>
+        <p:spPr/>
+        <p:txBody>
+          <a:bodyPr/>
+          <a:lstStyle/>
+          <a:p>
+            <a:fld id="{F7021451-1387-4CA6-816F-3879F97B5CBC}" type="slidenum">
+              <a:rPr lang="en-US"/>
+              <a:t>15</a:t>
             </a:fld>
             <a:endParaRPr lang="en-US"/>
           </a:p>
@@ -2201,7 +2646,7 @@
             <a:pPr indent="0" marL="0">
               <a:buNone/>
             </a:pPr>
-            <a:endParaRPr lang="en-US" sz="850" dirty="0"/>
+            <a:endParaRPr lang="en-US" sz="900" dirty="0"/>
           </a:p>
         </p:txBody>
       </p:sp>
@@ -2294,6 +2739,5289 @@
 <file path=ppt/slides/slide10.xml><?xml version="1.0" encoding="utf-8"?>
 <p:sld xmlns:a="http://schemas.openxmlformats.org/drawingml/2006/main" xmlns:r="http://schemas.openxmlformats.org/officeDocument/2006/relationships" xmlns:p="http://schemas.openxmlformats.org/presentationml/2006/main">
   <p:cSld name="Slide 10">
+    <p:bg>
+      <p:bgPr>
+        <a:solidFill>
+          <a:srgbClr val="FFFFFF"/>
+        </a:solidFill>
+      </p:bgPr>
+    </p:bg>
+    <p:spTree>
+      <p:nvGrpSpPr>
+        <p:cNvPr id="1" name=""/>
+        <p:cNvGrpSpPr/>
+        <p:nvPr/>
+      </p:nvGrpSpPr>
+      <p:grpSpPr>
+        <a:xfrm>
+          <a:off x="0" y="0"/>
+          <a:ext cx="0" cy="0"/>
+          <a:chOff x="0" y="0"/>
+          <a:chExt cx="0" cy="0"/>
+        </a:xfrm>
+      </p:grpSpPr>
+      <p:sp>
+        <p:nvSpPr>
+          <p:cNvPr id="2" name="Shape 0"/>
+          <p:cNvSpPr/>
+          <p:nvPr/>
+        </p:nvSpPr>
+        <p:spPr>
+          <a:xfrm>
+            <a:off x="566928" y="457200"/>
+            <a:ext cx="384048" cy="384048"/>
+          </a:xfrm>
+          <a:prstGeom prst="ellipse">
+            <a:avLst/>
+          </a:prstGeom>
+          <a:solidFill>
+            <a:srgbClr val="B98A2E"/>
+          </a:solidFill>
+          <a:ln/>
+        </p:spPr>
+      </p:sp>
+      <p:sp>
+        <p:nvSpPr>
+          <p:cNvPr id="3" name="Text 1"/>
+          <p:cNvSpPr/>
+          <p:nvPr/>
+        </p:nvSpPr>
+        <p:spPr>
+          <a:xfrm>
+            <a:off x="566928" y="457200"/>
+            <a:ext cx="384048" cy="384048"/>
+          </a:xfrm>
+          <a:prstGeom prst="rect">
+            <a:avLst/>
+          </a:prstGeom>
+          <a:noFill/>
+          <a:ln/>
+        </p:spPr>
+        <p:txBody>
+          <a:bodyPr wrap="square" lIns="0" tIns="0" rIns="0" bIns="0" rtlCol="0" anchor="ctr"/>
+          <a:lstStyle/>
+          <a:p>
+            <a:pPr algn="ctr" indent="0" marL="0">
+              <a:buNone/>
+            </a:pPr>
+            <a:r>
+              <a:rPr lang="en-US" sz="1300" b="1" dirty="0">
+                <a:solidFill>
+                  <a:srgbClr val="FFFFFF"/>
+                </a:solidFill>
+                <a:latin typeface="Arial" pitchFamily="34" charset="0"/>
+                <a:ea typeface="Arial" pitchFamily="34" charset="-122"/>
+                <a:cs typeface="Arial" pitchFamily="34" charset="-120"/>
+              </a:rPr>
+              <a:t>09</a:t>
+            </a:r>
+            <a:endParaRPr lang="en-US" sz="1300" dirty="0"/>
+          </a:p>
+        </p:txBody>
+      </p:sp>
+      <p:sp>
+        <p:nvSpPr>
+          <p:cNvPr id="4" name="Text 2"/>
+          <p:cNvSpPr/>
+          <p:nvPr/>
+        </p:nvSpPr>
+        <p:spPr>
+          <a:xfrm>
+            <a:off x="1133856" y="457200"/>
+            <a:ext cx="10490911" cy="182880"/>
+          </a:xfrm>
+          <a:prstGeom prst="rect">
+            <a:avLst/>
+          </a:prstGeom>
+          <a:noFill/>
+          <a:ln/>
+        </p:spPr>
+        <p:txBody>
+          <a:bodyPr wrap="square" lIns="0" tIns="0" rIns="0" bIns="0" rtlCol="0" anchor="ctr"/>
+          <a:lstStyle/>
+          <a:p>
+            <a:pPr indent="0" marL="0">
+              <a:buNone/>
+            </a:pPr>
+            <a:r>
+              <a:rPr lang="en-US" sz="950" b="1" spc="200" kern="0" dirty="0">
+                <a:solidFill>
+                  <a:srgbClr val="B98A2E"/>
+                </a:solidFill>
+                <a:latin typeface="Arial" pitchFamily="34" charset="0"/>
+                <a:ea typeface="Arial" pitchFamily="34" charset="-122"/>
+                <a:cs typeface="Arial" pitchFamily="34" charset="-120"/>
+              </a:rPr>
+              <a:t>Capital</a:t>
+            </a:r>
+            <a:endParaRPr lang="en-US" sz="950" dirty="0"/>
+          </a:p>
+        </p:txBody>
+      </p:sp>
+      <p:sp>
+        <p:nvSpPr>
+          <p:cNvPr id="5" name="Text 3"/>
+          <p:cNvSpPr/>
+          <p:nvPr/>
+        </p:nvSpPr>
+        <p:spPr>
+          <a:xfrm>
+            <a:off x="1133856" y="640080"/>
+            <a:ext cx="10490911" cy="365760"/>
+          </a:xfrm>
+          <a:prstGeom prst="rect">
+            <a:avLst/>
+          </a:prstGeom>
+          <a:noFill/>
+          <a:ln/>
+        </p:spPr>
+        <p:txBody>
+          <a:bodyPr wrap="square" lIns="0" tIns="0" rIns="0" bIns="0" rtlCol="0" anchor="ctr"/>
+          <a:lstStyle/>
+          <a:p>
+            <a:pPr indent="0" marL="0">
+              <a:buNone/>
+            </a:pPr>
+            <a:r>
+              <a:rPr lang="en-US" sz="2300" b="1" dirty="0">
+                <a:solidFill>
+                  <a:srgbClr val="10161F"/>
+                </a:solidFill>
+                <a:latin typeface="Pretendard" pitchFamily="34" charset="0"/>
+                <a:ea typeface="Pretendard" pitchFamily="34" charset="-122"/>
+                <a:cs typeface="Pretendard" pitchFamily="34" charset="-120"/>
+              </a:rPr>
+              <a:t>투자 및 자본 조달 구조 분석</a:t>
+            </a:r>
+            <a:endParaRPr lang="en-US" sz="2300" dirty="0"/>
+          </a:p>
+        </p:txBody>
+      </p:sp>
+      <p:sp>
+        <p:nvSpPr>
+          <p:cNvPr id="6" name="Shape 4"/>
+          <p:cNvSpPr/>
+          <p:nvPr/>
+        </p:nvSpPr>
+        <p:spPr>
+          <a:xfrm>
+            <a:off x="566928" y="1417320"/>
+            <a:ext cx="5391760" cy="4389120"/>
+          </a:xfrm>
+          <a:prstGeom prst="roundRect">
+            <a:avLst>
+              <a:gd name="adj" fmla="val 1250"/>
+            </a:avLst>
+          </a:prstGeom>
+          <a:solidFill>
+            <a:srgbClr val="F7FAFC"/>
+          </a:solidFill>
+          <a:ln w="6350">
+            <a:solidFill>
+              <a:srgbClr val="CBD5E0"/>
+            </a:solidFill>
+            <a:prstDash val="solid"/>
+          </a:ln>
+        </p:spPr>
+      </p:sp>
+      <p:sp>
+        <p:nvSpPr>
+          <p:cNvPr id="7" name="Text 5"/>
+          <p:cNvSpPr/>
+          <p:nvPr/>
+        </p:nvSpPr>
+        <p:spPr>
+          <a:xfrm>
+            <a:off x="795528" y="1618488"/>
+            <a:ext cx="4934560" cy="320040"/>
+          </a:xfrm>
+          <a:prstGeom prst="rect">
+            <a:avLst/>
+          </a:prstGeom>
+          <a:noFill/>
+          <a:ln/>
+        </p:spPr>
+        <p:txBody>
+          <a:bodyPr wrap="square" lIns="0" tIns="0" rIns="0" bIns="0" rtlCol="0" anchor="ctr"/>
+          <a:lstStyle/>
+          <a:p>
+            <a:pPr indent="0" marL="0">
+              <a:buNone/>
+            </a:pPr>
+            <a:r>
+              <a:rPr lang="en-US" sz="1350" b="1" dirty="0">
+                <a:solidFill>
+                  <a:srgbClr val="977024"/>
+                </a:solidFill>
+                <a:latin typeface="Pretendard" pitchFamily="34" charset="0"/>
+                <a:ea typeface="Pretendard" pitchFamily="34" charset="-122"/>
+                <a:cs typeface="Pretendard" pitchFamily="34" charset="-120"/>
+              </a:rPr>
+              <a:t>1. 총취득원가 및 자기자본 소요</a:t>
+            </a:r>
+            <a:endParaRPr lang="en-US" sz="1350" dirty="0"/>
+          </a:p>
+        </p:txBody>
+      </p:sp>
+      <p:sp>
+        <p:nvSpPr>
+          <p:cNvPr id="8" name="Text 6"/>
+          <p:cNvSpPr/>
+          <p:nvPr/>
+        </p:nvSpPr>
+        <p:spPr>
+          <a:xfrm>
+            <a:off x="795528" y="2011680"/>
+            <a:ext cx="1875133" cy="475488"/>
+          </a:xfrm>
+          <a:prstGeom prst="rect">
+            <a:avLst/>
+          </a:prstGeom>
+          <a:noFill/>
+          <a:ln/>
+        </p:spPr>
+        <p:txBody>
+          <a:bodyPr wrap="square" lIns="0" tIns="0" rIns="0" bIns="0" rtlCol="0" anchor="ctr"/>
+          <a:lstStyle/>
+          <a:p>
+            <a:pPr indent="0" marL="0">
+              <a:lnSpc>
+                <a:spcPct val="120000"/>
+              </a:lnSpc>
+              <a:buNone/>
+            </a:pPr>
+            <a:r>
+              <a:rPr lang="en-US" sz="1150" dirty="0">
+                <a:solidFill>
+                  <a:srgbClr val="718096"/>
+                </a:solidFill>
+                <a:latin typeface="Pretendard" pitchFamily="34" charset="0"/>
+                <a:ea typeface="Pretendard" pitchFamily="34" charset="-122"/>
+                <a:cs typeface="Pretendard" pitchFamily="34" charset="-120"/>
+              </a:rPr>
+              <a:t>매매 희망가 (A)</a:t>
+            </a:r>
+            <a:endParaRPr lang="en-US" sz="1150" dirty="0"/>
+          </a:p>
+        </p:txBody>
+      </p:sp>
+      <p:sp>
+        <p:nvSpPr>
+          <p:cNvPr id="9" name="Text 7"/>
+          <p:cNvSpPr/>
+          <p:nvPr/>
+        </p:nvSpPr>
+        <p:spPr>
+          <a:xfrm>
+            <a:off x="2670661" y="2011680"/>
+            <a:ext cx="3059427" cy="475488"/>
+          </a:xfrm>
+          <a:prstGeom prst="rect">
+            <a:avLst/>
+          </a:prstGeom>
+          <a:noFill/>
+          <a:ln/>
+        </p:spPr>
+        <p:txBody>
+          <a:bodyPr wrap="square" lIns="0" tIns="0" rIns="0" bIns="0" rtlCol="0" anchor="ctr"/>
+          <a:lstStyle/>
+          <a:p>
+            <a:pPr indent="0" marL="0">
+              <a:lnSpc>
+                <a:spcPct val="120000"/>
+              </a:lnSpc>
+              <a:buNone/>
+            </a:pPr>
+            <a:r>
+              <a:rPr lang="en-US" sz="1150" b="1" dirty="0">
+                <a:solidFill>
+                  <a:srgbClr val="10161F"/>
+                </a:solidFill>
+                <a:latin typeface="Pretendard" pitchFamily="34" charset="0"/>
+                <a:ea typeface="Pretendard" pitchFamily="34" charset="-122"/>
+                <a:cs typeface="Pretendard" pitchFamily="34" charset="-120"/>
+              </a:rPr>
+              <a:t>165.0억 원</a:t>
+            </a:r>
+            <a:endParaRPr lang="en-US" sz="1150" dirty="0"/>
+          </a:p>
+        </p:txBody>
+      </p:sp>
+      <p:sp>
+        <p:nvSpPr>
+          <p:cNvPr id="10" name="Shape 8"/>
+          <p:cNvSpPr/>
+          <p:nvPr/>
+        </p:nvSpPr>
+        <p:spPr>
+          <a:xfrm>
+            <a:off x="795528" y="2487168"/>
+            <a:ext cx="4934560" cy="0"/>
+          </a:xfrm>
+          <a:prstGeom prst="line">
+            <a:avLst/>
+          </a:prstGeom>
+          <a:noFill/>
+          <a:ln w="3810">
+            <a:solidFill>
+              <a:srgbClr val="CBD5E0"/>
+            </a:solidFill>
+            <a:prstDash val="solid"/>
+          </a:ln>
+        </p:spPr>
+      </p:sp>
+      <p:sp>
+        <p:nvSpPr>
+          <p:cNvPr id="11" name="Text 9"/>
+          <p:cNvSpPr/>
+          <p:nvPr/>
+        </p:nvSpPr>
+        <p:spPr>
+          <a:xfrm>
+            <a:off x="795528" y="2487168"/>
+            <a:ext cx="1875133" cy="475488"/>
+          </a:xfrm>
+          <a:prstGeom prst="rect">
+            <a:avLst/>
+          </a:prstGeom>
+          <a:noFill/>
+          <a:ln/>
+        </p:spPr>
+        <p:txBody>
+          <a:bodyPr wrap="square" lIns="0" tIns="0" rIns="0" bIns="0" rtlCol="0" anchor="ctr"/>
+          <a:lstStyle/>
+          <a:p>
+            <a:pPr indent="0" marL="0">
+              <a:lnSpc>
+                <a:spcPct val="120000"/>
+              </a:lnSpc>
+              <a:buNone/>
+            </a:pPr>
+            <a:r>
+              <a:rPr lang="en-US" sz="1150" dirty="0">
+                <a:solidFill>
+                  <a:srgbClr val="718096"/>
+                </a:solidFill>
+                <a:latin typeface="Pretendard" pitchFamily="34" charset="0"/>
+                <a:ea typeface="Pretendard" pitchFamily="34" charset="-122"/>
+                <a:cs typeface="Pretendard" pitchFamily="34" charset="-120"/>
+              </a:rPr>
+              <a:t>취득세 (4.6% 법정)</a:t>
+            </a:r>
+            <a:endParaRPr lang="en-US" sz="1150" dirty="0"/>
+          </a:p>
+        </p:txBody>
+      </p:sp>
+      <p:sp>
+        <p:nvSpPr>
+          <p:cNvPr id="12" name="Text 10"/>
+          <p:cNvSpPr/>
+          <p:nvPr/>
+        </p:nvSpPr>
+        <p:spPr>
+          <a:xfrm>
+            <a:off x="2670661" y="2487168"/>
+            <a:ext cx="3059427" cy="475488"/>
+          </a:xfrm>
+          <a:prstGeom prst="rect">
+            <a:avLst/>
+          </a:prstGeom>
+          <a:noFill/>
+          <a:ln/>
+        </p:spPr>
+        <p:txBody>
+          <a:bodyPr wrap="square" lIns="0" tIns="0" rIns="0" bIns="0" rtlCol="0" anchor="ctr"/>
+          <a:lstStyle/>
+          <a:p>
+            <a:pPr indent="0" marL="0">
+              <a:lnSpc>
+                <a:spcPct val="120000"/>
+              </a:lnSpc>
+              <a:buNone/>
+            </a:pPr>
+            <a:r>
+              <a:rPr lang="en-US" sz="1150" b="1" dirty="0">
+                <a:solidFill>
+                  <a:srgbClr val="10161F"/>
+                </a:solidFill>
+                <a:latin typeface="Pretendard" pitchFamily="34" charset="0"/>
+                <a:ea typeface="Pretendard" pitchFamily="34" charset="-122"/>
+                <a:cs typeface="Pretendard" pitchFamily="34" charset="-120"/>
+              </a:rPr>
+              <a:t>7.59억 원</a:t>
+            </a:r>
+            <a:endParaRPr lang="en-US" sz="1150" dirty="0"/>
+          </a:p>
+        </p:txBody>
+      </p:sp>
+      <p:sp>
+        <p:nvSpPr>
+          <p:cNvPr id="13" name="Shape 11"/>
+          <p:cNvSpPr/>
+          <p:nvPr/>
+        </p:nvSpPr>
+        <p:spPr>
+          <a:xfrm>
+            <a:off x="795528" y="2962656"/>
+            <a:ext cx="4934560" cy="0"/>
+          </a:xfrm>
+          <a:prstGeom prst="line">
+            <a:avLst/>
+          </a:prstGeom>
+          <a:noFill/>
+          <a:ln w="3810">
+            <a:solidFill>
+              <a:srgbClr val="CBD5E0"/>
+            </a:solidFill>
+            <a:prstDash val="solid"/>
+          </a:ln>
+        </p:spPr>
+      </p:sp>
+      <p:sp>
+        <p:nvSpPr>
+          <p:cNvPr id="14" name="Text 12"/>
+          <p:cNvSpPr/>
+          <p:nvPr/>
+        </p:nvSpPr>
+        <p:spPr>
+          <a:xfrm>
+            <a:off x="795528" y="2962656"/>
+            <a:ext cx="1875133" cy="475488"/>
+          </a:xfrm>
+          <a:prstGeom prst="rect">
+            <a:avLst/>
+          </a:prstGeom>
+          <a:noFill/>
+          <a:ln/>
+        </p:spPr>
+        <p:txBody>
+          <a:bodyPr wrap="square" lIns="0" tIns="0" rIns="0" bIns="0" rtlCol="0" anchor="ctr"/>
+          <a:lstStyle/>
+          <a:p>
+            <a:pPr indent="0" marL="0">
+              <a:lnSpc>
+                <a:spcPct val="120000"/>
+              </a:lnSpc>
+              <a:buNone/>
+            </a:pPr>
+            <a:r>
+              <a:rPr lang="en-US" sz="1150" dirty="0">
+                <a:solidFill>
+                  <a:srgbClr val="718096"/>
+                </a:solidFill>
+                <a:latin typeface="Pretendard" pitchFamily="34" charset="0"/>
+                <a:ea typeface="Pretendard" pitchFamily="34" charset="-122"/>
+                <a:cs typeface="Pretendard" pitchFamily="34" charset="-120"/>
+              </a:rPr>
+              <a:t>중개보수 (0.9% 한도)</a:t>
+            </a:r>
+            <a:endParaRPr lang="en-US" sz="1150" dirty="0"/>
+          </a:p>
+        </p:txBody>
+      </p:sp>
+      <p:sp>
+        <p:nvSpPr>
+          <p:cNvPr id="15" name="Text 13"/>
+          <p:cNvSpPr/>
+          <p:nvPr/>
+        </p:nvSpPr>
+        <p:spPr>
+          <a:xfrm>
+            <a:off x="2670661" y="2962656"/>
+            <a:ext cx="3059427" cy="475488"/>
+          </a:xfrm>
+          <a:prstGeom prst="rect">
+            <a:avLst/>
+          </a:prstGeom>
+          <a:noFill/>
+          <a:ln/>
+        </p:spPr>
+        <p:txBody>
+          <a:bodyPr wrap="square" lIns="0" tIns="0" rIns="0" bIns="0" rtlCol="0" anchor="ctr"/>
+          <a:lstStyle/>
+          <a:p>
+            <a:pPr indent="0" marL="0">
+              <a:lnSpc>
+                <a:spcPct val="120000"/>
+              </a:lnSpc>
+              <a:buNone/>
+            </a:pPr>
+            <a:r>
+              <a:rPr lang="en-US" sz="1150" b="1" dirty="0">
+                <a:solidFill>
+                  <a:srgbClr val="10161F"/>
+                </a:solidFill>
+                <a:latin typeface="Pretendard" pitchFamily="34" charset="0"/>
+                <a:ea typeface="Pretendard" pitchFamily="34" charset="-122"/>
+                <a:cs typeface="Pretendard" pitchFamily="34" charset="-120"/>
+              </a:rPr>
+              <a:t>1.49억 원</a:t>
+            </a:r>
+            <a:endParaRPr lang="en-US" sz="1150" dirty="0"/>
+          </a:p>
+        </p:txBody>
+      </p:sp>
+      <p:sp>
+        <p:nvSpPr>
+          <p:cNvPr id="16" name="Shape 14"/>
+          <p:cNvSpPr/>
+          <p:nvPr/>
+        </p:nvSpPr>
+        <p:spPr>
+          <a:xfrm>
+            <a:off x="795528" y="3438144"/>
+            <a:ext cx="4934560" cy="0"/>
+          </a:xfrm>
+          <a:prstGeom prst="line">
+            <a:avLst/>
+          </a:prstGeom>
+          <a:noFill/>
+          <a:ln w="3810">
+            <a:solidFill>
+              <a:srgbClr val="CBD5E0"/>
+            </a:solidFill>
+            <a:prstDash val="solid"/>
+          </a:ln>
+        </p:spPr>
+      </p:sp>
+      <p:sp>
+        <p:nvSpPr>
+          <p:cNvPr id="17" name="Text 15"/>
+          <p:cNvSpPr/>
+          <p:nvPr/>
+        </p:nvSpPr>
+        <p:spPr>
+          <a:xfrm>
+            <a:off x="795528" y="3438144"/>
+            <a:ext cx="1875133" cy="475488"/>
+          </a:xfrm>
+          <a:prstGeom prst="rect">
+            <a:avLst/>
+          </a:prstGeom>
+          <a:noFill/>
+          <a:ln/>
+        </p:spPr>
+        <p:txBody>
+          <a:bodyPr wrap="square" lIns="0" tIns="0" rIns="0" bIns="0" rtlCol="0" anchor="ctr"/>
+          <a:lstStyle/>
+          <a:p>
+            <a:pPr indent="0" marL="0">
+              <a:lnSpc>
+                <a:spcPct val="120000"/>
+              </a:lnSpc>
+              <a:buNone/>
+            </a:pPr>
+            <a:r>
+              <a:rPr lang="en-US" sz="1150" dirty="0">
+                <a:solidFill>
+                  <a:srgbClr val="718096"/>
+                </a:solidFill>
+                <a:latin typeface="Pretendard" pitchFamily="34" charset="0"/>
+                <a:ea typeface="Pretendard" pitchFamily="34" charset="-122"/>
+                <a:cs typeface="Pretendard" pitchFamily="34" charset="-120"/>
+              </a:rPr>
+              <a:t>총취득원가 (A + 세/비용)</a:t>
+            </a:r>
+            <a:endParaRPr lang="en-US" sz="1150" dirty="0"/>
+          </a:p>
+        </p:txBody>
+      </p:sp>
+      <p:sp>
+        <p:nvSpPr>
+          <p:cNvPr id="18" name="Text 16"/>
+          <p:cNvSpPr/>
+          <p:nvPr/>
+        </p:nvSpPr>
+        <p:spPr>
+          <a:xfrm>
+            <a:off x="2670661" y="3438144"/>
+            <a:ext cx="3059427" cy="475488"/>
+          </a:xfrm>
+          <a:prstGeom prst="rect">
+            <a:avLst/>
+          </a:prstGeom>
+          <a:noFill/>
+          <a:ln/>
+        </p:spPr>
+        <p:txBody>
+          <a:bodyPr wrap="square" lIns="0" tIns="0" rIns="0" bIns="0" rtlCol="0" anchor="ctr"/>
+          <a:lstStyle/>
+          <a:p>
+            <a:pPr indent="0" marL="0">
+              <a:lnSpc>
+                <a:spcPct val="120000"/>
+              </a:lnSpc>
+              <a:buNone/>
+            </a:pPr>
+            <a:r>
+              <a:rPr lang="en-US" sz="1150" b="1" dirty="0">
+                <a:solidFill>
+                  <a:srgbClr val="10161F"/>
+                </a:solidFill>
+                <a:latin typeface="Pretendard" pitchFamily="34" charset="0"/>
+                <a:ea typeface="Pretendard" pitchFamily="34" charset="-122"/>
+                <a:cs typeface="Pretendard" pitchFamily="34" charset="-120"/>
+              </a:rPr>
+              <a:t>174.1억 원</a:t>
+            </a:r>
+            <a:endParaRPr lang="en-US" sz="1150" dirty="0"/>
+          </a:p>
+        </p:txBody>
+      </p:sp>
+      <p:sp>
+        <p:nvSpPr>
+          <p:cNvPr id="19" name="Shape 17"/>
+          <p:cNvSpPr/>
+          <p:nvPr/>
+        </p:nvSpPr>
+        <p:spPr>
+          <a:xfrm>
+            <a:off x="795528" y="3913632"/>
+            <a:ext cx="4934560" cy="0"/>
+          </a:xfrm>
+          <a:prstGeom prst="line">
+            <a:avLst/>
+          </a:prstGeom>
+          <a:noFill/>
+          <a:ln w="3810">
+            <a:solidFill>
+              <a:srgbClr val="CBD5E0"/>
+            </a:solidFill>
+            <a:prstDash val="solid"/>
+          </a:ln>
+        </p:spPr>
+      </p:sp>
+      <p:sp>
+        <p:nvSpPr>
+          <p:cNvPr id="20" name="Text 18"/>
+          <p:cNvSpPr/>
+          <p:nvPr/>
+        </p:nvSpPr>
+        <p:spPr>
+          <a:xfrm>
+            <a:off x="795528" y="3913632"/>
+            <a:ext cx="1875133" cy="475488"/>
+          </a:xfrm>
+          <a:prstGeom prst="rect">
+            <a:avLst/>
+          </a:prstGeom>
+          <a:noFill/>
+          <a:ln/>
+        </p:spPr>
+        <p:txBody>
+          <a:bodyPr wrap="square" lIns="0" tIns="0" rIns="0" bIns="0" rtlCol="0" anchor="ctr"/>
+          <a:lstStyle/>
+          <a:p>
+            <a:pPr indent="0" marL="0">
+              <a:lnSpc>
+                <a:spcPct val="120000"/>
+              </a:lnSpc>
+              <a:buNone/>
+            </a:pPr>
+            <a:r>
+              <a:rPr lang="en-US" sz="1150" dirty="0">
+                <a:solidFill>
+                  <a:srgbClr val="718096"/>
+                </a:solidFill>
+                <a:latin typeface="Pretendard" pitchFamily="34" charset="0"/>
+                <a:ea typeface="Pretendard" pitchFamily="34" charset="-122"/>
+                <a:cs typeface="Pretendard" pitchFamily="34" charset="-120"/>
+              </a:rPr>
+              <a:t>(-) 임대보증금 승계</a:t>
+            </a:r>
+            <a:endParaRPr lang="en-US" sz="1150" dirty="0"/>
+          </a:p>
+        </p:txBody>
+      </p:sp>
+      <p:sp>
+        <p:nvSpPr>
+          <p:cNvPr id="21" name="Text 19"/>
+          <p:cNvSpPr/>
+          <p:nvPr/>
+        </p:nvSpPr>
+        <p:spPr>
+          <a:xfrm>
+            <a:off x="2670661" y="3913632"/>
+            <a:ext cx="3059427" cy="475488"/>
+          </a:xfrm>
+          <a:prstGeom prst="rect">
+            <a:avLst/>
+          </a:prstGeom>
+          <a:noFill/>
+          <a:ln/>
+        </p:spPr>
+        <p:txBody>
+          <a:bodyPr wrap="square" lIns="0" tIns="0" rIns="0" bIns="0" rtlCol="0" anchor="ctr"/>
+          <a:lstStyle/>
+          <a:p>
+            <a:pPr indent="0" marL="0">
+              <a:lnSpc>
+                <a:spcPct val="120000"/>
+              </a:lnSpc>
+              <a:buNone/>
+            </a:pPr>
+            <a:r>
+              <a:rPr lang="en-US" sz="1150" b="1" dirty="0">
+                <a:solidFill>
+                  <a:srgbClr val="10161F"/>
+                </a:solidFill>
+                <a:latin typeface="Pretendard" pitchFamily="34" charset="0"/>
+                <a:ea typeface="Pretendard" pitchFamily="34" charset="-122"/>
+                <a:cs typeface="Pretendard" pitchFamily="34" charset="-120"/>
+              </a:rPr>
+              <a:t>8.3억 원</a:t>
+            </a:r>
+            <a:endParaRPr lang="en-US" sz="1150" dirty="0"/>
+          </a:p>
+        </p:txBody>
+      </p:sp>
+      <p:sp>
+        <p:nvSpPr>
+          <p:cNvPr id="22" name="Shape 20"/>
+          <p:cNvSpPr/>
+          <p:nvPr/>
+        </p:nvSpPr>
+        <p:spPr>
+          <a:xfrm>
+            <a:off x="795528" y="4389120"/>
+            <a:ext cx="4934560" cy="0"/>
+          </a:xfrm>
+          <a:prstGeom prst="line">
+            <a:avLst/>
+          </a:prstGeom>
+          <a:noFill/>
+          <a:ln w="3810">
+            <a:solidFill>
+              <a:srgbClr val="CBD5E0"/>
+            </a:solidFill>
+            <a:prstDash val="solid"/>
+          </a:ln>
+        </p:spPr>
+      </p:sp>
+      <p:sp>
+        <p:nvSpPr>
+          <p:cNvPr id="23" name="Text 21"/>
+          <p:cNvSpPr/>
+          <p:nvPr/>
+        </p:nvSpPr>
+        <p:spPr>
+          <a:xfrm>
+            <a:off x="795528" y="4389120"/>
+            <a:ext cx="1875133" cy="475488"/>
+          </a:xfrm>
+          <a:prstGeom prst="rect">
+            <a:avLst/>
+          </a:prstGeom>
+          <a:noFill/>
+          <a:ln/>
+        </p:spPr>
+        <p:txBody>
+          <a:bodyPr wrap="square" lIns="0" tIns="0" rIns="0" bIns="0" rtlCol="0" anchor="ctr"/>
+          <a:lstStyle/>
+          <a:p>
+            <a:pPr indent="0" marL="0">
+              <a:lnSpc>
+                <a:spcPct val="120000"/>
+              </a:lnSpc>
+              <a:buNone/>
+            </a:pPr>
+            <a:r>
+              <a:rPr lang="en-US" sz="1150" dirty="0">
+                <a:solidFill>
+                  <a:srgbClr val="718096"/>
+                </a:solidFill>
+                <a:latin typeface="Pretendard" pitchFamily="34" charset="0"/>
+                <a:ea typeface="Pretendard" pitchFamily="34" charset="-122"/>
+                <a:cs typeface="Pretendard" pitchFamily="34" charset="-120"/>
+              </a:rPr>
+              <a:t>(-) 담보대출 조달</a:t>
+            </a:r>
+            <a:endParaRPr lang="en-US" sz="1150" dirty="0"/>
+          </a:p>
+        </p:txBody>
+      </p:sp>
+      <p:sp>
+        <p:nvSpPr>
+          <p:cNvPr id="24" name="Text 22"/>
+          <p:cNvSpPr/>
+          <p:nvPr/>
+        </p:nvSpPr>
+        <p:spPr>
+          <a:xfrm>
+            <a:off x="2670661" y="4389120"/>
+            <a:ext cx="3059427" cy="475488"/>
+          </a:xfrm>
+          <a:prstGeom prst="rect">
+            <a:avLst/>
+          </a:prstGeom>
+          <a:noFill/>
+          <a:ln/>
+        </p:spPr>
+        <p:txBody>
+          <a:bodyPr wrap="square" lIns="0" tIns="0" rIns="0" bIns="0" rtlCol="0" anchor="ctr"/>
+          <a:lstStyle/>
+          <a:p>
+            <a:pPr indent="0" marL="0">
+              <a:lnSpc>
+                <a:spcPct val="120000"/>
+              </a:lnSpc>
+              <a:buNone/>
+            </a:pPr>
+            <a:r>
+              <a:rPr lang="en-US" sz="1150" b="1" dirty="0">
+                <a:solidFill>
+                  <a:srgbClr val="10161F"/>
+                </a:solidFill>
+                <a:latin typeface="Pretendard" pitchFamily="34" charset="0"/>
+                <a:ea typeface="Pretendard" pitchFamily="34" charset="-122"/>
+                <a:cs typeface="Pretendard" pitchFamily="34" charset="-120"/>
+              </a:rPr>
+              <a:t>82.5억 원</a:t>
+            </a:r>
+            <a:endParaRPr lang="en-US" sz="1150" dirty="0"/>
+          </a:p>
+        </p:txBody>
+      </p:sp>
+      <p:sp>
+        <p:nvSpPr>
+          <p:cNvPr id="25" name="Shape 23"/>
+          <p:cNvSpPr/>
+          <p:nvPr/>
+        </p:nvSpPr>
+        <p:spPr>
+          <a:xfrm>
+            <a:off x="795528" y="4864608"/>
+            <a:ext cx="4934560" cy="0"/>
+          </a:xfrm>
+          <a:prstGeom prst="line">
+            <a:avLst/>
+          </a:prstGeom>
+          <a:noFill/>
+          <a:ln w="3810">
+            <a:solidFill>
+              <a:srgbClr val="CBD5E0"/>
+            </a:solidFill>
+            <a:prstDash val="solid"/>
+          </a:ln>
+        </p:spPr>
+      </p:sp>
+      <p:sp>
+        <p:nvSpPr>
+          <p:cNvPr id="26" name="Text 24"/>
+          <p:cNvSpPr/>
+          <p:nvPr/>
+        </p:nvSpPr>
+        <p:spPr>
+          <a:xfrm>
+            <a:off x="795528" y="4864608"/>
+            <a:ext cx="1875133" cy="475488"/>
+          </a:xfrm>
+          <a:prstGeom prst="rect">
+            <a:avLst/>
+          </a:prstGeom>
+          <a:noFill/>
+          <a:ln/>
+        </p:spPr>
+        <p:txBody>
+          <a:bodyPr wrap="square" lIns="0" tIns="0" rIns="0" bIns="0" rtlCol="0" anchor="ctr"/>
+          <a:lstStyle/>
+          <a:p>
+            <a:pPr indent="0" marL="0">
+              <a:lnSpc>
+                <a:spcPct val="120000"/>
+              </a:lnSpc>
+              <a:buNone/>
+            </a:pPr>
+            <a:r>
+              <a:rPr lang="en-US" sz="1150" dirty="0">
+                <a:solidFill>
+                  <a:srgbClr val="718096"/>
+                </a:solidFill>
+                <a:latin typeface="Pretendard" pitchFamily="34" charset="0"/>
+                <a:ea typeface="Pretendard" pitchFamily="34" charset="-122"/>
+                <a:cs typeface="Pretendard" pitchFamily="34" charset="-120"/>
+              </a:rPr>
+              <a:t>실투자금 (Net Equity)</a:t>
+            </a:r>
+            <a:endParaRPr lang="en-US" sz="1150" dirty="0"/>
+          </a:p>
+        </p:txBody>
+      </p:sp>
+      <p:sp>
+        <p:nvSpPr>
+          <p:cNvPr id="27" name="Text 25"/>
+          <p:cNvSpPr/>
+          <p:nvPr/>
+        </p:nvSpPr>
+        <p:spPr>
+          <a:xfrm>
+            <a:off x="2670661" y="4864608"/>
+            <a:ext cx="3059427" cy="475488"/>
+          </a:xfrm>
+          <a:prstGeom prst="rect">
+            <a:avLst/>
+          </a:prstGeom>
+          <a:noFill/>
+          <a:ln/>
+        </p:spPr>
+        <p:txBody>
+          <a:bodyPr wrap="square" lIns="0" tIns="0" rIns="0" bIns="0" rtlCol="0" anchor="ctr"/>
+          <a:lstStyle/>
+          <a:p>
+            <a:pPr indent="0" marL="0">
+              <a:lnSpc>
+                <a:spcPct val="120000"/>
+              </a:lnSpc>
+              <a:buNone/>
+            </a:pPr>
+            <a:r>
+              <a:rPr lang="en-US" sz="1150" b="1" dirty="0">
+                <a:solidFill>
+                  <a:srgbClr val="10161F"/>
+                </a:solidFill>
+                <a:latin typeface="Pretendard" pitchFamily="34" charset="0"/>
+                <a:ea typeface="Pretendard" pitchFamily="34" charset="-122"/>
+                <a:cs typeface="Pretendard" pitchFamily="34" charset="-120"/>
+              </a:rPr>
+              <a:t>83.3억 원</a:t>
+            </a:r>
+            <a:endParaRPr lang="en-US" sz="1150" dirty="0"/>
+          </a:p>
+        </p:txBody>
+      </p:sp>
+      <p:sp>
+        <p:nvSpPr>
+          <p:cNvPr id="28" name="Shape 26"/>
+          <p:cNvSpPr/>
+          <p:nvPr/>
+        </p:nvSpPr>
+        <p:spPr>
+          <a:xfrm>
+            <a:off x="6233008" y="1417320"/>
+            <a:ext cx="5391760" cy="4389120"/>
+          </a:xfrm>
+          <a:prstGeom prst="roundRect">
+            <a:avLst>
+              <a:gd name="adj" fmla="val 1250"/>
+            </a:avLst>
+          </a:prstGeom>
+          <a:solidFill>
+            <a:srgbClr val="F7FAFC"/>
+          </a:solidFill>
+          <a:ln w="6350">
+            <a:solidFill>
+              <a:srgbClr val="CBD5E0"/>
+            </a:solidFill>
+            <a:prstDash val="solid"/>
+          </a:ln>
+        </p:spPr>
+      </p:sp>
+      <p:sp>
+        <p:nvSpPr>
+          <p:cNvPr id="29" name="Text 27"/>
+          <p:cNvSpPr/>
+          <p:nvPr/>
+        </p:nvSpPr>
+        <p:spPr>
+          <a:xfrm>
+            <a:off x="6461608" y="1618488"/>
+            <a:ext cx="4934560" cy="320040"/>
+          </a:xfrm>
+          <a:prstGeom prst="rect">
+            <a:avLst/>
+          </a:prstGeom>
+          <a:noFill/>
+          <a:ln/>
+        </p:spPr>
+        <p:txBody>
+          <a:bodyPr wrap="square" lIns="0" tIns="0" rIns="0" bIns="0" rtlCol="0" anchor="ctr"/>
+          <a:lstStyle/>
+          <a:p>
+            <a:pPr indent="0" marL="0">
+              <a:buNone/>
+            </a:pPr>
+            <a:r>
+              <a:rPr lang="en-US" sz="1350" b="1" dirty="0">
+                <a:solidFill>
+                  <a:srgbClr val="977024"/>
+                </a:solidFill>
+                <a:latin typeface="Pretendard" pitchFamily="34" charset="0"/>
+                <a:ea typeface="Pretendard" pitchFamily="34" charset="-122"/>
+                <a:cs typeface="Pretendard" pitchFamily="34" charset="-120"/>
+              </a:rPr>
+              <a:t>2. LTV 시나리오별 레버리지 효과</a:t>
+            </a:r>
+            <a:endParaRPr lang="en-US" sz="1350" dirty="0"/>
+          </a:p>
+        </p:txBody>
+      </p:sp>
+      <p:graphicFrame>
+        <p:nvGraphicFramePr>
+          <p:cNvPr id="11" name="Table 0"/>
+          <p:cNvGraphicFramePr>
+            <a:graphicFrameLocks noGrp="1"/>
+          </p:cNvGraphicFramePr>
+          <p:nvPr>
+            <p:extLst>
+              <p:ext uri="{D42A27DB-BD31-4B8C-83A1-F6EECF244321}">
+                <p14:modId xmlns:p14="http://schemas.microsoft.com/office/powerpoint/2010/main" val="1579011935"/>
+              </p:ext>
+            </p:extLst>
+          </p:nvPr>
+        </p:nvGraphicFramePr>
+        <p:xfrm>
+          <a:off x="6461608" y="2057400"/>
+          <a:ext cx="4934560" cy="914400"/>
+        </p:xfrm>
+        <a:graphic>
+          <a:graphicData uri="http://schemas.openxmlformats.org/drawingml/2006/table">
+            <a:tbl>
+              <a:tblPr/>
+              <a:tblGrid>
+                <a:gridCol w="1463040"/>
+                <a:gridCol w="1005840"/>
+                <a:gridCol w="1280160"/>
+                <a:gridCol w="1280160"/>
+              </a:tblGrid>
+              <a:tr h="457200">
+                <a:tc>
+                  <a:txBody>
+                    <a:bodyPr/>
+                    <a:lstStyle/>
+                    <a:p>
+                      <a:pPr indent="0" marL="0">
+                        <a:buNone/>
+                      </a:pPr>
+                      <a:r>
+                        <a:rPr lang="en-US" sz="1100" b="1" dirty="0">
+                          <a:solidFill>
+                            <a:srgbClr val="718096"/>
+                          </a:solidFill>
+                          <a:latin typeface="Pretendard" pitchFamily="34" charset="0"/>
+                          <a:ea typeface="Pretendard" pitchFamily="34" charset="-122"/>
+                          <a:cs typeface="Pretendard" pitchFamily="34" charset="-120"/>
+                        </a:rPr>
+                        <a:t>구분</a:t>
+                      </a:r>
+                      <a:endParaRPr lang="en-US" sz="1100" dirty="0">
+                        <a:latin typeface="Pretendard" charset="0"/>
+                        <a:ea typeface="Pretendard" charset="0"/>
+                        <a:cs typeface="Pretendard" charset="0"/>
+                      </a:endParaRPr>
+                    </a:p>
+                  </a:txBody>
+                  <a:tcPr marL="50800" marR="50800" marT="25400" marB="25400" anchor="ctr">
+                    <a:lnL w="3810" cap="flat" cmpd="sng" algn="ctr">
+                      <a:solidFill>
+                        <a:srgbClr val="CBD5E0"/>
+                      </a:solidFill>
+                      <a:prstDash val="solid"/>
+                      <a:round/>
+                      <a:headEnd type="none" w="med" len="med"/>
+                      <a:tailEnd type="none" w="med" len="med"/>
+                    </a:lnL>
+                    <a:lnR w="3810" cap="flat" cmpd="sng" algn="ctr">
+                      <a:solidFill>
+                        <a:srgbClr val="CBD5E0"/>
+                      </a:solidFill>
+                      <a:prstDash val="solid"/>
+                      <a:round/>
+                      <a:headEnd type="none" w="med" len="med"/>
+                      <a:tailEnd type="none" w="med" len="med"/>
+                    </a:lnR>
+                    <a:lnT w="3810" cap="flat" cmpd="sng" algn="ctr">
+                      <a:solidFill>
+                        <a:srgbClr val="CBD5E0"/>
+                      </a:solidFill>
+                      <a:prstDash val="solid"/>
+                      <a:round/>
+                      <a:headEnd type="none" w="med" len="med"/>
+                      <a:tailEnd type="none" w="med" len="med"/>
+                    </a:lnT>
+                    <a:lnB w="3810" cap="flat" cmpd="sng" algn="ctr">
+                      <a:solidFill>
+                        <a:srgbClr val="CBD5E0"/>
+                      </a:solidFill>
+                      <a:prstDash val="solid"/>
+                      <a:round/>
+                      <a:headEnd type="none" w="med" len="med"/>
+                      <a:tailEnd type="none" w="med" len="med"/>
+                    </a:lnB>
+                    <a:solidFill>
+                      <a:srgbClr val="F7FAFC"/>
+                    </a:solidFill>
+                  </a:tcPr>
+                </a:tc>
+                <a:tc>
+                  <a:txBody>
+                    <a:bodyPr/>
+                    <a:lstStyle/>
+                    <a:p>
+                      <a:pPr indent="0" marL="0">
+                        <a:buNone/>
+                      </a:pPr>
+                      <a:r>
+                        <a:rPr lang="en-US" sz="1100" b="1" dirty="0">
+                          <a:solidFill>
+                            <a:srgbClr val="718096"/>
+                          </a:solidFill>
+                          <a:latin typeface="Pretendard" pitchFamily="34" charset="0"/>
+                          <a:ea typeface="Pretendard" pitchFamily="34" charset="-122"/>
+                          <a:cs typeface="Pretendard" pitchFamily="34" charset="-120"/>
+                        </a:rPr>
+                        <a:t>대출비율</a:t>
+                      </a:r>
+                      <a:endParaRPr lang="en-US" sz="1100" dirty="0">
+                        <a:latin typeface="Pretendard" charset="0"/>
+                        <a:ea typeface="Pretendard" charset="0"/>
+                        <a:cs typeface="Pretendard" charset="0"/>
+                      </a:endParaRPr>
+                    </a:p>
+                  </a:txBody>
+                  <a:tcPr marL="50800" marR="50800" marT="25400" marB="25400" anchor="ctr">
+                    <a:lnL w="3810" cap="flat" cmpd="sng" algn="ctr">
+                      <a:solidFill>
+                        <a:srgbClr val="CBD5E0"/>
+                      </a:solidFill>
+                      <a:prstDash val="solid"/>
+                      <a:round/>
+                      <a:headEnd type="none" w="med" len="med"/>
+                      <a:tailEnd type="none" w="med" len="med"/>
+                    </a:lnL>
+                    <a:lnR w="3810" cap="flat" cmpd="sng" algn="ctr">
+                      <a:solidFill>
+                        <a:srgbClr val="CBD5E0"/>
+                      </a:solidFill>
+                      <a:prstDash val="solid"/>
+                      <a:round/>
+                      <a:headEnd type="none" w="med" len="med"/>
+                      <a:tailEnd type="none" w="med" len="med"/>
+                    </a:lnR>
+                    <a:lnT w="3810" cap="flat" cmpd="sng" algn="ctr">
+                      <a:solidFill>
+                        <a:srgbClr val="CBD5E0"/>
+                      </a:solidFill>
+                      <a:prstDash val="solid"/>
+                      <a:round/>
+                      <a:headEnd type="none" w="med" len="med"/>
+                      <a:tailEnd type="none" w="med" len="med"/>
+                    </a:lnT>
+                    <a:lnB w="3810" cap="flat" cmpd="sng" algn="ctr">
+                      <a:solidFill>
+                        <a:srgbClr val="CBD5E0"/>
+                      </a:solidFill>
+                      <a:prstDash val="solid"/>
+                      <a:round/>
+                      <a:headEnd type="none" w="med" len="med"/>
+                      <a:tailEnd type="none" w="med" len="med"/>
+                    </a:lnB>
+                    <a:solidFill>
+                      <a:srgbClr val="F7FAFC"/>
+                    </a:solidFill>
+                  </a:tcPr>
+                </a:tc>
+                <a:tc>
+                  <a:txBody>
+                    <a:bodyPr/>
+                    <a:lstStyle/>
+                    <a:p>
+                      <a:pPr indent="0" marL="0">
+                        <a:buNone/>
+                      </a:pPr>
+                      <a:r>
+                        <a:rPr lang="en-US" sz="1100" b="1" dirty="0">
+                          <a:solidFill>
+                            <a:srgbClr val="718096"/>
+                          </a:solidFill>
+                          <a:latin typeface="Pretendard" pitchFamily="34" charset="0"/>
+                          <a:ea typeface="Pretendard" pitchFamily="34" charset="-122"/>
+                          <a:cs typeface="Pretendard" pitchFamily="34" charset="-120"/>
+                        </a:rPr>
+                        <a:t>실투자금</a:t>
+                      </a:r>
+                      <a:endParaRPr lang="en-US" sz="1100" dirty="0">
+                        <a:latin typeface="Pretendard" charset="0"/>
+                        <a:ea typeface="Pretendard" charset="0"/>
+                        <a:cs typeface="Pretendard" charset="0"/>
+                      </a:endParaRPr>
+                    </a:p>
+                  </a:txBody>
+                  <a:tcPr marL="50800" marR="50800" marT="25400" marB="25400" anchor="ctr">
+                    <a:lnL w="3810" cap="flat" cmpd="sng" algn="ctr">
+                      <a:solidFill>
+                        <a:srgbClr val="CBD5E0"/>
+                      </a:solidFill>
+                      <a:prstDash val="solid"/>
+                      <a:round/>
+                      <a:headEnd type="none" w="med" len="med"/>
+                      <a:tailEnd type="none" w="med" len="med"/>
+                    </a:lnL>
+                    <a:lnR w="3810" cap="flat" cmpd="sng" algn="ctr">
+                      <a:solidFill>
+                        <a:srgbClr val="CBD5E0"/>
+                      </a:solidFill>
+                      <a:prstDash val="solid"/>
+                      <a:round/>
+                      <a:headEnd type="none" w="med" len="med"/>
+                      <a:tailEnd type="none" w="med" len="med"/>
+                    </a:lnR>
+                    <a:lnT w="3810" cap="flat" cmpd="sng" algn="ctr">
+                      <a:solidFill>
+                        <a:srgbClr val="CBD5E0"/>
+                      </a:solidFill>
+                      <a:prstDash val="solid"/>
+                      <a:round/>
+                      <a:headEnd type="none" w="med" len="med"/>
+                      <a:tailEnd type="none" w="med" len="med"/>
+                    </a:lnT>
+                    <a:lnB w="3810" cap="flat" cmpd="sng" algn="ctr">
+                      <a:solidFill>
+                        <a:srgbClr val="CBD5E0"/>
+                      </a:solidFill>
+                      <a:prstDash val="solid"/>
+                      <a:round/>
+                      <a:headEnd type="none" w="med" len="med"/>
+                      <a:tailEnd type="none" w="med" len="med"/>
+                    </a:lnB>
+                    <a:solidFill>
+                      <a:srgbClr val="F7FAFC"/>
+                    </a:solidFill>
+                  </a:tcPr>
+                </a:tc>
+                <a:tc>
+                  <a:txBody>
+                    <a:bodyPr/>
+                    <a:lstStyle/>
+                    <a:p>
+                      <a:pPr indent="0" marL="0">
+                        <a:buNone/>
+                      </a:pPr>
+                      <a:r>
+                        <a:rPr lang="en-US" sz="1100" b="1" dirty="0">
+                          <a:solidFill>
+                            <a:srgbClr val="718096"/>
+                          </a:solidFill>
+                          <a:latin typeface="Pretendard" pitchFamily="34" charset="0"/>
+                          <a:ea typeface="Pretendard" pitchFamily="34" charset="-122"/>
+                          <a:cs typeface="Pretendard" pitchFamily="34" charset="-120"/>
+                        </a:rPr>
+                        <a:t>예상수익률</a:t>
+                      </a:r>
+                      <a:endParaRPr lang="en-US" sz="1100" dirty="0">
+                        <a:latin typeface="Pretendard" charset="0"/>
+                        <a:ea typeface="Pretendard" charset="0"/>
+                        <a:cs typeface="Pretendard" charset="0"/>
+                      </a:endParaRPr>
+                    </a:p>
+                  </a:txBody>
+                  <a:tcPr marL="50800" marR="50800" marT="25400" marB="25400" anchor="ctr">
+                    <a:lnL w="3810" cap="flat" cmpd="sng" algn="ctr">
+                      <a:solidFill>
+                        <a:srgbClr val="CBD5E0"/>
+                      </a:solidFill>
+                      <a:prstDash val="solid"/>
+                      <a:round/>
+                      <a:headEnd type="none" w="med" len="med"/>
+                      <a:tailEnd type="none" w="med" len="med"/>
+                    </a:lnL>
+                    <a:lnR w="3810" cap="flat" cmpd="sng" algn="ctr">
+                      <a:solidFill>
+                        <a:srgbClr val="CBD5E0"/>
+                      </a:solidFill>
+                      <a:prstDash val="solid"/>
+                      <a:round/>
+                      <a:headEnd type="none" w="med" len="med"/>
+                      <a:tailEnd type="none" w="med" len="med"/>
+                    </a:lnR>
+                    <a:lnT w="3810" cap="flat" cmpd="sng" algn="ctr">
+                      <a:solidFill>
+                        <a:srgbClr val="CBD5E0"/>
+                      </a:solidFill>
+                      <a:prstDash val="solid"/>
+                      <a:round/>
+                      <a:headEnd type="none" w="med" len="med"/>
+                      <a:tailEnd type="none" w="med" len="med"/>
+                    </a:lnT>
+                    <a:lnB w="3810" cap="flat" cmpd="sng" algn="ctr">
+                      <a:solidFill>
+                        <a:srgbClr val="CBD5E0"/>
+                      </a:solidFill>
+                      <a:prstDash val="solid"/>
+                      <a:round/>
+                      <a:headEnd type="none" w="med" len="med"/>
+                      <a:tailEnd type="none" w="med" len="med"/>
+                    </a:lnB>
+                    <a:solidFill>
+                      <a:srgbClr val="F7FAFC"/>
+                    </a:solidFill>
+                  </a:tcPr>
+                </a:tc>
+              </a:tr>
+              <a:tr h="457200">
+                <a:tc>
+                  <a:txBody>
+                    <a:bodyPr/>
+                    <a:lstStyle/>
+                    <a:p>
+                      <a:pPr indent="0" marL="0">
+                        <a:buNone/>
+                      </a:pPr>
+                      <a:r>
+                        <a:rPr lang="en-US" sz="1100" b="1" dirty="0">
+                          <a:solidFill>
+                            <a:srgbClr val="10161F"/>
+                          </a:solidFill>
+                          <a:latin typeface="Pretendard" pitchFamily="34" charset="0"/>
+                          <a:ea typeface="Pretendard" pitchFamily="34" charset="-122"/>
+                          <a:cs typeface="Pretendard" pitchFamily="34" charset="-120"/>
+                        </a:rPr>
+                        <a:t>전액 </a:t>
+                      </a:r>
+                      <a:pPr indent="0" marL="0">
+                        <a:buNone/>
+                      </a:pPr>
+                      <a:r>
+                        <a:rPr lang="en-US" sz="1100" b="1" dirty="0">
+                          <a:solidFill>
+                            <a:srgbClr val="10161F"/>
+                          </a:solidFill>
+                          <a:latin typeface="Pretendard" pitchFamily="34" charset="0"/>
+                          <a:ea typeface="Pretendard" pitchFamily="34" charset="-122"/>
+                          <a:cs typeface="Pretendard" pitchFamily="34" charset="-120"/>
+                        </a:rPr>
+                        <a:t>자기자본 </a:t>
+                      </a:r>
+                      <a:pPr indent="0" marL="0">
+                        <a:buNone/>
+                      </a:pPr>
+                      <a:r>
+                        <a:rPr lang="en-US" sz="1100" b="1" dirty="0">
+                          <a:solidFill>
+                            <a:srgbClr val="10161F"/>
+                          </a:solidFill>
+                          <a:latin typeface="Pretendard" pitchFamily="34" charset="0"/>
+                          <a:ea typeface="Pretendard" pitchFamily="34" charset="-122"/>
+                          <a:cs typeface="Pretendard" pitchFamily="34" charset="-120"/>
+                        </a:rPr>
+                        <a:t>(무차입)</a:t>
+                      </a:r>
+                      <a:endParaRPr lang="en-US" sz="1100" dirty="0">
+                        <a:latin typeface="Pretendard" charset="0"/>
+                        <a:ea typeface="Pretendard" charset="0"/>
+                        <a:cs typeface="Pretendard" charset="0"/>
+                      </a:endParaRPr>
+                    </a:p>
+                  </a:txBody>
+                  <a:tcPr marL="50800" marR="50800" marT="25400" marB="25400" anchor="ctr">
+                    <a:lnL w="3810" cap="flat" cmpd="sng" algn="ctr">
+                      <a:solidFill>
+                        <a:srgbClr val="CBD5E0"/>
+                      </a:solidFill>
+                      <a:prstDash val="solid"/>
+                      <a:round/>
+                      <a:headEnd type="none" w="med" len="med"/>
+                      <a:tailEnd type="none" w="med" len="med"/>
+                    </a:lnL>
+                    <a:lnR w="3810" cap="flat" cmpd="sng" algn="ctr">
+                      <a:solidFill>
+                        <a:srgbClr val="CBD5E0"/>
+                      </a:solidFill>
+                      <a:prstDash val="solid"/>
+                      <a:round/>
+                      <a:headEnd type="none" w="med" len="med"/>
+                      <a:tailEnd type="none" w="med" len="med"/>
+                    </a:lnR>
+                    <a:lnT w="3810" cap="flat" cmpd="sng" algn="ctr">
+                      <a:solidFill>
+                        <a:srgbClr val="CBD5E0"/>
+                      </a:solidFill>
+                      <a:prstDash val="solid"/>
+                      <a:round/>
+                      <a:headEnd type="none" w="med" len="med"/>
+                      <a:tailEnd type="none" w="med" len="med"/>
+                    </a:lnT>
+                    <a:lnB w="3810" cap="flat" cmpd="sng" algn="ctr">
+                      <a:solidFill>
+                        <a:srgbClr val="CBD5E0"/>
+                      </a:solidFill>
+                      <a:prstDash val="solid"/>
+                      <a:round/>
+                      <a:headEnd type="none" w="med" len="med"/>
+                      <a:tailEnd type="none" w="med" len="med"/>
+                    </a:lnB>
+                    <a:solidFill>
+                      <a:srgbClr val="FFFFFF"/>
+                    </a:solidFill>
+                  </a:tcPr>
+                </a:tc>
+                <a:tc>
+                  <a:txBody>
+                    <a:bodyPr/>
+                    <a:lstStyle/>
+                    <a:p>
+                      <a:pPr indent="0" marL="0">
+                        <a:buNone/>
+                      </a:pPr>
+                      <a:r>
+                        <a:rPr lang="en-US" sz="1100" dirty="0">
+                          <a:solidFill>
+                            <a:srgbClr val="10161F"/>
+                          </a:solidFill>
+                          <a:latin typeface="Pretendard" pitchFamily="34" charset="0"/>
+                          <a:ea typeface="Pretendard" pitchFamily="34" charset="-122"/>
+                          <a:cs typeface="Pretendard" pitchFamily="34" charset="-120"/>
+                        </a:rPr>
+                        <a:t>0%</a:t>
+                      </a:r>
+                      <a:endParaRPr lang="en-US" sz="1100" dirty="0">
+                        <a:latin typeface="Pretendard" charset="0"/>
+                        <a:ea typeface="Pretendard" charset="0"/>
+                        <a:cs typeface="Pretendard" charset="0"/>
+                      </a:endParaRPr>
+                    </a:p>
+                  </a:txBody>
+                  <a:tcPr marL="50800" marR="50800" marT="25400" marB="25400" anchor="ctr">
+                    <a:lnL w="3810" cap="flat" cmpd="sng" algn="ctr">
+                      <a:solidFill>
+                        <a:srgbClr val="CBD5E0"/>
+                      </a:solidFill>
+                      <a:prstDash val="solid"/>
+                      <a:round/>
+                      <a:headEnd type="none" w="med" len="med"/>
+                      <a:tailEnd type="none" w="med" len="med"/>
+                    </a:lnL>
+                    <a:lnR w="3810" cap="flat" cmpd="sng" algn="ctr">
+                      <a:solidFill>
+                        <a:srgbClr val="CBD5E0"/>
+                      </a:solidFill>
+                      <a:prstDash val="solid"/>
+                      <a:round/>
+                      <a:headEnd type="none" w="med" len="med"/>
+                      <a:tailEnd type="none" w="med" len="med"/>
+                    </a:lnR>
+                    <a:lnT w="3810" cap="flat" cmpd="sng" algn="ctr">
+                      <a:solidFill>
+                        <a:srgbClr val="CBD5E0"/>
+                      </a:solidFill>
+                      <a:prstDash val="solid"/>
+                      <a:round/>
+                      <a:headEnd type="none" w="med" len="med"/>
+                      <a:tailEnd type="none" w="med" len="med"/>
+                    </a:lnT>
+                    <a:lnB w="3810" cap="flat" cmpd="sng" algn="ctr">
+                      <a:solidFill>
+                        <a:srgbClr val="CBD5E0"/>
+                      </a:solidFill>
+                      <a:prstDash val="solid"/>
+                      <a:round/>
+                      <a:headEnd type="none" w="med" len="med"/>
+                      <a:tailEnd type="none" w="med" len="med"/>
+                    </a:lnB>
+                    <a:solidFill>
+                      <a:srgbClr val="FFFFFF"/>
+                    </a:solidFill>
+                  </a:tcPr>
+                </a:tc>
+                <a:tc>
+                  <a:txBody>
+                    <a:bodyPr/>
+                    <a:lstStyle/>
+                    <a:p>
+                      <a:pPr indent="0" marL="0">
+                        <a:buNone/>
+                      </a:pPr>
+                      <a:r>
+                        <a:rPr lang="en-US" sz="1100" dirty="0">
+                          <a:solidFill>
+                            <a:srgbClr val="10161F"/>
+                          </a:solidFill>
+                          <a:latin typeface="Pretendard" pitchFamily="34" charset="0"/>
+                          <a:ea typeface="Pretendard" pitchFamily="34" charset="-122"/>
+                          <a:cs typeface="Pretendard" pitchFamily="34" charset="-120"/>
+                        </a:rPr>
+                        <a:t>165.8억</a:t>
+                      </a:r>
+                      <a:endParaRPr lang="en-US" sz="1100" dirty="0">
+                        <a:latin typeface="Pretendard" charset="0"/>
+                        <a:ea typeface="Pretendard" charset="0"/>
+                        <a:cs typeface="Pretendard" charset="0"/>
+                      </a:endParaRPr>
+                    </a:p>
+                  </a:txBody>
+                  <a:tcPr marL="50800" marR="50800" marT="25400" marB="25400" anchor="ctr">
+                    <a:lnL w="3810" cap="flat" cmpd="sng" algn="ctr">
+                      <a:solidFill>
+                        <a:srgbClr val="CBD5E0"/>
+                      </a:solidFill>
+                      <a:prstDash val="solid"/>
+                      <a:round/>
+                      <a:headEnd type="none" w="med" len="med"/>
+                      <a:tailEnd type="none" w="med" len="med"/>
+                    </a:lnL>
+                    <a:lnR w="3810" cap="flat" cmpd="sng" algn="ctr">
+                      <a:solidFill>
+                        <a:srgbClr val="CBD5E0"/>
+                      </a:solidFill>
+                      <a:prstDash val="solid"/>
+                      <a:round/>
+                      <a:headEnd type="none" w="med" len="med"/>
+                      <a:tailEnd type="none" w="med" len="med"/>
+                    </a:lnR>
+                    <a:lnT w="3810" cap="flat" cmpd="sng" algn="ctr">
+                      <a:solidFill>
+                        <a:srgbClr val="CBD5E0"/>
+                      </a:solidFill>
+                      <a:prstDash val="solid"/>
+                      <a:round/>
+                      <a:headEnd type="none" w="med" len="med"/>
+                      <a:tailEnd type="none" w="med" len="med"/>
+                    </a:lnT>
+                    <a:lnB w="3810" cap="flat" cmpd="sng" algn="ctr">
+                      <a:solidFill>
+                        <a:srgbClr val="CBD5E0"/>
+                      </a:solidFill>
+                      <a:prstDash val="solid"/>
+                      <a:round/>
+                      <a:headEnd type="none" w="med" len="med"/>
+                      <a:tailEnd type="none" w="med" len="med"/>
+                    </a:lnB>
+                    <a:solidFill>
+                      <a:srgbClr val="FFFFFF"/>
+                    </a:solidFill>
+                  </a:tcPr>
+                </a:tc>
+                <a:tc>
+                  <a:txBody>
+                    <a:bodyPr/>
+                    <a:lstStyle/>
+                    <a:p>
+                      <a:pPr indent="0" marL="0">
+                        <a:buNone/>
+                      </a:pPr>
+                      <a:r>
+                        <a:rPr lang="en-US" sz="1100" dirty="0">
+                          <a:solidFill>
+                            <a:srgbClr val="10161F"/>
+                          </a:solidFill>
+                          <a:latin typeface="Pretendard" pitchFamily="34" charset="0"/>
+                          <a:ea typeface="Pretendard" pitchFamily="34" charset="-122"/>
+                          <a:cs typeface="Pretendard" pitchFamily="34" charset="-120"/>
+                        </a:rPr>
+                        <a:t>3.78%</a:t>
+                      </a:r>
+                      <a:endParaRPr lang="en-US" sz="1100" dirty="0">
+                        <a:latin typeface="Pretendard" charset="0"/>
+                        <a:ea typeface="Pretendard" charset="0"/>
+                        <a:cs typeface="Pretendard" charset="0"/>
+                      </a:endParaRPr>
+                    </a:p>
+                  </a:txBody>
+                  <a:tcPr marL="50800" marR="50800" marT="25400" marB="25400" anchor="ctr">
+                    <a:lnL w="3810" cap="flat" cmpd="sng" algn="ctr">
+                      <a:solidFill>
+                        <a:srgbClr val="CBD5E0"/>
+                      </a:solidFill>
+                      <a:prstDash val="solid"/>
+                      <a:round/>
+                      <a:headEnd type="none" w="med" len="med"/>
+                      <a:tailEnd type="none" w="med" len="med"/>
+                    </a:lnL>
+                    <a:lnR w="3810" cap="flat" cmpd="sng" algn="ctr">
+                      <a:solidFill>
+                        <a:srgbClr val="CBD5E0"/>
+                      </a:solidFill>
+                      <a:prstDash val="solid"/>
+                      <a:round/>
+                      <a:headEnd type="none" w="med" len="med"/>
+                      <a:tailEnd type="none" w="med" len="med"/>
+                    </a:lnR>
+                    <a:lnT w="3810" cap="flat" cmpd="sng" algn="ctr">
+                      <a:solidFill>
+                        <a:srgbClr val="CBD5E0"/>
+                      </a:solidFill>
+                      <a:prstDash val="solid"/>
+                      <a:round/>
+                      <a:headEnd type="none" w="med" len="med"/>
+                      <a:tailEnd type="none" w="med" len="med"/>
+                    </a:lnT>
+                    <a:lnB w="3810" cap="flat" cmpd="sng" algn="ctr">
+                      <a:solidFill>
+                        <a:srgbClr val="CBD5E0"/>
+                      </a:solidFill>
+                      <a:prstDash val="solid"/>
+                      <a:round/>
+                      <a:headEnd type="none" w="med" len="med"/>
+                      <a:tailEnd type="none" w="med" len="med"/>
+                    </a:lnB>
+                    <a:solidFill>
+                      <a:srgbClr val="FFFFFF"/>
+                    </a:solidFill>
+                  </a:tcPr>
+                </a:tc>
+              </a:tr>
+              <a:tr h="457200">
+                <a:tc>
+                  <a:txBody>
+                    <a:bodyPr/>
+                    <a:lstStyle/>
+                    <a:p>
+                      <a:pPr indent="0" marL="0">
+                        <a:buNone/>
+                      </a:pPr>
+                      <a:r>
+                        <a:rPr lang="en-US" sz="1100" b="1" dirty="0">
+                          <a:solidFill>
+                            <a:srgbClr val="10161F"/>
+                          </a:solidFill>
+                          <a:latin typeface="Pretendard" pitchFamily="34" charset="0"/>
+                          <a:ea typeface="Pretendard" pitchFamily="34" charset="-122"/>
+                          <a:cs typeface="Pretendard" pitchFamily="34" charset="-120"/>
+                        </a:rPr>
+                        <a:t>보수적 </a:t>
+                      </a:r>
+                      <a:pPr indent="0" marL="0">
+                        <a:buNone/>
+                      </a:pPr>
+                      <a:r>
+                        <a:rPr lang="en-US" sz="1100" b="1" dirty="0">
+                          <a:solidFill>
+                            <a:srgbClr val="10161F"/>
+                          </a:solidFill>
+                          <a:latin typeface="Pretendard" pitchFamily="34" charset="0"/>
+                          <a:ea typeface="Pretendard" pitchFamily="34" charset="-122"/>
+                          <a:cs typeface="Pretendard" pitchFamily="34" charset="-120"/>
+                        </a:rPr>
+                        <a:t>차입 </a:t>
+                      </a:r>
+                      <a:pPr indent="0" marL="0">
+                        <a:buNone/>
+                      </a:pPr>
+                      <a:r>
+                        <a:rPr lang="en-US" sz="1100" b="1" dirty="0">
+                          <a:solidFill>
+                            <a:srgbClr val="10161F"/>
+                          </a:solidFill>
+                          <a:latin typeface="Pretendard" pitchFamily="34" charset="0"/>
+                          <a:ea typeface="Pretendard" pitchFamily="34" charset="-122"/>
+                          <a:cs typeface="Pretendard" pitchFamily="34" charset="-120"/>
+                        </a:rPr>
+                        <a:t>(안정형)</a:t>
+                      </a:r>
+                      <a:endParaRPr lang="en-US" sz="1100" dirty="0">
+                        <a:latin typeface="Pretendard" charset="0"/>
+                        <a:ea typeface="Pretendard" charset="0"/>
+                        <a:cs typeface="Pretendard" charset="0"/>
+                      </a:endParaRPr>
+                    </a:p>
+                  </a:txBody>
+                  <a:tcPr marL="50800" marR="50800" marT="25400" marB="25400" anchor="ctr">
+                    <a:lnL w="3810" cap="flat" cmpd="sng" algn="ctr">
+                      <a:solidFill>
+                        <a:srgbClr val="CBD5E0"/>
+                      </a:solidFill>
+                      <a:prstDash val="solid"/>
+                      <a:round/>
+                      <a:headEnd type="none" w="med" len="med"/>
+                      <a:tailEnd type="none" w="med" len="med"/>
+                    </a:lnL>
+                    <a:lnR w="3810" cap="flat" cmpd="sng" algn="ctr">
+                      <a:solidFill>
+                        <a:srgbClr val="CBD5E0"/>
+                      </a:solidFill>
+                      <a:prstDash val="solid"/>
+                      <a:round/>
+                      <a:headEnd type="none" w="med" len="med"/>
+                      <a:tailEnd type="none" w="med" len="med"/>
+                    </a:lnR>
+                    <a:lnT w="3810" cap="flat" cmpd="sng" algn="ctr">
+                      <a:solidFill>
+                        <a:srgbClr val="CBD5E0"/>
+                      </a:solidFill>
+                      <a:prstDash val="solid"/>
+                      <a:round/>
+                      <a:headEnd type="none" w="med" len="med"/>
+                      <a:tailEnd type="none" w="med" len="med"/>
+                    </a:lnT>
+                    <a:lnB w="3810" cap="flat" cmpd="sng" algn="ctr">
+                      <a:solidFill>
+                        <a:srgbClr val="CBD5E0"/>
+                      </a:solidFill>
+                      <a:prstDash val="solid"/>
+                      <a:round/>
+                      <a:headEnd type="none" w="med" len="med"/>
+                      <a:tailEnd type="none" w="med" len="med"/>
+                    </a:lnB>
+                    <a:solidFill>
+                      <a:srgbClr val="F7FAFC"/>
+                    </a:solidFill>
+                  </a:tcPr>
+                </a:tc>
+                <a:tc>
+                  <a:txBody>
+                    <a:bodyPr/>
+                    <a:lstStyle/>
+                    <a:p>
+                      <a:pPr indent="0" marL="0">
+                        <a:buNone/>
+                      </a:pPr>
+                      <a:r>
+                        <a:rPr lang="en-US" sz="1100" dirty="0">
+                          <a:solidFill>
+                            <a:srgbClr val="10161F"/>
+                          </a:solidFill>
+                          <a:latin typeface="Pretendard" pitchFamily="34" charset="0"/>
+                          <a:ea typeface="Pretendard" pitchFamily="34" charset="-122"/>
+                          <a:cs typeface="Pretendard" pitchFamily="34" charset="-120"/>
+                        </a:rPr>
+                        <a:t>40%</a:t>
+                      </a:r>
+                      <a:endParaRPr lang="en-US" sz="1100" dirty="0">
+                        <a:latin typeface="Pretendard" charset="0"/>
+                        <a:ea typeface="Pretendard" charset="0"/>
+                        <a:cs typeface="Pretendard" charset="0"/>
+                      </a:endParaRPr>
+                    </a:p>
+                  </a:txBody>
+                  <a:tcPr marL="50800" marR="50800" marT="25400" marB="25400" anchor="ctr">
+                    <a:lnL w="3810" cap="flat" cmpd="sng" algn="ctr">
+                      <a:solidFill>
+                        <a:srgbClr val="CBD5E0"/>
+                      </a:solidFill>
+                      <a:prstDash val="solid"/>
+                      <a:round/>
+                      <a:headEnd type="none" w="med" len="med"/>
+                      <a:tailEnd type="none" w="med" len="med"/>
+                    </a:lnL>
+                    <a:lnR w="3810" cap="flat" cmpd="sng" algn="ctr">
+                      <a:solidFill>
+                        <a:srgbClr val="CBD5E0"/>
+                      </a:solidFill>
+                      <a:prstDash val="solid"/>
+                      <a:round/>
+                      <a:headEnd type="none" w="med" len="med"/>
+                      <a:tailEnd type="none" w="med" len="med"/>
+                    </a:lnR>
+                    <a:lnT w="3810" cap="flat" cmpd="sng" algn="ctr">
+                      <a:solidFill>
+                        <a:srgbClr val="CBD5E0"/>
+                      </a:solidFill>
+                      <a:prstDash val="solid"/>
+                      <a:round/>
+                      <a:headEnd type="none" w="med" len="med"/>
+                      <a:tailEnd type="none" w="med" len="med"/>
+                    </a:lnT>
+                    <a:lnB w="3810" cap="flat" cmpd="sng" algn="ctr">
+                      <a:solidFill>
+                        <a:srgbClr val="CBD5E0"/>
+                      </a:solidFill>
+                      <a:prstDash val="solid"/>
+                      <a:round/>
+                      <a:headEnd type="none" w="med" len="med"/>
+                      <a:tailEnd type="none" w="med" len="med"/>
+                    </a:lnB>
+                    <a:solidFill>
+                      <a:srgbClr val="F7FAFC"/>
+                    </a:solidFill>
+                  </a:tcPr>
+                </a:tc>
+                <a:tc>
+                  <a:txBody>
+                    <a:bodyPr/>
+                    <a:lstStyle/>
+                    <a:p>
+                      <a:pPr indent="0" marL="0">
+                        <a:buNone/>
+                      </a:pPr>
+                      <a:r>
+                        <a:rPr lang="en-US" sz="1100" dirty="0">
+                          <a:solidFill>
+                            <a:srgbClr val="10161F"/>
+                          </a:solidFill>
+                          <a:latin typeface="Pretendard" pitchFamily="34" charset="0"/>
+                          <a:ea typeface="Pretendard" pitchFamily="34" charset="-122"/>
+                          <a:cs typeface="Pretendard" pitchFamily="34" charset="-120"/>
+                        </a:rPr>
+                        <a:t>99.8억</a:t>
+                      </a:r>
+                      <a:endParaRPr lang="en-US" sz="1100" dirty="0">
+                        <a:latin typeface="Pretendard" charset="0"/>
+                        <a:ea typeface="Pretendard" charset="0"/>
+                        <a:cs typeface="Pretendard" charset="0"/>
+                      </a:endParaRPr>
+                    </a:p>
+                  </a:txBody>
+                  <a:tcPr marL="50800" marR="50800" marT="25400" marB="25400" anchor="ctr">
+                    <a:lnL w="3810" cap="flat" cmpd="sng" algn="ctr">
+                      <a:solidFill>
+                        <a:srgbClr val="CBD5E0"/>
+                      </a:solidFill>
+                      <a:prstDash val="solid"/>
+                      <a:round/>
+                      <a:headEnd type="none" w="med" len="med"/>
+                      <a:tailEnd type="none" w="med" len="med"/>
+                    </a:lnL>
+                    <a:lnR w="3810" cap="flat" cmpd="sng" algn="ctr">
+                      <a:solidFill>
+                        <a:srgbClr val="CBD5E0"/>
+                      </a:solidFill>
+                      <a:prstDash val="solid"/>
+                      <a:round/>
+                      <a:headEnd type="none" w="med" len="med"/>
+                      <a:tailEnd type="none" w="med" len="med"/>
+                    </a:lnR>
+                    <a:lnT w="3810" cap="flat" cmpd="sng" algn="ctr">
+                      <a:solidFill>
+                        <a:srgbClr val="CBD5E0"/>
+                      </a:solidFill>
+                      <a:prstDash val="solid"/>
+                      <a:round/>
+                      <a:headEnd type="none" w="med" len="med"/>
+                      <a:tailEnd type="none" w="med" len="med"/>
+                    </a:lnT>
+                    <a:lnB w="3810" cap="flat" cmpd="sng" algn="ctr">
+                      <a:solidFill>
+                        <a:srgbClr val="CBD5E0"/>
+                      </a:solidFill>
+                      <a:prstDash val="solid"/>
+                      <a:round/>
+                      <a:headEnd type="none" w="med" len="med"/>
+                      <a:tailEnd type="none" w="med" len="med"/>
+                    </a:lnB>
+                    <a:solidFill>
+                      <a:srgbClr val="F7FAFC"/>
+                    </a:solidFill>
+                  </a:tcPr>
+                </a:tc>
+                <a:tc>
+                  <a:txBody>
+                    <a:bodyPr/>
+                    <a:lstStyle/>
+                    <a:p>
+                      <a:pPr indent="0" marL="0">
+                        <a:buNone/>
+                      </a:pPr>
+                      <a:r>
+                        <a:rPr lang="en-US" sz="1100" dirty="0">
+                          <a:solidFill>
+                            <a:srgbClr val="10161F"/>
+                          </a:solidFill>
+                          <a:latin typeface="Pretendard" pitchFamily="34" charset="0"/>
+                          <a:ea typeface="Pretendard" pitchFamily="34" charset="-122"/>
+                          <a:cs typeface="Pretendard" pitchFamily="34" charset="-120"/>
+                        </a:rPr>
+                        <a:t>3.11%</a:t>
+                      </a:r>
+                      <a:endParaRPr lang="en-US" sz="1100" dirty="0">
+                        <a:latin typeface="Pretendard" charset="0"/>
+                        <a:ea typeface="Pretendard" charset="0"/>
+                        <a:cs typeface="Pretendard" charset="0"/>
+                      </a:endParaRPr>
+                    </a:p>
+                  </a:txBody>
+                  <a:tcPr marL="50800" marR="50800" marT="25400" marB="25400" anchor="ctr">
+                    <a:lnL w="3810" cap="flat" cmpd="sng" algn="ctr">
+                      <a:solidFill>
+                        <a:srgbClr val="CBD5E0"/>
+                      </a:solidFill>
+                      <a:prstDash val="solid"/>
+                      <a:round/>
+                      <a:headEnd type="none" w="med" len="med"/>
+                      <a:tailEnd type="none" w="med" len="med"/>
+                    </a:lnL>
+                    <a:lnR w="3810" cap="flat" cmpd="sng" algn="ctr">
+                      <a:solidFill>
+                        <a:srgbClr val="CBD5E0"/>
+                      </a:solidFill>
+                      <a:prstDash val="solid"/>
+                      <a:round/>
+                      <a:headEnd type="none" w="med" len="med"/>
+                      <a:tailEnd type="none" w="med" len="med"/>
+                    </a:lnR>
+                    <a:lnT w="3810" cap="flat" cmpd="sng" algn="ctr">
+                      <a:solidFill>
+                        <a:srgbClr val="CBD5E0"/>
+                      </a:solidFill>
+                      <a:prstDash val="solid"/>
+                      <a:round/>
+                      <a:headEnd type="none" w="med" len="med"/>
+                      <a:tailEnd type="none" w="med" len="med"/>
+                    </a:lnT>
+                    <a:lnB w="3810" cap="flat" cmpd="sng" algn="ctr">
+                      <a:solidFill>
+                        <a:srgbClr val="CBD5E0"/>
+                      </a:solidFill>
+                      <a:prstDash val="solid"/>
+                      <a:round/>
+                      <a:headEnd type="none" w="med" len="med"/>
+                      <a:tailEnd type="none" w="med" len="med"/>
+                    </a:lnB>
+                    <a:solidFill>
+                      <a:srgbClr val="F7FAFC"/>
+                    </a:solidFill>
+                  </a:tcPr>
+                </a:tc>
+              </a:tr>
+              <a:tr h="457200">
+                <a:tc>
+                  <a:txBody>
+                    <a:bodyPr/>
+                    <a:lstStyle/>
+                    <a:p>
+                      <a:pPr indent="0" marL="0">
+                        <a:buNone/>
+                      </a:pPr>
+                      <a:r>
+                        <a:rPr lang="en-US" sz="1100" b="1" dirty="0">
+                          <a:solidFill>
+                            <a:srgbClr val="10161F"/>
+                          </a:solidFill>
+                          <a:latin typeface="Pretendard" pitchFamily="34" charset="0"/>
+                          <a:ea typeface="Pretendard" pitchFamily="34" charset="-122"/>
+                          <a:cs typeface="Pretendard" pitchFamily="34" charset="-120"/>
+                        </a:rPr>
+                        <a:t>표준 </a:t>
+                      </a:r>
+                      <a:pPr indent="0" marL="0">
+                        <a:buNone/>
+                      </a:pPr>
+                      <a:r>
+                        <a:rPr lang="en-US" sz="1100" b="1" dirty="0">
+                          <a:solidFill>
+                            <a:srgbClr val="10161F"/>
+                          </a:solidFill>
+                          <a:latin typeface="Pretendard" pitchFamily="34" charset="0"/>
+                          <a:ea typeface="Pretendard" pitchFamily="34" charset="-122"/>
+                          <a:cs typeface="Pretendard" pitchFamily="34" charset="-120"/>
+                        </a:rPr>
+                        <a:t>차입 </a:t>
+                      </a:r>
+                      <a:pPr indent="0" marL="0">
+                        <a:buNone/>
+                      </a:pPr>
+                      <a:r>
+                        <a:rPr lang="en-US" sz="1100" b="1" dirty="0">
+                          <a:solidFill>
+                            <a:srgbClr val="10161F"/>
+                          </a:solidFill>
+                          <a:latin typeface="Pretendard" pitchFamily="34" charset="0"/>
+                          <a:ea typeface="Pretendard" pitchFamily="34" charset="-122"/>
+                          <a:cs typeface="Pretendard" pitchFamily="34" charset="-120"/>
+                        </a:rPr>
+                        <a:t>(기본형)</a:t>
+                      </a:r>
+                      <a:endParaRPr lang="en-US" sz="1100" dirty="0">
+                        <a:latin typeface="Pretendard" charset="0"/>
+                        <a:ea typeface="Pretendard" charset="0"/>
+                        <a:cs typeface="Pretendard" charset="0"/>
+                      </a:endParaRPr>
+                    </a:p>
+                  </a:txBody>
+                  <a:tcPr marL="50800" marR="50800" marT="25400" marB="25400" anchor="ctr">
+                    <a:lnL w="3810" cap="flat" cmpd="sng" algn="ctr">
+                      <a:solidFill>
+                        <a:srgbClr val="CBD5E0"/>
+                      </a:solidFill>
+                      <a:prstDash val="solid"/>
+                      <a:round/>
+                      <a:headEnd type="none" w="med" len="med"/>
+                      <a:tailEnd type="none" w="med" len="med"/>
+                    </a:lnL>
+                    <a:lnR w="3810" cap="flat" cmpd="sng" algn="ctr">
+                      <a:solidFill>
+                        <a:srgbClr val="CBD5E0"/>
+                      </a:solidFill>
+                      <a:prstDash val="solid"/>
+                      <a:round/>
+                      <a:headEnd type="none" w="med" len="med"/>
+                      <a:tailEnd type="none" w="med" len="med"/>
+                    </a:lnR>
+                    <a:lnT w="3810" cap="flat" cmpd="sng" algn="ctr">
+                      <a:solidFill>
+                        <a:srgbClr val="CBD5E0"/>
+                      </a:solidFill>
+                      <a:prstDash val="solid"/>
+                      <a:round/>
+                      <a:headEnd type="none" w="med" len="med"/>
+                      <a:tailEnd type="none" w="med" len="med"/>
+                    </a:lnT>
+                    <a:lnB w="3810" cap="flat" cmpd="sng" algn="ctr">
+                      <a:solidFill>
+                        <a:srgbClr val="CBD5E0"/>
+                      </a:solidFill>
+                      <a:prstDash val="solid"/>
+                      <a:round/>
+                      <a:headEnd type="none" w="med" len="med"/>
+                      <a:tailEnd type="none" w="med" len="med"/>
+                    </a:lnB>
+                    <a:solidFill>
+                      <a:srgbClr val="FFFFFF"/>
+                    </a:solidFill>
+                  </a:tcPr>
+                </a:tc>
+                <a:tc>
+                  <a:txBody>
+                    <a:bodyPr/>
+                    <a:lstStyle/>
+                    <a:p>
+                      <a:pPr indent="0" marL="0">
+                        <a:buNone/>
+                      </a:pPr>
+                      <a:r>
+                        <a:rPr lang="en-US" sz="1100" dirty="0">
+                          <a:solidFill>
+                            <a:srgbClr val="10161F"/>
+                          </a:solidFill>
+                          <a:latin typeface="Pretendard" pitchFamily="34" charset="0"/>
+                          <a:ea typeface="Pretendard" pitchFamily="34" charset="-122"/>
+                          <a:cs typeface="Pretendard" pitchFamily="34" charset="-120"/>
+                        </a:rPr>
+                        <a:t>50%</a:t>
+                      </a:r>
+                      <a:endParaRPr lang="en-US" sz="1100" dirty="0">
+                        <a:latin typeface="Pretendard" charset="0"/>
+                        <a:ea typeface="Pretendard" charset="0"/>
+                        <a:cs typeface="Pretendard" charset="0"/>
+                      </a:endParaRPr>
+                    </a:p>
+                  </a:txBody>
+                  <a:tcPr marL="50800" marR="50800" marT="25400" marB="25400" anchor="ctr">
+                    <a:lnL w="3810" cap="flat" cmpd="sng" algn="ctr">
+                      <a:solidFill>
+                        <a:srgbClr val="CBD5E0"/>
+                      </a:solidFill>
+                      <a:prstDash val="solid"/>
+                      <a:round/>
+                      <a:headEnd type="none" w="med" len="med"/>
+                      <a:tailEnd type="none" w="med" len="med"/>
+                    </a:lnL>
+                    <a:lnR w="3810" cap="flat" cmpd="sng" algn="ctr">
+                      <a:solidFill>
+                        <a:srgbClr val="CBD5E0"/>
+                      </a:solidFill>
+                      <a:prstDash val="solid"/>
+                      <a:round/>
+                      <a:headEnd type="none" w="med" len="med"/>
+                      <a:tailEnd type="none" w="med" len="med"/>
+                    </a:lnR>
+                    <a:lnT w="3810" cap="flat" cmpd="sng" algn="ctr">
+                      <a:solidFill>
+                        <a:srgbClr val="CBD5E0"/>
+                      </a:solidFill>
+                      <a:prstDash val="solid"/>
+                      <a:round/>
+                      <a:headEnd type="none" w="med" len="med"/>
+                      <a:tailEnd type="none" w="med" len="med"/>
+                    </a:lnT>
+                    <a:lnB w="3810" cap="flat" cmpd="sng" algn="ctr">
+                      <a:solidFill>
+                        <a:srgbClr val="CBD5E0"/>
+                      </a:solidFill>
+                      <a:prstDash val="solid"/>
+                      <a:round/>
+                      <a:headEnd type="none" w="med" len="med"/>
+                      <a:tailEnd type="none" w="med" len="med"/>
+                    </a:lnB>
+                    <a:solidFill>
+                      <a:srgbClr val="FFFFFF"/>
+                    </a:solidFill>
+                  </a:tcPr>
+                </a:tc>
+                <a:tc>
+                  <a:txBody>
+                    <a:bodyPr/>
+                    <a:lstStyle/>
+                    <a:p>
+                      <a:pPr indent="0" marL="0">
+                        <a:buNone/>
+                      </a:pPr>
+                      <a:r>
+                        <a:rPr lang="en-US" sz="1100" dirty="0">
+                          <a:solidFill>
+                            <a:srgbClr val="10161F"/>
+                          </a:solidFill>
+                          <a:latin typeface="Pretendard" pitchFamily="34" charset="0"/>
+                          <a:ea typeface="Pretendard" pitchFamily="34" charset="-122"/>
+                          <a:cs typeface="Pretendard" pitchFamily="34" charset="-120"/>
+                        </a:rPr>
+                        <a:t>83.3억</a:t>
+                      </a:r>
+                      <a:endParaRPr lang="en-US" sz="1100" dirty="0">
+                        <a:latin typeface="Pretendard" charset="0"/>
+                        <a:ea typeface="Pretendard" charset="0"/>
+                        <a:cs typeface="Pretendard" charset="0"/>
+                      </a:endParaRPr>
+                    </a:p>
+                  </a:txBody>
+                  <a:tcPr marL="50800" marR="50800" marT="25400" marB="25400" anchor="ctr">
+                    <a:lnL w="3810" cap="flat" cmpd="sng" algn="ctr">
+                      <a:solidFill>
+                        <a:srgbClr val="CBD5E0"/>
+                      </a:solidFill>
+                      <a:prstDash val="solid"/>
+                      <a:round/>
+                      <a:headEnd type="none" w="med" len="med"/>
+                      <a:tailEnd type="none" w="med" len="med"/>
+                    </a:lnL>
+                    <a:lnR w="3810" cap="flat" cmpd="sng" algn="ctr">
+                      <a:solidFill>
+                        <a:srgbClr val="CBD5E0"/>
+                      </a:solidFill>
+                      <a:prstDash val="solid"/>
+                      <a:round/>
+                      <a:headEnd type="none" w="med" len="med"/>
+                      <a:tailEnd type="none" w="med" len="med"/>
+                    </a:lnR>
+                    <a:lnT w="3810" cap="flat" cmpd="sng" algn="ctr">
+                      <a:solidFill>
+                        <a:srgbClr val="CBD5E0"/>
+                      </a:solidFill>
+                      <a:prstDash val="solid"/>
+                      <a:round/>
+                      <a:headEnd type="none" w="med" len="med"/>
+                      <a:tailEnd type="none" w="med" len="med"/>
+                    </a:lnT>
+                    <a:lnB w="3810" cap="flat" cmpd="sng" algn="ctr">
+                      <a:solidFill>
+                        <a:srgbClr val="CBD5E0"/>
+                      </a:solidFill>
+                      <a:prstDash val="solid"/>
+                      <a:round/>
+                      <a:headEnd type="none" w="med" len="med"/>
+                      <a:tailEnd type="none" w="med" len="med"/>
+                    </a:lnB>
+                    <a:solidFill>
+                      <a:srgbClr val="FFFFFF"/>
+                    </a:solidFill>
+                  </a:tcPr>
+                </a:tc>
+                <a:tc>
+                  <a:txBody>
+                    <a:bodyPr/>
+                    <a:lstStyle/>
+                    <a:p>
+                      <a:pPr indent="0" marL="0">
+                        <a:buNone/>
+                      </a:pPr>
+                      <a:r>
+                        <a:rPr lang="en-US" sz="1100" dirty="0">
+                          <a:solidFill>
+                            <a:srgbClr val="10161F"/>
+                          </a:solidFill>
+                          <a:latin typeface="Pretendard" pitchFamily="34" charset="0"/>
+                          <a:ea typeface="Pretendard" pitchFamily="34" charset="-122"/>
+                          <a:cs typeface="Pretendard" pitchFamily="34" charset="-120"/>
+                        </a:rPr>
+                        <a:t>2.77%</a:t>
+                      </a:r>
+                      <a:endParaRPr lang="en-US" sz="1100" dirty="0">
+                        <a:latin typeface="Pretendard" charset="0"/>
+                        <a:ea typeface="Pretendard" charset="0"/>
+                        <a:cs typeface="Pretendard" charset="0"/>
+                      </a:endParaRPr>
+                    </a:p>
+                  </a:txBody>
+                  <a:tcPr marL="50800" marR="50800" marT="25400" marB="25400" anchor="ctr">
+                    <a:lnL w="3810" cap="flat" cmpd="sng" algn="ctr">
+                      <a:solidFill>
+                        <a:srgbClr val="CBD5E0"/>
+                      </a:solidFill>
+                      <a:prstDash val="solid"/>
+                      <a:round/>
+                      <a:headEnd type="none" w="med" len="med"/>
+                      <a:tailEnd type="none" w="med" len="med"/>
+                    </a:lnL>
+                    <a:lnR w="3810" cap="flat" cmpd="sng" algn="ctr">
+                      <a:solidFill>
+                        <a:srgbClr val="CBD5E0"/>
+                      </a:solidFill>
+                      <a:prstDash val="solid"/>
+                      <a:round/>
+                      <a:headEnd type="none" w="med" len="med"/>
+                      <a:tailEnd type="none" w="med" len="med"/>
+                    </a:lnR>
+                    <a:lnT w="3810" cap="flat" cmpd="sng" algn="ctr">
+                      <a:solidFill>
+                        <a:srgbClr val="CBD5E0"/>
+                      </a:solidFill>
+                      <a:prstDash val="solid"/>
+                      <a:round/>
+                      <a:headEnd type="none" w="med" len="med"/>
+                      <a:tailEnd type="none" w="med" len="med"/>
+                    </a:lnT>
+                    <a:lnB w="3810" cap="flat" cmpd="sng" algn="ctr">
+                      <a:solidFill>
+                        <a:srgbClr val="CBD5E0"/>
+                      </a:solidFill>
+                      <a:prstDash val="solid"/>
+                      <a:round/>
+                      <a:headEnd type="none" w="med" len="med"/>
+                      <a:tailEnd type="none" w="med" len="med"/>
+                    </a:lnB>
+                    <a:solidFill>
+                      <a:srgbClr val="FFFFFF"/>
+                    </a:solidFill>
+                  </a:tcPr>
+                </a:tc>
+              </a:tr>
+              <a:tr h="457200">
+                <a:tc>
+                  <a:txBody>
+                    <a:bodyPr/>
+                    <a:lstStyle/>
+                    <a:p>
+                      <a:pPr indent="0" marL="0">
+                        <a:buNone/>
+                      </a:pPr>
+                      <a:r>
+                        <a:rPr lang="en-US" sz="1100" b="1" dirty="0">
+                          <a:solidFill>
+                            <a:srgbClr val="10161F"/>
+                          </a:solidFill>
+                          <a:latin typeface="Pretendard" pitchFamily="34" charset="0"/>
+                          <a:ea typeface="Pretendard" pitchFamily="34" charset="-122"/>
+                          <a:cs typeface="Pretendard" pitchFamily="34" charset="-120"/>
+                        </a:rPr>
+                        <a:t>적극적 </a:t>
+                      </a:r>
+                      <a:pPr indent="0" marL="0">
+                        <a:buNone/>
+                      </a:pPr>
+                      <a:r>
+                        <a:rPr lang="en-US" sz="1100" b="1" dirty="0">
+                          <a:solidFill>
+                            <a:srgbClr val="10161F"/>
+                          </a:solidFill>
+                          <a:latin typeface="Pretendard" pitchFamily="34" charset="0"/>
+                          <a:ea typeface="Pretendard" pitchFamily="34" charset="-122"/>
+                          <a:cs typeface="Pretendard" pitchFamily="34" charset="-120"/>
+                        </a:rPr>
+                        <a:t>차입 </a:t>
+                      </a:r>
+                      <a:pPr indent="0" marL="0">
+                        <a:buNone/>
+                      </a:pPr>
+                      <a:r>
+                        <a:rPr lang="en-US" sz="1100" b="1" dirty="0">
+                          <a:solidFill>
+                            <a:srgbClr val="10161F"/>
+                          </a:solidFill>
+                          <a:latin typeface="Pretendard" pitchFamily="34" charset="0"/>
+                          <a:ea typeface="Pretendard" pitchFamily="34" charset="-122"/>
+                          <a:cs typeface="Pretendard" pitchFamily="34" charset="-120"/>
+                        </a:rPr>
+                        <a:t>(레버리지)</a:t>
+                      </a:r>
+                      <a:endParaRPr lang="en-US" sz="1100" dirty="0">
+                        <a:latin typeface="Pretendard" charset="0"/>
+                        <a:ea typeface="Pretendard" charset="0"/>
+                        <a:cs typeface="Pretendard" charset="0"/>
+                      </a:endParaRPr>
+                    </a:p>
+                  </a:txBody>
+                  <a:tcPr marL="50800" marR="50800" marT="25400" marB="25400" anchor="ctr">
+                    <a:lnL w="3810" cap="flat" cmpd="sng" algn="ctr">
+                      <a:solidFill>
+                        <a:srgbClr val="CBD5E0"/>
+                      </a:solidFill>
+                      <a:prstDash val="solid"/>
+                      <a:round/>
+                      <a:headEnd type="none" w="med" len="med"/>
+                      <a:tailEnd type="none" w="med" len="med"/>
+                    </a:lnL>
+                    <a:lnR w="3810" cap="flat" cmpd="sng" algn="ctr">
+                      <a:solidFill>
+                        <a:srgbClr val="CBD5E0"/>
+                      </a:solidFill>
+                      <a:prstDash val="solid"/>
+                      <a:round/>
+                      <a:headEnd type="none" w="med" len="med"/>
+                      <a:tailEnd type="none" w="med" len="med"/>
+                    </a:lnR>
+                    <a:lnT w="3810" cap="flat" cmpd="sng" algn="ctr">
+                      <a:solidFill>
+                        <a:srgbClr val="CBD5E0"/>
+                      </a:solidFill>
+                      <a:prstDash val="solid"/>
+                      <a:round/>
+                      <a:headEnd type="none" w="med" len="med"/>
+                      <a:tailEnd type="none" w="med" len="med"/>
+                    </a:lnT>
+                    <a:lnB w="3810" cap="flat" cmpd="sng" algn="ctr">
+                      <a:solidFill>
+                        <a:srgbClr val="CBD5E0"/>
+                      </a:solidFill>
+                      <a:prstDash val="solid"/>
+                      <a:round/>
+                      <a:headEnd type="none" w="med" len="med"/>
+                      <a:tailEnd type="none" w="med" len="med"/>
+                    </a:lnB>
+                    <a:solidFill>
+                      <a:srgbClr val="F7FAFC"/>
+                    </a:solidFill>
+                  </a:tcPr>
+                </a:tc>
+                <a:tc>
+                  <a:txBody>
+                    <a:bodyPr/>
+                    <a:lstStyle/>
+                    <a:p>
+                      <a:pPr indent="0" marL="0">
+                        <a:buNone/>
+                      </a:pPr>
+                      <a:r>
+                        <a:rPr lang="en-US" sz="1100" dirty="0">
+                          <a:solidFill>
+                            <a:srgbClr val="10161F"/>
+                          </a:solidFill>
+                          <a:latin typeface="Pretendard" pitchFamily="34" charset="0"/>
+                          <a:ea typeface="Pretendard" pitchFamily="34" charset="-122"/>
+                          <a:cs typeface="Pretendard" pitchFamily="34" charset="-120"/>
+                        </a:rPr>
+                        <a:t>60%</a:t>
+                      </a:r>
+                      <a:endParaRPr lang="en-US" sz="1100" dirty="0">
+                        <a:latin typeface="Pretendard" charset="0"/>
+                        <a:ea typeface="Pretendard" charset="0"/>
+                        <a:cs typeface="Pretendard" charset="0"/>
+                      </a:endParaRPr>
+                    </a:p>
+                  </a:txBody>
+                  <a:tcPr marL="50800" marR="50800" marT="25400" marB="25400" anchor="ctr">
+                    <a:lnL w="3810" cap="flat" cmpd="sng" algn="ctr">
+                      <a:solidFill>
+                        <a:srgbClr val="CBD5E0"/>
+                      </a:solidFill>
+                      <a:prstDash val="solid"/>
+                      <a:round/>
+                      <a:headEnd type="none" w="med" len="med"/>
+                      <a:tailEnd type="none" w="med" len="med"/>
+                    </a:lnL>
+                    <a:lnR w="3810" cap="flat" cmpd="sng" algn="ctr">
+                      <a:solidFill>
+                        <a:srgbClr val="CBD5E0"/>
+                      </a:solidFill>
+                      <a:prstDash val="solid"/>
+                      <a:round/>
+                      <a:headEnd type="none" w="med" len="med"/>
+                      <a:tailEnd type="none" w="med" len="med"/>
+                    </a:lnR>
+                    <a:lnT w="3810" cap="flat" cmpd="sng" algn="ctr">
+                      <a:solidFill>
+                        <a:srgbClr val="CBD5E0"/>
+                      </a:solidFill>
+                      <a:prstDash val="solid"/>
+                      <a:round/>
+                      <a:headEnd type="none" w="med" len="med"/>
+                      <a:tailEnd type="none" w="med" len="med"/>
+                    </a:lnT>
+                    <a:lnB w="3810" cap="flat" cmpd="sng" algn="ctr">
+                      <a:solidFill>
+                        <a:srgbClr val="CBD5E0"/>
+                      </a:solidFill>
+                      <a:prstDash val="solid"/>
+                      <a:round/>
+                      <a:headEnd type="none" w="med" len="med"/>
+                      <a:tailEnd type="none" w="med" len="med"/>
+                    </a:lnB>
+                    <a:solidFill>
+                      <a:srgbClr val="F7FAFC"/>
+                    </a:solidFill>
+                  </a:tcPr>
+                </a:tc>
+                <a:tc>
+                  <a:txBody>
+                    <a:bodyPr/>
+                    <a:lstStyle/>
+                    <a:p>
+                      <a:pPr indent="0" marL="0">
+                        <a:buNone/>
+                      </a:pPr>
+                      <a:r>
+                        <a:rPr lang="en-US" sz="1100" dirty="0">
+                          <a:solidFill>
+                            <a:srgbClr val="10161F"/>
+                          </a:solidFill>
+                          <a:latin typeface="Pretendard" pitchFamily="34" charset="0"/>
+                          <a:ea typeface="Pretendard" pitchFamily="34" charset="-122"/>
+                          <a:cs typeface="Pretendard" pitchFamily="34" charset="-120"/>
+                        </a:rPr>
+                        <a:t>66.8억</a:t>
+                      </a:r>
+                      <a:endParaRPr lang="en-US" sz="1100" dirty="0">
+                        <a:latin typeface="Pretendard" charset="0"/>
+                        <a:ea typeface="Pretendard" charset="0"/>
+                        <a:cs typeface="Pretendard" charset="0"/>
+                      </a:endParaRPr>
+                    </a:p>
+                  </a:txBody>
+                  <a:tcPr marL="50800" marR="50800" marT="25400" marB="25400" anchor="ctr">
+                    <a:lnL w="3810" cap="flat" cmpd="sng" algn="ctr">
+                      <a:solidFill>
+                        <a:srgbClr val="CBD5E0"/>
+                      </a:solidFill>
+                      <a:prstDash val="solid"/>
+                      <a:round/>
+                      <a:headEnd type="none" w="med" len="med"/>
+                      <a:tailEnd type="none" w="med" len="med"/>
+                    </a:lnL>
+                    <a:lnR w="3810" cap="flat" cmpd="sng" algn="ctr">
+                      <a:solidFill>
+                        <a:srgbClr val="CBD5E0"/>
+                      </a:solidFill>
+                      <a:prstDash val="solid"/>
+                      <a:round/>
+                      <a:headEnd type="none" w="med" len="med"/>
+                      <a:tailEnd type="none" w="med" len="med"/>
+                    </a:lnR>
+                    <a:lnT w="3810" cap="flat" cmpd="sng" algn="ctr">
+                      <a:solidFill>
+                        <a:srgbClr val="CBD5E0"/>
+                      </a:solidFill>
+                      <a:prstDash val="solid"/>
+                      <a:round/>
+                      <a:headEnd type="none" w="med" len="med"/>
+                      <a:tailEnd type="none" w="med" len="med"/>
+                    </a:lnT>
+                    <a:lnB w="3810" cap="flat" cmpd="sng" algn="ctr">
+                      <a:solidFill>
+                        <a:srgbClr val="CBD5E0"/>
+                      </a:solidFill>
+                      <a:prstDash val="solid"/>
+                      <a:round/>
+                      <a:headEnd type="none" w="med" len="med"/>
+                      <a:tailEnd type="none" w="med" len="med"/>
+                    </a:lnB>
+                    <a:solidFill>
+                      <a:srgbClr val="F7FAFC"/>
+                    </a:solidFill>
+                  </a:tcPr>
+                </a:tc>
+                <a:tc>
+                  <a:txBody>
+                    <a:bodyPr/>
+                    <a:lstStyle/>
+                    <a:p>
+                      <a:pPr indent="0" marL="0">
+                        <a:buNone/>
+                      </a:pPr>
+                      <a:r>
+                        <a:rPr lang="en-US" sz="1100" dirty="0">
+                          <a:solidFill>
+                            <a:srgbClr val="10161F"/>
+                          </a:solidFill>
+                          <a:latin typeface="Pretendard" pitchFamily="34" charset="0"/>
+                          <a:ea typeface="Pretendard" pitchFamily="34" charset="-122"/>
+                          <a:cs typeface="Pretendard" pitchFamily="34" charset="-120"/>
+                        </a:rPr>
+                        <a:t>2.27%</a:t>
+                      </a:r>
+                      <a:endParaRPr lang="en-US" sz="1100" dirty="0">
+                        <a:latin typeface="Pretendard" charset="0"/>
+                        <a:ea typeface="Pretendard" charset="0"/>
+                        <a:cs typeface="Pretendard" charset="0"/>
+                      </a:endParaRPr>
+                    </a:p>
+                  </a:txBody>
+                  <a:tcPr marL="50800" marR="50800" marT="25400" marB="25400" anchor="ctr">
+                    <a:lnL w="3810" cap="flat" cmpd="sng" algn="ctr">
+                      <a:solidFill>
+                        <a:srgbClr val="CBD5E0"/>
+                      </a:solidFill>
+                      <a:prstDash val="solid"/>
+                      <a:round/>
+                      <a:headEnd type="none" w="med" len="med"/>
+                      <a:tailEnd type="none" w="med" len="med"/>
+                    </a:lnL>
+                    <a:lnR w="3810" cap="flat" cmpd="sng" algn="ctr">
+                      <a:solidFill>
+                        <a:srgbClr val="CBD5E0"/>
+                      </a:solidFill>
+                      <a:prstDash val="solid"/>
+                      <a:round/>
+                      <a:headEnd type="none" w="med" len="med"/>
+                      <a:tailEnd type="none" w="med" len="med"/>
+                    </a:lnR>
+                    <a:lnT w="3810" cap="flat" cmpd="sng" algn="ctr">
+                      <a:solidFill>
+                        <a:srgbClr val="CBD5E0"/>
+                      </a:solidFill>
+                      <a:prstDash val="solid"/>
+                      <a:round/>
+                      <a:headEnd type="none" w="med" len="med"/>
+                      <a:tailEnd type="none" w="med" len="med"/>
+                    </a:lnT>
+                    <a:lnB w="3810" cap="flat" cmpd="sng" algn="ctr">
+                      <a:solidFill>
+                        <a:srgbClr val="CBD5E0"/>
+                      </a:solidFill>
+                      <a:prstDash val="solid"/>
+                      <a:round/>
+                      <a:headEnd type="none" w="med" len="med"/>
+                      <a:tailEnd type="none" w="med" len="med"/>
+                    </a:lnB>
+                    <a:solidFill>
+                      <a:srgbClr val="F7FAFC"/>
+                    </a:solidFill>
+                  </a:tcPr>
+                </a:tc>
+              </a:tr>
+            </a:tbl>
+          </a:graphicData>
+        </a:graphic>
+      </p:graphicFrame>
+      <p:sp>
+        <p:nvSpPr>
+          <p:cNvPr id="31" name="Shape 28"/>
+          <p:cNvSpPr/>
+          <p:nvPr/>
+        </p:nvSpPr>
+        <p:spPr>
+          <a:xfrm>
+            <a:off x="6461608" y="4069080"/>
+            <a:ext cx="4934560" cy="1463040"/>
+          </a:xfrm>
+          <a:prstGeom prst="roundRect">
+            <a:avLst>
+              <a:gd name="adj" fmla="val 3750"/>
+            </a:avLst>
+          </a:prstGeom>
+          <a:solidFill>
+            <a:srgbClr val="FEEBC8"/>
+          </a:solidFill>
+          <a:ln/>
+        </p:spPr>
+      </p:sp>
+      <p:sp>
+        <p:nvSpPr>
+          <p:cNvPr id="32" name="Shape 29"/>
+          <p:cNvSpPr/>
+          <p:nvPr/>
+        </p:nvSpPr>
+        <p:spPr>
+          <a:xfrm>
+            <a:off x="6461608" y="4123944"/>
+            <a:ext cx="36576" cy="1353312"/>
+          </a:xfrm>
+          <a:prstGeom prst="rect">
+            <a:avLst/>
+          </a:prstGeom>
+          <a:solidFill>
+            <a:srgbClr val="9C4221"/>
+          </a:solidFill>
+          <a:ln/>
+        </p:spPr>
+      </p:sp>
+      <p:sp>
+        <p:nvSpPr>
+          <p:cNvPr id="33" name="Text 30"/>
+          <p:cNvSpPr/>
+          <p:nvPr/>
+        </p:nvSpPr>
+        <p:spPr>
+          <a:xfrm>
+            <a:off x="6644488" y="4178808"/>
+            <a:ext cx="4605376" cy="201168"/>
+          </a:xfrm>
+          <a:prstGeom prst="rect">
+            <a:avLst/>
+          </a:prstGeom>
+          <a:noFill/>
+          <a:ln/>
+        </p:spPr>
+        <p:txBody>
+          <a:bodyPr wrap="square" lIns="0" tIns="0" rIns="0" bIns="0" rtlCol="0" anchor="ctr"/>
+          <a:lstStyle/>
+          <a:p>
+            <a:pPr indent="0" marL="0">
+              <a:buNone/>
+            </a:pPr>
+            <a:r>
+              <a:rPr lang="en-US" sz="1050" b="1" dirty="0">
+                <a:solidFill>
+                  <a:srgbClr val="9C4221"/>
+                </a:solidFill>
+                <a:latin typeface="Pretendard" pitchFamily="34" charset="0"/>
+                <a:ea typeface="Pretendard" pitchFamily="34" charset="-122"/>
+                <a:cs typeface="Pretendard" pitchFamily="34" charset="-120"/>
+              </a:rPr>
+              <a:t>역레버리지 유의 구간</a:t>
+            </a:r>
+            <a:endParaRPr lang="en-US" sz="1050" dirty="0"/>
+          </a:p>
+        </p:txBody>
+      </p:sp>
+      <p:sp>
+        <p:nvSpPr>
+          <p:cNvPr id="34" name="Text 31"/>
+          <p:cNvSpPr/>
+          <p:nvPr/>
+        </p:nvSpPr>
+        <p:spPr>
+          <a:xfrm>
+            <a:off x="6644488" y="4398264"/>
+            <a:ext cx="4605376" cy="1060704"/>
+          </a:xfrm>
+          <a:prstGeom prst="rect">
+            <a:avLst/>
+          </a:prstGeom>
+          <a:noFill/>
+          <a:ln/>
+        </p:spPr>
+        <p:txBody>
+          <a:bodyPr wrap="square" lIns="0" tIns="0" rIns="0" bIns="0" rtlCol="0" anchor="t"/>
+          <a:lstStyle/>
+          <a:p>
+            <a:pPr indent="0" marL="0">
+              <a:lnSpc>
+                <a:spcPct val="120000"/>
+              </a:lnSpc>
+              <a:buNone/>
+            </a:pPr>
+            <a:r>
+              <a:rPr lang="en-US" sz="930" dirty="0">
+                <a:solidFill>
+                  <a:srgbClr val="10161F"/>
+                </a:solidFill>
+                <a:latin typeface="Pretendard" pitchFamily="34" charset="0"/>
+                <a:ea typeface="Pretendard" pitchFamily="34" charset="-122"/>
+                <a:cs typeface="Pretendard" pitchFamily="34" charset="-120"/>
+              </a:rPr>
+              <a:t>차입 금리가 자산 총수익률을 상회하여 대출 실행 시 자기자본수익률이 하락할 수 있습니다. 에쿼티 비중 확대를 권장합니다.</a:t>
+            </a:r>
+            <a:endParaRPr lang="en-US" sz="930" dirty="0"/>
+          </a:p>
+        </p:txBody>
+      </p:sp>
+      <p:sp>
+        <p:nvSpPr>
+          <p:cNvPr id="35" name="Text 32"/>
+          <p:cNvSpPr/>
+          <p:nvPr/>
+        </p:nvSpPr>
+        <p:spPr>
+          <a:xfrm>
+            <a:off x="566928" y="6382512"/>
+            <a:ext cx="7315200" cy="219456"/>
+          </a:xfrm>
+          <a:prstGeom prst="rect">
+            <a:avLst/>
+          </a:prstGeom>
+          <a:noFill/>
+          <a:ln/>
+        </p:spPr>
+        <p:txBody>
+          <a:bodyPr wrap="square" lIns="0" tIns="0" rIns="0" bIns="0" rtlCol="0" anchor="ctr"/>
+          <a:lstStyle/>
+          <a:p>
+            <a:pPr indent="0" marL="0">
+              <a:buNone/>
+            </a:pPr>
+            <a:r>
+              <a:rPr lang="en-US" sz="800" dirty="0">
+                <a:solidFill>
+                  <a:srgbClr val="718096"/>
+                </a:solidFill>
+                <a:latin typeface="Pretendard" pitchFamily="34" charset="0"/>
+                <a:ea typeface="Pretendard" pitchFamily="34" charset="-122"/>
+                <a:cs typeface="Pretendard" pitchFamily="34" charset="-120"/>
+              </a:rPr>
+              <a:t>크리딜   |   </a:t>
+            </a:r>
+            <a:endParaRPr lang="en-US" sz="800" dirty="0"/>
+          </a:p>
+        </p:txBody>
+      </p:sp>
+      <p:sp>
+        <p:nvSpPr>
+          <p:cNvPr id="36" name="Text 33"/>
+          <p:cNvSpPr/>
+          <p:nvPr/>
+        </p:nvSpPr>
+        <p:spPr>
+          <a:xfrm>
+            <a:off x="10710367" y="6382512"/>
+            <a:ext cx="914400" cy="219456"/>
+          </a:xfrm>
+          <a:prstGeom prst="rect">
+            <a:avLst/>
+          </a:prstGeom>
+          <a:noFill/>
+          <a:ln/>
+        </p:spPr>
+        <p:txBody>
+          <a:bodyPr wrap="square" lIns="0" tIns="0" rIns="0" bIns="0" rtlCol="0" anchor="ctr"/>
+          <a:lstStyle/>
+          <a:p>
+            <a:pPr algn="r" indent="0" marL="0">
+              <a:buNone/>
+            </a:pPr>
+            <a:r>
+              <a:rPr lang="en-US" sz="900" b="1" dirty="0">
+                <a:solidFill>
+                  <a:srgbClr val="B98A2E"/>
+                </a:solidFill>
+                <a:latin typeface="Arial" pitchFamily="34" charset="0"/>
+                <a:ea typeface="Arial" pitchFamily="34" charset="-122"/>
+                <a:cs typeface="Arial" pitchFamily="34" charset="-120"/>
+              </a:rPr>
+              <a:t>9</a:t>
+            </a:r>
+            <a:endParaRPr lang="en-US" sz="900" dirty="0"/>
+          </a:p>
+        </p:txBody>
+      </p:sp>
+    </p:spTree>
+  </p:cSld>
+  <p:clrMapOvr>
+    <a:masterClrMapping/>
+  </p:clrMapOvr>
+</p:sld>
+</file>
+
+<file path=ppt/slides/slide11.xml><?xml version="1.0" encoding="utf-8"?>
+<p:sld xmlns:a="http://schemas.openxmlformats.org/drawingml/2006/main" xmlns:r="http://schemas.openxmlformats.org/officeDocument/2006/relationships" xmlns:p="http://schemas.openxmlformats.org/presentationml/2006/main">
+  <p:cSld name="Slide 11">
+    <p:bg>
+      <p:bgPr>
+        <a:solidFill>
+          <a:srgbClr val="FFFFFF"/>
+        </a:solidFill>
+      </p:bgPr>
+    </p:bg>
+    <p:spTree>
+      <p:nvGrpSpPr>
+        <p:cNvPr id="1" name=""/>
+        <p:cNvGrpSpPr/>
+        <p:nvPr/>
+      </p:nvGrpSpPr>
+      <p:grpSpPr>
+        <a:xfrm>
+          <a:off x="0" y="0"/>
+          <a:ext cx="0" cy="0"/>
+          <a:chOff x="0" y="0"/>
+          <a:chExt cx="0" cy="0"/>
+        </a:xfrm>
+      </p:grpSpPr>
+      <p:sp>
+        <p:nvSpPr>
+          <p:cNvPr id="2" name="Shape 0"/>
+          <p:cNvSpPr/>
+          <p:nvPr/>
+        </p:nvSpPr>
+        <p:spPr>
+          <a:xfrm>
+            <a:off x="566928" y="457200"/>
+            <a:ext cx="384048" cy="384048"/>
+          </a:xfrm>
+          <a:prstGeom prst="ellipse">
+            <a:avLst/>
+          </a:prstGeom>
+          <a:solidFill>
+            <a:srgbClr val="B98A2E"/>
+          </a:solidFill>
+          <a:ln/>
+        </p:spPr>
+      </p:sp>
+      <p:sp>
+        <p:nvSpPr>
+          <p:cNvPr id="3" name="Text 1"/>
+          <p:cNvSpPr/>
+          <p:nvPr/>
+        </p:nvSpPr>
+        <p:spPr>
+          <a:xfrm>
+            <a:off x="566928" y="457200"/>
+            <a:ext cx="384048" cy="384048"/>
+          </a:xfrm>
+          <a:prstGeom prst="rect">
+            <a:avLst/>
+          </a:prstGeom>
+          <a:noFill/>
+          <a:ln/>
+        </p:spPr>
+        <p:txBody>
+          <a:bodyPr wrap="square" lIns="0" tIns="0" rIns="0" bIns="0" rtlCol="0" anchor="ctr"/>
+          <a:lstStyle/>
+          <a:p>
+            <a:pPr algn="ctr" indent="0" marL="0">
+              <a:buNone/>
+            </a:pPr>
+            <a:r>
+              <a:rPr lang="en-US" sz="1300" b="1" dirty="0">
+                <a:solidFill>
+                  <a:srgbClr val="FFFFFF"/>
+                </a:solidFill>
+                <a:latin typeface="Arial" pitchFamily="34" charset="0"/>
+                <a:ea typeface="Arial" pitchFamily="34" charset="-122"/>
+                <a:cs typeface="Arial" pitchFamily="34" charset="-120"/>
+              </a:rPr>
+              <a:t>10</a:t>
+            </a:r>
+            <a:endParaRPr lang="en-US" sz="1300" dirty="0"/>
+          </a:p>
+        </p:txBody>
+      </p:sp>
+      <p:sp>
+        <p:nvSpPr>
+          <p:cNvPr id="4" name="Text 2"/>
+          <p:cNvSpPr/>
+          <p:nvPr/>
+        </p:nvSpPr>
+        <p:spPr>
+          <a:xfrm>
+            <a:off x="1133856" y="457200"/>
+            <a:ext cx="10490911" cy="182880"/>
+          </a:xfrm>
+          <a:prstGeom prst="rect">
+            <a:avLst/>
+          </a:prstGeom>
+          <a:noFill/>
+          <a:ln/>
+        </p:spPr>
+        <p:txBody>
+          <a:bodyPr wrap="square" lIns="0" tIns="0" rIns="0" bIns="0" rtlCol="0" anchor="ctr"/>
+          <a:lstStyle/>
+          <a:p>
+            <a:pPr indent="0" marL="0">
+              <a:buNone/>
+            </a:pPr>
+            <a:r>
+              <a:rPr lang="en-US" sz="950" b="1" spc="200" kern="0" dirty="0">
+                <a:solidFill>
+                  <a:srgbClr val="B98A2E"/>
+                </a:solidFill>
+                <a:latin typeface="Arial" pitchFamily="34" charset="0"/>
+                <a:ea typeface="Arial" pitchFamily="34" charset="-122"/>
+                <a:cs typeface="Arial" pitchFamily="34" charset="-120"/>
+              </a:rPr>
+              <a:t>Thesis</a:t>
+            </a:r>
+            <a:endParaRPr lang="en-US" sz="950" dirty="0"/>
+          </a:p>
+        </p:txBody>
+      </p:sp>
+      <p:sp>
+        <p:nvSpPr>
+          <p:cNvPr id="5" name="Text 3"/>
+          <p:cNvSpPr/>
+          <p:nvPr/>
+        </p:nvSpPr>
+        <p:spPr>
+          <a:xfrm>
+            <a:off x="1133856" y="640080"/>
+            <a:ext cx="10490911" cy="365760"/>
+          </a:xfrm>
+          <a:prstGeom prst="rect">
+            <a:avLst/>
+          </a:prstGeom>
+          <a:noFill/>
+          <a:ln/>
+        </p:spPr>
+        <p:txBody>
+          <a:bodyPr wrap="square" lIns="0" tIns="0" rIns="0" bIns="0" rtlCol="0" anchor="ctr"/>
+          <a:lstStyle/>
+          <a:p>
+            <a:pPr indent="0" marL="0">
+              <a:buNone/>
+            </a:pPr>
+            <a:r>
+              <a:rPr lang="en-US" sz="2300" b="1" dirty="0">
+                <a:solidFill>
+                  <a:srgbClr val="10161F"/>
+                </a:solidFill>
+                <a:latin typeface="Pretendard" pitchFamily="34" charset="0"/>
+                <a:ea typeface="Pretendard" pitchFamily="34" charset="-122"/>
+                <a:cs typeface="Pretendard" pitchFamily="34" charset="-120"/>
+              </a:rPr>
+              <a:t>투자 포인트</a:t>
+            </a:r>
+            <a:endParaRPr lang="en-US" sz="2300" dirty="0"/>
+          </a:p>
+        </p:txBody>
+      </p:sp>
+      <p:sp>
+        <p:nvSpPr>
+          <p:cNvPr id="6" name="Shape 4"/>
+          <p:cNvSpPr/>
+          <p:nvPr/>
+        </p:nvSpPr>
+        <p:spPr>
+          <a:xfrm>
+            <a:off x="566928" y="4983480"/>
+            <a:ext cx="11057839" cy="804672"/>
+          </a:xfrm>
+          <a:prstGeom prst="roundRect">
+            <a:avLst>
+              <a:gd name="adj" fmla="val 6818"/>
+            </a:avLst>
+          </a:prstGeom>
+          <a:solidFill>
+            <a:srgbClr val="F3EBDA"/>
+          </a:solidFill>
+          <a:ln w="10160">
+            <a:solidFill>
+              <a:srgbClr val="D9B668"/>
+            </a:solidFill>
+            <a:prstDash val="solid"/>
+          </a:ln>
+        </p:spPr>
+      </p:sp>
+      <p:sp>
+        <p:nvSpPr>
+          <p:cNvPr id="7" name="Text 5"/>
+          <p:cNvSpPr/>
+          <p:nvPr/>
+        </p:nvSpPr>
+        <p:spPr>
+          <a:xfrm>
+            <a:off x="749808" y="5093208"/>
+            <a:ext cx="1691640" cy="256032"/>
+          </a:xfrm>
+          <a:prstGeom prst="rect">
+            <a:avLst/>
+          </a:prstGeom>
+          <a:noFill/>
+          <a:ln/>
+        </p:spPr>
+        <p:txBody>
+          <a:bodyPr wrap="square" lIns="0" tIns="0" rIns="0" bIns="0" rtlCol="0" anchor="ctr"/>
+          <a:lstStyle/>
+          <a:p>
+            <a:pPr indent="0" marL="0">
+              <a:buNone/>
+            </a:pPr>
+            <a:r>
+              <a:rPr lang="en-US" sz="1050" b="1" dirty="0">
+                <a:solidFill>
+                  <a:srgbClr val="977024"/>
+                </a:solidFill>
+                <a:latin typeface="Pretendard" pitchFamily="34" charset="0"/>
+                <a:ea typeface="Pretendard" pitchFamily="34" charset="-122"/>
+                <a:cs typeface="Pretendard" pitchFamily="34" charset="-120"/>
+              </a:rPr>
+              <a:t>종합 가치 제안</a:t>
+            </a:r>
+            <a:endParaRPr lang="en-US" sz="1050" dirty="0"/>
+          </a:p>
+        </p:txBody>
+      </p:sp>
+      <p:sp>
+        <p:nvSpPr>
+          <p:cNvPr id="8" name="Text 6"/>
+          <p:cNvSpPr/>
+          <p:nvPr/>
+        </p:nvSpPr>
+        <p:spPr>
+          <a:xfrm>
+            <a:off x="2487168" y="5056632"/>
+            <a:ext cx="8954719" cy="658368"/>
+          </a:xfrm>
+          <a:prstGeom prst="rect">
+            <a:avLst/>
+          </a:prstGeom>
+          <a:noFill/>
+          <a:ln/>
+        </p:spPr>
+        <p:txBody>
+          <a:bodyPr wrap="square" lIns="0" tIns="0" rIns="0" bIns="0" rtlCol="0" anchor="ctr"/>
+          <a:lstStyle/>
+          <a:p>
+            <a:pPr indent="0" marL="0">
+              <a:lnSpc>
+                <a:spcPct val="125000"/>
+              </a:lnSpc>
+              <a:buNone/>
+            </a:pPr>
+            <a:r>
+              <a:rPr lang="en-US" sz="1100" dirty="0">
+                <a:solidFill>
+                  <a:srgbClr val="10161F"/>
+                </a:solidFill>
+                <a:latin typeface="Pretendard" pitchFamily="34" charset="0"/>
+                <a:ea typeface="Pretendard" pitchFamily="34" charset="-122"/>
+                <a:cs typeface="Pretendard" pitchFamily="34" charset="-120"/>
+              </a:rPr>
+              <a:t>관점에서 안정적 월 임대수익과 우량 메디컬 테넌트를 보유한 핵심 투자 자산입니다.</a:t>
+            </a:r>
+            <a:endParaRPr lang="en-US" sz="1100" dirty="0"/>
+          </a:p>
+        </p:txBody>
+      </p:sp>
+      <p:sp>
+        <p:nvSpPr>
+          <p:cNvPr id="9" name="Text 7"/>
+          <p:cNvSpPr/>
+          <p:nvPr/>
+        </p:nvSpPr>
+        <p:spPr>
+          <a:xfrm>
+            <a:off x="566928" y="6382512"/>
+            <a:ext cx="7315200" cy="219456"/>
+          </a:xfrm>
+          <a:prstGeom prst="rect">
+            <a:avLst/>
+          </a:prstGeom>
+          <a:noFill/>
+          <a:ln/>
+        </p:spPr>
+        <p:txBody>
+          <a:bodyPr wrap="square" lIns="0" tIns="0" rIns="0" bIns="0" rtlCol="0" anchor="ctr"/>
+          <a:lstStyle/>
+          <a:p>
+            <a:pPr indent="0" marL="0">
+              <a:buNone/>
+            </a:pPr>
+            <a:r>
+              <a:rPr lang="en-US" sz="800" dirty="0">
+                <a:solidFill>
+                  <a:srgbClr val="718096"/>
+                </a:solidFill>
+                <a:latin typeface="Pretendard" pitchFamily="34" charset="0"/>
+                <a:ea typeface="Pretendard" pitchFamily="34" charset="-122"/>
+                <a:cs typeface="Pretendard" pitchFamily="34" charset="-120"/>
+              </a:rPr>
+              <a:t>크리딜   |   </a:t>
+            </a:r>
+            <a:endParaRPr lang="en-US" sz="800" dirty="0"/>
+          </a:p>
+        </p:txBody>
+      </p:sp>
+      <p:sp>
+        <p:nvSpPr>
+          <p:cNvPr id="10" name="Text 8"/>
+          <p:cNvSpPr/>
+          <p:nvPr/>
+        </p:nvSpPr>
+        <p:spPr>
+          <a:xfrm>
+            <a:off x="10710367" y="6382512"/>
+            <a:ext cx="914400" cy="219456"/>
+          </a:xfrm>
+          <a:prstGeom prst="rect">
+            <a:avLst/>
+          </a:prstGeom>
+          <a:noFill/>
+          <a:ln/>
+        </p:spPr>
+        <p:txBody>
+          <a:bodyPr wrap="square" lIns="0" tIns="0" rIns="0" bIns="0" rtlCol="0" anchor="ctr"/>
+          <a:lstStyle/>
+          <a:p>
+            <a:pPr algn="r" indent="0" marL="0">
+              <a:buNone/>
+            </a:pPr>
+            <a:r>
+              <a:rPr lang="en-US" sz="900" b="1" dirty="0">
+                <a:solidFill>
+                  <a:srgbClr val="B98A2E"/>
+                </a:solidFill>
+                <a:latin typeface="Arial" pitchFamily="34" charset="0"/>
+                <a:ea typeface="Arial" pitchFamily="34" charset="-122"/>
+                <a:cs typeface="Arial" pitchFamily="34" charset="-120"/>
+              </a:rPr>
+              <a:t>10</a:t>
+            </a:r>
+            <a:endParaRPr lang="en-US" sz="900" dirty="0"/>
+          </a:p>
+        </p:txBody>
+      </p:sp>
+    </p:spTree>
+  </p:cSld>
+  <p:clrMapOvr>
+    <a:masterClrMapping/>
+  </p:clrMapOvr>
+</p:sld>
+</file>
+
+<file path=ppt/slides/slide12.xml><?xml version="1.0" encoding="utf-8"?>
+<p:sld xmlns:a="http://schemas.openxmlformats.org/drawingml/2006/main" xmlns:r="http://schemas.openxmlformats.org/officeDocument/2006/relationships" xmlns:p="http://schemas.openxmlformats.org/presentationml/2006/main">
+  <p:cSld name="Slide 12">
+    <p:bg>
+      <p:bgPr>
+        <a:solidFill>
+          <a:srgbClr val="FFFFFF"/>
+        </a:solidFill>
+      </p:bgPr>
+    </p:bg>
+    <p:spTree>
+      <p:nvGrpSpPr>
+        <p:cNvPr id="1" name=""/>
+        <p:cNvGrpSpPr/>
+        <p:nvPr/>
+      </p:nvGrpSpPr>
+      <p:grpSpPr>
+        <a:xfrm>
+          <a:off x="0" y="0"/>
+          <a:ext cx="0" cy="0"/>
+          <a:chOff x="0" y="0"/>
+          <a:chExt cx="0" cy="0"/>
+        </a:xfrm>
+      </p:grpSpPr>
+      <p:sp>
+        <p:nvSpPr>
+          <p:cNvPr id="2" name="Shape 0"/>
+          <p:cNvSpPr/>
+          <p:nvPr/>
+        </p:nvSpPr>
+        <p:spPr>
+          <a:xfrm>
+            <a:off x="566928" y="457200"/>
+            <a:ext cx="384048" cy="384048"/>
+          </a:xfrm>
+          <a:prstGeom prst="ellipse">
+            <a:avLst/>
+          </a:prstGeom>
+          <a:solidFill>
+            <a:srgbClr val="B98A2E"/>
+          </a:solidFill>
+          <a:ln/>
+        </p:spPr>
+      </p:sp>
+      <p:sp>
+        <p:nvSpPr>
+          <p:cNvPr id="3" name="Text 1"/>
+          <p:cNvSpPr/>
+          <p:nvPr/>
+        </p:nvSpPr>
+        <p:spPr>
+          <a:xfrm>
+            <a:off x="566928" y="457200"/>
+            <a:ext cx="384048" cy="384048"/>
+          </a:xfrm>
+          <a:prstGeom prst="rect">
+            <a:avLst/>
+          </a:prstGeom>
+          <a:noFill/>
+          <a:ln/>
+        </p:spPr>
+        <p:txBody>
+          <a:bodyPr wrap="square" lIns="0" tIns="0" rIns="0" bIns="0" rtlCol="0" anchor="ctr"/>
+          <a:lstStyle/>
+          <a:p>
+            <a:pPr algn="ctr" indent="0" marL="0">
+              <a:buNone/>
+            </a:pPr>
+            <a:r>
+              <a:rPr lang="en-US" sz="1300" b="1" dirty="0">
+                <a:solidFill>
+                  <a:srgbClr val="FFFFFF"/>
+                </a:solidFill>
+                <a:latin typeface="Arial" pitchFamily="34" charset="0"/>
+                <a:ea typeface="Arial" pitchFamily="34" charset="-122"/>
+                <a:cs typeface="Arial" pitchFamily="34" charset="-120"/>
+              </a:rPr>
+              <a:t>11</a:t>
+            </a:r>
+            <a:endParaRPr lang="en-US" sz="1300" dirty="0"/>
+          </a:p>
+        </p:txBody>
+      </p:sp>
+      <p:sp>
+        <p:nvSpPr>
+          <p:cNvPr id="4" name="Text 2"/>
+          <p:cNvSpPr/>
+          <p:nvPr/>
+        </p:nvSpPr>
+        <p:spPr>
+          <a:xfrm>
+            <a:off x="1133856" y="457200"/>
+            <a:ext cx="10490911" cy="182880"/>
+          </a:xfrm>
+          <a:prstGeom prst="rect">
+            <a:avLst/>
+          </a:prstGeom>
+          <a:noFill/>
+          <a:ln/>
+        </p:spPr>
+        <p:txBody>
+          <a:bodyPr wrap="square" lIns="0" tIns="0" rIns="0" bIns="0" rtlCol="0" anchor="ctr"/>
+          <a:lstStyle/>
+          <a:p>
+            <a:pPr indent="0" marL="0">
+              <a:buNone/>
+            </a:pPr>
+            <a:r>
+              <a:rPr lang="en-US" sz="950" b="1" spc="200" kern="0" dirty="0">
+                <a:solidFill>
+                  <a:srgbClr val="B98A2E"/>
+                </a:solidFill>
+                <a:latin typeface="Arial" pitchFamily="34" charset="0"/>
+                <a:ea typeface="Arial" pitchFamily="34" charset="-122"/>
+                <a:cs typeface="Arial" pitchFamily="34" charset="-120"/>
+              </a:rPr>
+              <a:t>Risk</a:t>
+            </a:r>
+            <a:endParaRPr lang="en-US" sz="950" dirty="0"/>
+          </a:p>
+        </p:txBody>
+      </p:sp>
+      <p:sp>
+        <p:nvSpPr>
+          <p:cNvPr id="5" name="Text 3"/>
+          <p:cNvSpPr/>
+          <p:nvPr/>
+        </p:nvSpPr>
+        <p:spPr>
+          <a:xfrm>
+            <a:off x="1133856" y="640080"/>
+            <a:ext cx="10490911" cy="365760"/>
+          </a:xfrm>
+          <a:prstGeom prst="rect">
+            <a:avLst/>
+          </a:prstGeom>
+          <a:noFill/>
+          <a:ln/>
+        </p:spPr>
+        <p:txBody>
+          <a:bodyPr wrap="square" lIns="0" tIns="0" rIns="0" bIns="0" rtlCol="0" anchor="ctr"/>
+          <a:lstStyle/>
+          <a:p>
+            <a:pPr indent="0" marL="0">
+              <a:buNone/>
+            </a:pPr>
+            <a:r>
+              <a:rPr lang="en-US" sz="2300" b="1" dirty="0">
+                <a:solidFill>
+                  <a:srgbClr val="10161F"/>
+                </a:solidFill>
+                <a:latin typeface="Pretendard" pitchFamily="34" charset="0"/>
+                <a:ea typeface="Pretendard" pitchFamily="34" charset="-122"/>
+                <a:cs typeface="Pretendard" pitchFamily="34" charset="-120"/>
+              </a:rPr>
+              <a:t>리스크 점검</a:t>
+            </a:r>
+            <a:endParaRPr lang="en-US" sz="2300" dirty="0"/>
+          </a:p>
+        </p:txBody>
+      </p:sp>
+      <p:sp>
+        <p:nvSpPr>
+          <p:cNvPr id="6" name="Shape 4"/>
+          <p:cNvSpPr/>
+          <p:nvPr/>
+        </p:nvSpPr>
+        <p:spPr>
+          <a:xfrm>
+            <a:off x="566928" y="1417320"/>
+            <a:ext cx="5400904" cy="3657600"/>
+          </a:xfrm>
+          <a:prstGeom prst="roundRect">
+            <a:avLst>
+              <a:gd name="adj" fmla="val 1500"/>
+            </a:avLst>
+          </a:prstGeom>
+          <a:solidFill>
+            <a:srgbClr val="F7FAFC"/>
+          </a:solidFill>
+          <a:ln w="6350">
+            <a:solidFill>
+              <a:srgbClr val="CBD5E0"/>
+            </a:solidFill>
+            <a:prstDash val="solid"/>
+          </a:ln>
+        </p:spPr>
+      </p:sp>
+      <p:sp>
+        <p:nvSpPr>
+          <p:cNvPr id="7" name="Shape 5"/>
+          <p:cNvSpPr/>
+          <p:nvPr/>
+        </p:nvSpPr>
+        <p:spPr>
+          <a:xfrm>
+            <a:off x="566928" y="1417320"/>
+            <a:ext cx="5400904" cy="45720"/>
+          </a:xfrm>
+          <a:prstGeom prst="rect">
+            <a:avLst/>
+          </a:prstGeom>
+          <a:solidFill>
+            <a:srgbClr val="B98A2E"/>
+          </a:solidFill>
+          <a:ln/>
+        </p:spPr>
+      </p:sp>
+      <p:sp>
+        <p:nvSpPr>
+          <p:cNvPr id="8" name="Text 6"/>
+          <p:cNvSpPr/>
+          <p:nvPr/>
+        </p:nvSpPr>
+        <p:spPr>
+          <a:xfrm>
+            <a:off x="795528" y="1618488"/>
+            <a:ext cx="4943704" cy="292608"/>
+          </a:xfrm>
+          <a:prstGeom prst="rect">
+            <a:avLst/>
+          </a:prstGeom>
+          <a:noFill/>
+          <a:ln/>
+        </p:spPr>
+        <p:txBody>
+          <a:bodyPr wrap="square" lIns="0" tIns="0" rIns="0" bIns="0" rtlCol="0" anchor="ctr"/>
+          <a:lstStyle/>
+          <a:p>
+            <a:pPr indent="0" marL="0">
+              <a:buNone/>
+            </a:pPr>
+            <a:r>
+              <a:rPr lang="en-US" sz="1350" b="1" dirty="0">
+                <a:solidFill>
+                  <a:srgbClr val="977024"/>
+                </a:solidFill>
+                <a:latin typeface="Pretendard" pitchFamily="34" charset="0"/>
+                <a:ea typeface="Pretendard" pitchFamily="34" charset="-122"/>
+                <a:cs typeface="Pretendard" pitchFamily="34" charset="-120"/>
+              </a:rPr>
+              <a:t>메디컬 단일업종 집중</a:t>
+            </a:r>
+            <a:endParaRPr lang="en-US" sz="1350" dirty="0"/>
+          </a:p>
+        </p:txBody>
+      </p:sp>
+      <p:sp>
+        <p:nvSpPr>
+          <p:cNvPr id="9" name="Text 7"/>
+          <p:cNvSpPr/>
+          <p:nvPr/>
+        </p:nvSpPr>
+        <p:spPr>
+          <a:xfrm>
+            <a:off x="795528" y="1947672"/>
+            <a:ext cx="4943704" cy="365760"/>
+          </a:xfrm>
+          <a:prstGeom prst="rect">
+            <a:avLst/>
+          </a:prstGeom>
+          <a:noFill/>
+          <a:ln/>
+        </p:spPr>
+        <p:txBody>
+          <a:bodyPr wrap="square" lIns="0" tIns="0" rIns="0" bIns="0" rtlCol="0" anchor="ctr">
+            <a:normAutofit/>
+          </a:bodyPr>
+          <a:lstStyle/>
+          <a:p>
+            <a:pPr indent="0" marL="0">
+              <a:buNone/>
+            </a:pPr>
+            <a:r>
+              <a:rPr lang="en-US" sz="1250" b="1" dirty="0">
+                <a:solidFill>
+                  <a:srgbClr val="10161F"/>
+                </a:solidFill>
+                <a:latin typeface="Pretendard" pitchFamily="34" charset="0"/>
+                <a:ea typeface="Pretendard" pitchFamily="34" charset="-122"/>
+                <a:cs typeface="Pretendard" pitchFamily="34" charset="-120"/>
+              </a:rPr>
+              <a:t>전층 의료</a:t>
+            </a:r>
+            <a:endParaRPr lang="en-US" sz="1250" dirty="0"/>
+          </a:p>
+        </p:txBody>
+      </p:sp>
+      <p:sp>
+        <p:nvSpPr>
+          <p:cNvPr id="10" name="Text 8"/>
+          <p:cNvSpPr/>
+          <p:nvPr/>
+        </p:nvSpPr>
+        <p:spPr>
+          <a:xfrm>
+            <a:off x="795528" y="2377440"/>
+            <a:ext cx="4943704" cy="2606040"/>
+          </a:xfrm>
+          <a:prstGeom prst="rect">
+            <a:avLst/>
+          </a:prstGeom>
+          <a:noFill/>
+          <a:ln/>
+        </p:spPr>
+        <p:txBody>
+          <a:bodyPr wrap="square" lIns="0" tIns="0" rIns="0" bIns="0" rtlCol="0" anchor="t">
+            <a:normAutofit/>
+          </a:bodyPr>
+          <a:lstStyle/>
+          <a:p>
+            <a:pPr marL="342900" indent="-342900">
+              <a:lnSpc>
+                <a:spcPct val="125000"/>
+              </a:lnSpc>
+              <a:buSzPct val="100000"/>
+              <a:buChar char="•"/>
+            </a:pPr>
+            <a:r>
+              <a:rPr lang="en-US" sz="1100" dirty="0">
+                <a:solidFill>
+                  <a:srgbClr val="10161F"/>
+                </a:solidFill>
+                <a:latin typeface="Pretendard" pitchFamily="34" charset="0"/>
+                <a:ea typeface="Pretendard" pitchFamily="34" charset="-122"/>
+                <a:cs typeface="Pretendard" pitchFamily="34" charset="-120"/>
+              </a:rPr>
+              <a:t>업종 다각화 검토</a:t>
+            </a:r>
+            <a:endParaRPr lang="en-US" sz="1100" dirty="0"/>
+          </a:p>
+        </p:txBody>
+      </p:sp>
+      <p:sp>
+        <p:nvSpPr>
+          <p:cNvPr id="11" name="Shape 9"/>
+          <p:cNvSpPr/>
+          <p:nvPr/>
+        </p:nvSpPr>
+        <p:spPr>
+          <a:xfrm>
+            <a:off x="6223864" y="1417320"/>
+            <a:ext cx="5400904" cy="3657600"/>
+          </a:xfrm>
+          <a:prstGeom prst="roundRect">
+            <a:avLst>
+              <a:gd name="adj" fmla="val 1500"/>
+            </a:avLst>
+          </a:prstGeom>
+          <a:solidFill>
+            <a:srgbClr val="F7FAFC"/>
+          </a:solidFill>
+          <a:ln w="6350">
+            <a:solidFill>
+              <a:srgbClr val="CBD5E0"/>
+            </a:solidFill>
+            <a:prstDash val="solid"/>
+          </a:ln>
+        </p:spPr>
+      </p:sp>
+      <p:sp>
+        <p:nvSpPr>
+          <p:cNvPr id="12" name="Shape 10"/>
+          <p:cNvSpPr/>
+          <p:nvPr/>
+        </p:nvSpPr>
+        <p:spPr>
+          <a:xfrm>
+            <a:off x="6223864" y="1417320"/>
+            <a:ext cx="5400904" cy="45720"/>
+          </a:xfrm>
+          <a:prstGeom prst="rect">
+            <a:avLst/>
+          </a:prstGeom>
+          <a:solidFill>
+            <a:srgbClr val="B98A2E"/>
+          </a:solidFill>
+          <a:ln/>
+        </p:spPr>
+      </p:sp>
+      <p:sp>
+        <p:nvSpPr>
+          <p:cNvPr id="13" name="Text 11"/>
+          <p:cNvSpPr/>
+          <p:nvPr/>
+        </p:nvSpPr>
+        <p:spPr>
+          <a:xfrm>
+            <a:off x="6452464" y="1618488"/>
+            <a:ext cx="4943704" cy="292608"/>
+          </a:xfrm>
+          <a:prstGeom prst="rect">
+            <a:avLst/>
+          </a:prstGeom>
+          <a:noFill/>
+          <a:ln/>
+        </p:spPr>
+        <p:txBody>
+          <a:bodyPr wrap="square" lIns="0" tIns="0" rIns="0" bIns="0" rtlCol="0" anchor="ctr"/>
+          <a:lstStyle/>
+          <a:p>
+            <a:pPr indent="0" marL="0">
+              <a:buNone/>
+            </a:pPr>
+            <a:r>
+              <a:rPr lang="en-US" sz="1350" b="1" dirty="0">
+                <a:solidFill>
+                  <a:srgbClr val="977024"/>
+                </a:solidFill>
+                <a:latin typeface="Pretendard" pitchFamily="34" charset="0"/>
+                <a:ea typeface="Pretendard" pitchFamily="34" charset="-122"/>
+                <a:cs typeface="Pretendard" pitchFamily="34" charset="-120"/>
+              </a:rPr>
+              <a:t>금리 변동</a:t>
+            </a:r>
+            <a:endParaRPr lang="en-US" sz="1350" dirty="0"/>
+          </a:p>
+        </p:txBody>
+      </p:sp>
+      <p:sp>
+        <p:nvSpPr>
+          <p:cNvPr id="14" name="Text 12"/>
+          <p:cNvSpPr/>
+          <p:nvPr/>
+        </p:nvSpPr>
+        <p:spPr>
+          <a:xfrm>
+            <a:off x="6452464" y="1947672"/>
+            <a:ext cx="4943704" cy="365760"/>
+          </a:xfrm>
+          <a:prstGeom prst="rect">
+            <a:avLst/>
+          </a:prstGeom>
+          <a:noFill/>
+          <a:ln/>
+        </p:spPr>
+        <p:txBody>
+          <a:bodyPr wrap="square" lIns="0" tIns="0" rIns="0" bIns="0" rtlCol="0" anchor="ctr">
+            <a:normAutofit/>
+          </a:bodyPr>
+          <a:lstStyle/>
+          <a:p>
+            <a:pPr indent="0" marL="0">
+              <a:buNone/>
+            </a:pPr>
+            <a:r>
+              <a:rPr lang="en-US" sz="1250" b="1" dirty="0">
+                <a:solidFill>
+                  <a:srgbClr val="10161F"/>
+                </a:solidFill>
+                <a:latin typeface="Pretendard" pitchFamily="34" charset="0"/>
+                <a:ea typeface="Pretendard" pitchFamily="34" charset="-122"/>
+                <a:cs typeface="Pretendard" pitchFamily="34" charset="-120"/>
+              </a:rPr>
+              <a:t>4.1% 고정</a:t>
+            </a:r>
+            <a:endParaRPr lang="en-US" sz="1250" dirty="0"/>
+          </a:p>
+        </p:txBody>
+      </p:sp>
+      <p:sp>
+        <p:nvSpPr>
+          <p:cNvPr id="15" name="Text 13"/>
+          <p:cNvSpPr/>
+          <p:nvPr/>
+        </p:nvSpPr>
+        <p:spPr>
+          <a:xfrm>
+            <a:off x="6452464" y="2377440"/>
+            <a:ext cx="4943704" cy="2606040"/>
+          </a:xfrm>
+          <a:prstGeom prst="rect">
+            <a:avLst/>
+          </a:prstGeom>
+          <a:noFill/>
+          <a:ln/>
+        </p:spPr>
+        <p:txBody>
+          <a:bodyPr wrap="square" lIns="0" tIns="0" rIns="0" bIns="0" rtlCol="0" anchor="t">
+            <a:normAutofit/>
+          </a:bodyPr>
+          <a:lstStyle/>
+          <a:p>
+            <a:pPr marL="342900" indent="-342900">
+              <a:lnSpc>
+                <a:spcPct val="125000"/>
+              </a:lnSpc>
+              <a:buSzPct val="100000"/>
+              <a:buChar char="•"/>
+            </a:pPr>
+            <a:r>
+              <a:rPr lang="en-US" sz="1100" dirty="0">
+                <a:solidFill>
+                  <a:srgbClr val="10161F"/>
+                </a:solidFill>
+                <a:latin typeface="Pretendard" pitchFamily="34" charset="0"/>
+                <a:ea typeface="Pretendard" pitchFamily="34" charset="-122"/>
+                <a:cs typeface="Pretendard" pitchFamily="34" charset="-120"/>
+              </a:rPr>
+              <a:t>승계 대출 활용</a:t>
+            </a:r>
+            <a:endParaRPr lang="en-US" sz="1100" dirty="0"/>
+          </a:p>
+        </p:txBody>
+      </p:sp>
+      <p:sp>
+        <p:nvSpPr>
+          <p:cNvPr id="16" name="Shape 14"/>
+          <p:cNvSpPr/>
+          <p:nvPr/>
+        </p:nvSpPr>
+        <p:spPr>
+          <a:xfrm>
+            <a:off x="566928" y="5193792"/>
+            <a:ext cx="11057839" cy="621792"/>
+          </a:xfrm>
+          <a:prstGeom prst="roundRect">
+            <a:avLst>
+              <a:gd name="adj" fmla="val 8824"/>
+            </a:avLst>
+          </a:prstGeom>
+          <a:solidFill>
+            <a:srgbClr val="F7FAFC"/>
+          </a:solidFill>
+          <a:ln w="6350">
+            <a:solidFill>
+              <a:srgbClr val="CBD5E0"/>
+            </a:solidFill>
+            <a:prstDash val="solid"/>
+          </a:ln>
+        </p:spPr>
+      </p:sp>
+      <p:sp>
+        <p:nvSpPr>
+          <p:cNvPr id="17" name="Text 15"/>
+          <p:cNvSpPr/>
+          <p:nvPr/>
+        </p:nvSpPr>
+        <p:spPr>
+          <a:xfrm>
+            <a:off x="795528" y="5193792"/>
+            <a:ext cx="10600639" cy="621792"/>
+          </a:xfrm>
+          <a:prstGeom prst="rect">
+            <a:avLst/>
+          </a:prstGeom>
+          <a:noFill/>
+          <a:ln/>
+        </p:spPr>
+        <p:txBody>
+          <a:bodyPr wrap="square" lIns="0" tIns="0" rIns="0" bIns="0" rtlCol="0" anchor="ctr"/>
+          <a:lstStyle/>
+          <a:p>
+            <a:pPr indent="0" marL="0">
+              <a:buNone/>
+            </a:pPr>
+            <a:r>
+              <a:rPr lang="en-US" sz="1100" dirty="0">
+                <a:solidFill>
+                  <a:srgbClr val="10161F"/>
+                </a:solidFill>
+                <a:latin typeface="Pretendard" pitchFamily="34" charset="0"/>
+                <a:ea typeface="Pretendard" pitchFamily="34" charset="-122"/>
+                <a:cs typeface="Pretendard" pitchFamily="34" charset="-120"/>
+              </a:rPr>
+              <a:t>※ 본 리스크 체크는 공부 및 브로커 확인 기반이며, 매수 전 전문 실사팀(변호사/건축사)을 통한 정밀 실사가 필요합니다.</a:t>
+            </a:r>
+            <a:endParaRPr lang="en-US" sz="1100" dirty="0"/>
+          </a:p>
+        </p:txBody>
+      </p:sp>
+      <p:sp>
+        <p:nvSpPr>
+          <p:cNvPr id="18" name="Text 16"/>
+          <p:cNvSpPr/>
+          <p:nvPr/>
+        </p:nvSpPr>
+        <p:spPr>
+          <a:xfrm>
+            <a:off x="566928" y="6382512"/>
+            <a:ext cx="7315200" cy="219456"/>
+          </a:xfrm>
+          <a:prstGeom prst="rect">
+            <a:avLst/>
+          </a:prstGeom>
+          <a:noFill/>
+          <a:ln/>
+        </p:spPr>
+        <p:txBody>
+          <a:bodyPr wrap="square" lIns="0" tIns="0" rIns="0" bIns="0" rtlCol="0" anchor="ctr"/>
+          <a:lstStyle/>
+          <a:p>
+            <a:pPr indent="0" marL="0">
+              <a:buNone/>
+            </a:pPr>
+            <a:r>
+              <a:rPr lang="en-US" sz="800" dirty="0">
+                <a:solidFill>
+                  <a:srgbClr val="718096"/>
+                </a:solidFill>
+                <a:latin typeface="Pretendard" pitchFamily="34" charset="0"/>
+                <a:ea typeface="Pretendard" pitchFamily="34" charset="-122"/>
+                <a:cs typeface="Pretendard" pitchFamily="34" charset="-120"/>
+              </a:rPr>
+              <a:t>크리딜   |   </a:t>
+            </a:r>
+            <a:endParaRPr lang="en-US" sz="800" dirty="0"/>
+          </a:p>
+        </p:txBody>
+      </p:sp>
+      <p:sp>
+        <p:nvSpPr>
+          <p:cNvPr id="19" name="Text 17"/>
+          <p:cNvSpPr/>
+          <p:nvPr/>
+        </p:nvSpPr>
+        <p:spPr>
+          <a:xfrm>
+            <a:off x="10710367" y="6382512"/>
+            <a:ext cx="914400" cy="219456"/>
+          </a:xfrm>
+          <a:prstGeom prst="rect">
+            <a:avLst/>
+          </a:prstGeom>
+          <a:noFill/>
+          <a:ln/>
+        </p:spPr>
+        <p:txBody>
+          <a:bodyPr wrap="square" lIns="0" tIns="0" rIns="0" bIns="0" rtlCol="0" anchor="ctr"/>
+          <a:lstStyle/>
+          <a:p>
+            <a:pPr algn="r" indent="0" marL="0">
+              <a:buNone/>
+            </a:pPr>
+            <a:r>
+              <a:rPr lang="en-US" sz="900" b="1" dirty="0">
+                <a:solidFill>
+                  <a:srgbClr val="B98A2E"/>
+                </a:solidFill>
+                <a:latin typeface="Arial" pitchFamily="34" charset="0"/>
+                <a:ea typeface="Arial" pitchFamily="34" charset="-122"/>
+                <a:cs typeface="Arial" pitchFamily="34" charset="-120"/>
+              </a:rPr>
+              <a:t>11</a:t>
+            </a:r>
+            <a:endParaRPr lang="en-US" sz="900" dirty="0"/>
+          </a:p>
+        </p:txBody>
+      </p:sp>
+    </p:spTree>
+  </p:cSld>
+  <p:clrMapOvr>
+    <a:masterClrMapping/>
+  </p:clrMapOvr>
+</p:sld>
+</file>
+
+<file path=ppt/slides/slide13.xml><?xml version="1.0" encoding="utf-8"?>
+<p:sld xmlns:a="http://schemas.openxmlformats.org/drawingml/2006/main" xmlns:r="http://schemas.openxmlformats.org/officeDocument/2006/relationships" xmlns:p="http://schemas.openxmlformats.org/presentationml/2006/main">
+  <p:cSld name="Slide 13">
+    <p:bg>
+      <p:bgPr>
+        <a:solidFill>
+          <a:srgbClr val="FFFFFF"/>
+        </a:solidFill>
+      </p:bgPr>
+    </p:bg>
+    <p:spTree>
+      <p:nvGrpSpPr>
+        <p:cNvPr id="1" name=""/>
+        <p:cNvGrpSpPr/>
+        <p:nvPr/>
+      </p:nvGrpSpPr>
+      <p:grpSpPr>
+        <a:xfrm>
+          <a:off x="0" y="0"/>
+          <a:ext cx="0" cy="0"/>
+          <a:chOff x="0" y="0"/>
+          <a:chExt cx="0" cy="0"/>
+        </a:xfrm>
+      </p:grpSpPr>
+      <p:sp>
+        <p:nvSpPr>
+          <p:cNvPr id="2" name="Shape 0"/>
+          <p:cNvSpPr/>
+          <p:nvPr/>
+        </p:nvSpPr>
+        <p:spPr>
+          <a:xfrm>
+            <a:off x="566928" y="457200"/>
+            <a:ext cx="384048" cy="384048"/>
+          </a:xfrm>
+          <a:prstGeom prst="ellipse">
+            <a:avLst/>
+          </a:prstGeom>
+          <a:solidFill>
+            <a:srgbClr val="B98A2E"/>
+          </a:solidFill>
+          <a:ln/>
+        </p:spPr>
+      </p:sp>
+      <p:sp>
+        <p:nvSpPr>
+          <p:cNvPr id="3" name="Text 1"/>
+          <p:cNvSpPr/>
+          <p:nvPr/>
+        </p:nvSpPr>
+        <p:spPr>
+          <a:xfrm>
+            <a:off x="566928" y="457200"/>
+            <a:ext cx="384048" cy="384048"/>
+          </a:xfrm>
+          <a:prstGeom prst="rect">
+            <a:avLst/>
+          </a:prstGeom>
+          <a:noFill/>
+          <a:ln/>
+        </p:spPr>
+        <p:txBody>
+          <a:bodyPr wrap="square" lIns="0" tIns="0" rIns="0" bIns="0" rtlCol="0" anchor="ctr"/>
+          <a:lstStyle/>
+          <a:p>
+            <a:pPr algn="ctr" indent="0" marL="0">
+              <a:buNone/>
+            </a:pPr>
+            <a:r>
+              <a:rPr lang="en-US" sz="1300" b="1" dirty="0">
+                <a:solidFill>
+                  <a:srgbClr val="FFFFFF"/>
+                </a:solidFill>
+                <a:latin typeface="Arial" pitchFamily="34" charset="0"/>
+                <a:ea typeface="Arial" pitchFamily="34" charset="-122"/>
+                <a:cs typeface="Arial" pitchFamily="34" charset="-120"/>
+              </a:rPr>
+              <a:t>12</a:t>
+            </a:r>
+            <a:endParaRPr lang="en-US" sz="1300" dirty="0"/>
+          </a:p>
+        </p:txBody>
+      </p:sp>
+      <p:sp>
+        <p:nvSpPr>
+          <p:cNvPr id="4" name="Text 2"/>
+          <p:cNvSpPr/>
+          <p:nvPr/>
+        </p:nvSpPr>
+        <p:spPr>
+          <a:xfrm>
+            <a:off x="1133856" y="457200"/>
+            <a:ext cx="10490911" cy="182880"/>
+          </a:xfrm>
+          <a:prstGeom prst="rect">
+            <a:avLst/>
+          </a:prstGeom>
+          <a:noFill/>
+          <a:ln/>
+        </p:spPr>
+        <p:txBody>
+          <a:bodyPr wrap="square" lIns="0" tIns="0" rIns="0" bIns="0" rtlCol="0" anchor="ctr"/>
+          <a:lstStyle/>
+          <a:p>
+            <a:pPr indent="0" marL="0">
+              <a:buNone/>
+            </a:pPr>
+            <a:r>
+              <a:rPr lang="en-US" sz="950" b="1" spc="200" kern="0" dirty="0">
+                <a:solidFill>
+                  <a:srgbClr val="B98A2E"/>
+                </a:solidFill>
+                <a:latin typeface="Arial" pitchFamily="34" charset="0"/>
+                <a:ea typeface="Arial" pitchFamily="34" charset="-122"/>
+                <a:cs typeface="Arial" pitchFamily="34" charset="-120"/>
+              </a:rPr>
+              <a:t>Checklist</a:t>
+            </a:r>
+            <a:endParaRPr lang="en-US" sz="950" dirty="0"/>
+          </a:p>
+        </p:txBody>
+      </p:sp>
+      <p:sp>
+        <p:nvSpPr>
+          <p:cNvPr id="5" name="Text 3"/>
+          <p:cNvSpPr/>
+          <p:nvPr/>
+        </p:nvSpPr>
+        <p:spPr>
+          <a:xfrm>
+            <a:off x="1133856" y="640080"/>
+            <a:ext cx="10490911" cy="365760"/>
+          </a:xfrm>
+          <a:prstGeom prst="rect">
+            <a:avLst/>
+          </a:prstGeom>
+          <a:noFill/>
+          <a:ln/>
+        </p:spPr>
+        <p:txBody>
+          <a:bodyPr wrap="square" lIns="0" tIns="0" rIns="0" bIns="0" rtlCol="0" anchor="ctr"/>
+          <a:lstStyle/>
+          <a:p>
+            <a:pPr indent="0" marL="0">
+              <a:buNone/>
+            </a:pPr>
+            <a:r>
+              <a:rPr lang="en-US" sz="2300" b="1" dirty="0">
+                <a:solidFill>
+                  <a:srgbClr val="10161F"/>
+                </a:solidFill>
+                <a:latin typeface="Pretendard" pitchFamily="34" charset="0"/>
+                <a:ea typeface="Pretendard" pitchFamily="34" charset="-122"/>
+                <a:cs typeface="Pretendard" pitchFamily="34" charset="-120"/>
+              </a:rPr>
+              <a:t>실사 및 확인 필요사항</a:t>
+            </a:r>
+            <a:endParaRPr lang="en-US" sz="2300" dirty="0"/>
+          </a:p>
+        </p:txBody>
+      </p:sp>
+      <p:sp>
+        <p:nvSpPr>
+          <p:cNvPr id="6" name="Text 4"/>
+          <p:cNvSpPr/>
+          <p:nvPr/>
+        </p:nvSpPr>
+        <p:spPr>
+          <a:xfrm>
+            <a:off x="566928" y="1371600"/>
+            <a:ext cx="11057839" cy="237744"/>
+          </a:xfrm>
+          <a:prstGeom prst="rect">
+            <a:avLst/>
+          </a:prstGeom>
+          <a:noFill/>
+          <a:ln/>
+        </p:spPr>
+        <p:txBody>
+          <a:bodyPr wrap="square" lIns="0" tIns="0" rIns="0" bIns="0" rtlCol="0" anchor="ctr"/>
+          <a:lstStyle/>
+          <a:p>
+            <a:pPr indent="0" marL="0">
+              <a:buNone/>
+            </a:pPr>
+            <a:r>
+              <a:rPr lang="en-US" sz="1100" b="1" dirty="0">
+                <a:solidFill>
+                  <a:srgbClr val="10161F"/>
+                </a:solidFill>
+                <a:latin typeface="Pretendard" pitchFamily="34" charset="0"/>
+                <a:ea typeface="Pretendard" pitchFamily="34" charset="-122"/>
+                <a:cs typeface="Pretendard" pitchFamily="34" charset="-120"/>
+              </a:rPr>
+              <a:t>거래 안정성 확보를 위한 필수 법률·물리·임대차 실사 점검 항목 (총 6건)</a:t>
+            </a:r>
+            <a:endParaRPr lang="en-US" sz="1100" dirty="0"/>
+          </a:p>
+        </p:txBody>
+      </p:sp>
+      <p:sp>
+        <p:nvSpPr>
+          <p:cNvPr id="7" name="Shape 5"/>
+          <p:cNvSpPr/>
+          <p:nvPr/>
+        </p:nvSpPr>
+        <p:spPr>
+          <a:xfrm>
+            <a:off x="566928" y="1719072"/>
+            <a:ext cx="5368900" cy="868680"/>
+          </a:xfrm>
+          <a:prstGeom prst="rect">
+            <a:avLst/>
+          </a:prstGeom>
+          <a:solidFill>
+            <a:srgbClr val="F7FAFC"/>
+          </a:solidFill>
+          <a:ln w="6350">
+            <a:solidFill>
+              <a:srgbClr val="D9B668"/>
+            </a:solidFill>
+            <a:prstDash val="solid"/>
+          </a:ln>
+        </p:spPr>
+      </p:sp>
+      <p:sp>
+        <p:nvSpPr>
+          <p:cNvPr id="8" name="Shape 6"/>
+          <p:cNvSpPr/>
+          <p:nvPr/>
+        </p:nvSpPr>
+        <p:spPr>
+          <a:xfrm>
+            <a:off x="704088" y="1883664"/>
+            <a:ext cx="320040" cy="320040"/>
+          </a:xfrm>
+          <a:prstGeom prst="rect">
+            <a:avLst/>
+          </a:prstGeom>
+          <a:solidFill>
+            <a:srgbClr val="977024"/>
+          </a:solidFill>
+          <a:ln/>
+        </p:spPr>
+      </p:sp>
+      <p:sp>
+        <p:nvSpPr>
+          <p:cNvPr id="9" name="Text 7"/>
+          <p:cNvSpPr/>
+          <p:nvPr/>
+        </p:nvSpPr>
+        <p:spPr>
+          <a:xfrm>
+            <a:off x="704088" y="1883664"/>
+            <a:ext cx="320040" cy="320040"/>
+          </a:xfrm>
+          <a:prstGeom prst="rect">
+            <a:avLst/>
+          </a:prstGeom>
+          <a:noFill/>
+          <a:ln/>
+        </p:spPr>
+        <p:txBody>
+          <a:bodyPr wrap="square" rtlCol="0" anchor="ctr"/>
+          <a:lstStyle/>
+          <a:p>
+            <a:pPr algn="ctr" indent="0" marL="0">
+              <a:buNone/>
+            </a:pPr>
+            <a:r>
+              <a:rPr lang="en-US" sz="1100" b="1" dirty="0">
+                <a:solidFill>
+                  <a:srgbClr val="000000"/>
+                </a:solidFill>
+                <a:latin typeface="Pretendard" pitchFamily="34" charset="0"/>
+                <a:ea typeface="Pretendard" pitchFamily="34" charset="-122"/>
+                <a:cs typeface="Pretendard" pitchFamily="34" charset="-120"/>
+              </a:rPr>
+              <a:t>✓</a:t>
+            </a:r>
+            <a:endParaRPr lang="en-US" sz="1100" dirty="0"/>
+          </a:p>
+        </p:txBody>
+      </p:sp>
+      <p:sp>
+        <p:nvSpPr>
+          <p:cNvPr id="10" name="Text 8"/>
+          <p:cNvSpPr/>
+          <p:nvPr/>
+        </p:nvSpPr>
+        <p:spPr>
+          <a:xfrm>
+            <a:off x="1115568" y="1828800"/>
+            <a:ext cx="4683100" cy="685800"/>
+          </a:xfrm>
+          <a:prstGeom prst="rect">
+            <a:avLst/>
+          </a:prstGeom>
+          <a:noFill/>
+          <a:ln/>
+        </p:spPr>
+        <p:txBody>
+          <a:bodyPr wrap="square" rtlCol="0" anchor="ctr"/>
+          <a:lstStyle/>
+          <a:p>
+            <a:pPr indent="0" marL="0">
+              <a:lnSpc>
+                <a:spcPct val="115000"/>
+              </a:lnSpc>
+              <a:buNone/>
+            </a:pPr>
+            <a:r>
+              <a:rPr lang="en-US" sz="1050" dirty="0">
+                <a:solidFill>
+                  <a:srgbClr val="10161F"/>
+                </a:solidFill>
+                <a:latin typeface="Pretendard" pitchFamily="34" charset="0"/>
+                <a:ea typeface="Pretendard" pitchFamily="34" charset="-122"/>
+                <a:cs typeface="Pretendard" pitchFamily="34" charset="-120"/>
+              </a:rPr>
+              <a:t>등기부등본 갑구/을구 권리관계 및 근저당 채권최고액 전액 말소 조건 원본 대조</a:t>
+            </a:r>
+            <a:endParaRPr lang="en-US" sz="1050" dirty="0"/>
+          </a:p>
+        </p:txBody>
+      </p:sp>
+      <p:sp>
+        <p:nvSpPr>
+          <p:cNvPr id="11" name="Shape 9"/>
+          <p:cNvSpPr/>
+          <p:nvPr/>
+        </p:nvSpPr>
+        <p:spPr>
+          <a:xfrm>
+            <a:off x="566928" y="2715768"/>
+            <a:ext cx="5368900" cy="868680"/>
+          </a:xfrm>
+          <a:prstGeom prst="rect">
+            <a:avLst/>
+          </a:prstGeom>
+          <a:solidFill>
+            <a:srgbClr val="F7FAFC"/>
+          </a:solidFill>
+          <a:ln w="6350">
+            <a:solidFill>
+              <a:srgbClr val="D9B668"/>
+            </a:solidFill>
+            <a:prstDash val="solid"/>
+          </a:ln>
+        </p:spPr>
+      </p:sp>
+      <p:sp>
+        <p:nvSpPr>
+          <p:cNvPr id="12" name="Shape 10"/>
+          <p:cNvSpPr/>
+          <p:nvPr/>
+        </p:nvSpPr>
+        <p:spPr>
+          <a:xfrm>
+            <a:off x="704088" y="2880360"/>
+            <a:ext cx="320040" cy="320040"/>
+          </a:xfrm>
+          <a:prstGeom prst="rect">
+            <a:avLst/>
+          </a:prstGeom>
+          <a:solidFill>
+            <a:srgbClr val="977024"/>
+          </a:solidFill>
+          <a:ln/>
+        </p:spPr>
+      </p:sp>
+      <p:sp>
+        <p:nvSpPr>
+          <p:cNvPr id="13" name="Text 11"/>
+          <p:cNvSpPr/>
+          <p:nvPr/>
+        </p:nvSpPr>
+        <p:spPr>
+          <a:xfrm>
+            <a:off x="704088" y="2880360"/>
+            <a:ext cx="320040" cy="320040"/>
+          </a:xfrm>
+          <a:prstGeom prst="rect">
+            <a:avLst/>
+          </a:prstGeom>
+          <a:noFill/>
+          <a:ln/>
+        </p:spPr>
+        <p:txBody>
+          <a:bodyPr wrap="square" rtlCol="0" anchor="ctr"/>
+          <a:lstStyle/>
+          <a:p>
+            <a:pPr algn="ctr" indent="0" marL="0">
+              <a:buNone/>
+            </a:pPr>
+            <a:r>
+              <a:rPr lang="en-US" sz="1100" b="1" dirty="0">
+                <a:solidFill>
+                  <a:srgbClr val="000000"/>
+                </a:solidFill>
+                <a:latin typeface="Pretendard" pitchFamily="34" charset="0"/>
+                <a:ea typeface="Pretendard" pitchFamily="34" charset="-122"/>
+                <a:cs typeface="Pretendard" pitchFamily="34" charset="-120"/>
+              </a:rPr>
+              <a:t>✓</a:t>
+            </a:r>
+            <a:endParaRPr lang="en-US" sz="1100" dirty="0"/>
+          </a:p>
+        </p:txBody>
+      </p:sp>
+      <p:sp>
+        <p:nvSpPr>
+          <p:cNvPr id="14" name="Text 12"/>
+          <p:cNvSpPr/>
+          <p:nvPr/>
+        </p:nvSpPr>
+        <p:spPr>
+          <a:xfrm>
+            <a:off x="1115568" y="2825496"/>
+            <a:ext cx="4683100" cy="685800"/>
+          </a:xfrm>
+          <a:prstGeom prst="rect">
+            <a:avLst/>
+          </a:prstGeom>
+          <a:noFill/>
+          <a:ln/>
+        </p:spPr>
+        <p:txBody>
+          <a:bodyPr wrap="square" rtlCol="0" anchor="ctr"/>
+          <a:lstStyle/>
+          <a:p>
+            <a:pPr indent="0" marL="0">
+              <a:lnSpc>
+                <a:spcPct val="115000"/>
+              </a:lnSpc>
+              <a:buNone/>
+            </a:pPr>
+            <a:r>
+              <a:rPr lang="en-US" sz="1050" dirty="0">
+                <a:solidFill>
+                  <a:srgbClr val="10161F"/>
+                </a:solidFill>
+                <a:latin typeface="Pretendard" pitchFamily="34" charset="0"/>
+                <a:ea typeface="Pretendard" pitchFamily="34" charset="-122"/>
+                <a:cs typeface="Pretendard" pitchFamily="34" charset="-120"/>
+              </a:rPr>
+              <a:t>임대차 원본 계약서 대조 (보증금, 월임대료, 관리비 실입금 내역 및 제소전화해조서)</a:t>
+            </a:r>
+            <a:endParaRPr lang="en-US" sz="1050" dirty="0"/>
+          </a:p>
+        </p:txBody>
+      </p:sp>
+      <p:sp>
+        <p:nvSpPr>
+          <p:cNvPr id="15" name="Shape 13"/>
+          <p:cNvSpPr/>
+          <p:nvPr/>
+        </p:nvSpPr>
+        <p:spPr>
+          <a:xfrm>
+            <a:off x="566928" y="3712464"/>
+            <a:ext cx="5368900" cy="868680"/>
+          </a:xfrm>
+          <a:prstGeom prst="rect">
+            <a:avLst/>
+          </a:prstGeom>
+          <a:solidFill>
+            <a:srgbClr val="F7FAFC"/>
+          </a:solidFill>
+          <a:ln w="6350">
+            <a:solidFill>
+              <a:srgbClr val="D9B668"/>
+            </a:solidFill>
+            <a:prstDash val="solid"/>
+          </a:ln>
+        </p:spPr>
+      </p:sp>
+      <p:sp>
+        <p:nvSpPr>
+          <p:cNvPr id="16" name="Shape 14"/>
+          <p:cNvSpPr/>
+          <p:nvPr/>
+        </p:nvSpPr>
+        <p:spPr>
+          <a:xfrm>
+            <a:off x="704088" y="3877056"/>
+            <a:ext cx="320040" cy="320040"/>
+          </a:xfrm>
+          <a:prstGeom prst="rect">
+            <a:avLst/>
+          </a:prstGeom>
+          <a:solidFill>
+            <a:srgbClr val="977024"/>
+          </a:solidFill>
+          <a:ln/>
+        </p:spPr>
+      </p:sp>
+      <p:sp>
+        <p:nvSpPr>
+          <p:cNvPr id="17" name="Text 15"/>
+          <p:cNvSpPr/>
+          <p:nvPr/>
+        </p:nvSpPr>
+        <p:spPr>
+          <a:xfrm>
+            <a:off x="704088" y="3877056"/>
+            <a:ext cx="320040" cy="320040"/>
+          </a:xfrm>
+          <a:prstGeom prst="rect">
+            <a:avLst/>
+          </a:prstGeom>
+          <a:noFill/>
+          <a:ln/>
+        </p:spPr>
+        <p:txBody>
+          <a:bodyPr wrap="square" rtlCol="0" anchor="ctr"/>
+          <a:lstStyle/>
+          <a:p>
+            <a:pPr algn="ctr" indent="0" marL="0">
+              <a:buNone/>
+            </a:pPr>
+            <a:r>
+              <a:rPr lang="en-US" sz="1100" b="1" dirty="0">
+                <a:solidFill>
+                  <a:srgbClr val="000000"/>
+                </a:solidFill>
+                <a:latin typeface="Pretendard" pitchFamily="34" charset="0"/>
+                <a:ea typeface="Pretendard" pitchFamily="34" charset="-122"/>
+                <a:cs typeface="Pretendard" pitchFamily="34" charset="-120"/>
+              </a:rPr>
+              <a:t>✓</a:t>
+            </a:r>
+            <a:endParaRPr lang="en-US" sz="1100" dirty="0"/>
+          </a:p>
+        </p:txBody>
+      </p:sp>
+      <p:sp>
+        <p:nvSpPr>
+          <p:cNvPr id="18" name="Text 16"/>
+          <p:cNvSpPr/>
+          <p:nvPr/>
+        </p:nvSpPr>
+        <p:spPr>
+          <a:xfrm>
+            <a:off x="1115568" y="3822192"/>
+            <a:ext cx="4683100" cy="685800"/>
+          </a:xfrm>
+          <a:prstGeom prst="rect">
+            <a:avLst/>
+          </a:prstGeom>
+          <a:noFill/>
+          <a:ln/>
+        </p:spPr>
+        <p:txBody>
+          <a:bodyPr wrap="square" rtlCol="0" anchor="ctr"/>
+          <a:lstStyle/>
+          <a:p>
+            <a:pPr indent="0" marL="0">
+              <a:lnSpc>
+                <a:spcPct val="115000"/>
+              </a:lnSpc>
+              <a:buNone/>
+            </a:pPr>
+            <a:r>
+              <a:rPr lang="en-US" sz="1050" dirty="0">
+                <a:solidFill>
+                  <a:srgbClr val="10161F"/>
+                </a:solidFill>
+                <a:latin typeface="Pretendard" pitchFamily="34" charset="0"/>
+                <a:ea typeface="Pretendard" pitchFamily="34" charset="-122"/>
+                <a:cs typeface="Pretendard" pitchFamily="34" charset="-120"/>
+              </a:rPr>
+              <a:t>건축물대장상 위반건축물 등재 여부 및 불법 증축·용도변경 이행강제금 납부 이력 점검</a:t>
+            </a:r>
+            <a:endParaRPr lang="en-US" sz="1050" dirty="0"/>
+          </a:p>
+        </p:txBody>
+      </p:sp>
+      <p:sp>
+        <p:nvSpPr>
+          <p:cNvPr id="19" name="Shape 17"/>
+          <p:cNvSpPr/>
+          <p:nvPr/>
+        </p:nvSpPr>
+        <p:spPr>
+          <a:xfrm>
+            <a:off x="6255868" y="1719072"/>
+            <a:ext cx="5368900" cy="868680"/>
+          </a:xfrm>
+          <a:prstGeom prst="rect">
+            <a:avLst/>
+          </a:prstGeom>
+          <a:solidFill>
+            <a:srgbClr val="F7FAFC"/>
+          </a:solidFill>
+          <a:ln w="6350">
+            <a:solidFill>
+              <a:srgbClr val="D9B668"/>
+            </a:solidFill>
+            <a:prstDash val="solid"/>
+          </a:ln>
+        </p:spPr>
+      </p:sp>
+      <p:sp>
+        <p:nvSpPr>
+          <p:cNvPr id="20" name="Shape 18"/>
+          <p:cNvSpPr/>
+          <p:nvPr/>
+        </p:nvSpPr>
+        <p:spPr>
+          <a:xfrm>
+            <a:off x="6393028" y="1883664"/>
+            <a:ext cx="320040" cy="320040"/>
+          </a:xfrm>
+          <a:prstGeom prst="rect">
+            <a:avLst/>
+          </a:prstGeom>
+          <a:solidFill>
+            <a:srgbClr val="977024"/>
+          </a:solidFill>
+          <a:ln/>
+        </p:spPr>
+      </p:sp>
+      <p:sp>
+        <p:nvSpPr>
+          <p:cNvPr id="21" name="Text 19"/>
+          <p:cNvSpPr/>
+          <p:nvPr/>
+        </p:nvSpPr>
+        <p:spPr>
+          <a:xfrm>
+            <a:off x="6393028" y="1883664"/>
+            <a:ext cx="320040" cy="320040"/>
+          </a:xfrm>
+          <a:prstGeom prst="rect">
+            <a:avLst/>
+          </a:prstGeom>
+          <a:noFill/>
+          <a:ln/>
+        </p:spPr>
+        <p:txBody>
+          <a:bodyPr wrap="square" rtlCol="0" anchor="ctr"/>
+          <a:lstStyle/>
+          <a:p>
+            <a:pPr algn="ctr" indent="0" marL="0">
+              <a:buNone/>
+            </a:pPr>
+            <a:r>
+              <a:rPr lang="en-US" sz="1100" b="1" dirty="0">
+                <a:solidFill>
+                  <a:srgbClr val="000000"/>
+                </a:solidFill>
+                <a:latin typeface="Pretendard" pitchFamily="34" charset="0"/>
+                <a:ea typeface="Pretendard" pitchFamily="34" charset="-122"/>
+                <a:cs typeface="Pretendard" pitchFamily="34" charset="-120"/>
+              </a:rPr>
+              <a:t>✓</a:t>
+            </a:r>
+            <a:endParaRPr lang="en-US" sz="1100" dirty="0"/>
+          </a:p>
+        </p:txBody>
+      </p:sp>
+      <p:sp>
+        <p:nvSpPr>
+          <p:cNvPr id="22" name="Text 20"/>
+          <p:cNvSpPr/>
+          <p:nvPr/>
+        </p:nvSpPr>
+        <p:spPr>
+          <a:xfrm>
+            <a:off x="6804508" y="1828800"/>
+            <a:ext cx="4683100" cy="685800"/>
+          </a:xfrm>
+          <a:prstGeom prst="rect">
+            <a:avLst/>
+          </a:prstGeom>
+          <a:noFill/>
+          <a:ln/>
+        </p:spPr>
+        <p:txBody>
+          <a:bodyPr wrap="square" rtlCol="0" anchor="ctr"/>
+          <a:lstStyle/>
+          <a:p>
+            <a:pPr indent="0" marL="0">
+              <a:lnSpc>
+                <a:spcPct val="115000"/>
+              </a:lnSpc>
+              <a:buNone/>
+            </a:pPr>
+            <a:r>
+              <a:rPr lang="en-US" sz="1050" dirty="0">
+                <a:solidFill>
+                  <a:srgbClr val="10161F"/>
+                </a:solidFill>
+                <a:latin typeface="Pretendard" pitchFamily="34" charset="0"/>
+                <a:ea typeface="Pretendard" pitchFamily="34" charset="-122"/>
+                <a:cs typeface="Pretendard" pitchFamily="34" charset="-120"/>
+              </a:rPr>
+              <a:t>토지이용계획확인원상 도시계획시설 저촉, 건축선 후퇴, 지구단위계획 특별계획구역 확인</a:t>
+            </a:r>
+            <a:endParaRPr lang="en-US" sz="1050" dirty="0"/>
+          </a:p>
+        </p:txBody>
+      </p:sp>
+      <p:sp>
+        <p:nvSpPr>
+          <p:cNvPr id="23" name="Shape 21"/>
+          <p:cNvSpPr/>
+          <p:nvPr/>
+        </p:nvSpPr>
+        <p:spPr>
+          <a:xfrm>
+            <a:off x="6255868" y="2715768"/>
+            <a:ext cx="5368900" cy="868680"/>
+          </a:xfrm>
+          <a:prstGeom prst="rect">
+            <a:avLst/>
+          </a:prstGeom>
+          <a:solidFill>
+            <a:srgbClr val="F7FAFC"/>
+          </a:solidFill>
+          <a:ln w="6350">
+            <a:solidFill>
+              <a:srgbClr val="D9B668"/>
+            </a:solidFill>
+            <a:prstDash val="solid"/>
+          </a:ln>
+        </p:spPr>
+      </p:sp>
+      <p:sp>
+        <p:nvSpPr>
+          <p:cNvPr id="24" name="Shape 22"/>
+          <p:cNvSpPr/>
+          <p:nvPr/>
+        </p:nvSpPr>
+        <p:spPr>
+          <a:xfrm>
+            <a:off x="6393028" y="2880360"/>
+            <a:ext cx="320040" cy="320040"/>
+          </a:xfrm>
+          <a:prstGeom prst="rect">
+            <a:avLst/>
+          </a:prstGeom>
+          <a:solidFill>
+            <a:srgbClr val="977024"/>
+          </a:solidFill>
+          <a:ln/>
+        </p:spPr>
+      </p:sp>
+      <p:sp>
+        <p:nvSpPr>
+          <p:cNvPr id="25" name="Text 23"/>
+          <p:cNvSpPr/>
+          <p:nvPr/>
+        </p:nvSpPr>
+        <p:spPr>
+          <a:xfrm>
+            <a:off x="6393028" y="2880360"/>
+            <a:ext cx="320040" cy="320040"/>
+          </a:xfrm>
+          <a:prstGeom prst="rect">
+            <a:avLst/>
+          </a:prstGeom>
+          <a:noFill/>
+          <a:ln/>
+        </p:spPr>
+        <p:txBody>
+          <a:bodyPr wrap="square" rtlCol="0" anchor="ctr"/>
+          <a:lstStyle/>
+          <a:p>
+            <a:pPr algn="ctr" indent="0" marL="0">
+              <a:buNone/>
+            </a:pPr>
+            <a:r>
+              <a:rPr lang="en-US" sz="1100" b="1" dirty="0">
+                <a:solidFill>
+                  <a:srgbClr val="000000"/>
+                </a:solidFill>
+                <a:latin typeface="Pretendard" pitchFamily="34" charset="0"/>
+                <a:ea typeface="Pretendard" pitchFamily="34" charset="-122"/>
+                <a:cs typeface="Pretendard" pitchFamily="34" charset="-120"/>
+              </a:rPr>
+              <a:t>✓</a:t>
+            </a:r>
+            <a:endParaRPr lang="en-US" sz="1100" dirty="0"/>
+          </a:p>
+        </p:txBody>
+      </p:sp>
+      <p:sp>
+        <p:nvSpPr>
+          <p:cNvPr id="26" name="Text 24"/>
+          <p:cNvSpPr/>
+          <p:nvPr/>
+        </p:nvSpPr>
+        <p:spPr>
+          <a:xfrm>
+            <a:off x="6804508" y="2825496"/>
+            <a:ext cx="4683100" cy="685800"/>
+          </a:xfrm>
+          <a:prstGeom prst="rect">
+            <a:avLst/>
+          </a:prstGeom>
+          <a:noFill/>
+          <a:ln/>
+        </p:spPr>
+        <p:txBody>
+          <a:bodyPr wrap="square" rtlCol="0" anchor="ctr"/>
+          <a:lstStyle/>
+          <a:p>
+            <a:pPr indent="0" marL="0">
+              <a:lnSpc>
+                <a:spcPct val="115000"/>
+              </a:lnSpc>
+              <a:buNone/>
+            </a:pPr>
+            <a:r>
+              <a:rPr lang="en-US" sz="1050" dirty="0">
+                <a:solidFill>
+                  <a:srgbClr val="10161F"/>
+                </a:solidFill>
+                <a:latin typeface="Pretendard" pitchFamily="34" charset="0"/>
+                <a:ea typeface="Pretendard" pitchFamily="34" charset="-122"/>
+                <a:cs typeface="Pretendard" pitchFamily="34" charset="-120"/>
+              </a:rPr>
+              <a:t>기계식 주차기 정기 안전점검 합격증, 승강기 검사필증, 소방 완비증명서 실물 실사</a:t>
+            </a:r>
+            <a:endParaRPr lang="en-US" sz="1050" dirty="0"/>
+          </a:p>
+        </p:txBody>
+      </p:sp>
+      <p:sp>
+        <p:nvSpPr>
+          <p:cNvPr id="27" name="Shape 25"/>
+          <p:cNvSpPr/>
+          <p:nvPr/>
+        </p:nvSpPr>
+        <p:spPr>
+          <a:xfrm>
+            <a:off x="6255868" y="3712464"/>
+            <a:ext cx="5368900" cy="868680"/>
+          </a:xfrm>
+          <a:prstGeom prst="rect">
+            <a:avLst/>
+          </a:prstGeom>
+          <a:solidFill>
+            <a:srgbClr val="F7FAFC"/>
+          </a:solidFill>
+          <a:ln w="6350">
+            <a:solidFill>
+              <a:srgbClr val="D9B668"/>
+            </a:solidFill>
+            <a:prstDash val="solid"/>
+          </a:ln>
+        </p:spPr>
+      </p:sp>
+      <p:sp>
+        <p:nvSpPr>
+          <p:cNvPr id="28" name="Shape 26"/>
+          <p:cNvSpPr/>
+          <p:nvPr/>
+        </p:nvSpPr>
+        <p:spPr>
+          <a:xfrm>
+            <a:off x="6393028" y="3877056"/>
+            <a:ext cx="320040" cy="320040"/>
+          </a:xfrm>
+          <a:prstGeom prst="rect">
+            <a:avLst/>
+          </a:prstGeom>
+          <a:solidFill>
+            <a:srgbClr val="977024"/>
+          </a:solidFill>
+          <a:ln/>
+        </p:spPr>
+      </p:sp>
+      <p:sp>
+        <p:nvSpPr>
+          <p:cNvPr id="29" name="Text 27"/>
+          <p:cNvSpPr/>
+          <p:nvPr/>
+        </p:nvSpPr>
+        <p:spPr>
+          <a:xfrm>
+            <a:off x="6393028" y="3877056"/>
+            <a:ext cx="320040" cy="320040"/>
+          </a:xfrm>
+          <a:prstGeom prst="rect">
+            <a:avLst/>
+          </a:prstGeom>
+          <a:noFill/>
+          <a:ln/>
+        </p:spPr>
+        <p:txBody>
+          <a:bodyPr wrap="square" rtlCol="0" anchor="ctr"/>
+          <a:lstStyle/>
+          <a:p>
+            <a:pPr algn="ctr" indent="0" marL="0">
+              <a:buNone/>
+            </a:pPr>
+            <a:r>
+              <a:rPr lang="en-US" sz="1100" b="1" dirty="0">
+                <a:solidFill>
+                  <a:srgbClr val="000000"/>
+                </a:solidFill>
+                <a:latin typeface="Pretendard" pitchFamily="34" charset="0"/>
+                <a:ea typeface="Pretendard" pitchFamily="34" charset="-122"/>
+                <a:cs typeface="Pretendard" pitchFamily="34" charset="-120"/>
+              </a:rPr>
+              <a:t>✓</a:t>
+            </a:r>
+            <a:endParaRPr lang="en-US" sz="1100" dirty="0"/>
+          </a:p>
+        </p:txBody>
+      </p:sp>
+      <p:sp>
+        <p:nvSpPr>
+          <p:cNvPr id="30" name="Text 28"/>
+          <p:cNvSpPr/>
+          <p:nvPr/>
+        </p:nvSpPr>
+        <p:spPr>
+          <a:xfrm>
+            <a:off x="6804508" y="3822192"/>
+            <a:ext cx="4683100" cy="685800"/>
+          </a:xfrm>
+          <a:prstGeom prst="rect">
+            <a:avLst/>
+          </a:prstGeom>
+          <a:noFill/>
+          <a:ln/>
+        </p:spPr>
+        <p:txBody>
+          <a:bodyPr wrap="square" rtlCol="0" anchor="ctr"/>
+          <a:lstStyle/>
+          <a:p>
+            <a:pPr indent="0" marL="0">
+              <a:lnSpc>
+                <a:spcPct val="115000"/>
+              </a:lnSpc>
+              <a:buNone/>
+            </a:pPr>
+            <a:r>
+              <a:rPr lang="en-US" sz="1050" dirty="0">
+                <a:solidFill>
+                  <a:srgbClr val="10161F"/>
+                </a:solidFill>
+                <a:latin typeface="Pretendard" pitchFamily="34" charset="0"/>
+                <a:ea typeface="Pretendard" pitchFamily="34" charset="-122"/>
+                <a:cs typeface="Pretendard" pitchFamily="34" charset="-120"/>
+              </a:rPr>
+              <a:t>정화조 용량 대비 현 업종 적합성 및 하수도 원인자부담금 추가 부과 대상 여부 확인</a:t>
+            </a:r>
+            <a:endParaRPr lang="en-US" sz="1050" dirty="0"/>
+          </a:p>
+        </p:txBody>
+      </p:sp>
+      <p:sp>
+        <p:nvSpPr>
+          <p:cNvPr id="31" name="Shape 29"/>
+          <p:cNvSpPr/>
+          <p:nvPr/>
+        </p:nvSpPr>
+        <p:spPr>
+          <a:xfrm>
+            <a:off x="566928" y="5760720"/>
+            <a:ext cx="11057839" cy="594360"/>
+          </a:xfrm>
+          <a:prstGeom prst="rect">
+            <a:avLst/>
+          </a:prstGeom>
+          <a:solidFill>
+            <a:srgbClr val="D9B668"/>
+          </a:solidFill>
+          <a:ln/>
+        </p:spPr>
+      </p:sp>
+      <p:sp>
+        <p:nvSpPr>
+          <p:cNvPr id="32" name="Text 30"/>
+          <p:cNvSpPr/>
+          <p:nvPr/>
+        </p:nvSpPr>
+        <p:spPr>
+          <a:xfrm>
+            <a:off x="749808" y="5833872"/>
+            <a:ext cx="10692079" cy="448056"/>
+          </a:xfrm>
+          <a:prstGeom prst="rect">
+            <a:avLst/>
+          </a:prstGeom>
+          <a:noFill/>
+          <a:ln/>
+        </p:spPr>
+        <p:txBody>
+          <a:bodyPr wrap="square" rtlCol="0" anchor="ctr"/>
+          <a:lstStyle/>
+          <a:p>
+            <a:pPr indent="0" marL="0">
+              <a:buNone/>
+            </a:pPr>
+            <a:r>
+              <a:rPr lang="en-US" sz="950" b="1" dirty="0">
+                <a:solidFill>
+                  <a:srgbClr val="977024"/>
+                </a:solidFill>
+                <a:latin typeface="Pretendard" pitchFamily="34" charset="0"/>
+                <a:ea typeface="Pretendard" pitchFamily="34" charset="-122"/>
+                <a:cs typeface="Pretendard" pitchFamily="34" charset="-120"/>
+              </a:rPr>
+              <a:t>※ 본 체크리스트는 계약 전 매수인의 안전한 자산 인수를 위한 필수 확인 사항이며, 실사(Due Diligence) 결과에 따라 매매 조건 및 잔금 일정이 조정될 수 있습니다.</a:t>
+            </a:r>
+            <a:endParaRPr lang="en-US" sz="950" dirty="0"/>
+          </a:p>
+        </p:txBody>
+      </p:sp>
+      <p:sp>
+        <p:nvSpPr>
+          <p:cNvPr id="33" name="Text 31"/>
+          <p:cNvSpPr/>
+          <p:nvPr/>
+        </p:nvSpPr>
+        <p:spPr>
+          <a:xfrm>
+            <a:off x="566928" y="6382512"/>
+            <a:ext cx="7315200" cy="219456"/>
+          </a:xfrm>
+          <a:prstGeom prst="rect">
+            <a:avLst/>
+          </a:prstGeom>
+          <a:noFill/>
+          <a:ln/>
+        </p:spPr>
+        <p:txBody>
+          <a:bodyPr wrap="square" lIns="0" tIns="0" rIns="0" bIns="0" rtlCol="0" anchor="ctr"/>
+          <a:lstStyle/>
+          <a:p>
+            <a:pPr indent="0" marL="0">
+              <a:buNone/>
+            </a:pPr>
+            <a:r>
+              <a:rPr lang="en-US" sz="800" dirty="0">
+                <a:solidFill>
+                  <a:srgbClr val="718096"/>
+                </a:solidFill>
+                <a:latin typeface="Pretendard" pitchFamily="34" charset="0"/>
+                <a:ea typeface="Pretendard" pitchFamily="34" charset="-122"/>
+                <a:cs typeface="Pretendard" pitchFamily="34" charset="-120"/>
+              </a:rPr>
+              <a:t>크리딜   |   </a:t>
+            </a:r>
+            <a:endParaRPr lang="en-US" sz="800" dirty="0"/>
+          </a:p>
+        </p:txBody>
+      </p:sp>
+      <p:sp>
+        <p:nvSpPr>
+          <p:cNvPr id="34" name="Text 32"/>
+          <p:cNvSpPr/>
+          <p:nvPr/>
+        </p:nvSpPr>
+        <p:spPr>
+          <a:xfrm>
+            <a:off x="10710367" y="6382512"/>
+            <a:ext cx="914400" cy="219456"/>
+          </a:xfrm>
+          <a:prstGeom prst="rect">
+            <a:avLst/>
+          </a:prstGeom>
+          <a:noFill/>
+          <a:ln/>
+        </p:spPr>
+        <p:txBody>
+          <a:bodyPr wrap="square" lIns="0" tIns="0" rIns="0" bIns="0" rtlCol="0" anchor="ctr"/>
+          <a:lstStyle/>
+          <a:p>
+            <a:pPr algn="r" indent="0" marL="0">
+              <a:buNone/>
+            </a:pPr>
+            <a:r>
+              <a:rPr lang="en-US" sz="900" b="1" dirty="0">
+                <a:solidFill>
+                  <a:srgbClr val="B98A2E"/>
+                </a:solidFill>
+                <a:latin typeface="Arial" pitchFamily="34" charset="0"/>
+                <a:ea typeface="Arial" pitchFamily="34" charset="-122"/>
+                <a:cs typeface="Arial" pitchFamily="34" charset="-120"/>
+              </a:rPr>
+              <a:t>12</a:t>
+            </a:r>
+            <a:endParaRPr lang="en-US" sz="900" dirty="0"/>
+          </a:p>
+        </p:txBody>
+      </p:sp>
+    </p:spTree>
+  </p:cSld>
+  <p:clrMapOvr>
+    <a:masterClrMapping/>
+  </p:clrMapOvr>
+</p:sld>
+</file>
+
+<file path=ppt/slides/slide14.xml><?xml version="1.0" encoding="utf-8"?>
+<p:sld xmlns:a="http://schemas.openxmlformats.org/drawingml/2006/main" xmlns:r="http://schemas.openxmlformats.org/officeDocument/2006/relationships" xmlns:p="http://schemas.openxmlformats.org/presentationml/2006/main">
+  <p:cSld name="Slide 14">
+    <p:bg>
+      <p:bgPr>
+        <a:solidFill>
+          <a:srgbClr val="FFFFFF"/>
+        </a:solidFill>
+      </p:bgPr>
+    </p:bg>
+    <p:spTree>
+      <p:nvGrpSpPr>
+        <p:cNvPr id="1" name=""/>
+        <p:cNvGrpSpPr/>
+        <p:nvPr/>
+      </p:nvGrpSpPr>
+      <p:grpSpPr>
+        <a:xfrm>
+          <a:off x="0" y="0"/>
+          <a:ext cx="0" cy="0"/>
+          <a:chOff x="0" y="0"/>
+          <a:chExt cx="0" cy="0"/>
+        </a:xfrm>
+      </p:grpSpPr>
+      <p:sp>
+        <p:nvSpPr>
+          <p:cNvPr id="2" name="Shape 0"/>
+          <p:cNvSpPr/>
+          <p:nvPr/>
+        </p:nvSpPr>
+        <p:spPr>
+          <a:xfrm>
+            <a:off x="566928" y="457200"/>
+            <a:ext cx="384048" cy="384048"/>
+          </a:xfrm>
+          <a:prstGeom prst="ellipse">
+            <a:avLst/>
+          </a:prstGeom>
+          <a:solidFill>
+            <a:srgbClr val="B98A2E"/>
+          </a:solidFill>
+          <a:ln/>
+        </p:spPr>
+      </p:sp>
+      <p:sp>
+        <p:nvSpPr>
+          <p:cNvPr id="3" name="Text 1"/>
+          <p:cNvSpPr/>
+          <p:nvPr/>
+        </p:nvSpPr>
+        <p:spPr>
+          <a:xfrm>
+            <a:off x="566928" y="457200"/>
+            <a:ext cx="384048" cy="384048"/>
+          </a:xfrm>
+          <a:prstGeom prst="rect">
+            <a:avLst/>
+          </a:prstGeom>
+          <a:noFill/>
+          <a:ln/>
+        </p:spPr>
+        <p:txBody>
+          <a:bodyPr wrap="square" lIns="0" tIns="0" rIns="0" bIns="0" rtlCol="0" anchor="ctr"/>
+          <a:lstStyle/>
+          <a:p>
+            <a:pPr algn="ctr" indent="0" marL="0">
+              <a:buNone/>
+            </a:pPr>
+            <a:r>
+              <a:rPr lang="en-US" sz="1300" b="1" dirty="0">
+                <a:solidFill>
+                  <a:srgbClr val="FFFFFF"/>
+                </a:solidFill>
+                <a:latin typeface="Arial" pitchFamily="34" charset="0"/>
+                <a:ea typeface="Arial" pitchFamily="34" charset="-122"/>
+                <a:cs typeface="Arial" pitchFamily="34" charset="-120"/>
+              </a:rPr>
+              <a:t>13</a:t>
+            </a:r>
+            <a:endParaRPr lang="en-US" sz="1300" dirty="0"/>
+          </a:p>
+        </p:txBody>
+      </p:sp>
+      <p:sp>
+        <p:nvSpPr>
+          <p:cNvPr id="4" name="Text 2"/>
+          <p:cNvSpPr/>
+          <p:nvPr/>
+        </p:nvSpPr>
+        <p:spPr>
+          <a:xfrm>
+            <a:off x="1133856" y="457200"/>
+            <a:ext cx="10490911" cy="182880"/>
+          </a:xfrm>
+          <a:prstGeom prst="rect">
+            <a:avLst/>
+          </a:prstGeom>
+          <a:noFill/>
+          <a:ln/>
+        </p:spPr>
+        <p:txBody>
+          <a:bodyPr wrap="square" lIns="0" tIns="0" rIns="0" bIns="0" rtlCol="0" anchor="ctr"/>
+          <a:lstStyle/>
+          <a:p>
+            <a:pPr indent="0" marL="0">
+              <a:buNone/>
+            </a:pPr>
+            <a:r>
+              <a:rPr lang="en-US" sz="950" b="1" spc="200" kern="0" dirty="0">
+                <a:solidFill>
+                  <a:srgbClr val="B98A2E"/>
+                </a:solidFill>
+                <a:latin typeface="Arial" pitchFamily="34" charset="0"/>
+                <a:ea typeface="Arial" pitchFamily="34" charset="-122"/>
+                <a:cs typeface="Arial" pitchFamily="34" charset="-120"/>
+              </a:rPr>
+              <a:t>Process</a:t>
+            </a:r>
+            <a:endParaRPr lang="en-US" sz="950" dirty="0"/>
+          </a:p>
+        </p:txBody>
+      </p:sp>
+      <p:sp>
+        <p:nvSpPr>
+          <p:cNvPr id="5" name="Text 3"/>
+          <p:cNvSpPr/>
+          <p:nvPr/>
+        </p:nvSpPr>
+        <p:spPr>
+          <a:xfrm>
+            <a:off x="1133856" y="640080"/>
+            <a:ext cx="10490911" cy="365760"/>
+          </a:xfrm>
+          <a:prstGeom prst="rect">
+            <a:avLst/>
+          </a:prstGeom>
+          <a:noFill/>
+          <a:ln/>
+        </p:spPr>
+        <p:txBody>
+          <a:bodyPr wrap="square" lIns="0" tIns="0" rIns="0" bIns="0" rtlCol="0" anchor="ctr"/>
+          <a:lstStyle/>
+          <a:p>
+            <a:pPr indent="0" marL="0">
+              <a:buNone/>
+            </a:pPr>
+            <a:r>
+              <a:rPr lang="en-US" sz="2300" b="1" dirty="0">
+                <a:solidFill>
+                  <a:srgbClr val="10161F"/>
+                </a:solidFill>
+                <a:latin typeface="Pretendard" pitchFamily="34" charset="0"/>
+                <a:ea typeface="Pretendard" pitchFamily="34" charset="-122"/>
+                <a:cs typeface="Pretendard" pitchFamily="34" charset="-120"/>
+              </a:rPr>
+              <a:t>다음 단계</a:t>
+            </a:r>
+            <a:endParaRPr lang="en-US" sz="2300" dirty="0"/>
+          </a:p>
+        </p:txBody>
+      </p:sp>
+      <p:sp>
+        <p:nvSpPr>
+          <p:cNvPr id="6" name="Shape 4"/>
+          <p:cNvSpPr/>
+          <p:nvPr/>
+        </p:nvSpPr>
+        <p:spPr>
+          <a:xfrm>
+            <a:off x="566928" y="1572768"/>
+            <a:ext cx="11057839" cy="3200400"/>
+          </a:xfrm>
+          <a:prstGeom prst="roundRect">
+            <a:avLst>
+              <a:gd name="adj" fmla="val 1714"/>
+            </a:avLst>
+          </a:prstGeom>
+          <a:solidFill>
+            <a:srgbClr val="F7FAFC"/>
+          </a:solidFill>
+          <a:ln w="6350">
+            <a:solidFill>
+              <a:srgbClr val="CBD5E0"/>
+            </a:solidFill>
+            <a:prstDash val="solid"/>
+          </a:ln>
+        </p:spPr>
+      </p:sp>
+      <p:sp>
+        <p:nvSpPr>
+          <p:cNvPr id="7" name="Shape 5"/>
+          <p:cNvSpPr/>
+          <p:nvPr/>
+        </p:nvSpPr>
+        <p:spPr>
+          <a:xfrm>
+            <a:off x="786384" y="1792224"/>
+            <a:ext cx="438912" cy="438912"/>
+          </a:xfrm>
+          <a:prstGeom prst="ellipse">
+            <a:avLst/>
+          </a:prstGeom>
+          <a:solidFill>
+            <a:srgbClr val="B98A2E"/>
+          </a:solidFill>
+          <a:ln/>
+        </p:spPr>
+      </p:sp>
+      <p:sp>
+        <p:nvSpPr>
+          <p:cNvPr id="8" name="Text 6"/>
+          <p:cNvSpPr/>
+          <p:nvPr/>
+        </p:nvSpPr>
+        <p:spPr>
+          <a:xfrm>
+            <a:off x="786384" y="1792224"/>
+            <a:ext cx="438912" cy="438912"/>
+          </a:xfrm>
+          <a:prstGeom prst="rect">
+            <a:avLst/>
+          </a:prstGeom>
+          <a:noFill/>
+          <a:ln/>
+        </p:spPr>
+        <p:txBody>
+          <a:bodyPr wrap="square" lIns="0" tIns="0" rIns="0" bIns="0" rtlCol="0" anchor="ctr"/>
+          <a:lstStyle/>
+          <a:p>
+            <a:pPr algn="ctr" indent="0" marL="0">
+              <a:buNone/>
+            </a:pPr>
+            <a:r>
+              <a:rPr lang="en-US" sz="1400" b="1" dirty="0">
+                <a:solidFill>
+                  <a:srgbClr val="FFFFFF"/>
+                </a:solidFill>
+                <a:latin typeface="Arial" pitchFamily="34" charset="0"/>
+                <a:ea typeface="Arial" pitchFamily="34" charset="-122"/>
+                <a:cs typeface="Arial" pitchFamily="34" charset="-120"/>
+              </a:rPr>
+              <a:t>01</a:t>
+            </a:r>
+            <a:endParaRPr lang="en-US" sz="1400" dirty="0"/>
+          </a:p>
+        </p:txBody>
+      </p:sp>
+      <p:sp>
+        <p:nvSpPr>
+          <p:cNvPr id="9" name="Text 7"/>
+          <p:cNvSpPr/>
+          <p:nvPr/>
+        </p:nvSpPr>
+        <p:spPr>
+          <a:xfrm>
+            <a:off x="786384" y="2304288"/>
+            <a:ext cx="10618927" cy="365760"/>
+          </a:xfrm>
+          <a:prstGeom prst="rect">
+            <a:avLst/>
+          </a:prstGeom>
+          <a:noFill/>
+          <a:ln/>
+        </p:spPr>
+        <p:txBody>
+          <a:bodyPr wrap="square" rtlCol="0" anchor="ctr"/>
+          <a:lstStyle/>
+          <a:p>
+            <a:pPr indent="0" marL="0">
+              <a:buNone/>
+            </a:pPr>
+            <a:r>
+              <a:rPr lang="en-US" sz="1600" b="1" dirty="0">
+                <a:solidFill>
+                  <a:srgbClr val="10161F"/>
+                </a:solidFill>
+                <a:latin typeface="Pretendard" pitchFamily="34" charset="0"/>
+                <a:ea typeface="Pretendard" pitchFamily="34" charset="-122"/>
+                <a:cs typeface="Pretendard" pitchFamily="34" charset="-120"/>
+              </a:rPr>
+              <a:t>1단계</a:t>
+            </a:r>
+            <a:endParaRPr lang="en-US" sz="1600" dirty="0"/>
+          </a:p>
+        </p:txBody>
+      </p:sp>
+      <p:sp>
+        <p:nvSpPr>
+          <p:cNvPr id="10" name="Text 8"/>
+          <p:cNvSpPr/>
+          <p:nvPr/>
+        </p:nvSpPr>
+        <p:spPr>
+          <a:xfrm>
+            <a:off x="786384" y="2761488"/>
+            <a:ext cx="10618927" cy="1828800"/>
+          </a:xfrm>
+          <a:prstGeom prst="rect">
+            <a:avLst/>
+          </a:prstGeom>
+          <a:noFill/>
+          <a:ln/>
+        </p:spPr>
+        <p:txBody>
+          <a:bodyPr wrap="square" rtlCol="0" anchor="t"/>
+          <a:lstStyle/>
+          <a:p>
+            <a:pPr indent="0" marL="0">
+              <a:buNone/>
+            </a:pPr>
+            <a:r>
+              <a:rPr lang="en-US" sz="1100" dirty="0">
+                <a:solidFill>
+                  <a:srgbClr val="10161F"/>
+                </a:solidFill>
+                <a:latin typeface="Pretendard" pitchFamily="34" charset="0"/>
+                <a:ea typeface="Pretendard" pitchFamily="34" charset="-122"/>
+                <a:cs typeface="Pretendard" pitchFamily="34" charset="-120"/>
+              </a:rPr>
+              <a:t>현장 실사 및 임대차계약서 원본 확인을 권장합니다.</a:t>
+            </a:r>
+            <a:endParaRPr lang="en-US" sz="1100" dirty="0"/>
+          </a:p>
+          <a:p>
+            <a:pPr indent="0" marL="0">
+              <a:buNone/>
+            </a:pPr>
+            <a:r>
+              <a:rPr lang="en-US" sz="1100" dirty="0">
+                <a:solidFill>
+                  <a:srgbClr val="10161F"/>
+                </a:solidFill>
+                <a:latin typeface="Pretendard" pitchFamily="34" charset="0"/>
+                <a:ea typeface="Pretendard" pitchFamily="34" charset="-122"/>
+                <a:cs typeface="Pretendard" pitchFamily="34" charset="-120"/>
+              </a:rPr>
+              <a:t>현장 실사 및 임대차계약서 원본 확인을 권장합니다.</a:t>
+            </a:r>
+            <a:endParaRPr lang="en-US" sz="1100" dirty="0"/>
+          </a:p>
+        </p:txBody>
+      </p:sp>
+      <p:sp>
+        <p:nvSpPr>
+          <p:cNvPr id="11" name="Text 9"/>
+          <p:cNvSpPr/>
+          <p:nvPr/>
+        </p:nvSpPr>
+        <p:spPr>
+          <a:xfrm>
+            <a:off x="566928" y="6382512"/>
+            <a:ext cx="7315200" cy="219456"/>
+          </a:xfrm>
+          <a:prstGeom prst="rect">
+            <a:avLst/>
+          </a:prstGeom>
+          <a:noFill/>
+          <a:ln/>
+        </p:spPr>
+        <p:txBody>
+          <a:bodyPr wrap="square" lIns="0" tIns="0" rIns="0" bIns="0" rtlCol="0" anchor="ctr"/>
+          <a:lstStyle/>
+          <a:p>
+            <a:pPr indent="0" marL="0">
+              <a:buNone/>
+            </a:pPr>
+            <a:r>
+              <a:rPr lang="en-US" sz="800" dirty="0">
+                <a:solidFill>
+                  <a:srgbClr val="718096"/>
+                </a:solidFill>
+                <a:latin typeface="Pretendard" pitchFamily="34" charset="0"/>
+                <a:ea typeface="Pretendard" pitchFamily="34" charset="-122"/>
+                <a:cs typeface="Pretendard" pitchFamily="34" charset="-120"/>
+              </a:rPr>
+              <a:t>크리딜   |   </a:t>
+            </a:r>
+            <a:endParaRPr lang="en-US" sz="800" dirty="0"/>
+          </a:p>
+        </p:txBody>
+      </p:sp>
+      <p:sp>
+        <p:nvSpPr>
+          <p:cNvPr id="12" name="Text 10"/>
+          <p:cNvSpPr/>
+          <p:nvPr/>
+        </p:nvSpPr>
+        <p:spPr>
+          <a:xfrm>
+            <a:off x="10710367" y="6382512"/>
+            <a:ext cx="914400" cy="219456"/>
+          </a:xfrm>
+          <a:prstGeom prst="rect">
+            <a:avLst/>
+          </a:prstGeom>
+          <a:noFill/>
+          <a:ln/>
+        </p:spPr>
+        <p:txBody>
+          <a:bodyPr wrap="square" lIns="0" tIns="0" rIns="0" bIns="0" rtlCol="0" anchor="ctr"/>
+          <a:lstStyle/>
+          <a:p>
+            <a:pPr algn="r" indent="0" marL="0">
+              <a:buNone/>
+            </a:pPr>
+            <a:r>
+              <a:rPr lang="en-US" sz="900" b="1" dirty="0">
+                <a:solidFill>
+                  <a:srgbClr val="B98A2E"/>
+                </a:solidFill>
+                <a:latin typeface="Arial" pitchFamily="34" charset="0"/>
+                <a:ea typeface="Arial" pitchFamily="34" charset="-122"/>
+                <a:cs typeface="Arial" pitchFamily="34" charset="-120"/>
+              </a:rPr>
+              <a:t>13</a:t>
+            </a:r>
+            <a:endParaRPr lang="en-US" sz="900" dirty="0"/>
+          </a:p>
+        </p:txBody>
+      </p:sp>
+    </p:spTree>
+  </p:cSld>
+  <p:clrMapOvr>
+    <a:masterClrMapping/>
+  </p:clrMapOvr>
+</p:sld>
+</file>
+
+<file path=ppt/slides/slide15.xml><?xml version="1.0" encoding="utf-8"?>
+<p:sld xmlns:a="http://schemas.openxmlformats.org/drawingml/2006/main" xmlns:r="http://schemas.openxmlformats.org/officeDocument/2006/relationships" xmlns:p="http://schemas.openxmlformats.org/presentationml/2006/main">
+  <p:cSld name="Slide 15">
     <p:bg>
       <p:bgPr>
         <a:solidFill>
@@ -2368,7 +8096,7 @@
                 <a:ea typeface="Arial" pitchFamily="34" charset="-122"/>
                 <a:cs typeface="Arial" pitchFamily="34" charset="-120"/>
               </a:rPr>
-              <a:t>10</a:t>
+              <a:t>14</a:t>
             </a:r>
             <a:endParaRPr lang="en-US" sz="1300" dirty="0"/>
           </a:p>
@@ -2407,7 +8135,7 @@
                 <a:ea typeface="Arial" pitchFamily="34" charset="-122"/>
                 <a:cs typeface="Arial" pitchFamily="34" charset="-120"/>
               </a:rPr>
-              <a:t>Disclaimer</a:t>
+              <a:t>Closing</a:t>
             </a:r>
             <a:endParaRPr lang="en-US" sz="950" dirty="0"/>
           </a:p>
@@ -2597,7 +8325,7 @@
               <a:buNone/>
             </a:pPr>
             <a:r>
-              <a:rPr lang="en-US" sz="850" dirty="0">
+              <a:rPr lang="en-US" sz="900" dirty="0">
                 <a:solidFill>
                   <a:srgbClr val="A0AEC0"/>
                 </a:solidFill>
@@ -2607,7 +8335,7 @@
               </a:rPr>
               <a:t>담당 중개사에게 초기 관심 표명 및 상담 요청</a:t>
             </a:r>
-            <a:endParaRPr lang="en-US" sz="850" dirty="0"/>
+            <a:endParaRPr lang="en-US" sz="900" dirty="0"/>
           </a:p>
         </p:txBody>
       </p:sp>
@@ -2795,7 +8523,7 @@
               <a:buNone/>
             </a:pPr>
             <a:r>
-              <a:rPr lang="en-US" sz="850" dirty="0">
+              <a:rPr lang="en-US" sz="900" dirty="0">
                 <a:solidFill>
                   <a:srgbClr val="A0AEC0"/>
                 </a:solidFill>
@@ -2805,7 +8533,7 @@
               </a:rPr>
               <a:t>비밀유지계약 후 상세 임대차·재무 자료 제공</a:t>
             </a:r>
-            <a:endParaRPr lang="en-US" sz="850" dirty="0"/>
+            <a:endParaRPr lang="en-US" sz="900" dirty="0"/>
           </a:p>
         </p:txBody>
       </p:sp>
@@ -2993,7 +8721,7 @@
               <a:buNone/>
             </a:pPr>
             <a:r>
-              <a:rPr lang="en-US" sz="850" dirty="0">
+              <a:rPr lang="en-US" sz="900" dirty="0">
                 <a:solidFill>
                   <a:srgbClr val="A0AEC0"/>
                 </a:solidFill>
@@ -3003,7 +8731,7 @@
               </a:rPr>
               <a:t>건물 컨디션 및 설비 직접 확인 후 의향서(LOI) 제출</a:t>
             </a:r>
-            <a:endParaRPr lang="en-US" sz="850" dirty="0"/>
+            <a:endParaRPr lang="en-US" sz="900" dirty="0"/>
           </a:p>
         </p:txBody>
       </p:sp>
@@ -3093,7 +8821,7 @@
               <a:buNone/>
             </a:pPr>
             <a:r>
-              <a:rPr lang="en-US" sz="850" b="1" dirty="0">
+              <a:rPr lang="en-US" sz="900" b="1" dirty="0">
                 <a:solidFill>
                   <a:srgbClr val="FFFFFF"/>
                 </a:solidFill>
@@ -3103,7 +8831,7 @@
               </a:rPr>
               <a:t>✓ 공부확인</a:t>
             </a:r>
-            <a:endParaRPr lang="en-US" sz="850" dirty="0"/>
+            <a:endParaRPr lang="en-US" sz="900" dirty="0"/>
           </a:p>
         </p:txBody>
       </p:sp>
@@ -3193,7 +8921,7 @@
               <a:buNone/>
             </a:pPr>
             <a:r>
-              <a:rPr lang="en-US" sz="850" b="1" dirty="0">
+              <a:rPr lang="en-US" sz="900" b="1" dirty="0">
                 <a:solidFill>
                   <a:srgbClr val="FFFFFF"/>
                 </a:solidFill>
@@ -3203,7 +8931,7 @@
               </a:rPr>
               <a:t>★ 전문가검증</a:t>
             </a:r>
-            <a:endParaRPr lang="en-US" sz="850" dirty="0"/>
+            <a:endParaRPr lang="en-US" sz="900" dirty="0"/>
           </a:p>
         </p:txBody>
       </p:sp>
@@ -3293,7 +9021,7 @@
               <a:buNone/>
             </a:pPr>
             <a:r>
-              <a:rPr lang="en-US" sz="850" b="1" dirty="0">
+              <a:rPr lang="en-US" sz="900" b="1" dirty="0">
                 <a:solidFill>
                   <a:srgbClr val="FFFFFF"/>
                 </a:solidFill>
@@ -3303,7 +9031,7 @@
               </a:rPr>
               <a:t>▲ 매도인고지</a:t>
             </a:r>
-            <a:endParaRPr lang="en-US" sz="850" dirty="0"/>
+            <a:endParaRPr lang="en-US" sz="900" dirty="0"/>
           </a:p>
         </p:txBody>
       </p:sp>
@@ -3393,7 +9121,7 @@
               <a:buNone/>
             </a:pPr>
             <a:r>
-              <a:rPr lang="en-US" sz="850" b="1" dirty="0">
+              <a:rPr lang="en-US" sz="900" b="1" dirty="0">
                 <a:solidFill>
                   <a:srgbClr val="FFFFFF"/>
                 </a:solidFill>
@@ -3403,7 +9131,7 @@
               </a:rPr>
               <a:t>● 중개인입력</a:t>
             </a:r>
-            <a:endParaRPr lang="en-US" sz="850" dirty="0"/>
+            <a:endParaRPr lang="en-US" sz="900" dirty="0"/>
           </a:p>
         </p:txBody>
       </p:sp>
@@ -3493,7 +9221,7 @@
               <a:buNone/>
             </a:pPr>
             <a:r>
-              <a:rPr lang="en-US" sz="850" b="1" dirty="0">
+              <a:rPr lang="en-US" sz="900" b="1" dirty="0">
                 <a:solidFill>
                   <a:srgbClr val="FFFFFF"/>
                 </a:solidFill>
@@ -3503,7 +9231,7 @@
               </a:rPr>
               <a:t>◇ AI추정·가정</a:t>
             </a:r>
-            <a:endParaRPr lang="en-US" sz="850" dirty="0"/>
+            <a:endParaRPr lang="en-US" sz="900" dirty="0"/>
           </a:p>
         </p:txBody>
       </p:sp>
@@ -3635,7 +9363,7 @@
               <a:buNone/>
             </a:pPr>
             <a:r>
-              <a:rPr lang="en-US" sz="850" dirty="0">
+              <a:rPr lang="en-US" sz="900" dirty="0">
                 <a:solidFill>
                   <a:srgbClr val="A0AEC0"/>
                 </a:solidFill>
@@ -3645,7 +9373,7 @@
               </a:rPr>
               <a:t>본 자료는 투자 권유가 아니며, 기재된 정보의 정확성을 보증하지 않습니다.</a:t>
             </a:r>
-            <a:endParaRPr lang="en-US" sz="850" dirty="0"/>
+            <a:endParaRPr lang="en-US" sz="900" dirty="0"/>
           </a:p>
         </p:txBody>
       </p:sp>
@@ -3780,7 +9508,7 @@
                 <a:ea typeface="Arial" pitchFamily="34" charset="-122"/>
                 <a:cs typeface="Arial" pitchFamily="34" charset="-120"/>
               </a:rPr>
-              <a:t>10</a:t>
+              <a:t>14</a:t>
             </a:r>
             <a:endParaRPr lang="en-US" sz="900" dirty="0"/>
           </a:p>
@@ -4091,7 +9819,7 @@
         </p:nvSpPr>
         <p:spPr>
           <a:xfrm>
-            <a:off x="731520" y="2276856"/>
+            <a:off x="731520" y="2313432"/>
             <a:ext cx="3234842" cy="402336"/>
           </a:xfrm>
           <a:prstGeom prst="rect">
@@ -4198,7 +9926,7 @@
         </p:nvSpPr>
         <p:spPr>
           <a:xfrm>
-            <a:off x="4478426" y="2276856"/>
+            <a:off x="4478426" y="2313432"/>
             <a:ext cx="3234842" cy="402336"/>
           </a:xfrm>
           <a:prstGeom prst="rect">
@@ -4305,7 +10033,7 @@
         </p:nvSpPr>
         <p:spPr>
           <a:xfrm>
-            <a:off x="8225333" y="2276856"/>
+            <a:off x="8225333" y="2313432"/>
             <a:ext cx="3234842" cy="402336"/>
           </a:xfrm>
           <a:prstGeom prst="rect">
@@ -5020,117 +10748,9 @@
           </a:p>
         </p:txBody>
       </p:sp>
-      <p:pic>
-        <p:nvPicPr>
-          <p:cNvPr id="6" name="Image 0" descr="preencoded.png">    </p:cNvPr>
-          <p:cNvPicPr>
-            <a:picLocks noChangeAspect="1"/>
-          </p:cNvPicPr>
-          <p:nvPr/>
-        </p:nvPicPr>
-        <p:blipFill>
-          <a:blip r:embed="rId1"/>
-          <a:stretch>
-            <a:fillRect/>
-          </a:stretch>
-        </p:blipFill>
-        <p:spPr>
-          <a:xfrm>
-            <a:off x="566928" y="1481328"/>
-            <a:ext cx="5120640" cy="4114800"/>
-          </a:xfrm>
-          <a:prstGeom prst="rect">
-            <a:avLst/>
-          </a:prstGeom>
-        </p:spPr>
-      </p:pic>
-      <p:sp>
-        <p:nvSpPr>
-          <p:cNvPr id="7" name="Text 4"/>
-          <p:cNvSpPr/>
-          <p:nvPr/>
-        </p:nvSpPr>
-        <p:spPr>
-          <a:xfrm>
-            <a:off x="6053328" y="1481328"/>
-            <a:ext cx="2117147" cy="493776"/>
-          </a:xfrm>
-          <a:prstGeom prst="rect">
-            <a:avLst/>
-          </a:prstGeom>
-          <a:noFill/>
-          <a:ln/>
-        </p:spPr>
-        <p:txBody>
-          <a:bodyPr wrap="square" lIns="0" tIns="0" rIns="0" bIns="0" rtlCol="0" anchor="ctr"/>
-          <a:lstStyle/>
-          <a:p>
-            <a:pPr indent="0" marL="0">
-              <a:lnSpc>
-                <a:spcPct val="120000"/>
-              </a:lnSpc>
-              <a:buNone/>
-            </a:pPr>
-            <a:r>
-              <a:rPr lang="en-US" sz="1300" dirty="0">
-                <a:solidFill>
-                  <a:srgbClr val="718096"/>
-                </a:solidFill>
-                <a:latin typeface="Pretendard" pitchFamily="34" charset="0"/>
-                <a:ea typeface="Pretendard" pitchFamily="34" charset="-122"/>
-                <a:cs typeface="Pretendard" pitchFamily="34" charset="-120"/>
-              </a:rPr>
-              <a:t>교통 접근성</a:t>
-            </a:r>
-            <a:endParaRPr lang="en-US" sz="1300" dirty="0"/>
-          </a:p>
-        </p:txBody>
-      </p:sp>
-      <p:sp>
-        <p:nvSpPr>
-          <p:cNvPr id="8" name="Text 5"/>
-          <p:cNvSpPr/>
-          <p:nvPr/>
-        </p:nvSpPr>
-        <p:spPr>
-          <a:xfrm>
-            <a:off x="8170475" y="1481328"/>
-            <a:ext cx="3454292" cy="493776"/>
-          </a:xfrm>
-          <a:prstGeom prst="rect">
-            <a:avLst/>
-          </a:prstGeom>
-          <a:noFill/>
-          <a:ln/>
-        </p:spPr>
-        <p:txBody>
-          <a:bodyPr wrap="square" lIns="0" tIns="0" rIns="0" bIns="0" rtlCol="0" anchor="ctr"/>
-          <a:lstStyle/>
-          <a:p>
-            <a:pPr indent="0" marL="0">
-              <a:lnSpc>
-                <a:spcPct val="120000"/>
-              </a:lnSpc>
-              <a:buNone/>
-            </a:pPr>
-            <a:r>
-              <a:rPr lang="en-US" sz="1300" b="1" dirty="0">
-                <a:solidFill>
-                  <a:srgbClr val="10161F"/>
-                </a:solidFill>
-                <a:latin typeface="Pretendard" pitchFamily="34" charset="0"/>
-                <a:ea typeface="Pretendard" pitchFamily="34" charset="-122"/>
-                <a:cs typeface="Pretendard" pitchFamily="34" charset="-120"/>
-              </a:rPr>
-              <a:t>강남역·양재역 더블역세권 도보 4분 거리에 위치합니다.</a:t>
-            </a:r>
-            <a:endParaRPr lang="en-US" sz="1300" dirty="0"/>
-          </a:p>
-        </p:txBody>
-      </p:sp>
-      <p:sp>
-        <p:nvSpPr>
-          <p:cNvPr id="9" name="Text 6"/>
+      <p:sp>
+        <p:nvSpPr>
+          <p:cNvPr id="6" name="Text 4"/>
           <p:cNvSpPr/>
           <p:nvPr/>
         </p:nvSpPr>
@@ -5169,7 +10789,7 @@
       </p:sp>
       <p:sp>
         <p:nvSpPr>
-          <p:cNvPr id="10" name="Text 7"/>
+          <p:cNvPr id="7" name="Text 5"/>
           <p:cNvSpPr/>
           <p:nvPr/>
         </p:nvSpPr>
@@ -5203,45 +10823,6 @@
               <a:t>3</a:t>
             </a:r>
             <a:endParaRPr lang="en-US" sz="900" dirty="0"/>
-          </a:p>
-        </p:txBody>
-      </p:sp>
-      <p:sp>
-        <p:nvSpPr>
-          <p:cNvPr id="11" name="Text 8"/>
-          <p:cNvSpPr/>
-          <p:nvPr/>
-        </p:nvSpPr>
-        <p:spPr>
-          <a:xfrm>
-            <a:off x="566928" y="1481328"/>
-            <a:ext cx="11057839" cy="237744"/>
-          </a:xfrm>
-          <a:prstGeom prst="rect">
-            <a:avLst/>
-          </a:prstGeom>
-          <a:noFill/>
-          <a:ln/>
-        </p:spPr>
-        <p:txBody>
-          <a:bodyPr wrap="square" lIns="0" tIns="0" rIns="0" bIns="0" rtlCol="0" anchor="t"/>
-          <a:lstStyle/>
-          <a:p>
-            <a:pPr indent="0" marL="0">
-              <a:buNone/>
-            </a:pPr>
-            <a:r>
-              <a:rPr lang="en-US" sz="1000" dirty="0">
-                <a:solidFill>
-                  <a:srgbClr val="10161F"/>
-                </a:solidFill>
-                <a:latin typeface="Pretendard" pitchFamily="34" charset="0"/>
-                <a:ea typeface="Pretendard" pitchFamily="34" charset="-122"/>
-                <a:cs typeface="Pretendard" pitchFamily="34" charset="-120"/>
-              </a:rPr>
-              <a:t>강남역·양재역 더블역세권 도보 4분 거리에 위치합니다.</a:t>
-            </a:r>
-            <a:endParaRPr lang="en-US" sz="1000" dirty="0"/>
           </a:p>
         </p:txBody>
       </p:sp>
@@ -5330,7 +10911,7 @@
                 <a:ea typeface="Arial" pitchFamily="34" charset="-122"/>
                 <a:cs typeface="Arial" pitchFamily="34" charset="-120"/>
               </a:rPr>
-              <a:t>04</a:t>
+              <a:t>03</a:t>
             </a:r>
             <a:endParaRPr lang="en-US" sz="1300" dirty="0"/>
           </a:p>
@@ -5369,7 +10950,7 @@
                 <a:ea typeface="Arial" pitchFamily="34" charset="-122"/>
                 <a:cs typeface="Arial" pitchFamily="34" charset="-120"/>
               </a:rPr>
-              <a:t>Building</a:t>
+              <a:t>Land</a:t>
             </a:r>
             <a:endParaRPr lang="en-US" sz="950" dirty="0"/>
           </a:p>
@@ -5408,7 +10989,7 @@
                 <a:ea typeface="Pretendard" pitchFamily="34" charset="-122"/>
                 <a:cs typeface="Pretendard" pitchFamily="34" charset="-120"/>
               </a:rPr>
-              <a:t>물건 개요</a:t>
+              <a:t>토지</a:t>
             </a:r>
             <a:endParaRPr lang="en-US" sz="2300" dirty="0"/>
           </a:p>
@@ -5447,7 +11028,7 @@
                 <a:ea typeface="Pretendard" pitchFamily="34" charset="-122"/>
                 <a:cs typeface="Pretendard" pitchFamily="34" charset="-120"/>
               </a:rPr>
-              <a:t>건축물 개요 및 물리 스펙</a:t>
+              <a:t>토지 현황</a:t>
             </a:r>
             <a:endParaRPr lang="en-US" sz="1100" dirty="0"/>
           </a:p>
@@ -5659,7 +11240,7 @@
             </a:avLst>
           </a:prstGeom>
           <a:solidFill>
-            <a:srgbClr val="F3EBDA"/>
+            <a:srgbClr val="BEE3F8"/>
           </a:solidFill>
           <a:ln/>
         </p:spPr>
@@ -5679,7 +11260,7 @@
             <a:avLst/>
           </a:prstGeom>
           <a:solidFill>
-            <a:srgbClr val="977024"/>
+            <a:srgbClr val="2B6CB0"/>
           </a:solidFill>
           <a:ln/>
         </p:spPr>
@@ -5708,6 +11289,17 @@
             <a:pPr indent="0" marL="0">
               <a:buNone/>
             </a:pPr>
+            <a:r>
+              <a:rPr lang="en-US" sz="1050" b="1" dirty="0">
+                <a:solidFill>
+                  <a:srgbClr val="2B6CB0"/>
+                </a:solidFill>
+                <a:latin typeface="Pretendard" pitchFamily="34" charset="0"/>
+                <a:ea typeface="Pretendard" pitchFamily="34" charset="-122"/>
+                <a:cs typeface="Pretendard" pitchFamily="34" charset="-120"/>
+              </a:rPr>
+              <a:t>입지 및 권리관계 실사 포인트</a:t>
+            </a:r>
             <a:endParaRPr lang="en-US" sz="1050" dirty="0"/>
           </a:p>
         </p:txBody>
@@ -5733,11 +11325,12 @@
           <a:bodyPr wrap="square" lIns="0" tIns="0" rIns="0" bIns="0" rtlCol="0" anchor="t"/>
           <a:lstStyle/>
           <a:p>
-            <a:pPr indent="0" marL="0">
+            <a:pPr marL="342900" indent="-342900">
               <a:lnSpc>
                 <a:spcPct val="120000"/>
               </a:lnSpc>
-              <a:buNone/>
+              <a:buSzPct val="100000"/>
+              <a:buChar char="•"/>
             </a:pPr>
             <a:r>
               <a:rPr lang="en-US" sz="930" dirty="0">
@@ -5748,15 +11341,223 @@
                 <a:ea typeface="Pretendard" pitchFamily="34" charset="-122"/>
                 <a:cs typeface="Pretendard" pitchFamily="34" charset="-120"/>
               </a:rPr>
-              <a:t>이 건물은 이 건물은 이 건물은 이 건물은 이 건물은 이 건물은 이 건물은 이 건물은 이 건물은 이 건물은 이 건물은 이 건물은 이 건물은 이 건물은 이 건물은 이 건물은 이 건물은 이 건물은 이 건물은 이 건물은</a:t>
+              <a:t>물건 접면 도로 폭 및 진출입 여건은 현장 실사 확인 사항입니다</a:t>
             </a:r>
             <a:endParaRPr lang="en-US" sz="930" dirty="0"/>
           </a:p>
-        </p:txBody>
-      </p:sp>
-      <p:sp>
-        <p:nvSpPr>
-          <p:cNvPr id="16" name="Text 14"/>
+          <a:p>
+            <a:pPr marL="342900" indent="-342900">
+              <a:lnSpc>
+                <a:spcPct val="120000"/>
+              </a:lnSpc>
+              <a:buSzPct val="100000"/>
+              <a:buChar char="•"/>
+            </a:pPr>
+            <a:r>
+              <a:rPr lang="en-US" sz="930" dirty="0">
+                <a:solidFill>
+                  <a:srgbClr val="10161F"/>
+                </a:solidFill>
+                <a:latin typeface="Pretendard" pitchFamily="34" charset="0"/>
+                <a:ea typeface="Pretendard" pitchFamily="34" charset="-122"/>
+                <a:cs typeface="Pretendard" pitchFamily="34" charset="-120"/>
+              </a:rPr>
+              <a:t>등기부등본상 권리관계 및 제한물권 설정 여부를 확인하였습니다</a:t>
+            </a:r>
+            <a:endParaRPr lang="en-US" sz="930" dirty="0"/>
+          </a:p>
+          <a:p>
+            <a:pPr marL="342900" indent="-342900">
+              <a:lnSpc>
+                <a:spcPct val="120000"/>
+              </a:lnSpc>
+              <a:buSzPct val="100000"/>
+              <a:buChar char="•"/>
+            </a:pPr>
+            <a:r>
+              <a:rPr lang="en-US" sz="930" dirty="0">
+                <a:solidFill>
+                  <a:srgbClr val="10161F"/>
+                </a:solidFill>
+                <a:latin typeface="Pretendard" pitchFamily="34" charset="0"/>
+                <a:ea typeface="Pretendard" pitchFamily="34" charset="-122"/>
+                <a:cs typeface="Pretendard" pitchFamily="34" charset="-120"/>
+              </a:rPr>
+              <a:t>지구단위계획 및 토지이용계획상 허용 용도를 검토하였습니다</a:t>
+            </a:r>
+            <a:endParaRPr lang="en-US" sz="930" dirty="0"/>
+          </a:p>
+        </p:txBody>
+      </p:sp>
+      <p:sp>
+        <p:nvSpPr>
+          <p:cNvPr id="16" name="Shape 14"/>
+          <p:cNvSpPr/>
+          <p:nvPr/>
+        </p:nvSpPr>
+        <p:spPr>
+          <a:xfrm>
+            <a:off x="7784287" y="3977640"/>
+            <a:ext cx="3840480" cy="2148840"/>
+          </a:xfrm>
+          <a:prstGeom prst="roundRect">
+            <a:avLst>
+              <a:gd name="adj" fmla="val 2553"/>
+            </a:avLst>
+          </a:prstGeom>
+          <a:solidFill>
+            <a:srgbClr val="BEE3F8"/>
+          </a:solidFill>
+          <a:ln/>
+        </p:spPr>
+      </p:sp>
+      <p:sp>
+        <p:nvSpPr>
+          <p:cNvPr id="17" name="Shape 15"/>
+          <p:cNvSpPr/>
+          <p:nvPr/>
+        </p:nvSpPr>
+        <p:spPr>
+          <a:xfrm>
+            <a:off x="7784287" y="4032504"/>
+            <a:ext cx="36576" cy="2039112"/>
+          </a:xfrm>
+          <a:prstGeom prst="rect">
+            <a:avLst/>
+          </a:prstGeom>
+          <a:solidFill>
+            <a:srgbClr val="2B6CB0"/>
+          </a:solidFill>
+          <a:ln/>
+        </p:spPr>
+      </p:sp>
+      <p:sp>
+        <p:nvSpPr>
+          <p:cNvPr id="18" name="Text 16"/>
+          <p:cNvSpPr/>
+          <p:nvPr/>
+        </p:nvSpPr>
+        <p:spPr>
+          <a:xfrm>
+            <a:off x="7967167" y="4087368"/>
+            <a:ext cx="3511296" cy="201168"/>
+          </a:xfrm>
+          <a:prstGeom prst="rect">
+            <a:avLst/>
+          </a:prstGeom>
+          <a:noFill/>
+          <a:ln/>
+        </p:spPr>
+        <p:txBody>
+          <a:bodyPr wrap="square" lIns="0" tIns="0" rIns="0" bIns="0" rtlCol="0" anchor="ctr"/>
+          <a:lstStyle/>
+          <a:p>
+            <a:pPr indent="0" marL="0">
+              <a:buNone/>
+            </a:pPr>
+            <a:r>
+              <a:rPr lang="en-US" sz="1050" b="1" dirty="0">
+                <a:solidFill>
+                  <a:srgbClr val="2B6CB0"/>
+                </a:solidFill>
+                <a:latin typeface="Pretendard" pitchFamily="34" charset="0"/>
+                <a:ea typeface="Pretendard" pitchFamily="34" charset="-122"/>
+                <a:cs typeface="Pretendard" pitchFamily="34" charset="-120"/>
+              </a:rPr>
+              <a:t>임대차 및 운용 관리 상태</a:t>
+            </a:r>
+            <a:endParaRPr lang="en-US" sz="1050" dirty="0"/>
+          </a:p>
+        </p:txBody>
+      </p:sp>
+      <p:sp>
+        <p:nvSpPr>
+          <p:cNvPr id="19" name="Text 17"/>
+          <p:cNvSpPr/>
+          <p:nvPr/>
+        </p:nvSpPr>
+        <p:spPr>
+          <a:xfrm>
+            <a:off x="7967167" y="4306824"/>
+            <a:ext cx="3511296" cy="1746504"/>
+          </a:xfrm>
+          <a:prstGeom prst="rect">
+            <a:avLst/>
+          </a:prstGeom>
+          <a:noFill/>
+          <a:ln/>
+        </p:spPr>
+        <p:txBody>
+          <a:bodyPr wrap="square" lIns="0" tIns="0" rIns="0" bIns="0" rtlCol="0" anchor="t"/>
+          <a:lstStyle/>
+          <a:p>
+            <a:pPr marL="342900" indent="-342900">
+              <a:lnSpc>
+                <a:spcPct val="120000"/>
+              </a:lnSpc>
+              <a:buSzPct val="100000"/>
+              <a:buChar char="•"/>
+            </a:pPr>
+            <a:r>
+              <a:rPr lang="en-US" sz="930" dirty="0">
+                <a:solidFill>
+                  <a:srgbClr val="10161F"/>
+                </a:solidFill>
+                <a:latin typeface="Pretendard" pitchFamily="34" charset="0"/>
+                <a:ea typeface="Pretendard" pitchFamily="34" charset="-122"/>
+                <a:cs typeface="Pretendard" pitchFamily="34" charset="-120"/>
+              </a:rPr>
+              <a:t>주요 임차인별 계약 만기 분산 및 렌트롤 실사가 필요합니다</a:t>
+            </a:r>
+            <a:endParaRPr lang="en-US" sz="930" dirty="0"/>
+          </a:p>
+          <a:p>
+            <a:pPr marL="342900" indent="-342900">
+              <a:lnSpc>
+                <a:spcPct val="120000"/>
+              </a:lnSpc>
+              <a:buSzPct val="100000"/>
+              <a:buChar char="•"/>
+            </a:pPr>
+            <a:r>
+              <a:rPr lang="en-US" sz="930" dirty="0">
+                <a:solidFill>
+                  <a:srgbClr val="10161F"/>
+                </a:solidFill>
+                <a:latin typeface="Pretendard" pitchFamily="34" charset="0"/>
+                <a:ea typeface="Pretendard" pitchFamily="34" charset="-122"/>
+                <a:cs typeface="Pretendard" pitchFamily="34" charset="-120"/>
+              </a:rPr>
+              <a:t>관리비 정산 내역 및 수선유지비 집행 이력을 점검하였습니다</a:t>
+            </a:r>
+            <a:endParaRPr lang="en-US" sz="930" dirty="0"/>
+          </a:p>
+          <a:p>
+            <a:pPr marL="342900" indent="-342900">
+              <a:lnSpc>
+                <a:spcPct val="120000"/>
+              </a:lnSpc>
+              <a:buSzPct val="100000"/>
+              <a:buChar char="•"/>
+            </a:pPr>
+            <a:r>
+              <a:rPr lang="en-US" sz="930" dirty="0">
+                <a:solidFill>
+                  <a:srgbClr val="10161F"/>
+                </a:solidFill>
+                <a:latin typeface="Pretendard" pitchFamily="34" charset="0"/>
+                <a:ea typeface="Pretendard" pitchFamily="34" charset="-122"/>
+                <a:cs typeface="Pretendard" pitchFamily="34" charset="-120"/>
+              </a:rPr>
+              <a:t>취득세 감면 및 대출 조달 구조는 금융·세무 자문 후 확정됩니다</a:t>
+            </a:r>
+            <a:endParaRPr lang="en-US" sz="930" dirty="0"/>
+          </a:p>
+        </p:txBody>
+      </p:sp>
+      <p:sp>
+        <p:nvSpPr>
+          <p:cNvPr id="20" name="Text 18"/>
           <p:cNvSpPr/>
           <p:nvPr/>
         </p:nvSpPr>
@@ -5795,7 +11596,7 @@
       </p:sp>
       <p:sp>
         <p:nvSpPr>
-          <p:cNvPr id="17" name="Text 15"/>
+          <p:cNvPr id="21" name="Text 19"/>
           <p:cNvSpPr/>
           <p:nvPr/>
         </p:nvSpPr>
@@ -5826,7 +11627,7 @@
                 <a:ea typeface="Arial" pitchFamily="34" charset="-122"/>
                 <a:cs typeface="Arial" pitchFamily="34" charset="-120"/>
               </a:rPr>
-              <a:t>4</a:t>
+              <a:t>3</a:t>
             </a:r>
             <a:endParaRPr lang="en-US" sz="900" dirty="0"/>
           </a:p>
@@ -5917,7 +11718,7 @@
                 <a:ea typeface="Arial" pitchFamily="34" charset="-122"/>
                 <a:cs typeface="Arial" pitchFamily="34" charset="-120"/>
               </a:rPr>
-              <a:t>05</a:t>
+              <a:t>04</a:t>
             </a:r>
             <a:endParaRPr lang="en-US" sz="1300" dirty="0"/>
           </a:p>
@@ -5956,7 +11757,7 @@
                 <a:ea typeface="Arial" pitchFamily="34" charset="-122"/>
                 <a:cs typeface="Arial" pitchFamily="34" charset="-120"/>
               </a:rPr>
-              <a:t>Rent Roll</a:t>
+              <a:t>Building</a:t>
             </a:r>
             <a:endParaRPr lang="en-US" sz="950" dirty="0"/>
           </a:p>
@@ -5995,7 +11796,7 @@
                 <a:ea typeface="Pretendard" pitchFamily="34" charset="-122"/>
                 <a:cs typeface="Pretendard" pitchFamily="34" charset="-120"/>
               </a:rPr>
-              <a:t>임대차 현황</a:t>
+              <a:t>물건 개요</a:t>
             </a:r>
             <a:endParaRPr lang="en-US" sz="2300" dirty="0"/>
           </a:p>
@@ -6003,18 +11804,57 @@
       </p:sp>
       <p:sp>
         <p:nvSpPr>
-          <p:cNvPr id="6" name="Shape 4"/>
-          <p:cNvSpPr/>
-          <p:nvPr/>
-        </p:nvSpPr>
-        <p:spPr>
-          <a:xfrm>
-            <a:off x="566928" y="1700784"/>
-            <a:ext cx="11057839" cy="1371600"/>
+          <p:cNvPr id="6" name="Text 4"/>
+          <p:cNvSpPr/>
+          <p:nvPr/>
+        </p:nvSpPr>
+        <p:spPr>
+          <a:xfrm>
+            <a:off x="566928" y="1371600"/>
+            <a:ext cx="6858000" cy="237744"/>
+          </a:xfrm>
+          <a:prstGeom prst="rect">
+            <a:avLst/>
+          </a:prstGeom>
+          <a:noFill/>
+          <a:ln/>
+        </p:spPr>
+        <p:txBody>
+          <a:bodyPr wrap="square" lIns="0" tIns="0" rIns="0" bIns="0" rtlCol="0" anchor="ctr"/>
+          <a:lstStyle/>
+          <a:p>
+            <a:pPr indent="0" marL="0">
+              <a:buNone/>
+            </a:pPr>
+            <a:r>
+              <a:rPr lang="en-US" sz="1100" b="1" dirty="0">
+                <a:solidFill>
+                  <a:srgbClr val="10161F"/>
+                </a:solidFill>
+                <a:latin typeface="Pretendard" pitchFamily="34" charset="0"/>
+                <a:ea typeface="Pretendard" pitchFamily="34" charset="-122"/>
+                <a:cs typeface="Pretendard" pitchFamily="34" charset="-120"/>
+              </a:rPr>
+              <a:t>건축물 개요 및 물리 스펙</a:t>
+            </a:r>
+            <a:endParaRPr lang="en-US" sz="1100" dirty="0"/>
+          </a:p>
+        </p:txBody>
+      </p:sp>
+      <p:sp>
+        <p:nvSpPr>
+          <p:cNvPr id="7" name="Shape 5"/>
+          <p:cNvSpPr/>
+          <p:nvPr/>
+        </p:nvSpPr>
+        <p:spPr>
+          <a:xfrm>
+            <a:off x="566928" y="1645920"/>
+            <a:ext cx="6858000" cy="1828800"/>
           </a:xfrm>
           <a:prstGeom prst="roundRect">
             <a:avLst>
-              <a:gd name="adj" fmla="val 4000"/>
+              <a:gd name="adj" fmla="val 3000"/>
             </a:avLst>
           </a:prstGeom>
           <a:solidFill>
@@ -6025,14 +11865,14 @@
       </p:sp>
       <p:sp>
         <p:nvSpPr>
-          <p:cNvPr id="7" name="Shape 5"/>
-          <p:cNvSpPr/>
-          <p:nvPr/>
-        </p:nvSpPr>
-        <p:spPr>
-          <a:xfrm>
-            <a:off x="566928" y="1755648"/>
-            <a:ext cx="36576" cy="1261872"/>
+          <p:cNvPr id="8" name="Shape 6"/>
+          <p:cNvSpPr/>
+          <p:nvPr/>
+        </p:nvSpPr>
+        <p:spPr>
+          <a:xfrm>
+            <a:off x="566928" y="1700784"/>
+            <a:ext cx="36576" cy="1719072"/>
           </a:xfrm>
           <a:prstGeom prst="rect">
             <a:avLst/>
@@ -6045,14 +11885,14 @@
       </p:sp>
       <p:sp>
         <p:nvSpPr>
-          <p:cNvPr id="8" name="Text 6"/>
-          <p:cNvSpPr/>
-          <p:nvPr/>
-        </p:nvSpPr>
-        <p:spPr>
-          <a:xfrm>
-            <a:off x="749808" y="1810512"/>
-            <a:ext cx="10728655" cy="201168"/>
+          <p:cNvPr id="9" name="Text 7"/>
+          <p:cNvSpPr/>
+          <p:nvPr/>
+        </p:nvSpPr>
+        <p:spPr>
+          <a:xfrm>
+            <a:off x="749808" y="1755648"/>
+            <a:ext cx="6528816" cy="201168"/>
           </a:xfrm>
           <a:prstGeom prst="rect">
             <a:avLst/>
@@ -6076,7 +11916,7 @@
                 <a:ea typeface="Pretendard" pitchFamily="34" charset="-122"/>
                 <a:cs typeface="Pretendard" pitchFamily="34" charset="-120"/>
               </a:rPr>
-              <a:t>임대차 현황 데이터 준비 중</a:t>
+              <a:t>건축물 물리 스펙 요약</a:t>
             </a:r>
             <a:endParaRPr lang="en-US" sz="1050" dirty="0"/>
           </a:p>
@@ -6084,137 +11924,14 @@
       </p:sp>
       <p:sp>
         <p:nvSpPr>
-          <p:cNvPr id="9" name="Text 7"/>
-          <p:cNvSpPr/>
-          <p:nvPr/>
-        </p:nvSpPr>
-        <p:spPr>
-          <a:xfrm>
-            <a:off x="749808" y="2029968"/>
-            <a:ext cx="10728655" cy="969264"/>
-          </a:xfrm>
-          <a:prstGeom prst="rect">
-            <a:avLst/>
-          </a:prstGeom>
-          <a:noFill/>
-          <a:ln/>
-        </p:spPr>
-        <p:txBody>
-          <a:bodyPr wrap="square" lIns="0" tIns="0" rIns="0" bIns="0" rtlCol="0" anchor="t"/>
-          <a:lstStyle/>
-          <a:p>
-            <a:pPr indent="0" marL="0">
-              <a:lnSpc>
-                <a:spcPct val="120000"/>
-              </a:lnSpc>
-              <a:buNone/>
-            </a:pPr>
-            <a:r>
-              <a:rPr lang="en-US" sz="930" dirty="0">
-                <a:solidFill>
-                  <a:srgbClr val="10161F"/>
-                </a:solidFill>
-                <a:latin typeface="Pretendard" pitchFamily="34" charset="0"/>
-                <a:ea typeface="Pretendard" pitchFamily="34" charset="-122"/>
-                <a:cs typeface="Pretendard" pitchFamily="34" charset="-120"/>
-              </a:rPr>
-              <a:t>상세 임대차 계약 현황(호실별 보증금, 월차임, 관리비, 만기일)은 소유자/중개인 확인 후 업데이트됩니다.</a:t>
-            </a:r>
-            <a:endParaRPr lang="en-US" sz="930" dirty="0"/>
-          </a:p>
-        </p:txBody>
-      </p:sp>
-      <p:sp>
-        <p:nvSpPr>
-          <p:cNvPr id="10" name="Shape 8"/>
-          <p:cNvSpPr/>
-          <p:nvPr/>
-        </p:nvSpPr>
-        <p:spPr>
-          <a:xfrm>
-            <a:off x="566928" y="3291840"/>
-            <a:ext cx="5437480" cy="2194560"/>
-          </a:xfrm>
-          <a:prstGeom prst="roundRect">
-            <a:avLst>
-              <a:gd name="adj" fmla="val 2500"/>
-            </a:avLst>
-          </a:prstGeom>
-          <a:solidFill>
-            <a:srgbClr val="BEE3F8"/>
-          </a:solidFill>
-          <a:ln/>
-        </p:spPr>
-      </p:sp>
-      <p:sp>
-        <p:nvSpPr>
-          <p:cNvPr id="11" name="Shape 9"/>
-          <p:cNvSpPr/>
-          <p:nvPr/>
-        </p:nvSpPr>
-        <p:spPr>
-          <a:xfrm>
-            <a:off x="566928" y="3346704"/>
-            <a:ext cx="36576" cy="2084832"/>
-          </a:xfrm>
-          <a:prstGeom prst="rect">
-            <a:avLst/>
-          </a:prstGeom>
-          <a:solidFill>
-            <a:srgbClr val="2B6CB0"/>
-          </a:solidFill>
-          <a:ln/>
-        </p:spPr>
-      </p:sp>
-      <p:sp>
-        <p:nvSpPr>
-          <p:cNvPr id="12" name="Text 10"/>
-          <p:cNvSpPr/>
-          <p:nvPr/>
-        </p:nvSpPr>
-        <p:spPr>
-          <a:xfrm>
-            <a:off x="749808" y="3401568"/>
-            <a:ext cx="5108296" cy="201168"/>
-          </a:xfrm>
-          <a:prstGeom prst="rect">
-            <a:avLst/>
-          </a:prstGeom>
-          <a:noFill/>
-          <a:ln/>
-        </p:spPr>
-        <p:txBody>
-          <a:bodyPr wrap="square" lIns="0" tIns="0" rIns="0" bIns="0" rtlCol="0" anchor="ctr"/>
-          <a:lstStyle/>
-          <a:p>
-            <a:pPr indent="0" marL="0">
-              <a:buNone/>
-            </a:pPr>
-            <a:r>
-              <a:rPr lang="en-US" sz="1050" b="1" dirty="0">
-                <a:solidFill>
-                  <a:srgbClr val="2B6CB0"/>
-                </a:solidFill>
-                <a:latin typeface="Pretendard" pitchFamily="34" charset="0"/>
-                <a:ea typeface="Pretendard" pitchFamily="34" charset="-122"/>
-                <a:cs typeface="Pretendard" pitchFamily="34" charset="-120"/>
-              </a:rPr>
-              <a:t>임대차 실사 점검 항목</a:t>
-            </a:r>
-            <a:endParaRPr lang="en-US" sz="1050" dirty="0"/>
-          </a:p>
-        </p:txBody>
-      </p:sp>
-      <p:sp>
-        <p:nvSpPr>
-          <p:cNvPr id="13" name="Text 11"/>
-          <p:cNvSpPr/>
-          <p:nvPr/>
-        </p:nvSpPr>
-        <p:spPr>
-          <a:xfrm>
-            <a:off x="749808" y="3621024"/>
-            <a:ext cx="5108296" cy="1792224"/>
+          <p:cNvPr id="10" name="Text 8"/>
+          <p:cNvSpPr/>
+          <p:nvPr/>
+        </p:nvSpPr>
+        <p:spPr>
+          <a:xfrm>
+            <a:off x="749808" y="1975104"/>
+            <a:ext cx="6528816" cy="1426464"/>
           </a:xfrm>
           <a:prstGeom prst="rect">
             <a:avLst/>
@@ -6242,7 +11959,7 @@
                 <a:ea typeface="Pretendard" pitchFamily="34" charset="-122"/>
                 <a:cs typeface="Pretendard" pitchFamily="34" charset="-120"/>
               </a:rPr>
-              <a:t>층별/호실별 임대차 계약서 및 사업자등록 현황</a:t>
+              <a:t>상세 건물 제원은 실사 자료를 참조하시기 바랍니다</a:t>
             </a:r>
             <a:endParaRPr lang="en-US" sz="930" dirty="0"/>
           </a:p>
@@ -6263,7 +11980,7 @@
                 <a:ea typeface="Pretendard" pitchFamily="34" charset="-122"/>
                 <a:cs typeface="Pretendard" pitchFamily="34" charset="-120"/>
               </a:rPr>
-              <a:t>보증금 총액 및 월 임대료 입금 내역(최근 6개월)</a:t>
+              <a:t>건물 현황 및 규모는 첨부 대장을 기준으로 합니다</a:t>
             </a:r>
             <a:endParaRPr lang="en-US" sz="930" dirty="0"/>
           </a:p>
@@ -6284,7 +12001,7 @@
                 <a:ea typeface="Pretendard" pitchFamily="34" charset="-122"/>
                 <a:cs typeface="Pretendard" pitchFamily="34" charset="-120"/>
               </a:rPr>
-              <a:t>렌트프리, 핏아웃 등 특약 조건 존재 여부</a:t>
+              <a:t>건물 상태 및 설비 현황은 실사 보고서를 참조하십시오</a:t>
             </a:r>
             <a:endParaRPr lang="en-US" sz="930" dirty="0"/>
           </a:p>
@@ -6292,56 +12009,79 @@
       </p:sp>
       <p:sp>
         <p:nvSpPr>
-          <p:cNvPr id="14" name="Shape 12"/>
-          <p:cNvSpPr/>
-          <p:nvPr/>
-        </p:nvSpPr>
-        <p:spPr>
-          <a:xfrm>
-            <a:off x="6187288" y="3291840"/>
-            <a:ext cx="5437480" cy="2194560"/>
+          <p:cNvPr id="11" name="Shape 9"/>
+          <p:cNvSpPr/>
+          <p:nvPr/>
+        </p:nvSpPr>
+        <p:spPr>
+          <a:xfrm>
+            <a:off x="7604608" y="1371600"/>
+            <a:ext cx="0" cy="4754880"/>
+          </a:xfrm>
+          <a:prstGeom prst="line">
+            <a:avLst/>
+          </a:prstGeom>
+          <a:noFill/>
+          <a:ln w="8890">
+            <a:solidFill>
+              <a:srgbClr val="B98A2E"/>
+            </a:solidFill>
+            <a:prstDash val="solid"/>
+          </a:ln>
+        </p:spPr>
+      </p:sp>
+      <p:sp>
+        <p:nvSpPr>
+          <p:cNvPr id="12" name="Shape 10"/>
+          <p:cNvSpPr/>
+          <p:nvPr/>
+        </p:nvSpPr>
+        <p:spPr>
+          <a:xfrm>
+            <a:off x="7784287" y="1645920"/>
+            <a:ext cx="3840480" cy="2103120"/>
           </a:xfrm>
           <a:prstGeom prst="roundRect">
             <a:avLst>
-              <a:gd name="adj" fmla="val 2500"/>
+              <a:gd name="adj" fmla="val 2609"/>
             </a:avLst>
           </a:prstGeom>
           <a:solidFill>
-            <a:srgbClr val="BEE3F8"/>
+            <a:srgbClr val="F3EBDA"/>
           </a:solidFill>
           <a:ln/>
         </p:spPr>
       </p:sp>
       <p:sp>
         <p:nvSpPr>
-          <p:cNvPr id="15" name="Shape 13"/>
-          <p:cNvSpPr/>
-          <p:nvPr/>
-        </p:nvSpPr>
-        <p:spPr>
-          <a:xfrm>
-            <a:off x="6187288" y="3346704"/>
-            <a:ext cx="36576" cy="2084832"/>
+          <p:cNvPr id="13" name="Shape 11"/>
+          <p:cNvSpPr/>
+          <p:nvPr/>
+        </p:nvSpPr>
+        <p:spPr>
+          <a:xfrm>
+            <a:off x="7784287" y="1700784"/>
+            <a:ext cx="36576" cy="1993392"/>
           </a:xfrm>
           <a:prstGeom prst="rect">
             <a:avLst/>
           </a:prstGeom>
           <a:solidFill>
-            <a:srgbClr val="2B6CB0"/>
+            <a:srgbClr val="977024"/>
           </a:solidFill>
           <a:ln/>
         </p:spPr>
       </p:sp>
       <p:sp>
         <p:nvSpPr>
-          <p:cNvPr id="16" name="Text 14"/>
-          <p:cNvSpPr/>
-          <p:nvPr/>
-        </p:nvSpPr>
-        <p:spPr>
-          <a:xfrm>
-            <a:off x="6370168" y="3401568"/>
-            <a:ext cx="5108296" cy="201168"/>
+          <p:cNvPr id="14" name="Text 12"/>
+          <p:cNvSpPr/>
+          <p:nvPr/>
+        </p:nvSpPr>
+        <p:spPr>
+          <a:xfrm>
+            <a:off x="7967167" y="1755648"/>
+            <a:ext cx="3511296" cy="201168"/>
           </a:xfrm>
           <a:prstGeom prst="rect">
             <a:avLst/>
@@ -6356,31 +12096,20 @@
             <a:pPr indent="0" marL="0">
               <a:buNone/>
             </a:pPr>
-            <a:r>
-              <a:rPr lang="en-US" sz="1050" b="1" dirty="0">
-                <a:solidFill>
-                  <a:srgbClr val="2B6CB0"/>
-                </a:solidFill>
-                <a:latin typeface="Pretendard" pitchFamily="34" charset="0"/>
-                <a:ea typeface="Pretendard" pitchFamily="34" charset="-122"/>
-                <a:cs typeface="Pretendard" pitchFamily="34" charset="-120"/>
-              </a:rPr>
-              <a:t>수익률 분석 유의사항</a:t>
-            </a:r>
             <a:endParaRPr lang="en-US" sz="1050" dirty="0"/>
           </a:p>
         </p:txBody>
       </p:sp>
       <p:sp>
         <p:nvSpPr>
-          <p:cNvPr id="17" name="Text 15"/>
-          <p:cNvSpPr/>
-          <p:nvPr/>
-        </p:nvSpPr>
-        <p:spPr>
-          <a:xfrm>
-            <a:off x="6370168" y="3621024"/>
-            <a:ext cx="5108296" cy="1792224"/>
+          <p:cNvPr id="15" name="Text 13"/>
+          <p:cNvSpPr/>
+          <p:nvPr/>
+        </p:nvSpPr>
+        <p:spPr>
+          <a:xfrm>
+            <a:off x="7967167" y="1975104"/>
+            <a:ext cx="3511296" cy="1700784"/>
           </a:xfrm>
           <a:prstGeom prst="rect">
             <a:avLst/>
@@ -6392,12 +12121,11 @@
           <a:bodyPr wrap="square" lIns="0" tIns="0" rIns="0" bIns="0" rtlCol="0" anchor="t"/>
           <a:lstStyle/>
           <a:p>
-            <a:pPr marL="342900" indent="-342900">
+            <a:pPr indent="0" marL="0">
               <a:lnSpc>
                 <a:spcPct val="120000"/>
               </a:lnSpc>
-              <a:buSzPct val="100000"/>
-              <a:buChar char="•"/>
+              <a:buNone/>
             </a:pPr>
             <a:r>
               <a:rPr lang="en-US" sz="930" dirty="0">
@@ -6408,57 +12136,15 @@
                 <a:ea typeface="Pretendard" pitchFamily="34" charset="-122"/>
                 <a:cs typeface="Pretendard" pitchFamily="34" charset="-120"/>
               </a:rPr>
-              <a:t>상가임대차보호법상 10년 계약갱신요구권 적용 여부</a:t>
+              <a:t>이 건물은 이 건물은 이 건물은 이 건물은 이 건물은 이 건물은 이 건물은 이 건물은 이 건물은 이 건물은 이 건물은 이 건물은 이 건물은 이 건물은 이 건물은 이 건물은 이 건물은 이 건물은 이 건물은 이 건물은</a:t>
             </a:r>
             <a:endParaRPr lang="en-US" sz="930" dirty="0"/>
           </a:p>
-          <a:p>
-            <a:pPr marL="342900" indent="-342900">
-              <a:lnSpc>
-                <a:spcPct val="120000"/>
-              </a:lnSpc>
-              <a:buSzPct val="100000"/>
-              <a:buChar char="•"/>
-            </a:pPr>
-            <a:r>
-              <a:rPr lang="en-US" sz="930" dirty="0">
-                <a:solidFill>
-                  <a:srgbClr val="10161F"/>
-                </a:solidFill>
-                <a:latin typeface="Pretendard" pitchFamily="34" charset="0"/>
-                <a:ea typeface="Pretendard" pitchFamily="34" charset="-122"/>
-                <a:cs typeface="Pretendard" pitchFamily="34" charset="-120"/>
-              </a:rPr>
-              <a:t>주변 시세 대비 적정 임대료(Market Rent) 갭 분석</a:t>
-            </a:r>
-            <a:endParaRPr lang="en-US" sz="930" dirty="0"/>
-          </a:p>
-          <a:p>
-            <a:pPr marL="342900" indent="-342900">
-              <a:lnSpc>
-                <a:spcPct val="120000"/>
-              </a:lnSpc>
-              <a:buSzPct val="100000"/>
-              <a:buChar char="•"/>
-            </a:pPr>
-            <a:r>
-              <a:rPr lang="en-US" sz="930" dirty="0">
-                <a:solidFill>
-                  <a:srgbClr val="10161F"/>
-                </a:solidFill>
-                <a:latin typeface="Pretendard" pitchFamily="34" charset="0"/>
-                <a:ea typeface="Pretendard" pitchFamily="34" charset="-122"/>
-                <a:cs typeface="Pretendard" pitchFamily="34" charset="-120"/>
-              </a:rPr>
-              <a:t>향후 명도 가능 여부 및 리모델링/신축 타당성</a:t>
-            </a:r>
-            <a:endParaRPr lang="en-US" sz="930" dirty="0"/>
-          </a:p>
-        </p:txBody>
-      </p:sp>
-      <p:sp>
-        <p:nvSpPr>
-          <p:cNvPr id="18" name="Text 16"/>
+        </p:txBody>
+      </p:sp>
+      <p:sp>
+        <p:nvSpPr>
+          <p:cNvPr id="16" name="Text 14"/>
           <p:cNvSpPr/>
           <p:nvPr/>
         </p:nvSpPr>
@@ -6497,7 +12183,7 @@
       </p:sp>
       <p:sp>
         <p:nvSpPr>
-          <p:cNvPr id="19" name="Text 17"/>
+          <p:cNvPr id="17" name="Text 15"/>
           <p:cNvSpPr/>
           <p:nvPr/>
         </p:nvSpPr>
@@ -6528,7 +12214,7 @@
                 <a:ea typeface="Arial" pitchFamily="34" charset="-122"/>
                 <a:cs typeface="Arial" pitchFamily="34" charset="-120"/>
               </a:rPr>
-              <a:t>5</a:t>
+              <a:t>4</a:t>
             </a:r>
             <a:endParaRPr lang="en-US" sz="900" dirty="0"/>
           </a:p>
@@ -6619,7 +12305,7 @@
                 <a:ea typeface="Arial" pitchFamily="34" charset="-122"/>
                 <a:cs typeface="Arial" pitchFamily="34" charset="-120"/>
               </a:rPr>
-              <a:t>06</a:t>
+              <a:t>05</a:t>
             </a:r>
             <a:endParaRPr lang="en-US" sz="1300" dirty="0"/>
           </a:p>
@@ -6658,7 +12344,7 @@
                 <a:ea typeface="Arial" pitchFamily="34" charset="-122"/>
                 <a:cs typeface="Arial" pitchFamily="34" charset="-120"/>
               </a:rPr>
-              <a:t>Profit</a:t>
+              <a:t>Rent Roll</a:t>
             </a:r>
             <a:endParaRPr lang="en-US" sz="950" dirty="0"/>
           </a:p>
@@ -6697,7 +12383,7 @@
                 <a:ea typeface="Pretendard" pitchFamily="34" charset="-122"/>
                 <a:cs typeface="Pretendard" pitchFamily="34" charset="-120"/>
               </a:rPr>
-              <a:t>수익성 분석</a:t>
+              <a:t>임대차 현황</a:t>
             </a:r>
             <a:endParaRPr lang="en-US" sz="2300" dirty="0"/>
           </a:p>
@@ -6711,35 +12397,12 @@
         </p:nvSpPr>
         <p:spPr>
           <a:xfrm>
-            <a:off x="566928" y="1325880"/>
-            <a:ext cx="11057839" cy="0"/>
-          </a:xfrm>
-          <a:prstGeom prst="line">
-            <a:avLst/>
-          </a:prstGeom>
-          <a:noFill/>
-          <a:ln w="19050">
-            <a:solidFill>
-              <a:srgbClr val="B98A2E"/>
-            </a:solidFill>
-            <a:prstDash val="solid"/>
-          </a:ln>
-        </p:spPr>
-      </p:sp>
-      <p:sp>
-        <p:nvSpPr>
-          <p:cNvPr id="7" name="Shape 5"/>
-          <p:cNvSpPr/>
-          <p:nvPr/>
-        </p:nvSpPr>
-        <p:spPr>
-          <a:xfrm>
-            <a:off x="566928" y="1645920"/>
-            <a:ext cx="11057839" cy="1280160"/>
+            <a:off x="566928" y="1700784"/>
+            <a:ext cx="11057839" cy="1371600"/>
           </a:xfrm>
           <a:prstGeom prst="roundRect">
             <a:avLst>
-              <a:gd name="adj" fmla="val 4286"/>
+              <a:gd name="adj" fmla="val 4000"/>
             </a:avLst>
           </a:prstGeom>
           <a:solidFill>
@@ -6750,14 +12413,14 @@
       </p:sp>
       <p:sp>
         <p:nvSpPr>
-          <p:cNvPr id="8" name="Shape 6"/>
-          <p:cNvSpPr/>
-          <p:nvPr/>
-        </p:nvSpPr>
-        <p:spPr>
-          <a:xfrm>
-            <a:off x="566928" y="1700784"/>
-            <a:ext cx="36576" cy="1170432"/>
+          <p:cNvPr id="7" name="Shape 5"/>
+          <p:cNvSpPr/>
+          <p:nvPr/>
+        </p:nvSpPr>
+        <p:spPr>
+          <a:xfrm>
+            <a:off x="566928" y="1755648"/>
+            <a:ext cx="36576" cy="1261872"/>
           </a:xfrm>
           <a:prstGeom prst="rect">
             <a:avLst/>
@@ -6770,53 +12433,53 @@
       </p:sp>
       <p:sp>
         <p:nvSpPr>
+          <p:cNvPr id="8" name="Text 6"/>
+          <p:cNvSpPr/>
+          <p:nvPr/>
+        </p:nvSpPr>
+        <p:spPr>
+          <a:xfrm>
+            <a:off x="749808" y="1810512"/>
+            <a:ext cx="10728655" cy="201168"/>
+          </a:xfrm>
+          <a:prstGeom prst="rect">
+            <a:avLst/>
+          </a:prstGeom>
+          <a:noFill/>
+          <a:ln/>
+        </p:spPr>
+        <p:txBody>
+          <a:bodyPr wrap="square" lIns="0" tIns="0" rIns="0" bIns="0" rtlCol="0" anchor="ctr"/>
+          <a:lstStyle/>
+          <a:p>
+            <a:pPr indent="0" marL="0">
+              <a:buNone/>
+            </a:pPr>
+            <a:r>
+              <a:rPr lang="en-US" sz="1050" b="1" dirty="0">
+                <a:solidFill>
+                  <a:srgbClr val="2B6CB0"/>
+                </a:solidFill>
+                <a:latin typeface="Pretendard" pitchFamily="34" charset="0"/>
+                <a:ea typeface="Pretendard" pitchFamily="34" charset="-122"/>
+                <a:cs typeface="Pretendard" pitchFamily="34" charset="-120"/>
+              </a:rPr>
+              <a:t>임대차 현황 데이터 준비 중</a:t>
+            </a:r>
+            <a:endParaRPr lang="en-US" sz="1050" dirty="0"/>
+          </a:p>
+        </p:txBody>
+      </p:sp>
+      <p:sp>
+        <p:nvSpPr>
           <p:cNvPr id="9" name="Text 7"/>
           <p:cNvSpPr/>
           <p:nvPr/>
         </p:nvSpPr>
         <p:spPr>
           <a:xfrm>
-            <a:off x="749808" y="1755648"/>
-            <a:ext cx="10728655" cy="201168"/>
-          </a:xfrm>
-          <a:prstGeom prst="rect">
-            <a:avLst/>
-          </a:prstGeom>
-          <a:noFill/>
-          <a:ln/>
-        </p:spPr>
-        <p:txBody>
-          <a:bodyPr wrap="square" lIns="0" tIns="0" rIns="0" bIns="0" rtlCol="0" anchor="ctr"/>
-          <a:lstStyle/>
-          <a:p>
-            <a:pPr indent="0" marL="0">
-              <a:buNone/>
-            </a:pPr>
-            <a:r>
-              <a:rPr lang="en-US" sz="1050" b="1" dirty="0">
-                <a:solidFill>
-                  <a:srgbClr val="2B6CB0"/>
-                </a:solidFill>
-                <a:latin typeface="Pretendard" pitchFamily="34" charset="0"/>
-                <a:ea typeface="Pretendard" pitchFamily="34" charset="-122"/>
-                <a:cs typeface="Pretendard" pitchFamily="34" charset="-120"/>
-              </a:rPr>
-              <a:t>투자 가치 제안</a:t>
-            </a:r>
-            <a:endParaRPr lang="en-US" sz="1050" dirty="0"/>
-          </a:p>
-        </p:txBody>
-      </p:sp>
-      <p:sp>
-        <p:nvSpPr>
-          <p:cNvPr id="10" name="Text 8"/>
-          <p:cNvSpPr/>
-          <p:nvPr/>
-        </p:nvSpPr>
-        <p:spPr>
-          <a:xfrm>
-            <a:off x="749808" y="1975104"/>
-            <a:ext cx="10728655" cy="877824"/>
+            <a:off x="749808" y="2029968"/>
+            <a:ext cx="10728655" cy="969264"/>
           </a:xfrm>
           <a:prstGeom prst="rect">
             <a:avLst/>
@@ -6843,7 +12506,7 @@
                 <a:ea typeface="Pretendard" pitchFamily="34" charset="-122"/>
                 <a:cs typeface="Pretendard" pitchFamily="34" charset="-120"/>
               </a:rPr>
-              <a:t>연 순영업소득(NOI) 약 7.14억 원, 매입 Cap Rate 4.62%입니다.</a:t>
+              <a:t>상세 임대차 계약 현황(호실별 보증금, 월차임, 관리비, 만기일)은 소유자/중개인 확인 후 업데이트됩니다.</a:t>
             </a:r>
             <a:endParaRPr lang="en-US" sz="930" dirty="0"/>
           </a:p>
@@ -6851,7 +12514,339 @@
       </p:sp>
       <p:sp>
         <p:nvSpPr>
-          <p:cNvPr id="11" name="Text 9"/>
+          <p:cNvPr id="10" name="Shape 8"/>
+          <p:cNvSpPr/>
+          <p:nvPr/>
+        </p:nvSpPr>
+        <p:spPr>
+          <a:xfrm>
+            <a:off x="566928" y="3291840"/>
+            <a:ext cx="5437480" cy="2194560"/>
+          </a:xfrm>
+          <a:prstGeom prst="roundRect">
+            <a:avLst>
+              <a:gd name="adj" fmla="val 2500"/>
+            </a:avLst>
+          </a:prstGeom>
+          <a:solidFill>
+            <a:srgbClr val="BEE3F8"/>
+          </a:solidFill>
+          <a:ln/>
+        </p:spPr>
+      </p:sp>
+      <p:sp>
+        <p:nvSpPr>
+          <p:cNvPr id="11" name="Shape 9"/>
+          <p:cNvSpPr/>
+          <p:nvPr/>
+        </p:nvSpPr>
+        <p:spPr>
+          <a:xfrm>
+            <a:off x="566928" y="3346704"/>
+            <a:ext cx="36576" cy="2084832"/>
+          </a:xfrm>
+          <a:prstGeom prst="rect">
+            <a:avLst/>
+          </a:prstGeom>
+          <a:solidFill>
+            <a:srgbClr val="2B6CB0"/>
+          </a:solidFill>
+          <a:ln/>
+        </p:spPr>
+      </p:sp>
+      <p:sp>
+        <p:nvSpPr>
+          <p:cNvPr id="12" name="Text 10"/>
+          <p:cNvSpPr/>
+          <p:nvPr/>
+        </p:nvSpPr>
+        <p:spPr>
+          <a:xfrm>
+            <a:off x="749808" y="3401568"/>
+            <a:ext cx="5108296" cy="201168"/>
+          </a:xfrm>
+          <a:prstGeom prst="rect">
+            <a:avLst/>
+          </a:prstGeom>
+          <a:noFill/>
+          <a:ln/>
+        </p:spPr>
+        <p:txBody>
+          <a:bodyPr wrap="square" lIns="0" tIns="0" rIns="0" bIns="0" rtlCol="0" anchor="ctr"/>
+          <a:lstStyle/>
+          <a:p>
+            <a:pPr indent="0" marL="0">
+              <a:buNone/>
+            </a:pPr>
+            <a:r>
+              <a:rPr lang="en-US" sz="1050" b="1" dirty="0">
+                <a:solidFill>
+                  <a:srgbClr val="2B6CB0"/>
+                </a:solidFill>
+                <a:latin typeface="Pretendard" pitchFamily="34" charset="0"/>
+                <a:ea typeface="Pretendard" pitchFamily="34" charset="-122"/>
+                <a:cs typeface="Pretendard" pitchFamily="34" charset="-120"/>
+              </a:rPr>
+              <a:t>임대차 실사 점검 항목</a:t>
+            </a:r>
+            <a:endParaRPr lang="en-US" sz="1050" dirty="0"/>
+          </a:p>
+        </p:txBody>
+      </p:sp>
+      <p:sp>
+        <p:nvSpPr>
+          <p:cNvPr id="13" name="Text 11"/>
+          <p:cNvSpPr/>
+          <p:nvPr/>
+        </p:nvSpPr>
+        <p:spPr>
+          <a:xfrm>
+            <a:off x="749808" y="3621024"/>
+            <a:ext cx="5108296" cy="1792224"/>
+          </a:xfrm>
+          <a:prstGeom prst="rect">
+            <a:avLst/>
+          </a:prstGeom>
+          <a:noFill/>
+          <a:ln/>
+        </p:spPr>
+        <p:txBody>
+          <a:bodyPr wrap="square" lIns="0" tIns="0" rIns="0" bIns="0" rtlCol="0" anchor="t"/>
+          <a:lstStyle/>
+          <a:p>
+            <a:pPr marL="342900" indent="-342900">
+              <a:lnSpc>
+                <a:spcPct val="120000"/>
+              </a:lnSpc>
+              <a:buSzPct val="100000"/>
+              <a:buChar char="•"/>
+            </a:pPr>
+            <a:r>
+              <a:rPr lang="en-US" sz="930" dirty="0">
+                <a:solidFill>
+                  <a:srgbClr val="10161F"/>
+                </a:solidFill>
+                <a:latin typeface="Pretendard" pitchFamily="34" charset="0"/>
+                <a:ea typeface="Pretendard" pitchFamily="34" charset="-122"/>
+                <a:cs typeface="Pretendard" pitchFamily="34" charset="-120"/>
+              </a:rPr>
+              <a:t>층별/호실별 임대차 계약서 및 사업자등록 현황</a:t>
+            </a:r>
+            <a:endParaRPr lang="en-US" sz="930" dirty="0"/>
+          </a:p>
+          <a:p>
+            <a:pPr marL="342900" indent="-342900">
+              <a:lnSpc>
+                <a:spcPct val="120000"/>
+              </a:lnSpc>
+              <a:buSzPct val="100000"/>
+              <a:buChar char="•"/>
+            </a:pPr>
+            <a:r>
+              <a:rPr lang="en-US" sz="930" dirty="0">
+                <a:solidFill>
+                  <a:srgbClr val="10161F"/>
+                </a:solidFill>
+                <a:latin typeface="Pretendard" pitchFamily="34" charset="0"/>
+                <a:ea typeface="Pretendard" pitchFamily="34" charset="-122"/>
+                <a:cs typeface="Pretendard" pitchFamily="34" charset="-120"/>
+              </a:rPr>
+              <a:t>보증금 총액 및 월 임대료 입금 내역(최근 6개월)</a:t>
+            </a:r>
+            <a:endParaRPr lang="en-US" sz="930" dirty="0"/>
+          </a:p>
+          <a:p>
+            <a:pPr marL="342900" indent="-342900">
+              <a:lnSpc>
+                <a:spcPct val="120000"/>
+              </a:lnSpc>
+              <a:buSzPct val="100000"/>
+              <a:buChar char="•"/>
+            </a:pPr>
+            <a:r>
+              <a:rPr lang="en-US" sz="930" dirty="0">
+                <a:solidFill>
+                  <a:srgbClr val="10161F"/>
+                </a:solidFill>
+                <a:latin typeface="Pretendard" pitchFamily="34" charset="0"/>
+                <a:ea typeface="Pretendard" pitchFamily="34" charset="-122"/>
+                <a:cs typeface="Pretendard" pitchFamily="34" charset="-120"/>
+              </a:rPr>
+              <a:t>렌트프리, 핏아웃 등 특약 조건 존재 여부</a:t>
+            </a:r>
+            <a:endParaRPr lang="en-US" sz="930" dirty="0"/>
+          </a:p>
+        </p:txBody>
+      </p:sp>
+      <p:sp>
+        <p:nvSpPr>
+          <p:cNvPr id="14" name="Shape 12"/>
+          <p:cNvSpPr/>
+          <p:nvPr/>
+        </p:nvSpPr>
+        <p:spPr>
+          <a:xfrm>
+            <a:off x="6187288" y="3291840"/>
+            <a:ext cx="5437480" cy="2194560"/>
+          </a:xfrm>
+          <a:prstGeom prst="roundRect">
+            <a:avLst>
+              <a:gd name="adj" fmla="val 2500"/>
+            </a:avLst>
+          </a:prstGeom>
+          <a:solidFill>
+            <a:srgbClr val="BEE3F8"/>
+          </a:solidFill>
+          <a:ln/>
+        </p:spPr>
+      </p:sp>
+      <p:sp>
+        <p:nvSpPr>
+          <p:cNvPr id="15" name="Shape 13"/>
+          <p:cNvSpPr/>
+          <p:nvPr/>
+        </p:nvSpPr>
+        <p:spPr>
+          <a:xfrm>
+            <a:off x="6187288" y="3346704"/>
+            <a:ext cx="36576" cy="2084832"/>
+          </a:xfrm>
+          <a:prstGeom prst="rect">
+            <a:avLst/>
+          </a:prstGeom>
+          <a:solidFill>
+            <a:srgbClr val="2B6CB0"/>
+          </a:solidFill>
+          <a:ln/>
+        </p:spPr>
+      </p:sp>
+      <p:sp>
+        <p:nvSpPr>
+          <p:cNvPr id="16" name="Text 14"/>
+          <p:cNvSpPr/>
+          <p:nvPr/>
+        </p:nvSpPr>
+        <p:spPr>
+          <a:xfrm>
+            <a:off x="6370168" y="3401568"/>
+            <a:ext cx="5108296" cy="201168"/>
+          </a:xfrm>
+          <a:prstGeom prst="rect">
+            <a:avLst/>
+          </a:prstGeom>
+          <a:noFill/>
+          <a:ln/>
+        </p:spPr>
+        <p:txBody>
+          <a:bodyPr wrap="square" lIns="0" tIns="0" rIns="0" bIns="0" rtlCol="0" anchor="ctr"/>
+          <a:lstStyle/>
+          <a:p>
+            <a:pPr indent="0" marL="0">
+              <a:buNone/>
+            </a:pPr>
+            <a:r>
+              <a:rPr lang="en-US" sz="1050" b="1" dirty="0">
+                <a:solidFill>
+                  <a:srgbClr val="2B6CB0"/>
+                </a:solidFill>
+                <a:latin typeface="Pretendard" pitchFamily="34" charset="0"/>
+                <a:ea typeface="Pretendard" pitchFamily="34" charset="-122"/>
+                <a:cs typeface="Pretendard" pitchFamily="34" charset="-120"/>
+              </a:rPr>
+              <a:t>수익률 분석 유의사항</a:t>
+            </a:r>
+            <a:endParaRPr lang="en-US" sz="1050" dirty="0"/>
+          </a:p>
+        </p:txBody>
+      </p:sp>
+      <p:sp>
+        <p:nvSpPr>
+          <p:cNvPr id="17" name="Text 15"/>
+          <p:cNvSpPr/>
+          <p:nvPr/>
+        </p:nvSpPr>
+        <p:spPr>
+          <a:xfrm>
+            <a:off x="6370168" y="3621024"/>
+            <a:ext cx="5108296" cy="1792224"/>
+          </a:xfrm>
+          <a:prstGeom prst="rect">
+            <a:avLst/>
+          </a:prstGeom>
+          <a:noFill/>
+          <a:ln/>
+        </p:spPr>
+        <p:txBody>
+          <a:bodyPr wrap="square" lIns="0" tIns="0" rIns="0" bIns="0" rtlCol="0" anchor="t"/>
+          <a:lstStyle/>
+          <a:p>
+            <a:pPr marL="342900" indent="-342900">
+              <a:lnSpc>
+                <a:spcPct val="120000"/>
+              </a:lnSpc>
+              <a:buSzPct val="100000"/>
+              <a:buChar char="•"/>
+            </a:pPr>
+            <a:r>
+              <a:rPr lang="en-US" sz="930" dirty="0">
+                <a:solidFill>
+                  <a:srgbClr val="10161F"/>
+                </a:solidFill>
+                <a:latin typeface="Pretendard" pitchFamily="34" charset="0"/>
+                <a:ea typeface="Pretendard" pitchFamily="34" charset="-122"/>
+                <a:cs typeface="Pretendard" pitchFamily="34" charset="-120"/>
+              </a:rPr>
+              <a:t>상가임대차보호법상 10년 계약갱신요구권 적용 여부</a:t>
+            </a:r>
+            <a:endParaRPr lang="en-US" sz="930" dirty="0"/>
+          </a:p>
+          <a:p>
+            <a:pPr marL="342900" indent="-342900">
+              <a:lnSpc>
+                <a:spcPct val="120000"/>
+              </a:lnSpc>
+              <a:buSzPct val="100000"/>
+              <a:buChar char="•"/>
+            </a:pPr>
+            <a:r>
+              <a:rPr lang="en-US" sz="930" dirty="0">
+                <a:solidFill>
+                  <a:srgbClr val="10161F"/>
+                </a:solidFill>
+                <a:latin typeface="Pretendard" pitchFamily="34" charset="0"/>
+                <a:ea typeface="Pretendard" pitchFamily="34" charset="-122"/>
+                <a:cs typeface="Pretendard" pitchFamily="34" charset="-120"/>
+              </a:rPr>
+              <a:t>주변 시세 대비 적정 임대료(Market Rent) 갭 분석</a:t>
+            </a:r>
+            <a:endParaRPr lang="en-US" sz="930" dirty="0"/>
+          </a:p>
+          <a:p>
+            <a:pPr marL="342900" indent="-342900">
+              <a:lnSpc>
+                <a:spcPct val="120000"/>
+              </a:lnSpc>
+              <a:buSzPct val="100000"/>
+              <a:buChar char="•"/>
+            </a:pPr>
+            <a:r>
+              <a:rPr lang="en-US" sz="930" dirty="0">
+                <a:solidFill>
+                  <a:srgbClr val="10161F"/>
+                </a:solidFill>
+                <a:latin typeface="Pretendard" pitchFamily="34" charset="0"/>
+                <a:ea typeface="Pretendard" pitchFamily="34" charset="-122"/>
+                <a:cs typeface="Pretendard" pitchFamily="34" charset="-120"/>
+              </a:rPr>
+              <a:t>향후 명도 가능 여부 및 리모델링/신축 타당성</a:t>
+            </a:r>
+            <a:endParaRPr lang="en-US" sz="930" dirty="0"/>
+          </a:p>
+        </p:txBody>
+      </p:sp>
+      <p:sp>
+        <p:nvSpPr>
+          <p:cNvPr id="18" name="Text 16"/>
           <p:cNvSpPr/>
           <p:nvPr/>
         </p:nvSpPr>
@@ -6890,7 +12885,7 @@
       </p:sp>
       <p:sp>
         <p:nvSpPr>
-          <p:cNvPr id="12" name="Text 10"/>
+          <p:cNvPr id="19" name="Text 17"/>
           <p:cNvSpPr/>
           <p:nvPr/>
         </p:nvSpPr>
@@ -6921,7 +12916,7 @@
                 <a:ea typeface="Arial" pitchFamily="34" charset="-122"/>
                 <a:cs typeface="Arial" pitchFamily="34" charset="-120"/>
               </a:rPr>
-              <a:t>6</a:t>
+              <a:t>5</a:t>
             </a:r>
             <a:endParaRPr lang="en-US" sz="900" dirty="0"/>
           </a:p>
@@ -7012,7 +13007,7 @@
                 <a:ea typeface="Arial" pitchFamily="34" charset="-122"/>
                 <a:cs typeface="Arial" pitchFamily="34" charset="-120"/>
               </a:rPr>
-              <a:t>07</a:t>
+              <a:t>06</a:t>
             </a:r>
             <a:endParaRPr lang="en-US" sz="1300" dirty="0"/>
           </a:p>
@@ -7051,7 +13046,7 @@
                 <a:ea typeface="Arial" pitchFamily="34" charset="-122"/>
                 <a:cs typeface="Arial" pitchFamily="34" charset="-120"/>
               </a:rPr>
-              <a:t>Risk</a:t>
+              <a:t>Stability</a:t>
             </a:r>
             <a:endParaRPr lang="en-US" sz="950" dirty="0"/>
           </a:p>
@@ -7090,7 +13085,7 @@
                 <a:ea typeface="Pretendard" pitchFamily="34" charset="-122"/>
                 <a:cs typeface="Pretendard" pitchFamily="34" charset="-120"/>
               </a:rPr>
-              <a:t>리스크 점검</a:t>
+              <a:t>임대안정성</a:t>
             </a:r>
             <a:endParaRPr lang="en-US" sz="2300" dirty="0"/>
           </a:p>
@@ -7098,26 +13093,227 @@
       </p:sp>
       <p:sp>
         <p:nvSpPr>
-          <p:cNvPr id="6" name="Shape 4"/>
-          <p:cNvSpPr/>
-          <p:nvPr/>
-        </p:nvSpPr>
-        <p:spPr>
-          <a:xfrm>
-            <a:off x="566928" y="1417320"/>
-            <a:ext cx="5400904" cy="3657600"/>
+          <p:cNvPr id="6" name="Text 4"/>
+          <p:cNvSpPr/>
+          <p:nvPr/>
+        </p:nvSpPr>
+        <p:spPr>
+          <a:xfrm>
+            <a:off x="566928" y="1371600"/>
+            <a:ext cx="6858000" cy="237744"/>
+          </a:xfrm>
+          <a:prstGeom prst="rect">
+            <a:avLst/>
+          </a:prstGeom>
+          <a:noFill/>
+          <a:ln/>
+        </p:spPr>
+        <p:txBody>
+          <a:bodyPr wrap="square" lIns="0" tIns="0" rIns="0" bIns="0" rtlCol="0" anchor="ctr"/>
+          <a:lstStyle/>
+          <a:p>
+            <a:pPr indent="0" marL="0">
+              <a:buNone/>
+            </a:pPr>
+            <a:r>
+              <a:rPr lang="en-US" sz="1100" b="1" dirty="0">
+                <a:solidFill>
+                  <a:srgbClr val="10161F"/>
+                </a:solidFill>
+                <a:latin typeface="Pretendard" pitchFamily="34" charset="0"/>
+                <a:ea typeface="Pretendard" pitchFamily="34" charset="-122"/>
+                <a:cs typeface="Pretendard" pitchFamily="34" charset="-120"/>
+              </a:rPr>
+              <a:t>건축물 개요 및 물리 스펙</a:t>
+            </a:r>
+            <a:endParaRPr lang="en-US" sz="1100" dirty="0"/>
+          </a:p>
+        </p:txBody>
+      </p:sp>
+      <p:sp>
+        <p:nvSpPr>
+          <p:cNvPr id="7" name="Shape 5"/>
+          <p:cNvSpPr/>
+          <p:nvPr/>
+        </p:nvSpPr>
+        <p:spPr>
+          <a:xfrm>
+            <a:off x="566928" y="1645920"/>
+            <a:ext cx="6858000" cy="1828800"/>
           </a:xfrm>
           <a:prstGeom prst="roundRect">
             <a:avLst>
-              <a:gd name="adj" fmla="val 1500"/>
+              <a:gd name="adj" fmla="val 3000"/>
             </a:avLst>
           </a:prstGeom>
           <a:solidFill>
-            <a:srgbClr val="F7FAFC"/>
+            <a:srgbClr val="BEE3F8"/>
           </a:solidFill>
-          <a:ln w="6350">
+          <a:ln/>
+        </p:spPr>
+      </p:sp>
+      <p:sp>
+        <p:nvSpPr>
+          <p:cNvPr id="8" name="Shape 6"/>
+          <p:cNvSpPr/>
+          <p:nvPr/>
+        </p:nvSpPr>
+        <p:spPr>
+          <a:xfrm>
+            <a:off x="566928" y="1700784"/>
+            <a:ext cx="36576" cy="1719072"/>
+          </a:xfrm>
+          <a:prstGeom prst="rect">
+            <a:avLst/>
+          </a:prstGeom>
+          <a:solidFill>
+            <a:srgbClr val="2B6CB0"/>
+          </a:solidFill>
+          <a:ln/>
+        </p:spPr>
+      </p:sp>
+      <p:sp>
+        <p:nvSpPr>
+          <p:cNvPr id="9" name="Text 7"/>
+          <p:cNvSpPr/>
+          <p:nvPr/>
+        </p:nvSpPr>
+        <p:spPr>
+          <a:xfrm>
+            <a:off x="749808" y="1755648"/>
+            <a:ext cx="6528816" cy="201168"/>
+          </a:xfrm>
+          <a:prstGeom prst="rect">
+            <a:avLst/>
+          </a:prstGeom>
+          <a:noFill/>
+          <a:ln/>
+        </p:spPr>
+        <p:txBody>
+          <a:bodyPr wrap="square" lIns="0" tIns="0" rIns="0" bIns="0" rtlCol="0" anchor="ctr"/>
+          <a:lstStyle/>
+          <a:p>
+            <a:pPr indent="0" marL="0">
+              <a:buNone/>
+            </a:pPr>
+            <a:r>
+              <a:rPr lang="en-US" sz="1050" b="1" dirty="0">
+                <a:solidFill>
+                  <a:srgbClr val="2B6CB0"/>
+                </a:solidFill>
+                <a:latin typeface="Pretendard" pitchFamily="34" charset="0"/>
+                <a:ea typeface="Pretendard" pitchFamily="34" charset="-122"/>
+                <a:cs typeface="Pretendard" pitchFamily="34" charset="-120"/>
+              </a:rPr>
+              <a:t>건축물 물리 스펙 요약</a:t>
+            </a:r>
+            <a:endParaRPr lang="en-US" sz="1050" dirty="0"/>
+          </a:p>
+        </p:txBody>
+      </p:sp>
+      <p:sp>
+        <p:nvSpPr>
+          <p:cNvPr id="10" name="Text 8"/>
+          <p:cNvSpPr/>
+          <p:nvPr/>
+        </p:nvSpPr>
+        <p:spPr>
+          <a:xfrm>
+            <a:off x="749808" y="1975104"/>
+            <a:ext cx="6528816" cy="1426464"/>
+          </a:xfrm>
+          <a:prstGeom prst="rect">
+            <a:avLst/>
+          </a:prstGeom>
+          <a:noFill/>
+          <a:ln/>
+        </p:spPr>
+        <p:txBody>
+          <a:bodyPr wrap="square" lIns="0" tIns="0" rIns="0" bIns="0" rtlCol="0" anchor="t"/>
+          <a:lstStyle/>
+          <a:p>
+            <a:pPr marL="342900" indent="-342900">
+              <a:lnSpc>
+                <a:spcPct val="120000"/>
+              </a:lnSpc>
+              <a:buSzPct val="100000"/>
+              <a:buChar char="•"/>
+            </a:pPr>
+            <a:r>
+              <a:rPr lang="en-US" sz="930" dirty="0">
+                <a:solidFill>
+                  <a:srgbClr val="10161F"/>
+                </a:solidFill>
+                <a:latin typeface="Pretendard" pitchFamily="34" charset="0"/>
+                <a:ea typeface="Pretendard" pitchFamily="34" charset="-122"/>
+                <a:cs typeface="Pretendard" pitchFamily="34" charset="-120"/>
+              </a:rPr>
+              <a:t>상세 건물 제원은 실사 자료를 참조하시기 바랍니다</a:t>
+            </a:r>
+            <a:endParaRPr lang="en-US" sz="930" dirty="0"/>
+          </a:p>
+          <a:p>
+            <a:pPr marL="342900" indent="-342900">
+              <a:lnSpc>
+                <a:spcPct val="120000"/>
+              </a:lnSpc>
+              <a:buSzPct val="100000"/>
+              <a:buChar char="•"/>
+            </a:pPr>
+            <a:r>
+              <a:rPr lang="en-US" sz="930" dirty="0">
+                <a:solidFill>
+                  <a:srgbClr val="10161F"/>
+                </a:solidFill>
+                <a:latin typeface="Pretendard" pitchFamily="34" charset="0"/>
+                <a:ea typeface="Pretendard" pitchFamily="34" charset="-122"/>
+                <a:cs typeface="Pretendard" pitchFamily="34" charset="-120"/>
+              </a:rPr>
+              <a:t>건물 현황 및 규모는 첨부 대장을 기준으로 합니다</a:t>
+            </a:r>
+            <a:endParaRPr lang="en-US" sz="930" dirty="0"/>
+          </a:p>
+          <a:p>
+            <a:pPr marL="342900" indent="-342900">
+              <a:lnSpc>
+                <a:spcPct val="120000"/>
+              </a:lnSpc>
+              <a:buSzPct val="100000"/>
+              <a:buChar char="•"/>
+            </a:pPr>
+            <a:r>
+              <a:rPr lang="en-US" sz="930" dirty="0">
+                <a:solidFill>
+                  <a:srgbClr val="10161F"/>
+                </a:solidFill>
+                <a:latin typeface="Pretendard" pitchFamily="34" charset="0"/>
+                <a:ea typeface="Pretendard" pitchFamily="34" charset="-122"/>
+                <a:cs typeface="Pretendard" pitchFamily="34" charset="-120"/>
+              </a:rPr>
+              <a:t>건물 상태 및 설비 현황은 실사 보고서를 참조하십시오</a:t>
+            </a:r>
+            <a:endParaRPr lang="en-US" sz="930" dirty="0"/>
+          </a:p>
+        </p:txBody>
+      </p:sp>
+      <p:sp>
+        <p:nvSpPr>
+          <p:cNvPr id="11" name="Shape 9"/>
+          <p:cNvSpPr/>
+          <p:nvPr/>
+        </p:nvSpPr>
+        <p:spPr>
+          <a:xfrm>
+            <a:off x="7604608" y="1371600"/>
+            <a:ext cx="0" cy="4754880"/>
+          </a:xfrm>
+          <a:prstGeom prst="line">
+            <a:avLst/>
+          </a:prstGeom>
+          <a:noFill/>
+          <a:ln w="8890">
             <a:solidFill>
-              <a:srgbClr val="CBD5E0"/>
+              <a:srgbClr val="B98A2E"/>
             </a:solidFill>
             <a:prstDash val="solid"/>
           </a:ln>
@@ -7125,206 +13321,56 @@
       </p:sp>
       <p:sp>
         <p:nvSpPr>
-          <p:cNvPr id="7" name="Shape 5"/>
-          <p:cNvSpPr/>
-          <p:nvPr/>
-        </p:nvSpPr>
-        <p:spPr>
-          <a:xfrm>
-            <a:off x="566928" y="1417320"/>
-            <a:ext cx="5400904" cy="45720"/>
-          </a:xfrm>
-          <a:prstGeom prst="rect">
-            <a:avLst/>
-          </a:prstGeom>
-          <a:solidFill>
-            <a:srgbClr val="B98A2E"/>
-          </a:solidFill>
-          <a:ln/>
-        </p:spPr>
-      </p:sp>
-      <p:sp>
-        <p:nvSpPr>
-          <p:cNvPr id="8" name="Text 6"/>
-          <p:cNvSpPr/>
-          <p:nvPr/>
-        </p:nvSpPr>
-        <p:spPr>
-          <a:xfrm>
-            <a:off x="795528" y="1618488"/>
-            <a:ext cx="4943704" cy="292608"/>
-          </a:xfrm>
-          <a:prstGeom prst="rect">
-            <a:avLst/>
-          </a:prstGeom>
-          <a:noFill/>
-          <a:ln/>
-        </p:spPr>
-        <p:txBody>
-          <a:bodyPr wrap="square" lIns="0" tIns="0" rIns="0" bIns="0" rtlCol="0" anchor="ctr"/>
-          <a:lstStyle/>
-          <a:p>
-            <a:pPr indent="0" marL="0">
-              <a:buNone/>
-            </a:pPr>
-            <a:r>
-              <a:rPr lang="en-US" sz="1350" b="1" dirty="0">
-                <a:solidFill>
-                  <a:srgbClr val="977024"/>
-                </a:solidFill>
-                <a:latin typeface="Pretendard" pitchFamily="34" charset="0"/>
-                <a:ea typeface="Pretendard" pitchFamily="34" charset="-122"/>
-                <a:cs typeface="Pretendard" pitchFamily="34" charset="-120"/>
-              </a:rPr>
-              <a:t>메디컬 단일업종 집중</a:t>
-            </a:r>
-            <a:endParaRPr lang="en-US" sz="1350" dirty="0"/>
-          </a:p>
-        </p:txBody>
-      </p:sp>
-      <p:sp>
-        <p:nvSpPr>
-          <p:cNvPr id="9" name="Text 7"/>
-          <p:cNvSpPr/>
-          <p:nvPr/>
-        </p:nvSpPr>
-        <p:spPr>
-          <a:xfrm>
-            <a:off x="795528" y="1947672"/>
-            <a:ext cx="4943704" cy="365760"/>
-          </a:xfrm>
-          <a:prstGeom prst="rect">
-            <a:avLst/>
-          </a:prstGeom>
-          <a:noFill/>
-          <a:ln/>
-        </p:spPr>
-        <p:txBody>
-          <a:bodyPr wrap="square" lIns="0" tIns="0" rIns="0" bIns="0" rtlCol="0" anchor="ctr">
-            <a:normAutofit/>
-          </a:bodyPr>
-          <a:lstStyle/>
-          <a:p>
-            <a:pPr indent="0" marL="0">
-              <a:buNone/>
-            </a:pPr>
-            <a:r>
-              <a:rPr lang="en-US" sz="1250" b="1" dirty="0">
-                <a:solidFill>
-                  <a:srgbClr val="10161F"/>
-                </a:solidFill>
-                <a:latin typeface="Pretendard" pitchFamily="34" charset="0"/>
-                <a:ea typeface="Pretendard" pitchFamily="34" charset="-122"/>
-                <a:cs typeface="Pretendard" pitchFamily="34" charset="-120"/>
-              </a:rPr>
-              <a:t>전층 의료</a:t>
-            </a:r>
-            <a:endParaRPr lang="en-US" sz="1250" dirty="0"/>
-          </a:p>
-        </p:txBody>
-      </p:sp>
-      <p:sp>
-        <p:nvSpPr>
-          <p:cNvPr id="10" name="Text 8"/>
-          <p:cNvSpPr/>
-          <p:nvPr/>
-        </p:nvSpPr>
-        <p:spPr>
-          <a:xfrm>
-            <a:off x="795528" y="2377440"/>
-            <a:ext cx="4943704" cy="2606040"/>
-          </a:xfrm>
-          <a:prstGeom prst="rect">
-            <a:avLst/>
-          </a:prstGeom>
-          <a:noFill/>
-          <a:ln/>
-        </p:spPr>
-        <p:txBody>
-          <a:bodyPr wrap="square" lIns="0" tIns="0" rIns="0" bIns="0" rtlCol="0" anchor="t">
-            <a:normAutofit/>
-          </a:bodyPr>
-          <a:lstStyle/>
-          <a:p>
-            <a:pPr marL="342900" indent="-342900">
-              <a:lnSpc>
-                <a:spcPct val="125000"/>
-              </a:lnSpc>
-              <a:buSzPct val="100000"/>
-              <a:buChar char="•"/>
-            </a:pPr>
-            <a:r>
-              <a:rPr lang="en-US" sz="1100" dirty="0">
-                <a:solidFill>
-                  <a:srgbClr val="10161F"/>
-                </a:solidFill>
-                <a:latin typeface="Pretendard" pitchFamily="34" charset="0"/>
-                <a:ea typeface="Pretendard" pitchFamily="34" charset="-122"/>
-                <a:cs typeface="Pretendard" pitchFamily="34" charset="-120"/>
-              </a:rPr>
-              <a:t>업종 다각화 검토</a:t>
-            </a:r>
-            <a:endParaRPr lang="en-US" sz="1100" dirty="0"/>
-          </a:p>
-        </p:txBody>
-      </p:sp>
-      <p:sp>
-        <p:nvSpPr>
-          <p:cNvPr id="11" name="Shape 9"/>
-          <p:cNvSpPr/>
-          <p:nvPr/>
-        </p:nvSpPr>
-        <p:spPr>
-          <a:xfrm>
-            <a:off x="6223864" y="1417320"/>
-            <a:ext cx="5400904" cy="3657600"/>
+          <p:cNvPr id="12" name="Shape 10"/>
+          <p:cNvSpPr/>
+          <p:nvPr/>
+        </p:nvSpPr>
+        <p:spPr>
+          <a:xfrm>
+            <a:off x="7784287" y="1645920"/>
+            <a:ext cx="3840480" cy="2103120"/>
           </a:xfrm>
           <a:prstGeom prst="roundRect">
             <a:avLst>
-              <a:gd name="adj" fmla="val 1500"/>
+              <a:gd name="adj" fmla="val 2609"/>
             </a:avLst>
           </a:prstGeom>
           <a:solidFill>
-            <a:srgbClr val="F7FAFC"/>
+            <a:srgbClr val="F3EBDA"/>
           </a:solidFill>
-          <a:ln w="6350">
-            <a:solidFill>
-              <a:srgbClr val="CBD5E0"/>
-            </a:solidFill>
-            <a:prstDash val="solid"/>
-          </a:ln>
-        </p:spPr>
-      </p:sp>
-      <p:sp>
-        <p:nvSpPr>
-          <p:cNvPr id="12" name="Shape 10"/>
-          <p:cNvSpPr/>
-          <p:nvPr/>
-        </p:nvSpPr>
-        <p:spPr>
-          <a:xfrm>
-            <a:off x="6223864" y="1417320"/>
-            <a:ext cx="5400904" cy="45720"/>
+          <a:ln/>
+        </p:spPr>
+      </p:sp>
+      <p:sp>
+        <p:nvSpPr>
+          <p:cNvPr id="13" name="Shape 11"/>
+          <p:cNvSpPr/>
+          <p:nvPr/>
+        </p:nvSpPr>
+        <p:spPr>
+          <a:xfrm>
+            <a:off x="7784287" y="1700784"/>
+            <a:ext cx="36576" cy="1993392"/>
           </a:xfrm>
           <a:prstGeom prst="rect">
             <a:avLst/>
           </a:prstGeom>
           <a:solidFill>
-            <a:srgbClr val="B98A2E"/>
+            <a:srgbClr val="977024"/>
           </a:solidFill>
           <a:ln/>
         </p:spPr>
       </p:sp>
       <p:sp>
         <p:nvSpPr>
-          <p:cNvPr id="13" name="Text 11"/>
-          <p:cNvSpPr/>
-          <p:nvPr/>
-        </p:nvSpPr>
-        <p:spPr>
-          <a:xfrm>
-            <a:off x="6452464" y="1618488"/>
-            <a:ext cx="4943704" cy="292608"/>
+          <p:cNvPr id="14" name="Text 12"/>
+          <p:cNvSpPr/>
+          <p:nvPr/>
+        </p:nvSpPr>
+        <p:spPr>
+          <a:xfrm>
+            <a:off x="7967167" y="1755648"/>
+            <a:ext cx="3511296" cy="201168"/>
           </a:xfrm>
           <a:prstGeom prst="rect">
             <a:avLst/>
@@ -7339,49 +13385,39 @@
             <a:pPr indent="0" marL="0">
               <a:buNone/>
             </a:pPr>
-            <a:r>
-              <a:rPr lang="en-US" sz="1350" b="1" dirty="0">
-                <a:solidFill>
-                  <a:srgbClr val="977024"/>
-                </a:solidFill>
-                <a:latin typeface="Pretendard" pitchFamily="34" charset="0"/>
-                <a:ea typeface="Pretendard" pitchFamily="34" charset="-122"/>
-                <a:cs typeface="Pretendard" pitchFamily="34" charset="-120"/>
-              </a:rPr>
-              <a:t>금리 변동</a:t>
-            </a:r>
-            <a:endParaRPr lang="en-US" sz="1350" dirty="0"/>
-          </a:p>
-        </p:txBody>
-      </p:sp>
-      <p:sp>
-        <p:nvSpPr>
-          <p:cNvPr id="14" name="Text 12"/>
-          <p:cNvSpPr/>
-          <p:nvPr/>
-        </p:nvSpPr>
-        <p:spPr>
-          <a:xfrm>
-            <a:off x="6452464" y="1947672"/>
-            <a:ext cx="4943704" cy="365760"/>
-          </a:xfrm>
-          <a:prstGeom prst="rect">
-            <a:avLst/>
-          </a:prstGeom>
-          <a:noFill/>
-          <a:ln/>
-        </p:spPr>
-        <p:txBody>
-          <a:bodyPr wrap="square" lIns="0" tIns="0" rIns="0" bIns="0" rtlCol="0" anchor="ctr">
-            <a:normAutofit/>
-          </a:bodyPr>
+            <a:endParaRPr lang="en-US" sz="1050" dirty="0"/>
+          </a:p>
+        </p:txBody>
+      </p:sp>
+      <p:sp>
+        <p:nvSpPr>
+          <p:cNvPr id="15" name="Text 13"/>
+          <p:cNvSpPr/>
+          <p:nvPr/>
+        </p:nvSpPr>
+        <p:spPr>
+          <a:xfrm>
+            <a:off x="7967167" y="1975104"/>
+            <a:ext cx="3511296" cy="1700784"/>
+          </a:xfrm>
+          <a:prstGeom prst="rect">
+            <a:avLst/>
+          </a:prstGeom>
+          <a:noFill/>
+          <a:ln/>
+        </p:spPr>
+        <p:txBody>
+          <a:bodyPr wrap="square" lIns="0" tIns="0" rIns="0" bIns="0" rtlCol="0" anchor="t"/>
           <a:lstStyle/>
           <a:p>
             <a:pPr indent="0" marL="0">
-              <a:buNone/>
-            </a:pPr>
-            <a:r>
-              <a:rPr lang="en-US" sz="1250" b="1" dirty="0">
+              <a:lnSpc>
+                <a:spcPct val="120000"/>
+              </a:lnSpc>
+              <a:buNone/>
+            </a:pPr>
+            <a:r>
+              <a:rPr lang="en-US" sz="930" dirty="0">
                 <a:solidFill>
                   <a:srgbClr val="10161F"/>
                 </a:solidFill>
@@ -7389,126 +13425,15 @@
                 <a:ea typeface="Pretendard" pitchFamily="34" charset="-122"/>
                 <a:cs typeface="Pretendard" pitchFamily="34" charset="-120"/>
               </a:rPr>
-              <a:t>4.1% 고정</a:t>
-            </a:r>
-            <a:endParaRPr lang="en-US" sz="1250" dirty="0"/>
-          </a:p>
-        </p:txBody>
-      </p:sp>
-      <p:sp>
-        <p:nvSpPr>
-          <p:cNvPr id="15" name="Text 13"/>
-          <p:cNvSpPr/>
-          <p:nvPr/>
-        </p:nvSpPr>
-        <p:spPr>
-          <a:xfrm>
-            <a:off x="6452464" y="2377440"/>
-            <a:ext cx="4943704" cy="2606040"/>
-          </a:xfrm>
-          <a:prstGeom prst="rect">
-            <a:avLst/>
-          </a:prstGeom>
-          <a:noFill/>
-          <a:ln/>
-        </p:spPr>
-        <p:txBody>
-          <a:bodyPr wrap="square" lIns="0" tIns="0" rIns="0" bIns="0" rtlCol="0" anchor="t">
-            <a:normAutofit/>
-          </a:bodyPr>
-          <a:lstStyle/>
-          <a:p>
-            <a:pPr marL="342900" indent="-342900">
-              <a:lnSpc>
-                <a:spcPct val="125000"/>
-              </a:lnSpc>
-              <a:buSzPct val="100000"/>
-              <a:buChar char="•"/>
-            </a:pPr>
-            <a:r>
-              <a:rPr lang="en-US" sz="1100" dirty="0">
-                <a:solidFill>
-                  <a:srgbClr val="10161F"/>
-                </a:solidFill>
-                <a:latin typeface="Pretendard" pitchFamily="34" charset="0"/>
-                <a:ea typeface="Pretendard" pitchFamily="34" charset="-122"/>
-                <a:cs typeface="Pretendard" pitchFamily="34" charset="-120"/>
-              </a:rPr>
-              <a:t>승계 대출 활용</a:t>
-            </a:r>
-            <a:endParaRPr lang="en-US" sz="1100" dirty="0"/>
-          </a:p>
-        </p:txBody>
-      </p:sp>
-      <p:sp>
-        <p:nvSpPr>
-          <p:cNvPr id="16" name="Shape 14"/>
-          <p:cNvSpPr/>
-          <p:nvPr/>
-        </p:nvSpPr>
-        <p:spPr>
-          <a:xfrm>
-            <a:off x="566928" y="5193792"/>
-            <a:ext cx="11057839" cy="621792"/>
-          </a:xfrm>
-          <a:prstGeom prst="roundRect">
-            <a:avLst>
-              <a:gd name="adj" fmla="val 8824"/>
-            </a:avLst>
-          </a:prstGeom>
-          <a:solidFill>
-            <a:srgbClr val="F7FAFC"/>
-          </a:solidFill>
-          <a:ln w="6350">
-            <a:solidFill>
-              <a:srgbClr val="CBD5E0"/>
-            </a:solidFill>
-            <a:prstDash val="solid"/>
-          </a:ln>
-        </p:spPr>
-      </p:sp>
-      <p:sp>
-        <p:nvSpPr>
-          <p:cNvPr id="17" name="Text 15"/>
-          <p:cNvSpPr/>
-          <p:nvPr/>
-        </p:nvSpPr>
-        <p:spPr>
-          <a:xfrm>
-            <a:off x="795528" y="5193792"/>
-            <a:ext cx="10600639" cy="621792"/>
-          </a:xfrm>
-          <a:prstGeom prst="rect">
-            <a:avLst/>
-          </a:prstGeom>
-          <a:noFill/>
-          <a:ln/>
-        </p:spPr>
-        <p:txBody>
-          <a:bodyPr wrap="square" lIns="0" tIns="0" rIns="0" bIns="0" rtlCol="0" anchor="ctr"/>
-          <a:lstStyle/>
-          <a:p>
-            <a:pPr indent="0" marL="0">
-              <a:buNone/>
-            </a:pPr>
-            <a:r>
-              <a:rPr lang="en-US" sz="1100" dirty="0">
-                <a:solidFill>
-                  <a:srgbClr val="10161F"/>
-                </a:solidFill>
-                <a:latin typeface="Pretendard" pitchFamily="34" charset="0"/>
-                <a:ea typeface="Pretendard" pitchFamily="34" charset="-122"/>
-                <a:cs typeface="Pretendard" pitchFamily="34" charset="-120"/>
-              </a:rPr>
-              <a:t>※ 본 리스크 체크는 공부 및 브로커 확인 기반이며, 매수 전 전문 실사팀(변호사/건축사)을 통한 정밀 실사가 필요합니다.</a:t>
-            </a:r>
-            <a:endParaRPr lang="en-US" sz="1100" dirty="0"/>
-          </a:p>
-        </p:txBody>
-      </p:sp>
-      <p:sp>
-        <p:nvSpPr>
-          <p:cNvPr id="18" name="Text 16"/>
+              <a:t>이 건물은 이 건물은 이 건물은 이 건물은 이 건물은 이 건물은 이 건물은 이 건물은 이 건물은 이 건물은 이 건물은 이 건물은 이 건물은 이 건물은 이 건물은 이 건물은 이 건물은 이 건물은 이 건물은 이 건물은</a:t>
+            </a:r>
+            <a:endParaRPr lang="en-US" sz="930" dirty="0"/>
+          </a:p>
+        </p:txBody>
+      </p:sp>
+      <p:sp>
+        <p:nvSpPr>
+          <p:cNvPr id="16" name="Text 14"/>
           <p:cNvSpPr/>
           <p:nvPr/>
         </p:nvSpPr>
@@ -7547,7 +13472,7 @@
       </p:sp>
       <p:sp>
         <p:nvSpPr>
-          <p:cNvPr id="19" name="Text 17"/>
+          <p:cNvPr id="17" name="Text 15"/>
           <p:cNvSpPr/>
           <p:nvPr/>
         </p:nvSpPr>
@@ -7578,7 +13503,7 @@
                 <a:ea typeface="Arial" pitchFamily="34" charset="-122"/>
                 <a:cs typeface="Arial" pitchFamily="34" charset="-120"/>
               </a:rPr>
-              <a:t>7</a:t>
+              <a:t>6</a:t>
             </a:r>
             <a:endParaRPr lang="en-US" sz="900" dirty="0"/>
           </a:p>
@@ -7669,7 +13594,7 @@
                 <a:ea typeface="Arial" pitchFamily="34" charset="-122"/>
                 <a:cs typeface="Arial" pitchFamily="34" charset="-120"/>
               </a:rPr>
-              <a:t>08</a:t>
+              <a:t>07</a:t>
             </a:r>
             <a:endParaRPr lang="en-US" sz="1300" dirty="0"/>
           </a:p>
@@ -7708,7 +13633,7 @@
                 <a:ea typeface="Arial" pitchFamily="34" charset="-122"/>
                 <a:cs typeface="Arial" pitchFamily="34" charset="-120"/>
               </a:rPr>
-              <a:t>Thesis</a:t>
+              <a:t>Profit</a:t>
             </a:r>
             <a:endParaRPr lang="en-US" sz="950" dirty="0"/>
           </a:p>
@@ -7747,7 +13672,7 @@
                 <a:ea typeface="Pretendard" pitchFamily="34" charset="-122"/>
                 <a:cs typeface="Pretendard" pitchFamily="34" charset="-120"/>
               </a:rPr>
-              <a:t>투자 포인트</a:t>
+              <a:t>수익성 분석</a:t>
             </a:r>
             <a:endParaRPr lang="en-US" sz="2300" dirty="0"/>
           </a:p>
@@ -7761,20 +13686,16 @@
         </p:nvSpPr>
         <p:spPr>
           <a:xfrm>
-            <a:off x="566928" y="4983480"/>
-            <a:ext cx="11057839" cy="804672"/>
-          </a:xfrm>
-          <a:prstGeom prst="roundRect">
-            <a:avLst>
-              <a:gd name="adj" fmla="val 6818"/>
-            </a:avLst>
-          </a:prstGeom>
-          <a:solidFill>
-            <a:srgbClr val="F3EBDA"/>
-          </a:solidFill>
-          <a:ln w="10160">
+            <a:off x="566928" y="1325880"/>
+            <a:ext cx="11057839" cy="0"/>
+          </a:xfrm>
+          <a:prstGeom prst="line">
+            <a:avLst/>
+          </a:prstGeom>
+          <a:noFill/>
+          <a:ln w="19050">
             <a:solidFill>
-              <a:srgbClr val="D9B668"/>
+              <a:srgbClr val="B98A2E"/>
             </a:solidFill>
             <a:prstDash val="solid"/>
           </a:ln>
@@ -7782,14 +13703,41 @@
       </p:sp>
       <p:sp>
         <p:nvSpPr>
-          <p:cNvPr id="7" name="Text 5"/>
-          <p:cNvSpPr/>
-          <p:nvPr/>
-        </p:nvSpPr>
-        <p:spPr>
-          <a:xfrm>
-            <a:off x="749808" y="5093208"/>
-            <a:ext cx="1691640" cy="256032"/>
+          <p:cNvPr id="7" name="Shape 5"/>
+          <p:cNvSpPr/>
+          <p:nvPr/>
+        </p:nvSpPr>
+        <p:spPr>
+          <a:xfrm>
+            <a:off x="566928" y="1554480"/>
+            <a:ext cx="3576218" cy="1188720"/>
+          </a:xfrm>
+          <a:prstGeom prst="roundRect">
+            <a:avLst>
+              <a:gd name="adj" fmla="val 4615"/>
+            </a:avLst>
+          </a:prstGeom>
+          <a:solidFill>
+            <a:srgbClr val="F7FAFC"/>
+          </a:solidFill>
+          <a:ln w="6350">
+            <a:solidFill>
+              <a:srgbClr val="CBD5E0"/>
+            </a:solidFill>
+            <a:prstDash val="solid"/>
+          </a:ln>
+        </p:spPr>
+      </p:sp>
+      <p:sp>
+        <p:nvSpPr>
+          <p:cNvPr id="8" name="Text 6"/>
+          <p:cNvSpPr/>
+          <p:nvPr/>
+        </p:nvSpPr>
+        <p:spPr>
+          <a:xfrm>
+            <a:off x="731520" y="1682496"/>
+            <a:ext cx="3247034" cy="201168"/>
           </a:xfrm>
           <a:prstGeom prst="rect">
             <a:avLst/>
@@ -7805,15 +13753,351 @@
               <a:buNone/>
             </a:pPr>
             <a:r>
+              <a:rPr lang="en-US" sz="950" dirty="0">
+                <a:solidFill>
+                  <a:srgbClr val="718096"/>
+                </a:solidFill>
+                <a:latin typeface="Pretendard" pitchFamily="34" charset="0"/>
+                <a:ea typeface="Pretendard" pitchFamily="34" charset="-122"/>
+                <a:cs typeface="Pretendard" pitchFamily="34" charset="-120"/>
+              </a:rPr>
+              <a:t>실투자금</a:t>
+            </a:r>
+            <a:endParaRPr lang="en-US" sz="950" dirty="0"/>
+          </a:p>
+        </p:txBody>
+      </p:sp>
+      <p:sp>
+        <p:nvSpPr>
+          <p:cNvPr id="9" name="Text 7"/>
+          <p:cNvSpPr/>
+          <p:nvPr/>
+        </p:nvSpPr>
+        <p:spPr>
+          <a:xfrm>
+            <a:off x="731520" y="1901952"/>
+            <a:ext cx="3247034" cy="402336"/>
+          </a:xfrm>
+          <a:prstGeom prst="rect">
+            <a:avLst/>
+          </a:prstGeom>
+          <a:noFill/>
+          <a:ln/>
+        </p:spPr>
+        <p:txBody>
+          <a:bodyPr wrap="square" lIns="0" tIns="0" rIns="0" bIns="0" rtlCol="0" anchor="ctr">
+            <a:normAutofit/>
+          </a:bodyPr>
+          <a:lstStyle/>
+          <a:p>
+            <a:pPr indent="0" marL="0">
+              <a:buNone/>
+            </a:pPr>
+            <a:r>
+              <a:rPr lang="en-US" sz="2200" b="1" dirty="0">
+                <a:solidFill>
+                  <a:srgbClr val="10161F"/>
+                </a:solidFill>
+                <a:latin typeface="Pretendard" pitchFamily="34" charset="0"/>
+                <a:ea typeface="Pretendard" pitchFamily="34" charset="-122"/>
+                <a:cs typeface="Pretendard" pitchFamily="34" charset="-120"/>
+              </a:rPr>
+              <a:t>약 69억 원</a:t>
+            </a:r>
+            <a:endParaRPr lang="en-US" sz="2200" dirty="0"/>
+          </a:p>
+        </p:txBody>
+      </p:sp>
+      <p:sp>
+        <p:nvSpPr>
+          <p:cNvPr id="10" name="Shape 8"/>
+          <p:cNvSpPr/>
+          <p:nvPr/>
+        </p:nvSpPr>
+        <p:spPr>
+          <a:xfrm>
+            <a:off x="4307738" y="1554480"/>
+            <a:ext cx="3576218" cy="1188720"/>
+          </a:xfrm>
+          <a:prstGeom prst="roundRect">
+            <a:avLst>
+              <a:gd name="adj" fmla="val 4615"/>
+            </a:avLst>
+          </a:prstGeom>
+          <a:solidFill>
+            <a:srgbClr val="F7FAFC"/>
+          </a:solidFill>
+          <a:ln w="6350">
+            <a:solidFill>
+              <a:srgbClr val="CBD5E0"/>
+            </a:solidFill>
+            <a:prstDash val="solid"/>
+          </a:ln>
+        </p:spPr>
+      </p:sp>
+      <p:sp>
+        <p:nvSpPr>
+          <p:cNvPr id="11" name="Text 9"/>
+          <p:cNvSpPr/>
+          <p:nvPr/>
+        </p:nvSpPr>
+        <p:spPr>
+          <a:xfrm>
+            <a:off x="4472330" y="1682496"/>
+            <a:ext cx="3247034" cy="201168"/>
+          </a:xfrm>
+          <a:prstGeom prst="rect">
+            <a:avLst/>
+          </a:prstGeom>
+          <a:noFill/>
+          <a:ln/>
+        </p:spPr>
+        <p:txBody>
+          <a:bodyPr wrap="square" lIns="0" tIns="0" rIns="0" bIns="0" rtlCol="0" anchor="ctr"/>
+          <a:lstStyle/>
+          <a:p>
+            <a:pPr indent="0" marL="0">
+              <a:buNone/>
+            </a:pPr>
+            <a:r>
+              <a:rPr lang="en-US" sz="950" dirty="0">
+                <a:solidFill>
+                  <a:srgbClr val="718096"/>
+                </a:solidFill>
+                <a:latin typeface="Pretendard" pitchFamily="34" charset="0"/>
+                <a:ea typeface="Pretendard" pitchFamily="34" charset="-122"/>
+                <a:cs typeface="Pretendard" pitchFamily="34" charset="-120"/>
+              </a:rPr>
+              <a:t>순수익(매월)</a:t>
+            </a:r>
+            <a:endParaRPr lang="en-US" sz="950" dirty="0"/>
+          </a:p>
+        </p:txBody>
+      </p:sp>
+      <p:sp>
+        <p:nvSpPr>
+          <p:cNvPr id="12" name="Text 10"/>
+          <p:cNvSpPr/>
+          <p:nvPr/>
+        </p:nvSpPr>
+        <p:spPr>
+          <a:xfrm>
+            <a:off x="4472330" y="1901952"/>
+            <a:ext cx="3247034" cy="402336"/>
+          </a:xfrm>
+          <a:prstGeom prst="rect">
+            <a:avLst/>
+          </a:prstGeom>
+          <a:noFill/>
+          <a:ln/>
+        </p:spPr>
+        <p:txBody>
+          <a:bodyPr wrap="square" lIns="0" tIns="0" rIns="0" bIns="0" rtlCol="0" anchor="ctr">
+            <a:normAutofit/>
+          </a:bodyPr>
+          <a:lstStyle/>
+          <a:p>
+            <a:pPr indent="0" marL="0">
+              <a:buNone/>
+            </a:pPr>
+            <a:r>
+              <a:rPr lang="en-US" sz="2200" b="1" dirty="0">
+                <a:solidFill>
+                  <a:srgbClr val="10161F"/>
+                </a:solidFill>
+                <a:latin typeface="Pretendard" pitchFamily="34" charset="0"/>
+                <a:ea typeface="Pretendard" pitchFamily="34" charset="-122"/>
+                <a:cs typeface="Pretendard" pitchFamily="34" charset="-120"/>
+              </a:rPr>
+              <a:t>약 3,650만 원</a:t>
+            </a:r>
+            <a:endParaRPr lang="en-US" sz="2200" dirty="0"/>
+          </a:p>
+        </p:txBody>
+      </p:sp>
+      <p:sp>
+        <p:nvSpPr>
+          <p:cNvPr id="13" name="Shape 11"/>
+          <p:cNvSpPr/>
+          <p:nvPr/>
+        </p:nvSpPr>
+        <p:spPr>
+          <a:xfrm>
+            <a:off x="8048549" y="1554480"/>
+            <a:ext cx="3576218" cy="1188720"/>
+          </a:xfrm>
+          <a:prstGeom prst="roundRect">
+            <a:avLst>
+              <a:gd name="adj" fmla="val 4615"/>
+            </a:avLst>
+          </a:prstGeom>
+          <a:solidFill>
+            <a:srgbClr val="F7FAFC"/>
+          </a:solidFill>
+          <a:ln w="6350">
+            <a:solidFill>
+              <a:srgbClr val="CBD5E0"/>
+            </a:solidFill>
+            <a:prstDash val="solid"/>
+          </a:ln>
+        </p:spPr>
+      </p:sp>
+      <p:sp>
+        <p:nvSpPr>
+          <p:cNvPr id="14" name="Text 12"/>
+          <p:cNvSpPr/>
+          <p:nvPr/>
+        </p:nvSpPr>
+        <p:spPr>
+          <a:xfrm>
+            <a:off x="8213141" y="1682496"/>
+            <a:ext cx="3247034" cy="201168"/>
+          </a:xfrm>
+          <a:prstGeom prst="rect">
+            <a:avLst/>
+          </a:prstGeom>
+          <a:noFill/>
+          <a:ln/>
+        </p:spPr>
+        <p:txBody>
+          <a:bodyPr wrap="square" lIns="0" tIns="0" rIns="0" bIns="0" rtlCol="0" anchor="ctr"/>
+          <a:lstStyle/>
+          <a:p>
+            <a:pPr indent="0" marL="0">
+              <a:buNone/>
+            </a:pPr>
+            <a:r>
+              <a:rPr lang="en-US" sz="950" dirty="0">
+                <a:solidFill>
+                  <a:srgbClr val="718096"/>
+                </a:solidFill>
+                <a:latin typeface="Pretendard" pitchFamily="34" charset="0"/>
+                <a:ea typeface="Pretendard" pitchFamily="34" charset="-122"/>
+                <a:cs typeface="Pretendard" pitchFamily="34" charset="-120"/>
+              </a:rPr>
+              <a:t>레버리지 수익률</a:t>
+            </a:r>
+            <a:endParaRPr lang="en-US" sz="950" dirty="0"/>
+          </a:p>
+        </p:txBody>
+      </p:sp>
+      <p:sp>
+        <p:nvSpPr>
+          <p:cNvPr id="15" name="Text 13"/>
+          <p:cNvSpPr/>
+          <p:nvPr/>
+        </p:nvSpPr>
+        <p:spPr>
+          <a:xfrm>
+            <a:off x="8213141" y="1901952"/>
+            <a:ext cx="3247034" cy="402336"/>
+          </a:xfrm>
+          <a:prstGeom prst="rect">
+            <a:avLst/>
+          </a:prstGeom>
+          <a:noFill/>
+          <a:ln/>
+        </p:spPr>
+        <p:txBody>
+          <a:bodyPr wrap="square" lIns="0" tIns="0" rIns="0" bIns="0" rtlCol="0" anchor="ctr">
+            <a:normAutofit/>
+          </a:bodyPr>
+          <a:lstStyle/>
+          <a:p>
+            <a:pPr indent="0" marL="0">
+              <a:buNone/>
+            </a:pPr>
+            <a:r>
+              <a:rPr lang="en-US" sz="2200" b="1" dirty="0">
+                <a:solidFill>
+                  <a:srgbClr val="10161F"/>
+                </a:solidFill>
+                <a:latin typeface="Pretendard" pitchFamily="34" charset="0"/>
+                <a:ea typeface="Pretendard" pitchFamily="34" charset="-122"/>
+                <a:cs typeface="Pretendard" pitchFamily="34" charset="-120"/>
+              </a:rPr>
+              <a:t>약 5.8%</a:t>
+            </a:r>
+            <a:endParaRPr lang="en-US" sz="2200" dirty="0"/>
+          </a:p>
+        </p:txBody>
+      </p:sp>
+      <p:sp>
+        <p:nvSpPr>
+          <p:cNvPr id="16" name="Shape 14"/>
+          <p:cNvSpPr/>
+          <p:nvPr/>
+        </p:nvSpPr>
+        <p:spPr>
+          <a:xfrm>
+            <a:off x="566928" y="2999232"/>
+            <a:ext cx="11057839" cy="1280160"/>
+          </a:xfrm>
+          <a:prstGeom prst="roundRect">
+            <a:avLst>
+              <a:gd name="adj" fmla="val 4286"/>
+            </a:avLst>
+          </a:prstGeom>
+          <a:solidFill>
+            <a:srgbClr val="BEE3F8"/>
+          </a:solidFill>
+          <a:ln/>
+        </p:spPr>
+      </p:sp>
+      <p:sp>
+        <p:nvSpPr>
+          <p:cNvPr id="17" name="Shape 15"/>
+          <p:cNvSpPr/>
+          <p:nvPr/>
+        </p:nvSpPr>
+        <p:spPr>
+          <a:xfrm>
+            <a:off x="566928" y="3054096"/>
+            <a:ext cx="36576" cy="1170432"/>
+          </a:xfrm>
+          <a:prstGeom prst="rect">
+            <a:avLst/>
+          </a:prstGeom>
+          <a:solidFill>
+            <a:srgbClr val="2B6CB0"/>
+          </a:solidFill>
+          <a:ln/>
+        </p:spPr>
+      </p:sp>
+      <p:sp>
+        <p:nvSpPr>
+          <p:cNvPr id="18" name="Text 16"/>
+          <p:cNvSpPr/>
+          <p:nvPr/>
+        </p:nvSpPr>
+        <p:spPr>
+          <a:xfrm>
+            <a:off x="749808" y="3108960"/>
+            <a:ext cx="10728655" cy="201168"/>
+          </a:xfrm>
+          <a:prstGeom prst="rect">
+            <a:avLst/>
+          </a:prstGeom>
+          <a:noFill/>
+          <a:ln/>
+        </p:spPr>
+        <p:txBody>
+          <a:bodyPr wrap="square" lIns="0" tIns="0" rIns="0" bIns="0" rtlCol="0" anchor="ctr"/>
+          <a:lstStyle/>
+          <a:p>
+            <a:pPr indent="0" marL="0">
+              <a:buNone/>
+            </a:pPr>
+            <a:r>
               <a:rPr lang="en-US" sz="1050" b="1" dirty="0">
                 <a:solidFill>
-                  <a:srgbClr val="977024"/>
-                </a:solidFill>
-                <a:latin typeface="Pretendard" pitchFamily="34" charset="0"/>
-                <a:ea typeface="Pretendard" pitchFamily="34" charset="-122"/>
-                <a:cs typeface="Pretendard" pitchFamily="34" charset="-120"/>
-              </a:rPr>
-              <a:t>종합 가치 제안</a:t>
+                  <a:srgbClr val="2B6CB0"/>
+                </a:solidFill>
+                <a:latin typeface="Pretendard" pitchFamily="34" charset="0"/>
+                <a:ea typeface="Pretendard" pitchFamily="34" charset="-122"/>
+                <a:cs typeface="Pretendard" pitchFamily="34" charset="-120"/>
+              </a:rPr>
+              <a:t>투자 가치 제안</a:t>
             </a:r>
             <a:endParaRPr lang="en-US" sz="1050" dirty="0"/>
           </a:p>
@@ -7821,33 +14105,33 @@
       </p:sp>
       <p:sp>
         <p:nvSpPr>
-          <p:cNvPr id="8" name="Text 6"/>
-          <p:cNvSpPr/>
-          <p:nvPr/>
-        </p:nvSpPr>
-        <p:spPr>
-          <a:xfrm>
-            <a:off x="2487168" y="5056632"/>
-            <a:ext cx="8954719" cy="658368"/>
-          </a:xfrm>
-          <a:prstGeom prst="rect">
-            <a:avLst/>
-          </a:prstGeom>
-          <a:noFill/>
-          <a:ln/>
-        </p:spPr>
-        <p:txBody>
-          <a:bodyPr wrap="square" lIns="0" tIns="0" rIns="0" bIns="0" rtlCol="0" anchor="ctr"/>
+          <p:cNvPr id="19" name="Text 17"/>
+          <p:cNvSpPr/>
+          <p:nvPr/>
+        </p:nvSpPr>
+        <p:spPr>
+          <a:xfrm>
+            <a:off x="749808" y="3328416"/>
+            <a:ext cx="10728655" cy="877824"/>
+          </a:xfrm>
+          <a:prstGeom prst="rect">
+            <a:avLst/>
+          </a:prstGeom>
+          <a:noFill/>
+          <a:ln/>
+        </p:spPr>
+        <p:txBody>
+          <a:bodyPr wrap="square" lIns="0" tIns="0" rIns="0" bIns="0" rtlCol="0" anchor="t"/>
           <a:lstStyle/>
           <a:p>
             <a:pPr indent="0" marL="0">
               <a:lnSpc>
-                <a:spcPct val="125000"/>
+                <a:spcPct val="120000"/>
               </a:lnSpc>
               <a:buNone/>
             </a:pPr>
             <a:r>
-              <a:rPr lang="en-US" sz="1100" dirty="0">
+              <a:rPr lang="en-US" sz="930" dirty="0">
                 <a:solidFill>
                   <a:srgbClr val="10161F"/>
                 </a:solidFill>
@@ -7855,15 +14139,15 @@
                 <a:ea typeface="Pretendard" pitchFamily="34" charset="-122"/>
                 <a:cs typeface="Pretendard" pitchFamily="34" charset="-120"/>
               </a:rPr>
-              <a:t>관점에서 안정적 월 임대수익과 우량 메디컬 테넌트를 보유한 핵심 투자 자산입니다.</a:t>
-            </a:r>
-            <a:endParaRPr lang="en-US" sz="1100" dirty="0"/>
-          </a:p>
-        </p:txBody>
-      </p:sp>
-      <p:sp>
-        <p:nvSpPr>
-          <p:cNvPr id="9" name="Text 7"/>
+              <a:t>연 순영업소득(NOI) 약 7.14억 원, 매입 Cap Rate 4.62%입니다. 실투자금: 약 69억 원</a:t>
+            </a:r>
+            <a:endParaRPr lang="en-US" sz="930" dirty="0"/>
+          </a:p>
+        </p:txBody>
+      </p:sp>
+      <p:sp>
+        <p:nvSpPr>
+          <p:cNvPr id="20" name="Text 18"/>
           <p:cNvSpPr/>
           <p:nvPr/>
         </p:nvSpPr>
@@ -7902,7 +14186,7 @@
       </p:sp>
       <p:sp>
         <p:nvSpPr>
-          <p:cNvPr id="10" name="Text 8"/>
+          <p:cNvPr id="21" name="Text 19"/>
           <p:cNvSpPr/>
           <p:nvPr/>
         </p:nvSpPr>
@@ -7933,7 +14217,7 @@
                 <a:ea typeface="Arial" pitchFamily="34" charset="-122"/>
                 <a:cs typeface="Arial" pitchFamily="34" charset="-120"/>
               </a:rPr>
-              <a:t>8</a:t>
+              <a:t>7</a:t>
             </a:r>
             <a:endParaRPr lang="en-US" sz="900" dirty="0"/>
           </a:p>
@@ -8024,7 +14308,7 @@
                 <a:ea typeface="Arial" pitchFamily="34" charset="-122"/>
                 <a:cs typeface="Arial" pitchFamily="34" charset="-120"/>
               </a:rPr>
-              <a:t>09</a:t>
+              <a:t>08</a:t>
             </a:r>
             <a:endParaRPr lang="en-US" sz="1300" dirty="0"/>
           </a:p>
@@ -8063,7 +14347,7 @@
                 <a:ea typeface="Arial" pitchFamily="34" charset="-122"/>
                 <a:cs typeface="Arial" pitchFamily="34" charset="-120"/>
               </a:rPr>
-              <a:t>Process</a:t>
+              <a:t>Comps</a:t>
             </a:r>
             <a:endParaRPr lang="en-US" sz="950" dirty="0"/>
           </a:p>
@@ -8102,7 +14386,7 @@
                 <a:ea typeface="Pretendard" pitchFamily="34" charset="-122"/>
                 <a:cs typeface="Pretendard" pitchFamily="34" charset="-120"/>
               </a:rPr>
-              <a:t>다음 단계</a:t>
+              <a:t>비교사례</a:t>
             </a:r>
             <a:endParaRPr lang="en-US" sz="2300" dirty="0"/>
           </a:p>
@@ -8110,24 +14394,104 @@
       </p:sp>
       <p:sp>
         <p:nvSpPr>
-          <p:cNvPr id="6" name="Shape 4"/>
-          <p:cNvSpPr/>
-          <p:nvPr/>
-        </p:nvSpPr>
-        <p:spPr>
-          <a:xfrm>
-            <a:off x="566928" y="1572768"/>
-            <a:ext cx="11057839" cy="3200400"/>
-          </a:xfrm>
-          <a:prstGeom prst="roundRect">
-            <a:avLst>
-              <a:gd name="adj" fmla="val 1714"/>
-            </a:avLst>
-          </a:prstGeom>
-          <a:solidFill>
-            <a:srgbClr val="F7FAFC"/>
-          </a:solidFill>
-          <a:ln w="6350">
+          <p:cNvPr id="6" name="Text 4"/>
+          <p:cNvSpPr/>
+          <p:nvPr/>
+        </p:nvSpPr>
+        <p:spPr>
+          <a:xfrm>
+            <a:off x="566928" y="1645920"/>
+            <a:ext cx="4201979" cy="402336"/>
+          </a:xfrm>
+          <a:prstGeom prst="rect">
+            <a:avLst/>
+          </a:prstGeom>
+          <a:noFill/>
+          <a:ln/>
+        </p:spPr>
+        <p:txBody>
+          <a:bodyPr wrap="square" lIns="0" tIns="0" rIns="0" bIns="0" rtlCol="0" anchor="ctr"/>
+          <a:lstStyle/>
+          <a:p>
+            <a:pPr indent="0" marL="0">
+              <a:lnSpc>
+                <a:spcPct val="120000"/>
+              </a:lnSpc>
+              <a:buNone/>
+            </a:pPr>
+            <a:r>
+              <a:rPr lang="en-US" sz="1400" dirty="0">
+                <a:solidFill>
+                  <a:srgbClr val="718096"/>
+                </a:solidFill>
+                <a:latin typeface="Pretendard" pitchFamily="34" charset="0"/>
+                <a:ea typeface="Pretendard" pitchFamily="34" charset="-122"/>
+                <a:cs typeface="Pretendard" pitchFamily="34" charset="-120"/>
+              </a:rPr>
+              <a:t>- 실투자금</a:t>
+            </a:r>
+            <a:endParaRPr lang="en-US" sz="1400" dirty="0"/>
+          </a:p>
+        </p:txBody>
+      </p:sp>
+      <p:sp>
+        <p:nvSpPr>
+          <p:cNvPr id="7" name="Text 5"/>
+          <p:cNvSpPr/>
+          <p:nvPr/>
+        </p:nvSpPr>
+        <p:spPr>
+          <a:xfrm>
+            <a:off x="4768907" y="1645920"/>
+            <a:ext cx="6855860" cy="402336"/>
+          </a:xfrm>
+          <a:prstGeom prst="rect">
+            <a:avLst/>
+          </a:prstGeom>
+          <a:noFill/>
+          <a:ln/>
+        </p:spPr>
+        <p:txBody>
+          <a:bodyPr wrap="square" lIns="0" tIns="0" rIns="0" bIns="0" rtlCol="0" anchor="ctr"/>
+          <a:lstStyle/>
+          <a:p>
+            <a:pPr indent="0" marL="0">
+              <a:lnSpc>
+                <a:spcPct val="120000"/>
+              </a:lnSpc>
+              <a:buNone/>
+            </a:pPr>
+            <a:r>
+              <a:rPr lang="en-US" sz="1400" b="1" dirty="0">
+                <a:solidFill>
+                  <a:srgbClr val="10161F"/>
+                </a:solidFill>
+                <a:latin typeface="Pretendard" pitchFamily="34" charset="0"/>
+                <a:ea typeface="Pretendard" pitchFamily="34" charset="-122"/>
+                <a:cs typeface="Pretendard" pitchFamily="34" charset="-120"/>
+              </a:rPr>
+              <a:t>약 69억 원</a:t>
+            </a:r>
+            <a:endParaRPr lang="en-US" sz="1400" dirty="0"/>
+          </a:p>
+        </p:txBody>
+      </p:sp>
+      <p:sp>
+        <p:nvSpPr>
+          <p:cNvPr id="8" name="Shape 6"/>
+          <p:cNvSpPr/>
+          <p:nvPr/>
+        </p:nvSpPr>
+        <p:spPr>
+          <a:xfrm>
+            <a:off x="566928" y="2048256"/>
+            <a:ext cx="11057839" cy="0"/>
+          </a:xfrm>
+          <a:prstGeom prst="line">
+            <a:avLst/>
+          </a:prstGeom>
+          <a:noFill/>
+          <a:ln w="3810">
             <a:solidFill>
               <a:srgbClr val="CBD5E0"/>
             </a:solidFill>
@@ -8137,231 +14501,268 @@
       </p:sp>
       <p:sp>
         <p:nvSpPr>
-          <p:cNvPr id="7" name="Shape 5"/>
-          <p:cNvSpPr/>
-          <p:nvPr/>
-        </p:nvSpPr>
-        <p:spPr>
-          <a:xfrm>
-            <a:off x="786384" y="1792224"/>
-            <a:ext cx="438912" cy="438912"/>
-          </a:xfrm>
-          <a:prstGeom prst="ellipse">
-            <a:avLst/>
-          </a:prstGeom>
-          <a:solidFill>
-            <a:srgbClr val="B98A2E"/>
-          </a:solidFill>
-          <a:ln/>
-        </p:spPr>
-      </p:sp>
-      <p:sp>
-        <p:nvSpPr>
-          <p:cNvPr id="8" name="Text 6"/>
-          <p:cNvSpPr/>
-          <p:nvPr/>
-        </p:nvSpPr>
-        <p:spPr>
-          <a:xfrm>
-            <a:off x="786384" y="1792224"/>
-            <a:ext cx="438912" cy="438912"/>
-          </a:xfrm>
-          <a:prstGeom prst="rect">
-            <a:avLst/>
-          </a:prstGeom>
-          <a:noFill/>
-          <a:ln/>
-        </p:spPr>
-        <p:txBody>
-          <a:bodyPr wrap="square" lIns="0" tIns="0" rIns="0" bIns="0" rtlCol="0" anchor="ctr"/>
-          <a:lstStyle/>
-          <a:p>
-            <a:pPr algn="ctr" indent="0" marL="0">
+          <p:cNvPr id="9" name="Text 7"/>
+          <p:cNvSpPr/>
+          <p:nvPr/>
+        </p:nvSpPr>
+        <p:spPr>
+          <a:xfrm>
+            <a:off x="566928" y="2048256"/>
+            <a:ext cx="4201979" cy="402336"/>
+          </a:xfrm>
+          <a:prstGeom prst="rect">
+            <a:avLst/>
+          </a:prstGeom>
+          <a:noFill/>
+          <a:ln/>
+        </p:spPr>
+        <p:txBody>
+          <a:bodyPr wrap="square" lIns="0" tIns="0" rIns="0" bIns="0" rtlCol="0" anchor="ctr"/>
+          <a:lstStyle/>
+          <a:p>
+            <a:pPr indent="0" marL="0">
+              <a:lnSpc>
+                <a:spcPct val="120000"/>
+              </a:lnSpc>
+              <a:buNone/>
+            </a:pPr>
+            <a:r>
+              <a:rPr lang="en-US" sz="1400" dirty="0">
+                <a:solidFill>
+                  <a:srgbClr val="718096"/>
+                </a:solidFill>
+                <a:latin typeface="Pretendard" pitchFamily="34" charset="0"/>
+                <a:ea typeface="Pretendard" pitchFamily="34" charset="-122"/>
+                <a:cs typeface="Pretendard" pitchFamily="34" charset="-120"/>
+              </a:rPr>
+              <a:t>- 순수익(매월)</a:t>
+            </a:r>
+            <a:endParaRPr lang="en-US" sz="1400" dirty="0"/>
+          </a:p>
+        </p:txBody>
+      </p:sp>
+      <p:sp>
+        <p:nvSpPr>
+          <p:cNvPr id="10" name="Text 8"/>
+          <p:cNvSpPr/>
+          <p:nvPr/>
+        </p:nvSpPr>
+        <p:spPr>
+          <a:xfrm>
+            <a:off x="4768907" y="2048256"/>
+            <a:ext cx="6855860" cy="402336"/>
+          </a:xfrm>
+          <a:prstGeom prst="rect">
+            <a:avLst/>
+          </a:prstGeom>
+          <a:noFill/>
+          <a:ln/>
+        </p:spPr>
+        <p:txBody>
+          <a:bodyPr wrap="square" lIns="0" tIns="0" rIns="0" bIns="0" rtlCol="0" anchor="ctr"/>
+          <a:lstStyle/>
+          <a:p>
+            <a:pPr indent="0" marL="0">
+              <a:lnSpc>
+                <a:spcPct val="120000"/>
+              </a:lnSpc>
               <a:buNone/>
             </a:pPr>
             <a:r>
               <a:rPr lang="en-US" sz="1400" b="1" dirty="0">
                 <a:solidFill>
-                  <a:srgbClr val="FFFFFF"/>
+                  <a:srgbClr val="10161F"/>
+                </a:solidFill>
+                <a:latin typeface="Pretendard" pitchFamily="34" charset="0"/>
+                <a:ea typeface="Pretendard" pitchFamily="34" charset="-122"/>
+                <a:cs typeface="Pretendard" pitchFamily="34" charset="-120"/>
+              </a:rPr>
+              <a:t>약 3,650만 원</a:t>
+            </a:r>
+            <a:endParaRPr lang="en-US" sz="1400" dirty="0"/>
+          </a:p>
+        </p:txBody>
+      </p:sp>
+      <p:sp>
+        <p:nvSpPr>
+          <p:cNvPr id="11" name="Shape 9"/>
+          <p:cNvSpPr/>
+          <p:nvPr/>
+        </p:nvSpPr>
+        <p:spPr>
+          <a:xfrm>
+            <a:off x="566928" y="2450592"/>
+            <a:ext cx="11057839" cy="0"/>
+          </a:xfrm>
+          <a:prstGeom prst="line">
+            <a:avLst/>
+          </a:prstGeom>
+          <a:noFill/>
+          <a:ln w="3810">
+            <a:solidFill>
+              <a:srgbClr val="CBD5E0"/>
+            </a:solidFill>
+            <a:prstDash val="solid"/>
+          </a:ln>
+        </p:spPr>
+      </p:sp>
+      <p:sp>
+        <p:nvSpPr>
+          <p:cNvPr id="12" name="Text 10"/>
+          <p:cNvSpPr/>
+          <p:nvPr/>
+        </p:nvSpPr>
+        <p:spPr>
+          <a:xfrm>
+            <a:off x="566928" y="2450592"/>
+            <a:ext cx="4201979" cy="402336"/>
+          </a:xfrm>
+          <a:prstGeom prst="rect">
+            <a:avLst/>
+          </a:prstGeom>
+          <a:noFill/>
+          <a:ln/>
+        </p:spPr>
+        <p:txBody>
+          <a:bodyPr wrap="square" lIns="0" tIns="0" rIns="0" bIns="0" rtlCol="0" anchor="ctr"/>
+          <a:lstStyle/>
+          <a:p>
+            <a:pPr indent="0" marL="0">
+              <a:lnSpc>
+                <a:spcPct val="120000"/>
+              </a:lnSpc>
+              <a:buNone/>
+            </a:pPr>
+            <a:r>
+              <a:rPr lang="en-US" sz="1400" dirty="0">
+                <a:solidFill>
+                  <a:srgbClr val="718096"/>
+                </a:solidFill>
+                <a:latin typeface="Pretendard" pitchFamily="34" charset="0"/>
+                <a:ea typeface="Pretendard" pitchFamily="34" charset="-122"/>
+                <a:cs typeface="Pretendard" pitchFamily="34" charset="-120"/>
+              </a:rPr>
+              <a:t>- 레버리지 수익률</a:t>
+            </a:r>
+            <a:endParaRPr lang="en-US" sz="1400" dirty="0"/>
+          </a:p>
+        </p:txBody>
+      </p:sp>
+      <p:sp>
+        <p:nvSpPr>
+          <p:cNvPr id="13" name="Text 11"/>
+          <p:cNvSpPr/>
+          <p:nvPr/>
+        </p:nvSpPr>
+        <p:spPr>
+          <a:xfrm>
+            <a:off x="4768907" y="2450592"/>
+            <a:ext cx="6855860" cy="402336"/>
+          </a:xfrm>
+          <a:prstGeom prst="rect">
+            <a:avLst/>
+          </a:prstGeom>
+          <a:noFill/>
+          <a:ln/>
+        </p:spPr>
+        <p:txBody>
+          <a:bodyPr wrap="square" lIns="0" tIns="0" rIns="0" bIns="0" rtlCol="0" anchor="ctr"/>
+          <a:lstStyle/>
+          <a:p>
+            <a:pPr indent="0" marL="0">
+              <a:lnSpc>
+                <a:spcPct val="120000"/>
+              </a:lnSpc>
+              <a:buNone/>
+            </a:pPr>
+            <a:r>
+              <a:rPr lang="en-US" sz="1400" b="1" dirty="0">
+                <a:solidFill>
+                  <a:srgbClr val="10161F"/>
+                </a:solidFill>
+                <a:latin typeface="Pretendard" pitchFamily="34" charset="0"/>
+                <a:ea typeface="Pretendard" pitchFamily="34" charset="-122"/>
+                <a:cs typeface="Pretendard" pitchFamily="34" charset="-120"/>
+              </a:rPr>
+              <a:t>약 5.8%</a:t>
+            </a:r>
+            <a:endParaRPr lang="en-US" sz="1400" dirty="0"/>
+          </a:p>
+        </p:txBody>
+      </p:sp>
+      <p:sp>
+        <p:nvSpPr>
+          <p:cNvPr id="14" name="Text 12"/>
+          <p:cNvSpPr/>
+          <p:nvPr/>
+        </p:nvSpPr>
+        <p:spPr>
+          <a:xfrm>
+            <a:off x="566928" y="6382512"/>
+            <a:ext cx="7315200" cy="219456"/>
+          </a:xfrm>
+          <a:prstGeom prst="rect">
+            <a:avLst/>
+          </a:prstGeom>
+          <a:noFill/>
+          <a:ln/>
+        </p:spPr>
+        <p:txBody>
+          <a:bodyPr wrap="square" lIns="0" tIns="0" rIns="0" bIns="0" rtlCol="0" anchor="ctr"/>
+          <a:lstStyle/>
+          <a:p>
+            <a:pPr indent="0" marL="0">
+              <a:buNone/>
+            </a:pPr>
+            <a:r>
+              <a:rPr lang="en-US" sz="800" dirty="0">
+                <a:solidFill>
+                  <a:srgbClr val="718096"/>
+                </a:solidFill>
+                <a:latin typeface="Pretendard" pitchFamily="34" charset="0"/>
+                <a:ea typeface="Pretendard" pitchFamily="34" charset="-122"/>
+                <a:cs typeface="Pretendard" pitchFamily="34" charset="-120"/>
+              </a:rPr>
+              <a:t>크리딜   |   </a:t>
+            </a:r>
+            <a:endParaRPr lang="en-US" sz="800" dirty="0"/>
+          </a:p>
+        </p:txBody>
+      </p:sp>
+      <p:sp>
+        <p:nvSpPr>
+          <p:cNvPr id="15" name="Text 13"/>
+          <p:cNvSpPr/>
+          <p:nvPr/>
+        </p:nvSpPr>
+        <p:spPr>
+          <a:xfrm>
+            <a:off x="10710367" y="6382512"/>
+            <a:ext cx="914400" cy="219456"/>
+          </a:xfrm>
+          <a:prstGeom prst="rect">
+            <a:avLst/>
+          </a:prstGeom>
+          <a:noFill/>
+          <a:ln/>
+        </p:spPr>
+        <p:txBody>
+          <a:bodyPr wrap="square" lIns="0" tIns="0" rIns="0" bIns="0" rtlCol="0" anchor="ctr"/>
+          <a:lstStyle/>
+          <a:p>
+            <a:pPr algn="r" indent="0" marL="0">
+              <a:buNone/>
+            </a:pPr>
+            <a:r>
+              <a:rPr lang="en-US" sz="900" b="1" dirty="0">
+                <a:solidFill>
+                  <a:srgbClr val="B98A2E"/>
                 </a:solidFill>
                 <a:latin typeface="Arial" pitchFamily="34" charset="0"/>
                 <a:ea typeface="Arial" pitchFamily="34" charset="-122"/>
                 <a:cs typeface="Arial" pitchFamily="34" charset="-120"/>
               </a:rPr>
-              <a:t>01</a:t>
-            </a:r>
-            <a:endParaRPr lang="en-US" sz="1400" dirty="0"/>
-          </a:p>
-        </p:txBody>
-      </p:sp>
-      <p:sp>
-        <p:nvSpPr>
-          <p:cNvPr id="9" name="Text 7"/>
-          <p:cNvSpPr/>
-          <p:nvPr/>
-        </p:nvSpPr>
-        <p:spPr>
-          <a:xfrm>
-            <a:off x="786384" y="2304288"/>
-            <a:ext cx="10618927" cy="365760"/>
-          </a:xfrm>
-          <a:prstGeom prst="rect">
-            <a:avLst/>
-          </a:prstGeom>
-          <a:noFill/>
-          <a:ln/>
-        </p:spPr>
-        <p:txBody>
-          <a:bodyPr wrap="square" rtlCol="0" anchor="ctr"/>
-          <a:lstStyle/>
-          <a:p>
-            <a:pPr indent="0" marL="0">
-              <a:buNone/>
-            </a:pPr>
-            <a:r>
-              <a:rPr lang="en-US" sz="1600" b="1" dirty="0">
-                <a:solidFill>
-                  <a:srgbClr val="10161F"/>
-                </a:solidFill>
-                <a:latin typeface="Pretendard" pitchFamily="34" charset="0"/>
-                <a:ea typeface="Pretendard" pitchFamily="34" charset="-122"/>
-                <a:cs typeface="Pretendard" pitchFamily="34" charset="-120"/>
-              </a:rPr>
-              <a:t>1단계</a:t>
-            </a:r>
-            <a:endParaRPr lang="en-US" sz="1600" dirty="0"/>
-          </a:p>
-        </p:txBody>
-      </p:sp>
-      <p:sp>
-        <p:nvSpPr>
-          <p:cNvPr id="10" name="Text 8"/>
-          <p:cNvSpPr/>
-          <p:nvPr/>
-        </p:nvSpPr>
-        <p:spPr>
-          <a:xfrm>
-            <a:off x="786384" y="2761488"/>
-            <a:ext cx="10618927" cy="1828800"/>
-          </a:xfrm>
-          <a:prstGeom prst="rect">
-            <a:avLst/>
-          </a:prstGeom>
-          <a:noFill/>
-          <a:ln/>
-        </p:spPr>
-        <p:txBody>
-          <a:bodyPr wrap="square" rtlCol="0" anchor="t"/>
-          <a:lstStyle/>
-          <a:p>
-            <a:pPr indent="0" marL="0">
-              <a:buNone/>
-            </a:pPr>
-            <a:r>
-              <a:rPr lang="en-US" sz="1100" dirty="0">
-                <a:solidFill>
-                  <a:srgbClr val="10161F"/>
-                </a:solidFill>
-                <a:latin typeface="Pretendard" pitchFamily="34" charset="0"/>
-                <a:ea typeface="Pretendard" pitchFamily="34" charset="-122"/>
-                <a:cs typeface="Pretendard" pitchFamily="34" charset="-120"/>
-              </a:rPr>
-              <a:t>현장 실사 및 임대차계약서 원본 확인을 권장합니다.</a:t>
-            </a:r>
-            <a:endParaRPr lang="en-US" sz="1100" dirty="0"/>
-          </a:p>
-          <a:p>
-            <a:pPr indent="0" marL="0">
-              <a:buNone/>
-            </a:pPr>
-            <a:r>
-              <a:rPr lang="en-US" sz="1100" dirty="0">
-                <a:solidFill>
-                  <a:srgbClr val="10161F"/>
-                </a:solidFill>
-                <a:latin typeface="Pretendard" pitchFamily="34" charset="0"/>
-                <a:ea typeface="Pretendard" pitchFamily="34" charset="-122"/>
-                <a:cs typeface="Pretendard" pitchFamily="34" charset="-120"/>
-              </a:rPr>
-              <a:t>현장 실사 및 임대차계약서 원본 확인을 권장합니다.</a:t>
-            </a:r>
-            <a:endParaRPr lang="en-US" sz="1100" dirty="0"/>
-          </a:p>
-        </p:txBody>
-      </p:sp>
-      <p:sp>
-        <p:nvSpPr>
-          <p:cNvPr id="11" name="Text 9"/>
-          <p:cNvSpPr/>
-          <p:nvPr/>
-        </p:nvSpPr>
-        <p:spPr>
-          <a:xfrm>
-            <a:off x="566928" y="6382512"/>
-            <a:ext cx="7315200" cy="219456"/>
-          </a:xfrm>
-          <a:prstGeom prst="rect">
-            <a:avLst/>
-          </a:prstGeom>
-          <a:noFill/>
-          <a:ln/>
-        </p:spPr>
-        <p:txBody>
-          <a:bodyPr wrap="square" lIns="0" tIns="0" rIns="0" bIns="0" rtlCol="0" anchor="ctr"/>
-          <a:lstStyle/>
-          <a:p>
-            <a:pPr indent="0" marL="0">
-              <a:buNone/>
-            </a:pPr>
-            <a:r>
-              <a:rPr lang="en-US" sz="800" dirty="0">
-                <a:solidFill>
-                  <a:srgbClr val="718096"/>
-                </a:solidFill>
-                <a:latin typeface="Pretendard" pitchFamily="34" charset="0"/>
-                <a:ea typeface="Pretendard" pitchFamily="34" charset="-122"/>
-                <a:cs typeface="Pretendard" pitchFamily="34" charset="-120"/>
-              </a:rPr>
-              <a:t>크리딜   |   </a:t>
-            </a:r>
-            <a:endParaRPr lang="en-US" sz="800" dirty="0"/>
-          </a:p>
-        </p:txBody>
-      </p:sp>
-      <p:sp>
-        <p:nvSpPr>
-          <p:cNvPr id="12" name="Text 10"/>
-          <p:cNvSpPr/>
-          <p:nvPr/>
-        </p:nvSpPr>
-        <p:spPr>
-          <a:xfrm>
-            <a:off x="10710367" y="6382512"/>
-            <a:ext cx="914400" cy="219456"/>
-          </a:xfrm>
-          <a:prstGeom prst="rect">
-            <a:avLst/>
-          </a:prstGeom>
-          <a:noFill/>
-          <a:ln/>
-        </p:spPr>
-        <p:txBody>
-          <a:bodyPr wrap="square" lIns="0" tIns="0" rIns="0" bIns="0" rtlCol="0" anchor="ctr"/>
-          <a:lstStyle/>
-          <a:p>
-            <a:pPr algn="r" indent="0" marL="0">
-              <a:buNone/>
-            </a:pPr>
-            <a:r>
-              <a:rPr lang="en-US" sz="900" b="1" dirty="0">
-                <a:solidFill>
-                  <a:srgbClr val="B98A2E"/>
-                </a:solidFill>
-                <a:latin typeface="Arial" pitchFamily="34" charset="0"/>
-                <a:ea typeface="Arial" pitchFamily="34" charset="-122"/>
-                <a:cs typeface="Arial" pitchFamily="34" charset="-120"/>
-              </a:rPr>
-              <a:t>9</a:t>
+              <a:t>8</a:t>
             </a:r>
             <a:endParaRPr lang="en-US" sz="900" dirty="0"/>
           </a:p>

--- a/docs/test/stress/e2e-outputs/income_overflow_pr11.pptx
+++ b/docs/test/stress/e2e-outputs/income_overflow_pr11.pptx
@@ -14139,7 +14139,7 @@
                 <a:ea typeface="Pretendard" pitchFamily="34" charset="-122"/>
                 <a:cs typeface="Pretendard" pitchFamily="34" charset="-120"/>
               </a:rPr>
-              <a:t>연 순영업소득(NOI) 약 7.14억 원, 매입 Cap Rate 4.62%입니다. 실투자금: 약 69억 원</a:t>
+              <a:t>연 순영업소득(NOI) 약 7.14억 원, 매입 Cap Rate 4.62%입니다.</a:t>
             </a:r>
             <a:endParaRPr lang="en-US" sz="930" dirty="0"/>
           </a:p>
